--- a/AIoT_期末專題報告.pptx
+++ b/AIoT_期末專題報告.pptx
@@ -3438,7 +3438,7 @@
               </a:defRPr>
             </a:pPr>
             <a:r>
-              <a:t>核心程式碼 — ESP32 照明控制</a:t>
+              <a:t>核心程式碼 — ESP32 PIR + 智慧照明</a:t>
             </a:r>
           </a:p>
         </p:txBody>
@@ -3591,7 +3591,7 @@
                 </a:solidFill>
                 <a:latin typeface="Consolas"/>
               </a:rPr>
-              <a:t>ldr = ADC(Pin(34))</a:t>
+              <a:t>pir = Pin(27, Pin.IN, Pin.PULL_DOWN)</a:t>
             </a:r>
           </a:p>
           <a:p>
@@ -3607,7 +3607,7 @@
                 </a:solidFill>
                 <a:latin typeface="Consolas"/>
               </a:rPr>
-              <a:t>ldr.atten(ADC.ATTN_11DB)  # 0-3.3V, ADC 0-4095</a:t>
+              <a:t>ldr = ADC(Pin(34))</a:t>
             </a:r>
           </a:p>
           <a:p>
@@ -3623,7 +3623,7 @@
                 </a:solidFill>
                 <a:latin typeface="Consolas"/>
               </a:rPr>
-              <a:t>led = Pin(2, Pin.OUT)</a:t>
+              <a:t>ldr.atten(ADC.ATTN_11DB)  # 0-3.3V, ADC 0-4095</a:t>
             </a:r>
           </a:p>
           <a:p>
@@ -3639,7 +3639,7 @@
                 </a:solidFill>
                 <a:latin typeface="Consolas"/>
               </a:rPr>
-              <a:t/>
+              <a:t>led = Pin(2, Pin.OUT)</a:t>
             </a:r>
           </a:p>
           <a:p>
@@ -3655,7 +3655,7 @@
                 </a:solidFill>
                 <a:latin typeface="Consolas"/>
               </a:rPr>
-              <a:t># 主迴圈</a:t>
+              <a:t/>
             </a:r>
           </a:p>
           <a:p>
@@ -3703,7 +3703,7 @@
                 </a:solidFill>
                 <a:latin typeface="Consolas"/>
               </a:rPr>
-              <a:t/>
+              <a:t>    pir_value = pir.value()</a:t>
             </a:r>
           </a:p>
           <a:p>
@@ -3719,7 +3719,7 @@
                 </a:solidFill>
                 <a:latin typeface="Consolas"/>
               </a:rPr>
-              <a:t>    # 手動覆蓋超時，恢復自動</a:t>
+              <a:t/>
             </a:r>
           </a:p>
           <a:p>
@@ -3735,7 +3735,7 @@
                 </a:solidFill>
                 <a:latin typeface="Consolas"/>
               </a:rPr>
-              <a:t>    if manual_override and \</a:t>
+              <a:t>    # 手動覆蓋超時，恢復自動</a:t>
             </a:r>
           </a:p>
           <a:p>
@@ -3751,7 +3751,7 @@
                 </a:solidFill>
                 <a:latin typeface="Consolas"/>
               </a:rPr>
-              <a:t>       (time.time() - manual_override_time &gt; 60):</a:t>
+              <a:t>    if manual_override and \</a:t>
             </a:r>
           </a:p>
           <a:p>
@@ -3767,7 +3767,7 @@
                 </a:solidFill>
                 <a:latin typeface="Consolas"/>
               </a:rPr>
-              <a:t>        manual_override = False</a:t>
+              <a:t>       (now - manual_override_time &gt; 60):</a:t>
             </a:r>
           </a:p>
           <a:p>
@@ -3783,7 +3783,7 @@
                 </a:solidFill>
                 <a:latin typeface="Consolas"/>
               </a:rPr>
-              <a:t/>
+              <a:t>        manual_override = False</a:t>
             </a:r>
           </a:p>
           <a:p>
@@ -3799,7 +3799,7 @@
                 </a:solidFill>
                 <a:latin typeface="Consolas"/>
               </a:rPr>
-              <a:t>    # 自動控制（手動模式下跳過）</a:t>
+              <a:t/>
             </a:r>
           </a:p>
           <a:p>
@@ -3815,7 +3815,7 @@
                 </a:solidFill>
                 <a:latin typeface="Consolas"/>
               </a:rPr>
-              <a:t>    if not manual_override:</a:t>
+              <a:t>    # 智慧照明（手動模式下跳過）</a:t>
             </a:r>
           </a:p>
           <a:p>
@@ -3831,7 +3831,7 @@
                 </a:solidFill>
                 <a:latin typeface="Consolas"/>
               </a:rPr>
-              <a:t>        if ldr_value &lt; LIGHT_THRESHOLD:</a:t>
+              <a:t>    if not manual_override:</a:t>
             </a:r>
           </a:p>
           <a:p>
@@ -3847,7 +3847,7 @@
                 </a:solidFill>
                 <a:latin typeface="Consolas"/>
               </a:rPr>
-              <a:t>            led.value(1)   # 開燈</a:t>
+              <a:t>        if pir_value == 1:</a:t>
             </a:r>
           </a:p>
           <a:p>
@@ -3863,7 +3863,7 @@
                 </a:solidFill>
                 <a:latin typeface="Consolas"/>
               </a:rPr>
-              <a:t>            led_status = "on"</a:t>
+              <a:t>            # 有人 + 暗 → 開燈（供攝影機夜間辨識）</a:t>
             </a:r>
           </a:p>
           <a:p>
@@ -3879,7 +3879,7 @@
                 </a:solidFill>
                 <a:latin typeface="Consolas"/>
               </a:rPr>
-              <a:t>        else:</a:t>
+              <a:t>            if ldr_value &lt; LIGHT_THRESHOLD:</a:t>
             </a:r>
           </a:p>
           <a:p>
@@ -3895,7 +3895,7 @@
                 </a:solidFill>
                 <a:latin typeface="Consolas"/>
               </a:rPr>
-              <a:t>            led.value(0)   # 關燈</a:t>
+              <a:t>                set_led(client, True)</a:t>
             </a:r>
           </a:p>
           <a:p>
@@ -3911,7 +3911,7 @@
                 </a:solidFill>
                 <a:latin typeface="Consolas"/>
               </a:rPr>
-              <a:t>            led_status = "off"</a:t>
+              <a:t>        else:</a:t>
             </a:r>
           </a:p>
           <a:p>
@@ -3927,7 +3927,7 @@
                 </a:solidFill>
                 <a:latin typeface="Consolas"/>
               </a:rPr>
-              <a:t/>
+              <a:t>            set_led(client, False)  # 沒人 → 關燈</a:t>
             </a:r>
           </a:p>
           <a:p>
@@ -3943,7 +3943,7 @@
                 </a:solidFill>
                 <a:latin typeface="Consolas"/>
               </a:rPr>
-              <a:t>    # 發布亮度數據</a:t>
+              <a:t/>
             </a:r>
           </a:p>
           <a:p>
@@ -3959,7 +3959,7 @@
                 </a:solidFill>
                 <a:latin typeface="Consolas"/>
               </a:rPr>
-              <a:t>    client.publish("home/sensor/light",</a:t>
+              <a:t>    # PIR 觸發 → MQTT 通知 RPi 拍照</a:t>
             </a:r>
           </a:p>
           <a:p>
@@ -3975,7 +3975,7 @@
                 </a:solidFill>
                 <a:latin typeface="Consolas"/>
               </a:rPr>
-              <a:t>                   json.dumps({"value": ldr_value}))</a:t>
+              <a:t>    if pir_value == 1 and \</a:t>
             </a:r>
           </a:p>
           <a:p>
@@ -3991,7 +3991,7 @@
                 </a:solidFill>
                 <a:latin typeface="Consolas"/>
               </a:rPr>
-              <a:t/>
+              <a:t>       (now - last_pir_time &gt;= PIR_COOLDOWN):</a:t>
             </a:r>
           </a:p>
           <a:p>
@@ -4007,7 +4007,7 @@
                 </a:solidFill>
                 <a:latin typeface="Consolas"/>
               </a:rPr>
-              <a:t>    # 每秒檢查 MQTT（控燈指令）</a:t>
+              <a:t>        client.publish("home/security/pir",</a:t>
             </a:r>
           </a:p>
           <a:p>
@@ -4023,39 +4023,7 @@
                 </a:solidFill>
                 <a:latin typeface="Consolas"/>
               </a:rPr>
-              <a:t>    for _ in range(PUBLISH_INTERVAL):</a:t>
-            </a:r>
-          </a:p>
-          <a:p>
-            <a:pPr>
-              <a:spcAft>
-                <a:spcPts val="200"/>
-              </a:spcAft>
-            </a:pPr>
-            <a:r>
-              <a:rPr sz="1100">
-                <a:solidFill>
-                  <a:srgbClr val="4ADE80"/>
-                </a:solidFill>
-                <a:latin typeface="Consolas"/>
-              </a:rPr>
-              <a:t>        client.check_msg()</a:t>
-            </a:r>
-          </a:p>
-          <a:p>
-            <a:pPr>
-              <a:spcAft>
-                <a:spcPts val="200"/>
-              </a:spcAft>
-            </a:pPr>
-            <a:r>
-              <a:rPr sz="1100">
-                <a:solidFill>
-                  <a:srgbClr val="4ADE80"/>
-                </a:solidFill>
-                <a:latin typeface="Consolas"/>
-              </a:rPr>
-              <a:t>        time.sleep(1)</a:t>
+              <a:t>            json.dumps({"triggered": True}))</a:t>
             </a:r>
           </a:p>
         </p:txBody>
@@ -4136,7 +4104,7 @@
               </a:defRPr>
             </a:pPr>
             <a:r>
-              <a:t>ADC 讀取</a:t>
+              <a:t>PIR 偵測</a:t>
             </a:r>
           </a:p>
         </p:txBody>
@@ -4172,11 +4140,11 @@
               </a:defRPr>
             </a:pPr>
             <a:r>
-              <a:t>ESP32 內建 12-bit ADC</a:t>
+              <a:t>GPIO 27 偵測人體移動</a:t>
             </a:r>
             <a:br/>
             <a:r>
-              <a:t>直讀光敏電阻 0-4095</a:t>
+              <a:t>觸發 MQTT 通知 RPi</a:t>
             </a:r>
           </a:p>
         </p:txBody>
@@ -4257,7 +4225,7 @@
               </a:defRPr>
             </a:pPr>
             <a:r>
-              <a:t>自動控制</a:t>
+              <a:t>智慧照明</a:t>
             </a:r>
           </a:p>
         </p:txBody>
@@ -4293,11 +4261,11 @@
               </a:defRPr>
             </a:pPr>
             <a:r>
-              <a:t>亮度低於閾值自動開燈</a:t>
+              <a:t>有人+暗→開燈</a:t>
             </a:r>
             <a:br/>
             <a:r>
-              <a:t>高於閾值自動關燈</a:t>
+              <a:t>無人→關燈（省電）</a:t>
             </a:r>
           </a:p>
         </p:txBody>
@@ -4499,7 +4467,7 @@
               </a:defRPr>
             </a:pPr>
             <a:r>
-              <a:t>即時響應</a:t>
+              <a:t>MQTT 觸發</a:t>
             </a:r>
           </a:p>
         </p:txBody>
@@ -4535,11 +4503,11 @@
               </a:defRPr>
             </a:pPr>
             <a:r>
-              <a:t>每秒檢查 MQTT 訊息</a:t>
+              <a:t>PIR 觸發通知 RPi</a:t>
             </a:r>
             <a:br/>
             <a:r>
-              <a:t>確保控燈指令即時</a:t>
+              <a:t>遠端啟動攝影機拍照</a:t>
             </a:r>
           </a:p>
         </p:txBody>
@@ -4825,7 +4793,7 @@
           </a:solidFill>
           <a:ln w="19050">
             <a:solidFill>
-              <a:srgbClr val="F87171"/>
+              <a:srgbClr val="38BDF8"/>
             </a:solidFill>
           </a:ln>
         </p:spPr>
@@ -4876,13 +4844,13 @@
             <a:pPr algn="l">
               <a:defRPr sz="1800" b="1">
                 <a:solidFill>
-                  <a:srgbClr val="F87171"/>
-                </a:solidFill>
-                <a:latin typeface="Microsoft JhengHei"/>
-              </a:defRPr>
-            </a:pPr>
-            <a:r>
-              <a:t>警報事件列表</a:t>
+                  <a:srgbClr val="38BDF8"/>
+                </a:solidFill>
+                <a:latin typeface="Microsoft JhengHei"/>
+              </a:defRPr>
+            </a:pPr>
+            <a:r>
+              <a:t>PIR 感測器</a:t>
             </a:r>
           </a:p>
         </p:txBody>
@@ -4918,11 +4886,11 @@
               </a:defRPr>
             </a:pPr>
             <a:r>
-              <a:t>subscribe home/security/alert</a:t>
+              <a:t>subscribe home/security/pir</a:t>
             </a:r>
             <a:br/>
             <a:r>
-              <a:t>入侵警報即時顯示</a:t>
+              <a:t>即時顯示 PIR 狀態 0/1</a:t>
             </a:r>
           </a:p>
         </p:txBody>
@@ -4936,6 +4904,127 @@
         <p:spPr>
           <a:xfrm>
             <a:off x="8138160" y="1645920"/>
+            <a:ext cx="3474720" cy="1828800"/>
+          </a:xfrm>
+          <a:prstGeom prst="roundRect">
+            <a:avLst/>
+          </a:prstGeom>
+          <a:solidFill>
+            <a:srgbClr val="1E293B"/>
+          </a:solidFill>
+          <a:ln w="19050">
+            <a:solidFill>
+              <a:srgbClr val="F87171"/>
+            </a:solidFill>
+          </a:ln>
+        </p:spPr>
+        <p:style>
+          <a:lnRef idx="1">
+            <a:schemeClr val="accent1"/>
+          </a:lnRef>
+          <a:fillRef idx="3">
+            <a:schemeClr val="accent1"/>
+          </a:fillRef>
+          <a:effectRef idx="2">
+            <a:schemeClr val="accent1"/>
+          </a:effectRef>
+          <a:fontRef idx="minor">
+            <a:schemeClr val="lt1"/>
+          </a:fontRef>
+        </p:style>
+        <p:txBody>
+          <a:bodyPr rtlCol="0" anchor="ctr"/>
+          <a:lstStyle/>
+          <a:p>
+            <a:pPr algn="ctr"/>
+          </a:p>
+        </p:txBody>
+      </p:sp>
+      <p:sp>
+        <p:nvSpPr>
+          <p:cNvPr id="12" name="TextBox 11"/>
+          <p:cNvSpPr txBox="1"/>
+          <p:nvPr/>
+        </p:nvSpPr>
+        <p:spPr>
+          <a:xfrm>
+            <a:off x="8412480" y="1828800"/>
+            <a:ext cx="2926080" cy="365760"/>
+          </a:xfrm>
+          <a:prstGeom prst="rect">
+            <a:avLst/>
+          </a:prstGeom>
+          <a:noFill/>
+        </p:spPr>
+        <p:txBody>
+          <a:bodyPr wrap="square">
+            <a:spAutoFit/>
+          </a:bodyPr>
+          <a:lstStyle/>
+          <a:p>
+            <a:pPr algn="l">
+              <a:defRPr sz="1800" b="1">
+                <a:solidFill>
+                  <a:srgbClr val="F87171"/>
+                </a:solidFill>
+                <a:latin typeface="Microsoft JhengHei"/>
+              </a:defRPr>
+            </a:pPr>
+            <a:r>
+              <a:t>警報事件列表</a:t>
+            </a:r>
+          </a:p>
+        </p:txBody>
+      </p:sp>
+      <p:sp>
+        <p:nvSpPr>
+          <p:cNvPr id="13" name="TextBox 12"/>
+          <p:cNvSpPr txBox="1"/>
+          <p:nvPr/>
+        </p:nvSpPr>
+        <p:spPr>
+          <a:xfrm>
+            <a:off x="8412480" y="2286000"/>
+            <a:ext cx="2926080" cy="914400"/>
+          </a:xfrm>
+          <a:prstGeom prst="rect">
+            <a:avLst/>
+          </a:prstGeom>
+          <a:noFill/>
+        </p:spPr>
+        <p:txBody>
+          <a:bodyPr wrap="square">
+            <a:spAutoFit/>
+          </a:bodyPr>
+          <a:lstStyle/>
+          <a:p>
+            <a:pPr algn="l">
+              <a:defRPr sz="1400" b="0">
+                <a:solidFill>
+                  <a:srgbClr val="CBD5E1"/>
+                </a:solidFill>
+                <a:latin typeface="Microsoft JhengHei"/>
+              </a:defRPr>
+            </a:pPr>
+            <a:r>
+              <a:t>subscribe home/security/alert</a:t>
+            </a:r>
+            <a:br/>
+            <a:r>
+              <a:t>入侵警報即時顯示</a:t>
+            </a:r>
+          </a:p>
+        </p:txBody>
+      </p:sp>
+      <p:sp>
+        <p:nvSpPr>
+          <p:cNvPr id="14" name="Rounded Rectangle 13"/>
+          <p:cNvSpPr/>
+          <p:nvPr/>
+        </p:nvSpPr>
+        <p:spPr>
+          <a:xfrm>
+            <a:off x="457200" y="3931920"/>
             <a:ext cx="3474720" cy="1828800"/>
           </a:xfrm>
           <a:prstGeom prst="roundRect">
@@ -4974,13 +5063,13 @@
       </p:sp>
       <p:sp>
         <p:nvSpPr>
-          <p:cNvPr id="12" name="TextBox 11"/>
-          <p:cNvSpPr txBox="1"/>
-          <p:nvPr/>
-        </p:nvSpPr>
-        <p:spPr>
-          <a:xfrm>
-            <a:off x="8412480" y="1828800"/>
+          <p:cNvPr id="15" name="TextBox 14"/>
+          <p:cNvSpPr txBox="1"/>
+          <p:nvPr/>
+        </p:nvSpPr>
+        <p:spPr>
+          <a:xfrm>
+            <a:off x="731520" y="4114800"/>
             <a:ext cx="2926080" cy="365760"/>
           </a:xfrm>
           <a:prstGeom prst="rect">
@@ -5010,13 +5099,13 @@
       </p:sp>
       <p:sp>
         <p:nvSpPr>
-          <p:cNvPr id="13" name="TextBox 12"/>
-          <p:cNvSpPr txBox="1"/>
-          <p:nvPr/>
-        </p:nvSpPr>
-        <p:spPr>
-          <a:xfrm>
-            <a:off x="8412480" y="2286000"/>
+          <p:cNvPr id="16" name="TextBox 15"/>
+          <p:cNvSpPr txBox="1"/>
+          <p:nvPr/>
+        </p:nvSpPr>
+        <p:spPr>
+          <a:xfrm>
+            <a:off x="731520" y="4572000"/>
             <a:ext cx="2926080" cy="914400"/>
           </a:xfrm>
           <a:prstGeom prst="rect">
@@ -5050,13 +5139,13 @@
       </p:sp>
       <p:sp>
         <p:nvSpPr>
-          <p:cNvPr id="14" name="Rounded Rectangle 13"/>
+          <p:cNvPr id="17" name="Rounded Rectangle 16"/>
           <p:cNvSpPr/>
           <p:nvPr/>
         </p:nvSpPr>
         <p:spPr>
           <a:xfrm>
-            <a:off x="457200" y="3931920"/>
+            <a:off x="4297680" y="3931920"/>
             <a:ext cx="3474720" cy="1828800"/>
           </a:xfrm>
           <a:prstGeom prst="roundRect">
@@ -5095,13 +5184,13 @@
       </p:sp>
       <p:sp>
         <p:nvSpPr>
-          <p:cNvPr id="15" name="TextBox 14"/>
-          <p:cNvSpPr txBox="1"/>
-          <p:nvPr/>
-        </p:nvSpPr>
-        <p:spPr>
-          <a:xfrm>
-            <a:off x="731520" y="4114800"/>
+          <p:cNvPr id="18" name="TextBox 17"/>
+          <p:cNvSpPr txBox="1"/>
+          <p:nvPr/>
+        </p:nvSpPr>
+        <p:spPr>
+          <a:xfrm>
+            <a:off x="4572000" y="4114800"/>
             <a:ext cx="2926080" cy="365760"/>
           </a:xfrm>
           <a:prstGeom prst="rect">
@@ -5131,13 +5220,13 @@
       </p:sp>
       <p:sp>
         <p:nvSpPr>
-          <p:cNvPr id="16" name="TextBox 15"/>
-          <p:cNvSpPr txBox="1"/>
-          <p:nvPr/>
-        </p:nvSpPr>
-        <p:spPr>
-          <a:xfrm>
-            <a:off x="731520" y="4572000"/>
+          <p:cNvPr id="19" name="TextBox 18"/>
+          <p:cNvSpPr txBox="1"/>
+          <p:nvPr/>
+        </p:nvSpPr>
+        <p:spPr>
+          <a:xfrm>
+            <a:off x="4572000" y="4572000"/>
             <a:ext cx="2926080" cy="914400"/>
           </a:xfrm>
           <a:prstGeom prst="rect">
@@ -5165,127 +5254,6 @@
             <a:br/>
             <a:r>
               <a:t>手動開關燈按鈕</a:t>
-            </a:r>
-          </a:p>
-        </p:txBody>
-      </p:sp>
-      <p:sp>
-        <p:nvSpPr>
-          <p:cNvPr id="17" name="Rounded Rectangle 16"/>
-          <p:cNvSpPr/>
-          <p:nvPr/>
-        </p:nvSpPr>
-        <p:spPr>
-          <a:xfrm>
-            <a:off x="4297680" y="3931920"/>
-            <a:ext cx="3474720" cy="1828800"/>
-          </a:xfrm>
-          <a:prstGeom prst="roundRect">
-            <a:avLst/>
-          </a:prstGeom>
-          <a:solidFill>
-            <a:srgbClr val="1E293B"/>
-          </a:solidFill>
-          <a:ln w="19050">
-            <a:solidFill>
-              <a:srgbClr val="38BDF8"/>
-            </a:solidFill>
-          </a:ln>
-        </p:spPr>
-        <p:style>
-          <a:lnRef idx="1">
-            <a:schemeClr val="accent1"/>
-          </a:lnRef>
-          <a:fillRef idx="3">
-            <a:schemeClr val="accent1"/>
-          </a:fillRef>
-          <a:effectRef idx="2">
-            <a:schemeClr val="accent1"/>
-          </a:effectRef>
-          <a:fontRef idx="minor">
-            <a:schemeClr val="lt1"/>
-          </a:fontRef>
-        </p:style>
-        <p:txBody>
-          <a:bodyPr rtlCol="0" anchor="ctr"/>
-          <a:lstStyle/>
-          <a:p>
-            <a:pPr algn="ctr"/>
-          </a:p>
-        </p:txBody>
-      </p:sp>
-      <p:sp>
-        <p:nvSpPr>
-          <p:cNvPr id="18" name="TextBox 17"/>
-          <p:cNvSpPr txBox="1"/>
-          <p:nvPr/>
-        </p:nvSpPr>
-        <p:spPr>
-          <a:xfrm>
-            <a:off x="4572000" y="4114800"/>
-            <a:ext cx="2926080" cy="365760"/>
-          </a:xfrm>
-          <a:prstGeom prst="rect">
-            <a:avLst/>
-          </a:prstGeom>
-          <a:noFill/>
-        </p:spPr>
-        <p:txBody>
-          <a:bodyPr wrap="square">
-            <a:spAutoFit/>
-          </a:bodyPr>
-          <a:lstStyle/>
-          <a:p>
-            <a:pPr algn="l">
-              <a:defRPr sz="1800" b="1">
-                <a:solidFill>
-                  <a:srgbClr val="38BDF8"/>
-                </a:solidFill>
-                <a:latin typeface="Microsoft JhengHei"/>
-              </a:defRPr>
-            </a:pPr>
-            <a:r>
-              <a:t>系統狀態</a:t>
-            </a:r>
-          </a:p>
-        </p:txBody>
-      </p:sp>
-      <p:sp>
-        <p:nvSpPr>
-          <p:cNvPr id="19" name="TextBox 18"/>
-          <p:cNvSpPr txBox="1"/>
-          <p:nvPr/>
-        </p:nvSpPr>
-        <p:spPr>
-          <a:xfrm>
-            <a:off x="4572000" y="4572000"/>
-            <a:ext cx="2926080" cy="914400"/>
-          </a:xfrm>
-          <a:prstGeom prst="rect">
-            <a:avLst/>
-          </a:prstGeom>
-          <a:noFill/>
-        </p:spPr>
-        <p:txBody>
-          <a:bodyPr wrap="square">
-            <a:spAutoFit/>
-          </a:bodyPr>
-          <a:lstStyle/>
-          <a:p>
-            <a:pPr algn="l">
-              <a:defRPr sz="1400" b="0">
-                <a:solidFill>
-                  <a:srgbClr val="CBD5E1"/>
-                </a:solidFill>
-                <a:latin typeface="Microsoft JhengHei"/>
-              </a:defRPr>
-            </a:pPr>
-            <a:r>
-              <a:t>subscribe home/system/status</a:t>
-            </a:r>
-            <a:br/>
-            <a:r>
-              <a:t>CPU 溫度、運行時間</a:t>
             </a:r>
           </a:p>
         </p:txBody>
@@ -5366,7 +5334,7 @@
               </a:defRPr>
             </a:pPr>
             <a:r>
-              <a:t>連線設定</a:t>
+              <a:t>系統狀態</a:t>
             </a:r>
           </a:p>
         </p:txBody>
@@ -5402,11 +5370,11 @@
               </a:defRPr>
             </a:pPr>
             <a:r>
-              <a:t>MQTT Broker 設定</a:t>
+              <a:t>subscribe home/system/status</a:t>
             </a:r>
             <a:br/>
             <a:r>
-              <a:t>localStorage 儲存</a:t>
+              <a:t>CPU 溫度、運行時間</a:t>
             </a:r>
           </a:p>
         </p:txBody>
@@ -6350,7 +6318,7 @@
                 </a:solidFill>
                 <a:latin typeface="Consolas"/>
               </a:rPr>
-              <a:t>├── config.py                  # RPi 設定檔（MQTT、GPIO、Discord）</a:t>
+              <a:t>├── config.py                  # RPi 設定檔（MQTT、Discord）</a:t>
             </a:r>
           </a:p>
           <a:p>
@@ -6414,7 +6382,7 @@
                 </a:solidFill>
                 <a:latin typeface="Consolas"/>
               </a:rPr>
-              <a:t>├── sensors/</a:t>
+              <a:t>├── camera/</a:t>
             </a:r>
           </a:p>
           <a:p>
@@ -6430,7 +6398,7 @@
                 </a:solidFill>
                 <a:latin typeface="Consolas"/>
               </a:rPr>
-              <a:t>│   └── pir.py                 # PIR 紅外線感測器模組</a:t>
+              <a:t>│   ├── capture.py             # 攝影機擷取（OpenCV）</a:t>
             </a:r>
           </a:p>
           <a:p>
@@ -6446,7 +6414,7 @@
                 </a:solidFill>
                 <a:latin typeface="Consolas"/>
               </a:rPr>
-              <a:t>│</a:t>
+              <a:t>│   ├── detector.py            # MobileNet SSD 人形偵測</a:t>
             </a:r>
           </a:p>
           <a:p>
@@ -6462,7 +6430,7 @@
                 </a:solidFill>
                 <a:latin typeface="Consolas"/>
               </a:rPr>
-              <a:t>├── camera/</a:t>
+              <a:t>│   └── model/</a:t>
             </a:r>
           </a:p>
           <a:p>
@@ -6478,7 +6446,7 @@
                 </a:solidFill>
                 <a:latin typeface="Consolas"/>
               </a:rPr>
-              <a:t>│   ├── capture.py             # 攝影機擷取（OpenCV）</a:t>
+              <a:t>│       ├── deploy.prototxt    # 模型定義</a:t>
             </a:r>
           </a:p>
           <a:p>
@@ -6494,7 +6462,7 @@
                 </a:solidFill>
                 <a:latin typeface="Consolas"/>
               </a:rPr>
-              <a:t>│   └── detector.py            # HOG+SVM 人形偵測</a:t>
+              <a:t>│       └── mobilenet_ssd.caffemodel  # 預訓練權重</a:t>
             </a:r>
           </a:p>
           <a:p>
@@ -6542,7 +6510,7 @@
                 </a:solidFill>
                 <a:latin typeface="Consolas"/>
               </a:rPr>
-              <a:t>│   └── client.py              # MQTT 連線封裝（paho-mqtt）</a:t>
+              <a:t>│   └── client.py              # MQTT 連線封裝（paho-mqtt v2）</a:t>
             </a:r>
           </a:p>
           <a:p>
@@ -6702,7 +6670,7 @@
                 </a:solidFill>
                 <a:latin typeface="Consolas"/>
               </a:rPr>
-              <a:t>│   ├── main.py                # 光敏+LED+MQTT 主程式</a:t>
+              <a:t>│   ├── main.py                # PIR+光敏+LED+MQTT</a:t>
             </a:r>
           </a:p>
           <a:p>
@@ -7524,7 +7492,7 @@
               </a:defRPr>
             </a:pPr>
             <a:r>
-              <a:t>解法：加入 pull-down 電阻 + 軟體冷卻機制（15 秒）</a:t>
+              <a:t>解法：加入 pull-down 電阻 + 軟體冷卻機制</a:t>
             </a:r>
           </a:p>
         </p:txBody>
@@ -7605,7 +7573,7 @@
               </a:defRPr>
             </a:pPr>
             <a:r>
-              <a:t>picamera2 與 USB Webcam 衝突</a:t>
+              <a:t>Haar Cascade 誤判衣服為人</a:t>
             </a:r>
           </a:p>
         </p:txBody>
@@ -7641,7 +7609,7 @@
               </a:defRPr>
             </a:pPr>
             <a:r>
-              <a:t>原因：picamera2 嘗試用 libcamera 開啟 USB Webcam 導致凍結</a:t>
+              <a:t>原因：upperbody 偵測器誤報率高</a:t>
             </a:r>
           </a:p>
         </p:txBody>
@@ -7677,7 +7645,7 @@
               </a:defRPr>
             </a:pPr>
             <a:r>
-              <a:t>解法：硬編碼使用 OpenCV VideoCapture，跳過 picamera2</a:t>
+              <a:t>解法：改用 MobileNet SSD 深度學習模型</a:t>
             </a:r>
           </a:p>
         </p:txBody>
@@ -7758,7 +7726,7 @@
               </a:defRPr>
             </a:pPr>
             <a:r>
-              <a:t>ESP32 ussl 模組更名</a:t>
+              <a:t>PIR 與攝影機位置衝突</a:t>
             </a:r>
           </a:p>
         </p:txBody>
@@ -7794,7 +7762,7 @@
               </a:defRPr>
             </a:pPr>
             <a:r>
-              <a:t>原因：MicroPython v1.25 將 ussl 更名為 ssl</a:t>
+              <a:t>原因：同一位置角度難以兼顧</a:t>
             </a:r>
           </a:p>
         </p:txBody>
@@ -7830,7 +7798,7 @@
               </a:defRPr>
             </a:pPr>
             <a:r>
-              <a:t>解法：umqtt_simple.py 加入 try/except 相容處理</a:t>
+              <a:t>解法：PIR 移至 ESP32，MQTT 遠端觸發 RPi</a:t>
             </a:r>
           </a:p>
         </p:txBody>
@@ -7947,7 +7915,7 @@
               </a:defRPr>
             </a:pPr>
             <a:r>
-              <a:t>原因：手動開燈後，下一個 loop 自動模式立即關燈</a:t>
+              <a:t>原因：自動模式立即覆蓋手動操作</a:t>
             </a:r>
           </a:p>
         </p:txBody>
@@ -7983,7 +7951,7 @@
               </a:defRPr>
             </a:pPr>
             <a:r>
-              <a:t>解法：加入 manual_override 機制，手動控制後暫停自動 60 秒</a:t>
+              <a:t>解法：manual_override 機制，暫停自動 60 秒</a:t>
             </a:r>
           </a:p>
         </p:txBody>
@@ -8064,7 +8032,7 @@
               </a:defRPr>
             </a:pPr>
             <a:r>
-              <a:t>WiFi WPA3 不相容</a:t>
+              <a:t>ESP32 ussl 模組更名</a:t>
             </a:r>
           </a:p>
         </p:txBody>
@@ -8100,7 +8068,7 @@
               </a:defRPr>
             </a:pPr>
             <a:r>
-              <a:t>原因：RPi 無法連線 WPA3 手機熱點</a:t>
+              <a:t>原因：MicroPython v1.25 ussl→ssl</a:t>
             </a:r>
           </a:p>
         </p:txBody>
@@ -8136,7 +8104,7 @@
               </a:defRPr>
             </a:pPr>
             <a:r>
-              <a:t>解法：手機端改用 WPA2 安全性設定</a:t>
+              <a:t>解法：umqtt_simple.py 加入 try/except 相容</a:t>
             </a:r>
           </a:p>
         </p:txBody>
@@ -8358,11 +8326,11 @@
               </a:defRPr>
             </a:pPr>
             <a:r>
-              <a:t>PIR 偵測人體 → 攝影機截圖 → OpenCV 人形辨識</a:t>
+              <a:t>ESP32 PIR → MQTT → RPi 連拍 3 張 → MobileNet SSD</a:t>
             </a:r>
             <a:br/>
             <a:r>
-              <a:t>→ MQTT 發布警報 → Discord 推播通知（含截圖）</a:t>
+              <a:t>多幀驗證（2/3 通過）→ Discord 推播（含截圖）</a:t>
             </a:r>
           </a:p>
         </p:txBody>
@@ -8443,7 +8411,7 @@
               </a:defRPr>
             </a:pPr>
             <a:r>
-              <a:t>自動照明控制</a:t>
+              <a:t>智慧照明控制</a:t>
             </a:r>
           </a:p>
         </p:txBody>
@@ -8479,11 +8447,11 @@
               </a:defRPr>
             </a:pPr>
             <a:r>
-              <a:t>光敏電阻即時偵測環境亮度 → 自動開/關 LED</a:t>
+              <a:t>PIR 偵測有人 + 光敏判斷環境暗 → 自動開燈</a:t>
             </a:r>
             <a:br/>
             <a:r>
-              <a:t>→ MQTT 發布狀態 → Dashboard 即時顯示</a:t>
+              <a:t>供攝影機夜間辨識。Dashboard 可手動控制（60 秒覆蓋）</a:t>
             </a:r>
           </a:p>
         </p:txBody>
@@ -8600,11 +8568,11 @@
               </a:defRPr>
             </a:pPr>
             <a:r>
-              <a:t>MQTT.js 直連雲端 Broker → 即時截圖、亮度數據</a:t>
+              <a:t>MQTT.js 直連雲端 → 即時截圖、PIR 狀態、亮度數據</a:t>
             </a:r>
             <a:br/>
             <a:r>
-              <a:t>燈光手動控制、系統狀態監控</a:t>
+              <a:t>燈光手動控制、警報記錄、系統狀態監控</a:t>
             </a:r>
           </a:p>
         </p:txBody>
@@ -8685,7 +8653,7 @@
               </a:defRPr>
             </a:pPr>
             <a:r>
-              <a:t>雲端通訊架構</a:t>
+              <a:t>雲端分散式架構</a:t>
             </a:r>
           </a:p>
         </p:txBody>
@@ -8721,11 +8689,11 @@
               </a:defRPr>
             </a:pPr>
             <a:r>
-              <a:t>RPi + ESP32 雙裝置透過 HiveMQ Cloud 協同運作</a:t>
+              <a:t>PIR 在 ESP32、攝影機在 RPi，MQTT 解耦</a:t>
             </a:r>
             <a:br/>
             <a:r>
-              <a:t>支援外網存取，手機可即時收到警報</a:t>
+              <a:t>支援外網存取 + systemd 開機自啟動</a:t>
             </a:r>
           </a:p>
         </p:txBody>
@@ -10008,7 +9976,7 @@
                 </a:solidFill>
                 <a:latin typeface="Microsoft JhengHei"/>
               </a:rPr>
-              <a:t>光敏電阻（ADC 直讀）</a:t>
+              <a:t>PIR 紅外線感測器（GPIO 27）</a:t>
             </a:r>
           </a:p>
           <a:p>
@@ -10033,7 +10001,7 @@
                 </a:solidFill>
                 <a:latin typeface="Microsoft JhengHei"/>
               </a:rPr>
-              <a:t>LED 自動/手動控制</a:t>
+              <a:t>光敏電阻（ADC 直讀）</a:t>
             </a:r>
           </a:p>
           <a:p>
@@ -10058,7 +10026,32 @@
                 </a:solidFill>
                 <a:latin typeface="Microsoft JhengHei"/>
               </a:rPr>
-              <a:t>MQTT 發布亮度數據</a:t>
+              <a:t>LED 自動/手動控制</a:t>
+            </a:r>
+          </a:p>
+          <a:p>
+            <a:pPr>
+              <a:spcAft>
+                <a:spcPts val="800"/>
+              </a:spcAft>
+            </a:pPr>
+            <a:r>
+              <a:rPr sz="1100">
+                <a:solidFill>
+                  <a:srgbClr val="4ADE80"/>
+                </a:solidFill>
+                <a:latin typeface="Microsoft JhengHei"/>
+              </a:rPr>
+              <a:t>●  </a:t>
+            </a:r>
+            <a:r>
+              <a:rPr sz="1300">
+                <a:solidFill>
+                  <a:srgbClr val="FFFFFF"/>
+                </a:solidFill>
+                <a:latin typeface="Microsoft JhengHei"/>
+              </a:rPr>
+              <a:t>MQTT 發布 PIR + 亮度數據</a:t>
             </a:r>
           </a:p>
           <a:p>
@@ -10248,7 +10241,7 @@
                 </a:solidFill>
                 <a:latin typeface="Microsoft JhengHei"/>
               </a:rPr>
-              <a:t>PIR 紅外線感測器</a:t>
+              <a:t>USB Webcam + OpenCV DNN</a:t>
             </a:r>
           </a:p>
           <a:p>
@@ -10273,7 +10266,32 @@
                 </a:solidFill>
                 <a:latin typeface="Microsoft JhengHei"/>
               </a:rPr>
-              <a:t>USB Webcam + OpenCV</a:t>
+              <a:t>MobileNet SSD 人形偵測</a:t>
+            </a:r>
+          </a:p>
+          <a:p>
+            <a:pPr>
+              <a:spcAft>
+                <a:spcPts val="800"/>
+              </a:spcAft>
+            </a:pPr>
+            <a:r>
+              <a:rPr sz="1100">
+                <a:solidFill>
+                  <a:srgbClr val="38BDF8"/>
+                </a:solidFill>
+                <a:latin typeface="Microsoft JhengHei"/>
+              </a:rPr>
+              <a:t>●  </a:t>
+            </a:r>
+            <a:r>
+              <a:rPr sz="1300">
+                <a:solidFill>
+                  <a:srgbClr val="FFFFFF"/>
+                </a:solidFill>
+                <a:latin typeface="Microsoft JhengHei"/>
+              </a:rPr>
+              <a:t>MQTT 接收 PIR 觸發訊號</a:t>
             </a:r>
           </a:p>
           <a:p>
@@ -11116,7 +11134,7 @@
               </a:defRPr>
             </a:pPr>
             <a:r>
-              <a:t>Raspberry Pi — PIR → Camera → OpenCV → MQTT → Discord</a:t>
+              <a:t>ESP32 PIR → MQTT → RPi Camera → MobileNet SSD → Discord</a:t>
             </a:r>
           </a:p>
         </p:txBody>
@@ -11173,6 +11191,424 @@
         <p:spPr>
           <a:xfrm>
             <a:off x="457200" y="1828800"/>
+            <a:ext cx="1691640" cy="1828800"/>
+          </a:xfrm>
+          <a:prstGeom prst="roundRect">
+            <a:avLst/>
+          </a:prstGeom>
+          <a:solidFill>
+            <a:srgbClr val="1E293B"/>
+          </a:solidFill>
+          <a:ln w="19050">
+            <a:solidFill>
+              <a:srgbClr val="4ADE80"/>
+            </a:solidFill>
+          </a:ln>
+        </p:spPr>
+        <p:style>
+          <a:lnRef idx="1">
+            <a:schemeClr val="accent1"/>
+          </a:lnRef>
+          <a:fillRef idx="3">
+            <a:schemeClr val="accent1"/>
+          </a:fillRef>
+          <a:effectRef idx="2">
+            <a:schemeClr val="accent1"/>
+          </a:effectRef>
+          <a:fontRef idx="minor">
+            <a:schemeClr val="lt1"/>
+          </a:fontRef>
+        </p:style>
+        <p:txBody>
+          <a:bodyPr rtlCol="0" anchor="ctr"/>
+          <a:lstStyle/>
+          <a:p>
+            <a:pPr algn="ctr"/>
+          </a:p>
+        </p:txBody>
+      </p:sp>
+      <p:sp>
+        <p:nvSpPr>
+          <p:cNvPr id="6" name="Rounded Rectangle 5"/>
+          <p:cNvSpPr/>
+          <p:nvPr/>
+        </p:nvSpPr>
+        <p:spPr>
+          <a:xfrm>
+            <a:off x="1051560" y="1965960"/>
+            <a:ext cx="502920" cy="502920"/>
+          </a:xfrm>
+          <a:prstGeom prst="roundRect">
+            <a:avLst/>
+          </a:prstGeom>
+          <a:solidFill>
+            <a:srgbClr val="4ADE80"/>
+          </a:solidFill>
+          <a:ln>
+            <a:noFill/>
+          </a:ln>
+        </p:spPr>
+        <p:style>
+          <a:lnRef idx="1">
+            <a:schemeClr val="accent1"/>
+          </a:lnRef>
+          <a:fillRef idx="3">
+            <a:schemeClr val="accent1"/>
+          </a:fillRef>
+          <a:effectRef idx="2">
+            <a:schemeClr val="accent1"/>
+          </a:effectRef>
+          <a:fontRef idx="minor">
+            <a:schemeClr val="lt1"/>
+          </a:fontRef>
+        </p:style>
+        <p:txBody>
+          <a:bodyPr rtlCol="0" anchor="ctr"/>
+          <a:lstStyle/>
+          <a:p>
+            <a:pPr algn="ctr"/>
+            <a:r>
+              <a:rPr sz="2000" b="1">
+                <a:solidFill>
+                  <a:srgbClr val="0F172A"/>
+                </a:solidFill>
+                <a:latin typeface="Consolas"/>
+              </a:rPr>
+              <a:t>1</a:t>
+            </a:r>
+          </a:p>
+        </p:txBody>
+      </p:sp>
+      <p:sp>
+        <p:nvSpPr>
+          <p:cNvPr id="7" name="TextBox 6"/>
+          <p:cNvSpPr txBox="1"/>
+          <p:nvPr/>
+        </p:nvSpPr>
+        <p:spPr>
+          <a:xfrm>
+            <a:off x="548640" y="2560320"/>
+            <a:ext cx="1508760" cy="320040"/>
+          </a:xfrm>
+          <a:prstGeom prst="rect">
+            <a:avLst/>
+          </a:prstGeom>
+          <a:noFill/>
+        </p:spPr>
+        <p:txBody>
+          <a:bodyPr wrap="square">
+            <a:spAutoFit/>
+          </a:bodyPr>
+          <a:lstStyle/>
+          <a:p>
+            <a:pPr algn="ctr">
+              <a:defRPr sz="1500" b="1">
+                <a:solidFill>
+                  <a:srgbClr val="4ADE80"/>
+                </a:solidFill>
+                <a:latin typeface="Microsoft JhengHei"/>
+              </a:defRPr>
+            </a:pPr>
+            <a:r>
+              <a:t>ESP32 PIR</a:t>
+            </a:r>
+          </a:p>
+        </p:txBody>
+      </p:sp>
+      <p:sp>
+        <p:nvSpPr>
+          <p:cNvPr id="8" name="TextBox 7"/>
+          <p:cNvSpPr txBox="1"/>
+          <p:nvPr/>
+        </p:nvSpPr>
+        <p:spPr>
+          <a:xfrm>
+            <a:off x="548640" y="2926080"/>
+            <a:ext cx="1508760" cy="640080"/>
+          </a:xfrm>
+          <a:prstGeom prst="rect">
+            <a:avLst/>
+          </a:prstGeom>
+          <a:noFill/>
+        </p:spPr>
+        <p:txBody>
+          <a:bodyPr wrap="square">
+            <a:spAutoFit/>
+          </a:bodyPr>
+          <a:lstStyle/>
+          <a:p>
+            <a:pPr algn="ctr">
+              <a:defRPr sz="1200" b="0">
+                <a:solidFill>
+                  <a:srgbClr val="CBD5E1"/>
+                </a:solidFill>
+                <a:latin typeface="Microsoft JhengHei"/>
+              </a:defRPr>
+            </a:pPr>
+            <a:r>
+              <a:t>紅外線感測器</a:t>
+            </a:r>
+            <a:br/>
+            <a:r>
+              <a:t>GPIO 27 偵測移動</a:t>
+            </a:r>
+          </a:p>
+        </p:txBody>
+      </p:sp>
+      <p:sp>
+        <p:nvSpPr>
+          <p:cNvPr id="9" name="TextBox 8"/>
+          <p:cNvSpPr txBox="1"/>
+          <p:nvPr/>
+        </p:nvSpPr>
+        <p:spPr>
+          <a:xfrm>
+            <a:off x="2148840" y="2514600"/>
+            <a:ext cx="274320" cy="365760"/>
+          </a:xfrm>
+          <a:prstGeom prst="rect">
+            <a:avLst/>
+          </a:prstGeom>
+          <a:noFill/>
+        </p:spPr>
+        <p:txBody>
+          <a:bodyPr wrap="square">
+            <a:spAutoFit/>
+          </a:bodyPr>
+          <a:lstStyle/>
+          <a:p>
+            <a:pPr algn="ctr">
+              <a:defRPr sz="2000" b="0">
+                <a:solidFill>
+                  <a:srgbClr val="94A3B8"/>
+                </a:solidFill>
+                <a:latin typeface="Microsoft JhengHei"/>
+              </a:defRPr>
+            </a:pPr>
+            <a:r>
+              <a:t>→</a:t>
+            </a:r>
+          </a:p>
+        </p:txBody>
+      </p:sp>
+      <p:sp>
+        <p:nvSpPr>
+          <p:cNvPr id="10" name="Rounded Rectangle 9"/>
+          <p:cNvSpPr/>
+          <p:nvPr/>
+        </p:nvSpPr>
+        <p:spPr>
+          <a:xfrm>
+            <a:off x="2377440" y="1828800"/>
+            <a:ext cx="1691640" cy="1828800"/>
+          </a:xfrm>
+          <a:prstGeom prst="roundRect">
+            <a:avLst/>
+          </a:prstGeom>
+          <a:solidFill>
+            <a:srgbClr val="1E293B"/>
+          </a:solidFill>
+          <a:ln w="19050">
+            <a:solidFill>
+              <a:srgbClr val="A78BFA"/>
+            </a:solidFill>
+          </a:ln>
+        </p:spPr>
+        <p:style>
+          <a:lnRef idx="1">
+            <a:schemeClr val="accent1"/>
+          </a:lnRef>
+          <a:fillRef idx="3">
+            <a:schemeClr val="accent1"/>
+          </a:fillRef>
+          <a:effectRef idx="2">
+            <a:schemeClr val="accent1"/>
+          </a:effectRef>
+          <a:fontRef idx="minor">
+            <a:schemeClr val="lt1"/>
+          </a:fontRef>
+        </p:style>
+        <p:txBody>
+          <a:bodyPr rtlCol="0" anchor="ctr"/>
+          <a:lstStyle/>
+          <a:p>
+            <a:pPr algn="ctr"/>
+          </a:p>
+        </p:txBody>
+      </p:sp>
+      <p:sp>
+        <p:nvSpPr>
+          <p:cNvPr id="11" name="Rounded Rectangle 10"/>
+          <p:cNvSpPr/>
+          <p:nvPr/>
+        </p:nvSpPr>
+        <p:spPr>
+          <a:xfrm>
+            <a:off x="2971800" y="1965960"/>
+            <a:ext cx="502920" cy="502920"/>
+          </a:xfrm>
+          <a:prstGeom prst="roundRect">
+            <a:avLst/>
+          </a:prstGeom>
+          <a:solidFill>
+            <a:srgbClr val="A78BFA"/>
+          </a:solidFill>
+          <a:ln>
+            <a:noFill/>
+          </a:ln>
+        </p:spPr>
+        <p:style>
+          <a:lnRef idx="1">
+            <a:schemeClr val="accent1"/>
+          </a:lnRef>
+          <a:fillRef idx="3">
+            <a:schemeClr val="accent1"/>
+          </a:fillRef>
+          <a:effectRef idx="2">
+            <a:schemeClr val="accent1"/>
+          </a:effectRef>
+          <a:fontRef idx="minor">
+            <a:schemeClr val="lt1"/>
+          </a:fontRef>
+        </p:style>
+        <p:txBody>
+          <a:bodyPr rtlCol="0" anchor="ctr"/>
+          <a:lstStyle/>
+          <a:p>
+            <a:pPr algn="ctr"/>
+            <a:r>
+              <a:rPr sz="2000" b="1">
+                <a:solidFill>
+                  <a:srgbClr val="0F172A"/>
+                </a:solidFill>
+                <a:latin typeface="Consolas"/>
+              </a:rPr>
+              <a:t>2</a:t>
+            </a:r>
+          </a:p>
+        </p:txBody>
+      </p:sp>
+      <p:sp>
+        <p:nvSpPr>
+          <p:cNvPr id="12" name="TextBox 11"/>
+          <p:cNvSpPr txBox="1"/>
+          <p:nvPr/>
+        </p:nvSpPr>
+        <p:spPr>
+          <a:xfrm>
+            <a:off x="2468880" y="2560320"/>
+            <a:ext cx="1508760" cy="320040"/>
+          </a:xfrm>
+          <a:prstGeom prst="rect">
+            <a:avLst/>
+          </a:prstGeom>
+          <a:noFill/>
+        </p:spPr>
+        <p:txBody>
+          <a:bodyPr wrap="square">
+            <a:spAutoFit/>
+          </a:bodyPr>
+          <a:lstStyle/>
+          <a:p>
+            <a:pPr algn="ctr">
+              <a:defRPr sz="1500" b="1">
+                <a:solidFill>
+                  <a:srgbClr val="A78BFA"/>
+                </a:solidFill>
+                <a:latin typeface="Microsoft JhengHei"/>
+              </a:defRPr>
+            </a:pPr>
+            <a:r>
+              <a:t>MQTT 觸發</a:t>
+            </a:r>
+          </a:p>
+        </p:txBody>
+      </p:sp>
+      <p:sp>
+        <p:nvSpPr>
+          <p:cNvPr id="13" name="TextBox 12"/>
+          <p:cNvSpPr txBox="1"/>
+          <p:nvPr/>
+        </p:nvSpPr>
+        <p:spPr>
+          <a:xfrm>
+            <a:off x="2468880" y="2926080"/>
+            <a:ext cx="1508760" cy="640080"/>
+          </a:xfrm>
+          <a:prstGeom prst="rect">
+            <a:avLst/>
+          </a:prstGeom>
+          <a:noFill/>
+        </p:spPr>
+        <p:txBody>
+          <a:bodyPr wrap="square">
+            <a:spAutoFit/>
+          </a:bodyPr>
+          <a:lstStyle/>
+          <a:p>
+            <a:pPr algn="ctr">
+              <a:defRPr sz="1200" b="0">
+                <a:solidFill>
+                  <a:srgbClr val="CBD5E1"/>
+                </a:solidFill>
+                <a:latin typeface="Microsoft JhengHei"/>
+              </a:defRPr>
+            </a:pPr>
+            <a:r>
+              <a:t>發布 PIR 訊號</a:t>
+            </a:r>
+            <a:br/>
+            <a:r>
+              <a:t>RPi 接收觸發</a:t>
+            </a:r>
+          </a:p>
+        </p:txBody>
+      </p:sp>
+      <p:sp>
+        <p:nvSpPr>
+          <p:cNvPr id="14" name="TextBox 13"/>
+          <p:cNvSpPr txBox="1"/>
+          <p:nvPr/>
+        </p:nvSpPr>
+        <p:spPr>
+          <a:xfrm>
+            <a:off x="4069080" y="2514600"/>
+            <a:ext cx="274320" cy="365760"/>
+          </a:xfrm>
+          <a:prstGeom prst="rect">
+            <a:avLst/>
+          </a:prstGeom>
+          <a:noFill/>
+        </p:spPr>
+        <p:txBody>
+          <a:bodyPr wrap="square">
+            <a:spAutoFit/>
+          </a:bodyPr>
+          <a:lstStyle/>
+          <a:p>
+            <a:pPr algn="ctr">
+              <a:defRPr sz="2000" b="0">
+                <a:solidFill>
+                  <a:srgbClr val="94A3B8"/>
+                </a:solidFill>
+                <a:latin typeface="Microsoft JhengHei"/>
+              </a:defRPr>
+            </a:pPr>
+            <a:r>
+              <a:t>→</a:t>
+            </a:r>
+          </a:p>
+        </p:txBody>
+      </p:sp>
+      <p:sp>
+        <p:nvSpPr>
+          <p:cNvPr id="15" name="Rounded Rectangle 14"/>
+          <p:cNvSpPr/>
+          <p:nvPr/>
+        </p:nvSpPr>
+        <p:spPr>
+          <a:xfrm>
+            <a:off x="4297680" y="1828800"/>
             <a:ext cx="1691640" cy="1828800"/>
           </a:xfrm>
           <a:prstGeom prst="roundRect">
@@ -11211,13 +11647,13 @@
       </p:sp>
       <p:sp>
         <p:nvSpPr>
-          <p:cNvPr id="6" name="Rounded Rectangle 5"/>
+          <p:cNvPr id="16" name="Rounded Rectangle 15"/>
           <p:cNvSpPr/>
           <p:nvPr/>
         </p:nvSpPr>
         <p:spPr>
           <a:xfrm>
-            <a:off x="1051560" y="1965960"/>
+            <a:off x="4892040" y="1965960"/>
             <a:ext cx="502920" cy="502920"/>
           </a:xfrm>
           <a:prstGeom prst="roundRect">
@@ -11256,20 +11692,20 @@
                 </a:solidFill>
                 <a:latin typeface="Consolas"/>
               </a:rPr>
-              <a:t>1</a:t>
-            </a:r>
-          </a:p>
-        </p:txBody>
-      </p:sp>
-      <p:sp>
-        <p:nvSpPr>
-          <p:cNvPr id="7" name="TextBox 6"/>
-          <p:cNvSpPr txBox="1"/>
-          <p:nvPr/>
-        </p:nvSpPr>
-        <p:spPr>
-          <a:xfrm>
-            <a:off x="548640" y="2560320"/>
+              <a:t>3</a:t>
+            </a:r>
+          </a:p>
+        </p:txBody>
+      </p:sp>
+      <p:sp>
+        <p:nvSpPr>
+          <p:cNvPr id="17" name="TextBox 16"/>
+          <p:cNvSpPr txBox="1"/>
+          <p:nvPr/>
+        </p:nvSpPr>
+        <p:spPr>
+          <a:xfrm>
+            <a:off x="4389120" y="2560320"/>
             <a:ext cx="1508760" cy="320040"/>
           </a:xfrm>
           <a:prstGeom prst="rect">
@@ -11292,20 +11728,20 @@
               </a:defRPr>
             </a:pPr>
             <a:r>
-              <a:t>PIR 偵測</a:t>
-            </a:r>
-          </a:p>
-        </p:txBody>
-      </p:sp>
-      <p:sp>
-        <p:nvSpPr>
-          <p:cNvPr id="8" name="TextBox 7"/>
-          <p:cNvSpPr txBox="1"/>
-          <p:nvPr/>
-        </p:nvSpPr>
-        <p:spPr>
-          <a:xfrm>
-            <a:off x="548640" y="2926080"/>
+              <a:t>連拍驗證</a:t>
+            </a:r>
+          </a:p>
+        </p:txBody>
+      </p:sp>
+      <p:sp>
+        <p:nvSpPr>
+          <p:cNvPr id="18" name="TextBox 17"/>
+          <p:cNvSpPr txBox="1"/>
+          <p:nvPr/>
+        </p:nvSpPr>
+        <p:spPr>
+          <a:xfrm>
+            <a:off x="4389120" y="2926080"/>
             <a:ext cx="1508760" cy="640080"/>
           </a:xfrm>
           <a:prstGeom prst="rect">
@@ -11328,429 +11764,11 @@
               </a:defRPr>
             </a:pPr>
             <a:r>
-              <a:t>紅外線感測器</a:t>
+              <a:t>USB Webcam</a:t>
             </a:r>
             <a:br/>
             <a:r>
-              <a:t>偵測人體移動</a:t>
-            </a:r>
-          </a:p>
-        </p:txBody>
-      </p:sp>
-      <p:sp>
-        <p:nvSpPr>
-          <p:cNvPr id="9" name="TextBox 8"/>
-          <p:cNvSpPr txBox="1"/>
-          <p:nvPr/>
-        </p:nvSpPr>
-        <p:spPr>
-          <a:xfrm>
-            <a:off x="2148840" y="2514600"/>
-            <a:ext cx="274320" cy="365760"/>
-          </a:xfrm>
-          <a:prstGeom prst="rect">
-            <a:avLst/>
-          </a:prstGeom>
-          <a:noFill/>
-        </p:spPr>
-        <p:txBody>
-          <a:bodyPr wrap="square">
-            <a:spAutoFit/>
-          </a:bodyPr>
-          <a:lstStyle/>
-          <a:p>
-            <a:pPr algn="ctr">
-              <a:defRPr sz="2000" b="0">
-                <a:solidFill>
-                  <a:srgbClr val="94A3B8"/>
-                </a:solidFill>
-                <a:latin typeface="Microsoft JhengHei"/>
-              </a:defRPr>
-            </a:pPr>
-            <a:r>
-              <a:t>→</a:t>
-            </a:r>
-          </a:p>
-        </p:txBody>
-      </p:sp>
-      <p:sp>
-        <p:nvSpPr>
-          <p:cNvPr id="10" name="Rounded Rectangle 9"/>
-          <p:cNvSpPr/>
-          <p:nvPr/>
-        </p:nvSpPr>
-        <p:spPr>
-          <a:xfrm>
-            <a:off x="2377440" y="1828800"/>
-            <a:ext cx="1691640" cy="1828800"/>
-          </a:xfrm>
-          <a:prstGeom prst="roundRect">
-            <a:avLst/>
-          </a:prstGeom>
-          <a:solidFill>
-            <a:srgbClr val="1E293B"/>
-          </a:solidFill>
-          <a:ln w="19050">
-            <a:solidFill>
-              <a:srgbClr val="4ADE80"/>
-            </a:solidFill>
-          </a:ln>
-        </p:spPr>
-        <p:style>
-          <a:lnRef idx="1">
-            <a:schemeClr val="accent1"/>
-          </a:lnRef>
-          <a:fillRef idx="3">
-            <a:schemeClr val="accent1"/>
-          </a:fillRef>
-          <a:effectRef idx="2">
-            <a:schemeClr val="accent1"/>
-          </a:effectRef>
-          <a:fontRef idx="minor">
-            <a:schemeClr val="lt1"/>
-          </a:fontRef>
-        </p:style>
-        <p:txBody>
-          <a:bodyPr rtlCol="0" anchor="ctr"/>
-          <a:lstStyle/>
-          <a:p>
-            <a:pPr algn="ctr"/>
-          </a:p>
-        </p:txBody>
-      </p:sp>
-      <p:sp>
-        <p:nvSpPr>
-          <p:cNvPr id="11" name="Rounded Rectangle 10"/>
-          <p:cNvSpPr/>
-          <p:nvPr/>
-        </p:nvSpPr>
-        <p:spPr>
-          <a:xfrm>
-            <a:off x="2971800" y="1965960"/>
-            <a:ext cx="502920" cy="502920"/>
-          </a:xfrm>
-          <a:prstGeom prst="roundRect">
-            <a:avLst/>
-          </a:prstGeom>
-          <a:solidFill>
-            <a:srgbClr val="4ADE80"/>
-          </a:solidFill>
-          <a:ln>
-            <a:noFill/>
-          </a:ln>
-        </p:spPr>
-        <p:style>
-          <a:lnRef idx="1">
-            <a:schemeClr val="accent1"/>
-          </a:lnRef>
-          <a:fillRef idx="3">
-            <a:schemeClr val="accent1"/>
-          </a:fillRef>
-          <a:effectRef idx="2">
-            <a:schemeClr val="accent1"/>
-          </a:effectRef>
-          <a:fontRef idx="minor">
-            <a:schemeClr val="lt1"/>
-          </a:fontRef>
-        </p:style>
-        <p:txBody>
-          <a:bodyPr rtlCol="0" anchor="ctr"/>
-          <a:lstStyle/>
-          <a:p>
-            <a:pPr algn="ctr"/>
-            <a:r>
-              <a:rPr sz="2000" b="1">
-                <a:solidFill>
-                  <a:srgbClr val="0F172A"/>
-                </a:solidFill>
-                <a:latin typeface="Consolas"/>
-              </a:rPr>
-              <a:t>2</a:t>
-            </a:r>
-          </a:p>
-        </p:txBody>
-      </p:sp>
-      <p:sp>
-        <p:nvSpPr>
-          <p:cNvPr id="12" name="TextBox 11"/>
-          <p:cNvSpPr txBox="1"/>
-          <p:nvPr/>
-        </p:nvSpPr>
-        <p:spPr>
-          <a:xfrm>
-            <a:off x="2468880" y="2560320"/>
-            <a:ext cx="1508760" cy="320040"/>
-          </a:xfrm>
-          <a:prstGeom prst="rect">
-            <a:avLst/>
-          </a:prstGeom>
-          <a:noFill/>
-        </p:spPr>
-        <p:txBody>
-          <a:bodyPr wrap="square">
-            <a:spAutoFit/>
-          </a:bodyPr>
-          <a:lstStyle/>
-          <a:p>
-            <a:pPr algn="ctr">
-              <a:defRPr sz="1500" b="1">
-                <a:solidFill>
-                  <a:srgbClr val="4ADE80"/>
-                </a:solidFill>
-                <a:latin typeface="Microsoft JhengHei"/>
-              </a:defRPr>
-            </a:pPr>
-            <a:r>
-              <a:t>攝影機擷取</a:t>
-            </a:r>
-          </a:p>
-        </p:txBody>
-      </p:sp>
-      <p:sp>
-        <p:nvSpPr>
-          <p:cNvPr id="13" name="TextBox 12"/>
-          <p:cNvSpPr txBox="1"/>
-          <p:nvPr/>
-        </p:nvSpPr>
-        <p:spPr>
-          <a:xfrm>
-            <a:off x="2468880" y="2926080"/>
-            <a:ext cx="1508760" cy="640080"/>
-          </a:xfrm>
-          <a:prstGeom prst="rect">
-            <a:avLst/>
-          </a:prstGeom>
-          <a:noFill/>
-        </p:spPr>
-        <p:txBody>
-          <a:bodyPr wrap="square">
-            <a:spAutoFit/>
-          </a:bodyPr>
-          <a:lstStyle/>
-          <a:p>
-            <a:pPr algn="ctr">
-              <a:defRPr sz="1200" b="0">
-                <a:solidFill>
-                  <a:srgbClr val="CBD5E1"/>
-                </a:solidFill>
-                <a:latin typeface="Microsoft JhengHei"/>
-              </a:defRPr>
-            </a:pPr>
-            <a:r>
-              <a:t>USB Webcam</a:t>
-            </a:r>
-            <a:br/>
-            <a:r>
-              <a:t>擷取即時畫面</a:t>
-            </a:r>
-          </a:p>
-        </p:txBody>
-      </p:sp>
-      <p:sp>
-        <p:nvSpPr>
-          <p:cNvPr id="14" name="TextBox 13"/>
-          <p:cNvSpPr txBox="1"/>
-          <p:nvPr/>
-        </p:nvSpPr>
-        <p:spPr>
-          <a:xfrm>
-            <a:off x="4069080" y="2514600"/>
-            <a:ext cx="274320" cy="365760"/>
-          </a:xfrm>
-          <a:prstGeom prst="rect">
-            <a:avLst/>
-          </a:prstGeom>
-          <a:noFill/>
-        </p:spPr>
-        <p:txBody>
-          <a:bodyPr wrap="square">
-            <a:spAutoFit/>
-          </a:bodyPr>
-          <a:lstStyle/>
-          <a:p>
-            <a:pPr algn="ctr">
-              <a:defRPr sz="2000" b="0">
-                <a:solidFill>
-                  <a:srgbClr val="94A3B8"/>
-                </a:solidFill>
-                <a:latin typeface="Microsoft JhengHei"/>
-              </a:defRPr>
-            </a:pPr>
-            <a:r>
-              <a:t>→</a:t>
-            </a:r>
-          </a:p>
-        </p:txBody>
-      </p:sp>
-      <p:sp>
-        <p:nvSpPr>
-          <p:cNvPr id="15" name="Rounded Rectangle 14"/>
-          <p:cNvSpPr/>
-          <p:nvPr/>
-        </p:nvSpPr>
-        <p:spPr>
-          <a:xfrm>
-            <a:off x="4297680" y="1828800"/>
-            <a:ext cx="1691640" cy="1828800"/>
-          </a:xfrm>
-          <a:prstGeom prst="roundRect">
-            <a:avLst/>
-          </a:prstGeom>
-          <a:solidFill>
-            <a:srgbClr val="1E293B"/>
-          </a:solidFill>
-          <a:ln w="19050">
-            <a:solidFill>
-              <a:srgbClr val="A78BFA"/>
-            </a:solidFill>
-          </a:ln>
-        </p:spPr>
-        <p:style>
-          <a:lnRef idx="1">
-            <a:schemeClr val="accent1"/>
-          </a:lnRef>
-          <a:fillRef idx="3">
-            <a:schemeClr val="accent1"/>
-          </a:fillRef>
-          <a:effectRef idx="2">
-            <a:schemeClr val="accent1"/>
-          </a:effectRef>
-          <a:fontRef idx="minor">
-            <a:schemeClr val="lt1"/>
-          </a:fontRef>
-        </p:style>
-        <p:txBody>
-          <a:bodyPr rtlCol="0" anchor="ctr"/>
-          <a:lstStyle/>
-          <a:p>
-            <a:pPr algn="ctr"/>
-          </a:p>
-        </p:txBody>
-      </p:sp>
-      <p:sp>
-        <p:nvSpPr>
-          <p:cNvPr id="16" name="Rounded Rectangle 15"/>
-          <p:cNvSpPr/>
-          <p:nvPr/>
-        </p:nvSpPr>
-        <p:spPr>
-          <a:xfrm>
-            <a:off x="4892040" y="1965960"/>
-            <a:ext cx="502920" cy="502920"/>
-          </a:xfrm>
-          <a:prstGeom prst="roundRect">
-            <a:avLst/>
-          </a:prstGeom>
-          <a:solidFill>
-            <a:srgbClr val="A78BFA"/>
-          </a:solidFill>
-          <a:ln>
-            <a:noFill/>
-          </a:ln>
-        </p:spPr>
-        <p:style>
-          <a:lnRef idx="1">
-            <a:schemeClr val="accent1"/>
-          </a:lnRef>
-          <a:fillRef idx="3">
-            <a:schemeClr val="accent1"/>
-          </a:fillRef>
-          <a:effectRef idx="2">
-            <a:schemeClr val="accent1"/>
-          </a:effectRef>
-          <a:fontRef idx="minor">
-            <a:schemeClr val="lt1"/>
-          </a:fontRef>
-        </p:style>
-        <p:txBody>
-          <a:bodyPr rtlCol="0" anchor="ctr"/>
-          <a:lstStyle/>
-          <a:p>
-            <a:pPr algn="ctr"/>
-            <a:r>
-              <a:rPr sz="2000" b="1">
-                <a:solidFill>
-                  <a:srgbClr val="0F172A"/>
-                </a:solidFill>
-                <a:latin typeface="Consolas"/>
-              </a:rPr>
-              <a:t>3</a:t>
-            </a:r>
-          </a:p>
-        </p:txBody>
-      </p:sp>
-      <p:sp>
-        <p:nvSpPr>
-          <p:cNvPr id="17" name="TextBox 16"/>
-          <p:cNvSpPr txBox="1"/>
-          <p:nvPr/>
-        </p:nvSpPr>
-        <p:spPr>
-          <a:xfrm>
-            <a:off x="4389120" y="2560320"/>
-            <a:ext cx="1508760" cy="320040"/>
-          </a:xfrm>
-          <a:prstGeom prst="rect">
-            <a:avLst/>
-          </a:prstGeom>
-          <a:noFill/>
-        </p:spPr>
-        <p:txBody>
-          <a:bodyPr wrap="square">
-            <a:spAutoFit/>
-          </a:bodyPr>
-          <a:lstStyle/>
-          <a:p>
-            <a:pPr algn="ctr">
-              <a:defRPr sz="1500" b="1">
-                <a:solidFill>
-                  <a:srgbClr val="A78BFA"/>
-                </a:solidFill>
-                <a:latin typeface="Microsoft JhengHei"/>
-              </a:defRPr>
-            </a:pPr>
-            <a:r>
-              <a:t>OpenCV 辨識</a:t>
-            </a:r>
-          </a:p>
-        </p:txBody>
-      </p:sp>
-      <p:sp>
-        <p:nvSpPr>
-          <p:cNvPr id="18" name="TextBox 17"/>
-          <p:cNvSpPr txBox="1"/>
-          <p:nvPr/>
-        </p:nvSpPr>
-        <p:spPr>
-          <a:xfrm>
-            <a:off x="4389120" y="2926080"/>
-            <a:ext cx="1508760" cy="640080"/>
-          </a:xfrm>
-          <a:prstGeom prst="rect">
-            <a:avLst/>
-          </a:prstGeom>
-          <a:noFill/>
-        </p:spPr>
-        <p:txBody>
-          <a:bodyPr wrap="square">
-            <a:spAutoFit/>
-          </a:bodyPr>
-          <a:lstStyle/>
-          <a:p>
-            <a:pPr algn="ctr">
-              <a:defRPr sz="1200" b="0">
-                <a:solidFill>
-                  <a:srgbClr val="CBD5E1"/>
-                </a:solidFill>
-                <a:latin typeface="Microsoft JhengHei"/>
-              </a:defRPr>
-            </a:pPr>
-            <a:r>
-              <a:t>HOG + SVM</a:t>
-            </a:r>
-            <a:br/>
-            <a:r>
-              <a:t>人形偵測演算法</a:t>
+              <a:t>連拍 3 張照片</a:t>
             </a:r>
           </a:p>
         </p:txBody>
@@ -11919,7 +11937,7 @@
               </a:defRPr>
             </a:pPr>
             <a:r>
-              <a:t>截圖儲存</a:t>
+              <a:t>MobileNet SSD</a:t>
             </a:r>
           </a:p>
         </p:txBody>
@@ -11955,11 +11973,11 @@
               </a:defRPr>
             </a:pPr>
             <a:r>
-              <a:t>Base64 編碼</a:t>
+              <a:t>深度學習模型</a:t>
             </a:r>
             <a:br/>
             <a:r>
-              <a:t>本地備份</a:t>
+              <a:t>2/3 幀通過才算</a:t>
             </a:r>
           </a:p>
         </p:txBody>
@@ -12494,7 +12512,7 @@
               </a:defRPr>
             </a:pPr>
             <a:r>
-              <a:t>冷卻時間 15 秒：PIR 觸發後 15 秒內不重複處理，避免連續誤觸發導致系統過載。SR505 本身為不可重觸發型，延遲約 8 秒。</a:t>
+              <a:t>多幀驗證：連拍 3 張，至少 2 張偵測到人形才觸發警報。冷卻時間 15 秒，避免連續誤觸發。ESP32 PIR 額外設定 10 秒冷卻。</a:t>
             </a:r>
           </a:p>
         </p:txBody>
@@ -12556,7 +12574,7 @@
               </a:defRPr>
             </a:pPr>
             <a:r>
-              <a:t>線路二：自動照明流程</a:t>
+              <a:t>線路二：智慧照明流程</a:t>
             </a:r>
           </a:p>
         </p:txBody>
@@ -12592,7 +12610,7 @@
               </a:defRPr>
             </a:pPr>
             <a:r>
-              <a:t>ESP32（MicroPython）— 光敏電阻 → LED 自動控制 → MQTT</a:t>
+              <a:t>ESP32（MicroPython）— PIR + 光敏電阻 → 智慧 LED 控制 → MQTT</a:t>
             </a:r>
           </a:p>
         </p:txBody>
@@ -12768,7 +12786,7 @@
               </a:defRPr>
             </a:pPr>
             <a:r>
-              <a:t>WiFi 連線</a:t>
+              <a:t>PIR 偵測</a:t>
             </a:r>
           </a:p>
         </p:txBody>
@@ -12804,11 +12822,11 @@
               </a:defRPr>
             </a:pPr>
             <a:r>
-              <a:t>boot.py</a:t>
+              <a:t>GPIO 27 偵測</a:t>
             </a:r>
             <a:br/>
             <a:r>
-              <a:t>自動連線熱點</a:t>
+              <a:t>是否有人在場</a:t>
             </a:r>
           </a:p>
         </p:txBody>
@@ -12858,6 +12876,424 @@
         <p:spPr>
           <a:xfrm>
             <a:off x="2377440" y="1828800"/>
+            <a:ext cx="1691640" cy="1828800"/>
+          </a:xfrm>
+          <a:prstGeom prst="roundRect">
+            <a:avLst/>
+          </a:prstGeom>
+          <a:solidFill>
+            <a:srgbClr val="1E293B"/>
+          </a:solidFill>
+          <a:ln w="19050">
+            <a:solidFill>
+              <a:srgbClr val="4ADE80"/>
+            </a:solidFill>
+          </a:ln>
+        </p:spPr>
+        <p:style>
+          <a:lnRef idx="1">
+            <a:schemeClr val="accent1"/>
+          </a:lnRef>
+          <a:fillRef idx="3">
+            <a:schemeClr val="accent1"/>
+          </a:fillRef>
+          <a:effectRef idx="2">
+            <a:schemeClr val="accent1"/>
+          </a:effectRef>
+          <a:fontRef idx="minor">
+            <a:schemeClr val="lt1"/>
+          </a:fontRef>
+        </p:style>
+        <p:txBody>
+          <a:bodyPr rtlCol="0" anchor="ctr"/>
+          <a:lstStyle/>
+          <a:p>
+            <a:pPr algn="ctr"/>
+          </a:p>
+        </p:txBody>
+      </p:sp>
+      <p:sp>
+        <p:nvSpPr>
+          <p:cNvPr id="11" name="Rounded Rectangle 10"/>
+          <p:cNvSpPr/>
+          <p:nvPr/>
+        </p:nvSpPr>
+        <p:spPr>
+          <a:xfrm>
+            <a:off x="2971800" y="1965960"/>
+            <a:ext cx="502920" cy="502920"/>
+          </a:xfrm>
+          <a:prstGeom prst="roundRect">
+            <a:avLst/>
+          </a:prstGeom>
+          <a:solidFill>
+            <a:srgbClr val="4ADE80"/>
+          </a:solidFill>
+          <a:ln>
+            <a:noFill/>
+          </a:ln>
+        </p:spPr>
+        <p:style>
+          <a:lnRef idx="1">
+            <a:schemeClr val="accent1"/>
+          </a:lnRef>
+          <a:fillRef idx="3">
+            <a:schemeClr val="accent1"/>
+          </a:fillRef>
+          <a:effectRef idx="2">
+            <a:schemeClr val="accent1"/>
+          </a:effectRef>
+          <a:fontRef idx="minor">
+            <a:schemeClr val="lt1"/>
+          </a:fontRef>
+        </p:style>
+        <p:txBody>
+          <a:bodyPr rtlCol="0" anchor="ctr"/>
+          <a:lstStyle/>
+          <a:p>
+            <a:pPr algn="ctr"/>
+            <a:r>
+              <a:rPr sz="2000" b="1">
+                <a:solidFill>
+                  <a:srgbClr val="0F172A"/>
+                </a:solidFill>
+                <a:latin typeface="Consolas"/>
+              </a:rPr>
+              <a:t>2</a:t>
+            </a:r>
+          </a:p>
+        </p:txBody>
+      </p:sp>
+      <p:sp>
+        <p:nvSpPr>
+          <p:cNvPr id="12" name="TextBox 11"/>
+          <p:cNvSpPr txBox="1"/>
+          <p:nvPr/>
+        </p:nvSpPr>
+        <p:spPr>
+          <a:xfrm>
+            <a:off x="2468880" y="2560320"/>
+            <a:ext cx="1508760" cy="320040"/>
+          </a:xfrm>
+          <a:prstGeom prst="rect">
+            <a:avLst/>
+          </a:prstGeom>
+          <a:noFill/>
+        </p:spPr>
+        <p:txBody>
+          <a:bodyPr wrap="square">
+            <a:spAutoFit/>
+          </a:bodyPr>
+          <a:lstStyle/>
+          <a:p>
+            <a:pPr algn="ctr">
+              <a:defRPr sz="1500" b="1">
+                <a:solidFill>
+                  <a:srgbClr val="4ADE80"/>
+                </a:solidFill>
+                <a:latin typeface="Microsoft JhengHei"/>
+              </a:defRPr>
+            </a:pPr>
+            <a:r>
+              <a:t>ADC 讀取</a:t>
+            </a:r>
+          </a:p>
+        </p:txBody>
+      </p:sp>
+      <p:sp>
+        <p:nvSpPr>
+          <p:cNvPr id="13" name="TextBox 12"/>
+          <p:cNvSpPr txBox="1"/>
+          <p:nvPr/>
+        </p:nvSpPr>
+        <p:spPr>
+          <a:xfrm>
+            <a:off x="2468880" y="2926080"/>
+            <a:ext cx="1508760" cy="640080"/>
+          </a:xfrm>
+          <a:prstGeom prst="rect">
+            <a:avLst/>
+          </a:prstGeom>
+          <a:noFill/>
+        </p:spPr>
+        <p:txBody>
+          <a:bodyPr wrap="square">
+            <a:spAutoFit/>
+          </a:bodyPr>
+          <a:lstStyle/>
+          <a:p>
+            <a:pPr algn="ctr">
+              <a:defRPr sz="1200" b="0">
+                <a:solidFill>
+                  <a:srgbClr val="CBD5E1"/>
+                </a:solidFill>
+                <a:latin typeface="Microsoft JhengHei"/>
+              </a:defRPr>
+            </a:pPr>
+            <a:r>
+              <a:t>光敏電阻</a:t>
+            </a:r>
+            <a:br/>
+            <a:r>
+              <a:t>亮度值 0-4095</a:t>
+            </a:r>
+          </a:p>
+        </p:txBody>
+      </p:sp>
+      <p:sp>
+        <p:nvSpPr>
+          <p:cNvPr id="14" name="TextBox 13"/>
+          <p:cNvSpPr txBox="1"/>
+          <p:nvPr/>
+        </p:nvSpPr>
+        <p:spPr>
+          <a:xfrm>
+            <a:off x="4069080" y="2514600"/>
+            <a:ext cx="274320" cy="365760"/>
+          </a:xfrm>
+          <a:prstGeom prst="rect">
+            <a:avLst/>
+          </a:prstGeom>
+          <a:noFill/>
+        </p:spPr>
+        <p:txBody>
+          <a:bodyPr wrap="square">
+            <a:spAutoFit/>
+          </a:bodyPr>
+          <a:lstStyle/>
+          <a:p>
+            <a:pPr algn="ctr">
+              <a:defRPr sz="2000" b="0">
+                <a:solidFill>
+                  <a:srgbClr val="94A3B8"/>
+                </a:solidFill>
+                <a:latin typeface="Microsoft JhengHei"/>
+              </a:defRPr>
+            </a:pPr>
+            <a:r>
+              <a:t>→</a:t>
+            </a:r>
+          </a:p>
+        </p:txBody>
+      </p:sp>
+      <p:sp>
+        <p:nvSpPr>
+          <p:cNvPr id="15" name="Rounded Rectangle 14"/>
+          <p:cNvSpPr/>
+          <p:nvPr/>
+        </p:nvSpPr>
+        <p:spPr>
+          <a:xfrm>
+            <a:off x="4297680" y="1828800"/>
+            <a:ext cx="1691640" cy="1828800"/>
+          </a:xfrm>
+          <a:prstGeom prst="roundRect">
+            <a:avLst/>
+          </a:prstGeom>
+          <a:solidFill>
+            <a:srgbClr val="1E293B"/>
+          </a:solidFill>
+          <a:ln w="19050">
+            <a:solidFill>
+              <a:srgbClr val="FBBF24"/>
+            </a:solidFill>
+          </a:ln>
+        </p:spPr>
+        <p:style>
+          <a:lnRef idx="1">
+            <a:schemeClr val="accent1"/>
+          </a:lnRef>
+          <a:fillRef idx="3">
+            <a:schemeClr val="accent1"/>
+          </a:fillRef>
+          <a:effectRef idx="2">
+            <a:schemeClr val="accent1"/>
+          </a:effectRef>
+          <a:fontRef idx="minor">
+            <a:schemeClr val="lt1"/>
+          </a:fontRef>
+        </p:style>
+        <p:txBody>
+          <a:bodyPr rtlCol="0" anchor="ctr"/>
+          <a:lstStyle/>
+          <a:p>
+            <a:pPr algn="ctr"/>
+          </a:p>
+        </p:txBody>
+      </p:sp>
+      <p:sp>
+        <p:nvSpPr>
+          <p:cNvPr id="16" name="Rounded Rectangle 15"/>
+          <p:cNvSpPr/>
+          <p:nvPr/>
+        </p:nvSpPr>
+        <p:spPr>
+          <a:xfrm>
+            <a:off x="4892040" y="1965960"/>
+            <a:ext cx="502920" cy="502920"/>
+          </a:xfrm>
+          <a:prstGeom prst="roundRect">
+            <a:avLst/>
+          </a:prstGeom>
+          <a:solidFill>
+            <a:srgbClr val="FBBF24"/>
+          </a:solidFill>
+          <a:ln>
+            <a:noFill/>
+          </a:ln>
+        </p:spPr>
+        <p:style>
+          <a:lnRef idx="1">
+            <a:schemeClr val="accent1"/>
+          </a:lnRef>
+          <a:fillRef idx="3">
+            <a:schemeClr val="accent1"/>
+          </a:fillRef>
+          <a:effectRef idx="2">
+            <a:schemeClr val="accent1"/>
+          </a:effectRef>
+          <a:fontRef idx="minor">
+            <a:schemeClr val="lt1"/>
+          </a:fontRef>
+        </p:style>
+        <p:txBody>
+          <a:bodyPr rtlCol="0" anchor="ctr"/>
+          <a:lstStyle/>
+          <a:p>
+            <a:pPr algn="ctr"/>
+            <a:r>
+              <a:rPr sz="2000" b="1">
+                <a:solidFill>
+                  <a:srgbClr val="0F172A"/>
+                </a:solidFill>
+                <a:latin typeface="Consolas"/>
+              </a:rPr>
+              <a:t>3</a:t>
+            </a:r>
+          </a:p>
+        </p:txBody>
+      </p:sp>
+      <p:sp>
+        <p:nvSpPr>
+          <p:cNvPr id="17" name="TextBox 16"/>
+          <p:cNvSpPr txBox="1"/>
+          <p:nvPr/>
+        </p:nvSpPr>
+        <p:spPr>
+          <a:xfrm>
+            <a:off x="4389120" y="2560320"/>
+            <a:ext cx="1508760" cy="320040"/>
+          </a:xfrm>
+          <a:prstGeom prst="rect">
+            <a:avLst/>
+          </a:prstGeom>
+          <a:noFill/>
+        </p:spPr>
+        <p:txBody>
+          <a:bodyPr wrap="square">
+            <a:spAutoFit/>
+          </a:bodyPr>
+          <a:lstStyle/>
+          <a:p>
+            <a:pPr algn="ctr">
+              <a:defRPr sz="1500" b="1">
+                <a:solidFill>
+                  <a:srgbClr val="FBBF24"/>
+                </a:solidFill>
+                <a:latin typeface="Microsoft JhengHei"/>
+              </a:defRPr>
+            </a:pPr>
+            <a:r>
+              <a:t>智慧判斷</a:t>
+            </a:r>
+          </a:p>
+        </p:txBody>
+      </p:sp>
+      <p:sp>
+        <p:nvSpPr>
+          <p:cNvPr id="18" name="TextBox 17"/>
+          <p:cNvSpPr txBox="1"/>
+          <p:nvPr/>
+        </p:nvSpPr>
+        <p:spPr>
+          <a:xfrm>
+            <a:off x="4389120" y="2926080"/>
+            <a:ext cx="1508760" cy="640080"/>
+          </a:xfrm>
+          <a:prstGeom prst="rect">
+            <a:avLst/>
+          </a:prstGeom>
+          <a:noFill/>
+        </p:spPr>
+        <p:txBody>
+          <a:bodyPr wrap="square">
+            <a:spAutoFit/>
+          </a:bodyPr>
+          <a:lstStyle/>
+          <a:p>
+            <a:pPr algn="ctr">
+              <a:defRPr sz="1200" b="0">
+                <a:solidFill>
+                  <a:srgbClr val="CBD5E1"/>
+                </a:solidFill>
+                <a:latin typeface="Microsoft JhengHei"/>
+              </a:defRPr>
+            </a:pPr>
+            <a:r>
+              <a:t>有人 + 暗 → 開燈</a:t>
+            </a:r>
+            <a:br/>
+            <a:r>
+              <a:t>無人 → 關燈</a:t>
+            </a:r>
+          </a:p>
+        </p:txBody>
+      </p:sp>
+      <p:sp>
+        <p:nvSpPr>
+          <p:cNvPr id="19" name="TextBox 18"/>
+          <p:cNvSpPr txBox="1"/>
+          <p:nvPr/>
+        </p:nvSpPr>
+        <p:spPr>
+          <a:xfrm>
+            <a:off x="5989320" y="2514600"/>
+            <a:ext cx="274320" cy="365760"/>
+          </a:xfrm>
+          <a:prstGeom prst="rect">
+            <a:avLst/>
+          </a:prstGeom>
+          <a:noFill/>
+        </p:spPr>
+        <p:txBody>
+          <a:bodyPr wrap="square">
+            <a:spAutoFit/>
+          </a:bodyPr>
+          <a:lstStyle/>
+          <a:p>
+            <a:pPr algn="ctr">
+              <a:defRPr sz="2000" b="0">
+                <a:solidFill>
+                  <a:srgbClr val="94A3B8"/>
+                </a:solidFill>
+                <a:latin typeface="Microsoft JhengHei"/>
+              </a:defRPr>
+            </a:pPr>
+            <a:r>
+              <a:t>→</a:t>
+            </a:r>
+          </a:p>
+        </p:txBody>
+      </p:sp>
+      <p:sp>
+        <p:nvSpPr>
+          <p:cNvPr id="20" name="Rounded Rectangle 19"/>
+          <p:cNvSpPr/>
+          <p:nvPr/>
+        </p:nvSpPr>
+        <p:spPr>
+          <a:xfrm>
+            <a:off x="6217920" y="1828800"/>
             <a:ext cx="1691640" cy="1828800"/>
           </a:xfrm>
           <a:prstGeom prst="roundRect">
@@ -12896,13 +13332,13 @@
       </p:sp>
       <p:sp>
         <p:nvSpPr>
-          <p:cNvPr id="11" name="Rounded Rectangle 10"/>
+          <p:cNvPr id="21" name="Rounded Rectangle 20"/>
           <p:cNvSpPr/>
           <p:nvPr/>
         </p:nvSpPr>
         <p:spPr>
           <a:xfrm>
-            <a:off x="2971800" y="1965960"/>
+            <a:off x="6812280" y="1965960"/>
             <a:ext cx="502920" cy="502920"/>
           </a:xfrm>
           <a:prstGeom prst="roundRect">
@@ -12941,20 +13377,20 @@
                 </a:solidFill>
                 <a:latin typeface="Consolas"/>
               </a:rPr>
-              <a:t>2</a:t>
-            </a:r>
-          </a:p>
-        </p:txBody>
-      </p:sp>
-      <p:sp>
-        <p:nvSpPr>
-          <p:cNvPr id="12" name="TextBox 11"/>
-          <p:cNvSpPr txBox="1"/>
-          <p:nvPr/>
-        </p:nvSpPr>
-        <p:spPr>
-          <a:xfrm>
-            <a:off x="2468880" y="2560320"/>
+              <a:t>4</a:t>
+            </a:r>
+          </a:p>
+        </p:txBody>
+      </p:sp>
+      <p:sp>
+        <p:nvSpPr>
+          <p:cNvPr id="22" name="TextBox 21"/>
+          <p:cNvSpPr txBox="1"/>
+          <p:nvPr/>
+        </p:nvSpPr>
+        <p:spPr>
+          <a:xfrm>
+            <a:off x="6309360" y="2560320"/>
             <a:ext cx="1508760" cy="320040"/>
           </a:xfrm>
           <a:prstGeom prst="rect">
@@ -12977,20 +13413,20 @@
               </a:defRPr>
             </a:pPr>
             <a:r>
-              <a:t>MQTT 連線</a:t>
-            </a:r>
-          </a:p>
-        </p:txBody>
-      </p:sp>
-      <p:sp>
-        <p:nvSpPr>
-          <p:cNvPr id="13" name="TextBox 12"/>
-          <p:cNvSpPr txBox="1"/>
-          <p:nvPr/>
-        </p:nvSpPr>
-        <p:spPr>
-          <a:xfrm>
-            <a:off x="2468880" y="2926080"/>
+              <a:t>MQTT 發布</a:t>
+            </a:r>
+          </a:p>
+        </p:txBody>
+      </p:sp>
+      <p:sp>
+        <p:nvSpPr>
+          <p:cNvPr id="23" name="TextBox 22"/>
+          <p:cNvSpPr txBox="1"/>
+          <p:nvPr/>
+        </p:nvSpPr>
+        <p:spPr>
+          <a:xfrm>
+            <a:off x="6309360" y="2926080"/>
             <a:ext cx="1508760" cy="640080"/>
           </a:xfrm>
           <a:prstGeom prst="rect">
@@ -13013,24 +13449,24 @@
               </a:defRPr>
             </a:pPr>
             <a:r>
-              <a:t>HiveMQ Cloud</a:t>
+              <a:t>亮度數據</a:t>
             </a:r>
             <a:br/>
             <a:r>
-              <a:t>TLS 加密</a:t>
-            </a:r>
-          </a:p>
-        </p:txBody>
-      </p:sp>
-      <p:sp>
-        <p:nvSpPr>
-          <p:cNvPr id="14" name="TextBox 13"/>
-          <p:cNvSpPr txBox="1"/>
-          <p:nvPr/>
-        </p:nvSpPr>
-        <p:spPr>
-          <a:xfrm>
-            <a:off x="4069080" y="2514600"/>
+              <a:t>+ 燈光 + PIR 狀態</a:t>
+            </a:r>
+          </a:p>
+        </p:txBody>
+      </p:sp>
+      <p:sp>
+        <p:nvSpPr>
+          <p:cNvPr id="24" name="TextBox 23"/>
+          <p:cNvSpPr txBox="1"/>
+          <p:nvPr/>
+        </p:nvSpPr>
+        <p:spPr>
+          <a:xfrm>
+            <a:off x="7909560" y="2514600"/>
             <a:ext cx="274320" cy="365760"/>
           </a:xfrm>
           <a:prstGeom prst="rect">
@@ -13060,14 +13496,396 @@
       </p:sp>
       <p:sp>
         <p:nvSpPr>
-          <p:cNvPr id="15" name="Rounded Rectangle 14"/>
+          <p:cNvPr id="25" name="Rounded Rectangle 24"/>
           <p:cNvSpPr/>
           <p:nvPr/>
         </p:nvSpPr>
         <p:spPr>
           <a:xfrm>
-            <a:off x="4297680" y="1828800"/>
+            <a:off x="8138160" y="1828800"/>
             <a:ext cx="1691640" cy="1828800"/>
+          </a:xfrm>
+          <a:prstGeom prst="roundRect">
+            <a:avLst/>
+          </a:prstGeom>
+          <a:solidFill>
+            <a:srgbClr val="1E293B"/>
+          </a:solidFill>
+          <a:ln w="19050">
+            <a:solidFill>
+              <a:srgbClr val="F87171"/>
+            </a:solidFill>
+          </a:ln>
+        </p:spPr>
+        <p:style>
+          <a:lnRef idx="1">
+            <a:schemeClr val="accent1"/>
+          </a:lnRef>
+          <a:fillRef idx="3">
+            <a:schemeClr val="accent1"/>
+          </a:fillRef>
+          <a:effectRef idx="2">
+            <a:schemeClr val="accent1"/>
+          </a:effectRef>
+          <a:fontRef idx="minor">
+            <a:schemeClr val="lt1"/>
+          </a:fontRef>
+        </p:style>
+        <p:txBody>
+          <a:bodyPr rtlCol="0" anchor="ctr"/>
+          <a:lstStyle/>
+          <a:p>
+            <a:pPr algn="ctr"/>
+          </a:p>
+        </p:txBody>
+      </p:sp>
+      <p:sp>
+        <p:nvSpPr>
+          <p:cNvPr id="26" name="Rounded Rectangle 25"/>
+          <p:cNvSpPr/>
+          <p:nvPr/>
+        </p:nvSpPr>
+        <p:spPr>
+          <a:xfrm>
+            <a:off x="8732520" y="1965960"/>
+            <a:ext cx="502920" cy="502920"/>
+          </a:xfrm>
+          <a:prstGeom prst="roundRect">
+            <a:avLst/>
+          </a:prstGeom>
+          <a:solidFill>
+            <a:srgbClr val="F87171"/>
+          </a:solidFill>
+          <a:ln>
+            <a:noFill/>
+          </a:ln>
+        </p:spPr>
+        <p:style>
+          <a:lnRef idx="1">
+            <a:schemeClr val="accent1"/>
+          </a:lnRef>
+          <a:fillRef idx="3">
+            <a:schemeClr val="accent1"/>
+          </a:fillRef>
+          <a:effectRef idx="2">
+            <a:schemeClr val="accent1"/>
+          </a:effectRef>
+          <a:fontRef idx="minor">
+            <a:schemeClr val="lt1"/>
+          </a:fontRef>
+        </p:style>
+        <p:txBody>
+          <a:bodyPr rtlCol="0" anchor="ctr"/>
+          <a:lstStyle/>
+          <a:p>
+            <a:pPr algn="ctr"/>
+            <a:r>
+              <a:rPr sz="2000" b="1">
+                <a:solidFill>
+                  <a:srgbClr val="0F172A"/>
+                </a:solidFill>
+                <a:latin typeface="Consolas"/>
+              </a:rPr>
+              <a:t>5</a:t>
+            </a:r>
+          </a:p>
+        </p:txBody>
+      </p:sp>
+      <p:sp>
+        <p:nvSpPr>
+          <p:cNvPr id="27" name="TextBox 26"/>
+          <p:cNvSpPr txBox="1"/>
+          <p:nvPr/>
+        </p:nvSpPr>
+        <p:spPr>
+          <a:xfrm>
+            <a:off x="8229600" y="2560320"/>
+            <a:ext cx="1508760" cy="320040"/>
+          </a:xfrm>
+          <a:prstGeom prst="rect">
+            <a:avLst/>
+          </a:prstGeom>
+          <a:noFill/>
+        </p:spPr>
+        <p:txBody>
+          <a:bodyPr wrap="square">
+            <a:spAutoFit/>
+          </a:bodyPr>
+          <a:lstStyle/>
+          <a:p>
+            <a:pPr algn="ctr">
+              <a:defRPr sz="1500" b="1">
+                <a:solidFill>
+                  <a:srgbClr val="F87171"/>
+                </a:solidFill>
+                <a:latin typeface="Microsoft JhengHei"/>
+              </a:defRPr>
+            </a:pPr>
+            <a:r>
+              <a:t>遠端控制</a:t>
+            </a:r>
+          </a:p>
+        </p:txBody>
+      </p:sp>
+      <p:sp>
+        <p:nvSpPr>
+          <p:cNvPr id="28" name="TextBox 27"/>
+          <p:cNvSpPr txBox="1"/>
+          <p:nvPr/>
+        </p:nvSpPr>
+        <p:spPr>
+          <a:xfrm>
+            <a:off x="8229600" y="2926080"/>
+            <a:ext cx="1508760" cy="640080"/>
+          </a:xfrm>
+          <a:prstGeom prst="rect">
+            <a:avLst/>
+          </a:prstGeom>
+          <a:noFill/>
+        </p:spPr>
+        <p:txBody>
+          <a:bodyPr wrap="square">
+            <a:spAutoFit/>
+          </a:bodyPr>
+          <a:lstStyle/>
+          <a:p>
+            <a:pPr algn="ctr">
+              <a:defRPr sz="1200" b="0">
+                <a:solidFill>
+                  <a:srgbClr val="CBD5E1"/>
+                </a:solidFill>
+                <a:latin typeface="Microsoft JhengHei"/>
+              </a:defRPr>
+            </a:pPr>
+            <a:r>
+              <a:t>Dashboard 手動</a:t>
+            </a:r>
+            <a:br/>
+            <a:r>
+              <a:t>開/關燈指令</a:t>
+            </a:r>
+          </a:p>
+        </p:txBody>
+      </p:sp>
+      <p:sp>
+        <p:nvSpPr>
+          <p:cNvPr id="29" name="TextBox 28"/>
+          <p:cNvSpPr txBox="1"/>
+          <p:nvPr/>
+        </p:nvSpPr>
+        <p:spPr>
+          <a:xfrm>
+            <a:off x="9829800" y="2514600"/>
+            <a:ext cx="274320" cy="365760"/>
+          </a:xfrm>
+          <a:prstGeom prst="rect">
+            <a:avLst/>
+          </a:prstGeom>
+          <a:noFill/>
+        </p:spPr>
+        <p:txBody>
+          <a:bodyPr wrap="square">
+            <a:spAutoFit/>
+          </a:bodyPr>
+          <a:lstStyle/>
+          <a:p>
+            <a:pPr algn="ctr">
+              <a:defRPr sz="2000" b="0">
+                <a:solidFill>
+                  <a:srgbClr val="94A3B8"/>
+                </a:solidFill>
+                <a:latin typeface="Microsoft JhengHei"/>
+              </a:defRPr>
+            </a:pPr>
+            <a:r>
+              <a:t>→</a:t>
+            </a:r>
+          </a:p>
+        </p:txBody>
+      </p:sp>
+      <p:sp>
+        <p:nvSpPr>
+          <p:cNvPr id="30" name="Rounded Rectangle 29"/>
+          <p:cNvSpPr/>
+          <p:nvPr/>
+        </p:nvSpPr>
+        <p:spPr>
+          <a:xfrm>
+            <a:off x="10058400" y="1828800"/>
+            <a:ext cx="1691640" cy="1828800"/>
+          </a:xfrm>
+          <a:prstGeom prst="roundRect">
+            <a:avLst/>
+          </a:prstGeom>
+          <a:solidFill>
+            <a:srgbClr val="1E293B"/>
+          </a:solidFill>
+          <a:ln w="19050">
+            <a:solidFill>
+              <a:srgbClr val="38BDF8"/>
+            </a:solidFill>
+          </a:ln>
+        </p:spPr>
+        <p:style>
+          <a:lnRef idx="1">
+            <a:schemeClr val="accent1"/>
+          </a:lnRef>
+          <a:fillRef idx="3">
+            <a:schemeClr val="accent1"/>
+          </a:fillRef>
+          <a:effectRef idx="2">
+            <a:schemeClr val="accent1"/>
+          </a:effectRef>
+          <a:fontRef idx="minor">
+            <a:schemeClr val="lt1"/>
+          </a:fontRef>
+        </p:style>
+        <p:txBody>
+          <a:bodyPr rtlCol="0" anchor="ctr"/>
+          <a:lstStyle/>
+          <a:p>
+            <a:pPr algn="ctr"/>
+          </a:p>
+        </p:txBody>
+      </p:sp>
+      <p:sp>
+        <p:nvSpPr>
+          <p:cNvPr id="31" name="Rounded Rectangle 30"/>
+          <p:cNvSpPr/>
+          <p:nvPr/>
+        </p:nvSpPr>
+        <p:spPr>
+          <a:xfrm>
+            <a:off x="10652760" y="1965960"/>
+            <a:ext cx="502920" cy="502920"/>
+          </a:xfrm>
+          <a:prstGeom prst="roundRect">
+            <a:avLst/>
+          </a:prstGeom>
+          <a:solidFill>
+            <a:srgbClr val="38BDF8"/>
+          </a:solidFill>
+          <a:ln>
+            <a:noFill/>
+          </a:ln>
+        </p:spPr>
+        <p:style>
+          <a:lnRef idx="1">
+            <a:schemeClr val="accent1"/>
+          </a:lnRef>
+          <a:fillRef idx="3">
+            <a:schemeClr val="accent1"/>
+          </a:fillRef>
+          <a:effectRef idx="2">
+            <a:schemeClr val="accent1"/>
+          </a:effectRef>
+          <a:fontRef idx="minor">
+            <a:schemeClr val="lt1"/>
+          </a:fontRef>
+        </p:style>
+        <p:txBody>
+          <a:bodyPr rtlCol="0" anchor="ctr"/>
+          <a:lstStyle/>
+          <a:p>
+            <a:pPr algn="ctr"/>
+            <a:r>
+              <a:rPr sz="2000" b="1">
+                <a:solidFill>
+                  <a:srgbClr val="0F172A"/>
+                </a:solidFill>
+                <a:latin typeface="Consolas"/>
+              </a:rPr>
+              <a:t>6</a:t>
+            </a:r>
+          </a:p>
+        </p:txBody>
+      </p:sp>
+      <p:sp>
+        <p:nvSpPr>
+          <p:cNvPr id="32" name="TextBox 31"/>
+          <p:cNvSpPr txBox="1"/>
+          <p:nvPr/>
+        </p:nvSpPr>
+        <p:spPr>
+          <a:xfrm>
+            <a:off x="10149840" y="2560320"/>
+            <a:ext cx="1508760" cy="320040"/>
+          </a:xfrm>
+          <a:prstGeom prst="rect">
+            <a:avLst/>
+          </a:prstGeom>
+          <a:noFill/>
+        </p:spPr>
+        <p:txBody>
+          <a:bodyPr wrap="square">
+            <a:spAutoFit/>
+          </a:bodyPr>
+          <a:lstStyle/>
+          <a:p>
+            <a:pPr algn="ctr">
+              <a:defRPr sz="1500" b="1">
+                <a:solidFill>
+                  <a:srgbClr val="38BDF8"/>
+                </a:solidFill>
+                <a:latin typeface="Microsoft JhengHei"/>
+              </a:defRPr>
+            </a:pPr>
+            <a:r>
+              <a:t>手動覆蓋</a:t>
+            </a:r>
+          </a:p>
+        </p:txBody>
+      </p:sp>
+      <p:sp>
+        <p:nvSpPr>
+          <p:cNvPr id="33" name="TextBox 32"/>
+          <p:cNvSpPr txBox="1"/>
+          <p:nvPr/>
+        </p:nvSpPr>
+        <p:spPr>
+          <a:xfrm>
+            <a:off x="10149840" y="2926080"/>
+            <a:ext cx="1508760" cy="640080"/>
+          </a:xfrm>
+          <a:prstGeom prst="rect">
+            <a:avLst/>
+          </a:prstGeom>
+          <a:noFill/>
+        </p:spPr>
+        <p:txBody>
+          <a:bodyPr wrap="square">
+            <a:spAutoFit/>
+          </a:bodyPr>
+          <a:lstStyle/>
+          <a:p>
+            <a:pPr algn="ctr">
+              <a:defRPr sz="1200" b="0">
+                <a:solidFill>
+                  <a:srgbClr val="CBD5E1"/>
+                </a:solidFill>
+                <a:latin typeface="Microsoft JhengHei"/>
+              </a:defRPr>
+            </a:pPr>
+            <a:r>
+              <a:t>手動控制後</a:t>
+            </a:r>
+            <a:br/>
+            <a:r>
+              <a:t>暫停自動 60 秒</a:t>
+            </a:r>
+          </a:p>
+        </p:txBody>
+      </p:sp>
+      <p:sp>
+        <p:nvSpPr>
+          <p:cNvPr id="34" name="Rounded Rectangle 33"/>
+          <p:cNvSpPr/>
+          <p:nvPr/>
+        </p:nvSpPr>
+        <p:spPr>
+          <a:xfrm>
+            <a:off x="457200" y="4114800"/>
+            <a:ext cx="11247120" cy="1097280"/>
           </a:xfrm>
           <a:prstGeom prst="roundRect">
             <a:avLst/>
@@ -13105,806 +13923,6 @@
       </p:sp>
       <p:sp>
         <p:nvSpPr>
-          <p:cNvPr id="16" name="Rounded Rectangle 15"/>
-          <p:cNvSpPr/>
-          <p:nvPr/>
-        </p:nvSpPr>
-        <p:spPr>
-          <a:xfrm>
-            <a:off x="4892040" y="1965960"/>
-            <a:ext cx="502920" cy="502920"/>
-          </a:xfrm>
-          <a:prstGeom prst="roundRect">
-            <a:avLst/>
-          </a:prstGeom>
-          <a:solidFill>
-            <a:srgbClr val="4ADE80"/>
-          </a:solidFill>
-          <a:ln>
-            <a:noFill/>
-          </a:ln>
-        </p:spPr>
-        <p:style>
-          <a:lnRef idx="1">
-            <a:schemeClr val="accent1"/>
-          </a:lnRef>
-          <a:fillRef idx="3">
-            <a:schemeClr val="accent1"/>
-          </a:fillRef>
-          <a:effectRef idx="2">
-            <a:schemeClr val="accent1"/>
-          </a:effectRef>
-          <a:fontRef idx="minor">
-            <a:schemeClr val="lt1"/>
-          </a:fontRef>
-        </p:style>
-        <p:txBody>
-          <a:bodyPr rtlCol="0" anchor="ctr"/>
-          <a:lstStyle/>
-          <a:p>
-            <a:pPr algn="ctr"/>
-            <a:r>
-              <a:rPr sz="2000" b="1">
-                <a:solidFill>
-                  <a:srgbClr val="0F172A"/>
-                </a:solidFill>
-                <a:latin typeface="Consolas"/>
-              </a:rPr>
-              <a:t>3</a:t>
-            </a:r>
-          </a:p>
-        </p:txBody>
-      </p:sp>
-      <p:sp>
-        <p:nvSpPr>
-          <p:cNvPr id="17" name="TextBox 16"/>
-          <p:cNvSpPr txBox="1"/>
-          <p:nvPr/>
-        </p:nvSpPr>
-        <p:spPr>
-          <a:xfrm>
-            <a:off x="4389120" y="2560320"/>
-            <a:ext cx="1508760" cy="320040"/>
-          </a:xfrm>
-          <a:prstGeom prst="rect">
-            <a:avLst/>
-          </a:prstGeom>
-          <a:noFill/>
-        </p:spPr>
-        <p:txBody>
-          <a:bodyPr wrap="square">
-            <a:spAutoFit/>
-          </a:bodyPr>
-          <a:lstStyle/>
-          <a:p>
-            <a:pPr algn="ctr">
-              <a:defRPr sz="1500" b="1">
-                <a:solidFill>
-                  <a:srgbClr val="4ADE80"/>
-                </a:solidFill>
-                <a:latin typeface="Microsoft JhengHei"/>
-              </a:defRPr>
-            </a:pPr>
-            <a:r>
-              <a:t>ADC 讀取</a:t>
-            </a:r>
-          </a:p>
-        </p:txBody>
-      </p:sp>
-      <p:sp>
-        <p:nvSpPr>
-          <p:cNvPr id="18" name="TextBox 17"/>
-          <p:cNvSpPr txBox="1"/>
-          <p:nvPr/>
-        </p:nvSpPr>
-        <p:spPr>
-          <a:xfrm>
-            <a:off x="4389120" y="2926080"/>
-            <a:ext cx="1508760" cy="640080"/>
-          </a:xfrm>
-          <a:prstGeom prst="rect">
-            <a:avLst/>
-          </a:prstGeom>
-          <a:noFill/>
-        </p:spPr>
-        <p:txBody>
-          <a:bodyPr wrap="square">
-            <a:spAutoFit/>
-          </a:bodyPr>
-          <a:lstStyle/>
-          <a:p>
-            <a:pPr algn="ctr">
-              <a:defRPr sz="1200" b="0">
-                <a:solidFill>
-                  <a:srgbClr val="CBD5E1"/>
-                </a:solidFill>
-                <a:latin typeface="Microsoft JhengHei"/>
-              </a:defRPr>
-            </a:pPr>
-            <a:r>
-              <a:t>光敏電阻</a:t>
-            </a:r>
-            <a:br/>
-            <a:r>
-              <a:t>亮度值 0-4095</a:t>
-            </a:r>
-          </a:p>
-        </p:txBody>
-      </p:sp>
-      <p:sp>
-        <p:nvSpPr>
-          <p:cNvPr id="19" name="TextBox 18"/>
-          <p:cNvSpPr txBox="1"/>
-          <p:nvPr/>
-        </p:nvSpPr>
-        <p:spPr>
-          <a:xfrm>
-            <a:off x="5989320" y="2514600"/>
-            <a:ext cx="274320" cy="365760"/>
-          </a:xfrm>
-          <a:prstGeom prst="rect">
-            <a:avLst/>
-          </a:prstGeom>
-          <a:noFill/>
-        </p:spPr>
-        <p:txBody>
-          <a:bodyPr wrap="square">
-            <a:spAutoFit/>
-          </a:bodyPr>
-          <a:lstStyle/>
-          <a:p>
-            <a:pPr algn="ctr">
-              <a:defRPr sz="2000" b="0">
-                <a:solidFill>
-                  <a:srgbClr val="94A3B8"/>
-                </a:solidFill>
-                <a:latin typeface="Microsoft JhengHei"/>
-              </a:defRPr>
-            </a:pPr>
-            <a:r>
-              <a:t>→</a:t>
-            </a:r>
-          </a:p>
-        </p:txBody>
-      </p:sp>
-      <p:sp>
-        <p:nvSpPr>
-          <p:cNvPr id="20" name="Rounded Rectangle 19"/>
-          <p:cNvSpPr/>
-          <p:nvPr/>
-        </p:nvSpPr>
-        <p:spPr>
-          <a:xfrm>
-            <a:off x="6217920" y="1828800"/>
-            <a:ext cx="1691640" cy="1828800"/>
-          </a:xfrm>
-          <a:prstGeom prst="roundRect">
-            <a:avLst/>
-          </a:prstGeom>
-          <a:solidFill>
-            <a:srgbClr val="1E293B"/>
-          </a:solidFill>
-          <a:ln w="19050">
-            <a:solidFill>
-              <a:srgbClr val="FBBF24"/>
-            </a:solidFill>
-          </a:ln>
-        </p:spPr>
-        <p:style>
-          <a:lnRef idx="1">
-            <a:schemeClr val="accent1"/>
-          </a:lnRef>
-          <a:fillRef idx="3">
-            <a:schemeClr val="accent1"/>
-          </a:fillRef>
-          <a:effectRef idx="2">
-            <a:schemeClr val="accent1"/>
-          </a:effectRef>
-          <a:fontRef idx="minor">
-            <a:schemeClr val="lt1"/>
-          </a:fontRef>
-        </p:style>
-        <p:txBody>
-          <a:bodyPr rtlCol="0" anchor="ctr"/>
-          <a:lstStyle/>
-          <a:p>
-            <a:pPr algn="ctr"/>
-          </a:p>
-        </p:txBody>
-      </p:sp>
-      <p:sp>
-        <p:nvSpPr>
-          <p:cNvPr id="21" name="Rounded Rectangle 20"/>
-          <p:cNvSpPr/>
-          <p:nvPr/>
-        </p:nvSpPr>
-        <p:spPr>
-          <a:xfrm>
-            <a:off x="6812280" y="1965960"/>
-            <a:ext cx="502920" cy="502920"/>
-          </a:xfrm>
-          <a:prstGeom prst="roundRect">
-            <a:avLst/>
-          </a:prstGeom>
-          <a:solidFill>
-            <a:srgbClr val="FBBF24"/>
-          </a:solidFill>
-          <a:ln>
-            <a:noFill/>
-          </a:ln>
-        </p:spPr>
-        <p:style>
-          <a:lnRef idx="1">
-            <a:schemeClr val="accent1"/>
-          </a:lnRef>
-          <a:fillRef idx="3">
-            <a:schemeClr val="accent1"/>
-          </a:fillRef>
-          <a:effectRef idx="2">
-            <a:schemeClr val="accent1"/>
-          </a:effectRef>
-          <a:fontRef idx="minor">
-            <a:schemeClr val="lt1"/>
-          </a:fontRef>
-        </p:style>
-        <p:txBody>
-          <a:bodyPr rtlCol="0" anchor="ctr"/>
-          <a:lstStyle/>
-          <a:p>
-            <a:pPr algn="ctr"/>
-            <a:r>
-              <a:rPr sz="2000" b="1">
-                <a:solidFill>
-                  <a:srgbClr val="0F172A"/>
-                </a:solidFill>
-                <a:latin typeface="Consolas"/>
-              </a:rPr>
-              <a:t>4</a:t>
-            </a:r>
-          </a:p>
-        </p:txBody>
-      </p:sp>
-      <p:sp>
-        <p:nvSpPr>
-          <p:cNvPr id="22" name="TextBox 21"/>
-          <p:cNvSpPr txBox="1"/>
-          <p:nvPr/>
-        </p:nvSpPr>
-        <p:spPr>
-          <a:xfrm>
-            <a:off x="6309360" y="2560320"/>
-            <a:ext cx="1508760" cy="320040"/>
-          </a:xfrm>
-          <a:prstGeom prst="rect">
-            <a:avLst/>
-          </a:prstGeom>
-          <a:noFill/>
-        </p:spPr>
-        <p:txBody>
-          <a:bodyPr wrap="square">
-            <a:spAutoFit/>
-          </a:bodyPr>
-          <a:lstStyle/>
-          <a:p>
-            <a:pPr algn="ctr">
-              <a:defRPr sz="1500" b="1">
-                <a:solidFill>
-                  <a:srgbClr val="FBBF24"/>
-                </a:solidFill>
-                <a:latin typeface="Microsoft JhengHei"/>
-              </a:defRPr>
-            </a:pPr>
-            <a:r>
-              <a:t>自動控制</a:t>
-            </a:r>
-          </a:p>
-        </p:txBody>
-      </p:sp>
-      <p:sp>
-        <p:nvSpPr>
-          <p:cNvPr id="23" name="TextBox 22"/>
-          <p:cNvSpPr txBox="1"/>
-          <p:nvPr/>
-        </p:nvSpPr>
-        <p:spPr>
-          <a:xfrm>
-            <a:off x="6309360" y="2926080"/>
-            <a:ext cx="1508760" cy="640080"/>
-          </a:xfrm>
-          <a:prstGeom prst="rect">
-            <a:avLst/>
-          </a:prstGeom>
-          <a:noFill/>
-        </p:spPr>
-        <p:txBody>
-          <a:bodyPr wrap="square">
-            <a:spAutoFit/>
-          </a:bodyPr>
-          <a:lstStyle/>
-          <a:p>
-            <a:pPr algn="ctr">
-              <a:defRPr sz="1200" b="0">
-                <a:solidFill>
-                  <a:srgbClr val="CBD5E1"/>
-                </a:solidFill>
-                <a:latin typeface="Microsoft JhengHei"/>
-              </a:defRPr>
-            </a:pPr>
-            <a:r>
-              <a:t>亮度 &lt; 閾值 → 開燈</a:t>
-            </a:r>
-            <a:br/>
-            <a:r>
-              <a:t>亮度 ≥ 閾值 → 關燈</a:t>
-            </a:r>
-          </a:p>
-        </p:txBody>
-      </p:sp>
-      <p:sp>
-        <p:nvSpPr>
-          <p:cNvPr id="24" name="TextBox 23"/>
-          <p:cNvSpPr txBox="1"/>
-          <p:nvPr/>
-        </p:nvSpPr>
-        <p:spPr>
-          <a:xfrm>
-            <a:off x="7909560" y="2514600"/>
-            <a:ext cx="274320" cy="365760"/>
-          </a:xfrm>
-          <a:prstGeom prst="rect">
-            <a:avLst/>
-          </a:prstGeom>
-          <a:noFill/>
-        </p:spPr>
-        <p:txBody>
-          <a:bodyPr wrap="square">
-            <a:spAutoFit/>
-          </a:bodyPr>
-          <a:lstStyle/>
-          <a:p>
-            <a:pPr algn="ctr">
-              <a:defRPr sz="2000" b="0">
-                <a:solidFill>
-                  <a:srgbClr val="94A3B8"/>
-                </a:solidFill>
-                <a:latin typeface="Microsoft JhengHei"/>
-              </a:defRPr>
-            </a:pPr>
-            <a:r>
-              <a:t>→</a:t>
-            </a:r>
-          </a:p>
-        </p:txBody>
-      </p:sp>
-      <p:sp>
-        <p:nvSpPr>
-          <p:cNvPr id="25" name="Rounded Rectangle 24"/>
-          <p:cNvSpPr/>
-          <p:nvPr/>
-        </p:nvSpPr>
-        <p:spPr>
-          <a:xfrm>
-            <a:off x="8138160" y="1828800"/>
-            <a:ext cx="1691640" cy="1828800"/>
-          </a:xfrm>
-          <a:prstGeom prst="roundRect">
-            <a:avLst/>
-          </a:prstGeom>
-          <a:solidFill>
-            <a:srgbClr val="1E293B"/>
-          </a:solidFill>
-          <a:ln w="19050">
-            <a:solidFill>
-              <a:srgbClr val="38BDF8"/>
-            </a:solidFill>
-          </a:ln>
-        </p:spPr>
-        <p:style>
-          <a:lnRef idx="1">
-            <a:schemeClr val="accent1"/>
-          </a:lnRef>
-          <a:fillRef idx="3">
-            <a:schemeClr val="accent1"/>
-          </a:fillRef>
-          <a:effectRef idx="2">
-            <a:schemeClr val="accent1"/>
-          </a:effectRef>
-          <a:fontRef idx="minor">
-            <a:schemeClr val="lt1"/>
-          </a:fontRef>
-        </p:style>
-        <p:txBody>
-          <a:bodyPr rtlCol="0" anchor="ctr"/>
-          <a:lstStyle/>
-          <a:p>
-            <a:pPr algn="ctr"/>
-          </a:p>
-        </p:txBody>
-      </p:sp>
-      <p:sp>
-        <p:nvSpPr>
-          <p:cNvPr id="26" name="Rounded Rectangle 25"/>
-          <p:cNvSpPr/>
-          <p:nvPr/>
-        </p:nvSpPr>
-        <p:spPr>
-          <a:xfrm>
-            <a:off x="8732520" y="1965960"/>
-            <a:ext cx="502920" cy="502920"/>
-          </a:xfrm>
-          <a:prstGeom prst="roundRect">
-            <a:avLst/>
-          </a:prstGeom>
-          <a:solidFill>
-            <a:srgbClr val="38BDF8"/>
-          </a:solidFill>
-          <a:ln>
-            <a:noFill/>
-          </a:ln>
-        </p:spPr>
-        <p:style>
-          <a:lnRef idx="1">
-            <a:schemeClr val="accent1"/>
-          </a:lnRef>
-          <a:fillRef idx="3">
-            <a:schemeClr val="accent1"/>
-          </a:fillRef>
-          <a:effectRef idx="2">
-            <a:schemeClr val="accent1"/>
-          </a:effectRef>
-          <a:fontRef idx="minor">
-            <a:schemeClr val="lt1"/>
-          </a:fontRef>
-        </p:style>
-        <p:txBody>
-          <a:bodyPr rtlCol="0" anchor="ctr"/>
-          <a:lstStyle/>
-          <a:p>
-            <a:pPr algn="ctr"/>
-            <a:r>
-              <a:rPr sz="2000" b="1">
-                <a:solidFill>
-                  <a:srgbClr val="0F172A"/>
-                </a:solidFill>
-                <a:latin typeface="Consolas"/>
-              </a:rPr>
-              <a:t>5</a:t>
-            </a:r>
-          </a:p>
-        </p:txBody>
-      </p:sp>
-      <p:sp>
-        <p:nvSpPr>
-          <p:cNvPr id="27" name="TextBox 26"/>
-          <p:cNvSpPr txBox="1"/>
-          <p:nvPr/>
-        </p:nvSpPr>
-        <p:spPr>
-          <a:xfrm>
-            <a:off x="8229600" y="2560320"/>
-            <a:ext cx="1508760" cy="320040"/>
-          </a:xfrm>
-          <a:prstGeom prst="rect">
-            <a:avLst/>
-          </a:prstGeom>
-          <a:noFill/>
-        </p:spPr>
-        <p:txBody>
-          <a:bodyPr wrap="square">
-            <a:spAutoFit/>
-          </a:bodyPr>
-          <a:lstStyle/>
-          <a:p>
-            <a:pPr algn="ctr">
-              <a:defRPr sz="1500" b="1">
-                <a:solidFill>
-                  <a:srgbClr val="38BDF8"/>
-                </a:solidFill>
-                <a:latin typeface="Microsoft JhengHei"/>
-              </a:defRPr>
-            </a:pPr>
-            <a:r>
-              <a:t>MQTT 發布</a:t>
-            </a:r>
-          </a:p>
-        </p:txBody>
-      </p:sp>
-      <p:sp>
-        <p:nvSpPr>
-          <p:cNvPr id="28" name="TextBox 27"/>
-          <p:cNvSpPr txBox="1"/>
-          <p:nvPr/>
-        </p:nvSpPr>
-        <p:spPr>
-          <a:xfrm>
-            <a:off x="8229600" y="2926080"/>
-            <a:ext cx="1508760" cy="640080"/>
-          </a:xfrm>
-          <a:prstGeom prst="rect">
-            <a:avLst/>
-          </a:prstGeom>
-          <a:noFill/>
-        </p:spPr>
-        <p:txBody>
-          <a:bodyPr wrap="square">
-            <a:spAutoFit/>
-          </a:bodyPr>
-          <a:lstStyle/>
-          <a:p>
-            <a:pPr algn="ctr">
-              <a:defRPr sz="1200" b="0">
-                <a:solidFill>
-                  <a:srgbClr val="CBD5E1"/>
-                </a:solidFill>
-                <a:latin typeface="Microsoft JhengHei"/>
-              </a:defRPr>
-            </a:pPr>
-            <a:r>
-              <a:t>亮度數據</a:t>
-            </a:r>
-            <a:br/>
-            <a:r>
-              <a:t>+ 燈光狀態</a:t>
-            </a:r>
-          </a:p>
-        </p:txBody>
-      </p:sp>
-      <p:sp>
-        <p:nvSpPr>
-          <p:cNvPr id="29" name="TextBox 28"/>
-          <p:cNvSpPr txBox="1"/>
-          <p:nvPr/>
-        </p:nvSpPr>
-        <p:spPr>
-          <a:xfrm>
-            <a:off x="9829800" y="2514600"/>
-            <a:ext cx="274320" cy="365760"/>
-          </a:xfrm>
-          <a:prstGeom prst="rect">
-            <a:avLst/>
-          </a:prstGeom>
-          <a:noFill/>
-        </p:spPr>
-        <p:txBody>
-          <a:bodyPr wrap="square">
-            <a:spAutoFit/>
-          </a:bodyPr>
-          <a:lstStyle/>
-          <a:p>
-            <a:pPr algn="ctr">
-              <a:defRPr sz="2000" b="0">
-                <a:solidFill>
-                  <a:srgbClr val="94A3B8"/>
-                </a:solidFill>
-                <a:latin typeface="Microsoft JhengHei"/>
-              </a:defRPr>
-            </a:pPr>
-            <a:r>
-              <a:t>→</a:t>
-            </a:r>
-          </a:p>
-        </p:txBody>
-      </p:sp>
-      <p:sp>
-        <p:nvSpPr>
-          <p:cNvPr id="30" name="Rounded Rectangle 29"/>
-          <p:cNvSpPr/>
-          <p:nvPr/>
-        </p:nvSpPr>
-        <p:spPr>
-          <a:xfrm>
-            <a:off x="10058400" y="1828800"/>
-            <a:ext cx="1691640" cy="1828800"/>
-          </a:xfrm>
-          <a:prstGeom prst="roundRect">
-            <a:avLst/>
-          </a:prstGeom>
-          <a:solidFill>
-            <a:srgbClr val="1E293B"/>
-          </a:solidFill>
-          <a:ln w="19050">
-            <a:solidFill>
-              <a:srgbClr val="F87171"/>
-            </a:solidFill>
-          </a:ln>
-        </p:spPr>
-        <p:style>
-          <a:lnRef idx="1">
-            <a:schemeClr val="accent1"/>
-          </a:lnRef>
-          <a:fillRef idx="3">
-            <a:schemeClr val="accent1"/>
-          </a:fillRef>
-          <a:effectRef idx="2">
-            <a:schemeClr val="accent1"/>
-          </a:effectRef>
-          <a:fontRef idx="minor">
-            <a:schemeClr val="lt1"/>
-          </a:fontRef>
-        </p:style>
-        <p:txBody>
-          <a:bodyPr rtlCol="0" anchor="ctr"/>
-          <a:lstStyle/>
-          <a:p>
-            <a:pPr algn="ctr"/>
-          </a:p>
-        </p:txBody>
-      </p:sp>
-      <p:sp>
-        <p:nvSpPr>
-          <p:cNvPr id="31" name="Rounded Rectangle 30"/>
-          <p:cNvSpPr/>
-          <p:nvPr/>
-        </p:nvSpPr>
-        <p:spPr>
-          <a:xfrm>
-            <a:off x="10652760" y="1965960"/>
-            <a:ext cx="502920" cy="502920"/>
-          </a:xfrm>
-          <a:prstGeom prst="roundRect">
-            <a:avLst/>
-          </a:prstGeom>
-          <a:solidFill>
-            <a:srgbClr val="F87171"/>
-          </a:solidFill>
-          <a:ln>
-            <a:noFill/>
-          </a:ln>
-        </p:spPr>
-        <p:style>
-          <a:lnRef idx="1">
-            <a:schemeClr val="accent1"/>
-          </a:lnRef>
-          <a:fillRef idx="3">
-            <a:schemeClr val="accent1"/>
-          </a:fillRef>
-          <a:effectRef idx="2">
-            <a:schemeClr val="accent1"/>
-          </a:effectRef>
-          <a:fontRef idx="minor">
-            <a:schemeClr val="lt1"/>
-          </a:fontRef>
-        </p:style>
-        <p:txBody>
-          <a:bodyPr rtlCol="0" anchor="ctr"/>
-          <a:lstStyle/>
-          <a:p>
-            <a:pPr algn="ctr"/>
-            <a:r>
-              <a:rPr sz="2000" b="1">
-                <a:solidFill>
-                  <a:srgbClr val="0F172A"/>
-                </a:solidFill>
-                <a:latin typeface="Consolas"/>
-              </a:rPr>
-              <a:t>6</a:t>
-            </a:r>
-          </a:p>
-        </p:txBody>
-      </p:sp>
-      <p:sp>
-        <p:nvSpPr>
-          <p:cNvPr id="32" name="TextBox 31"/>
-          <p:cNvSpPr txBox="1"/>
-          <p:nvPr/>
-        </p:nvSpPr>
-        <p:spPr>
-          <a:xfrm>
-            <a:off x="10149840" y="2560320"/>
-            <a:ext cx="1508760" cy="320040"/>
-          </a:xfrm>
-          <a:prstGeom prst="rect">
-            <a:avLst/>
-          </a:prstGeom>
-          <a:noFill/>
-        </p:spPr>
-        <p:txBody>
-          <a:bodyPr wrap="square">
-            <a:spAutoFit/>
-          </a:bodyPr>
-          <a:lstStyle/>
-          <a:p>
-            <a:pPr algn="ctr">
-              <a:defRPr sz="1500" b="1">
-                <a:solidFill>
-                  <a:srgbClr val="F87171"/>
-                </a:solidFill>
-                <a:latin typeface="Microsoft JhengHei"/>
-              </a:defRPr>
-            </a:pPr>
-            <a:r>
-              <a:t>遠端控制</a:t>
-            </a:r>
-          </a:p>
-        </p:txBody>
-      </p:sp>
-      <p:sp>
-        <p:nvSpPr>
-          <p:cNvPr id="33" name="TextBox 32"/>
-          <p:cNvSpPr txBox="1"/>
-          <p:nvPr/>
-        </p:nvSpPr>
-        <p:spPr>
-          <a:xfrm>
-            <a:off x="10149840" y="2926080"/>
-            <a:ext cx="1508760" cy="640080"/>
-          </a:xfrm>
-          <a:prstGeom prst="rect">
-            <a:avLst/>
-          </a:prstGeom>
-          <a:noFill/>
-        </p:spPr>
-        <p:txBody>
-          <a:bodyPr wrap="square">
-            <a:spAutoFit/>
-          </a:bodyPr>
-          <a:lstStyle/>
-          <a:p>
-            <a:pPr algn="ctr">
-              <a:defRPr sz="1200" b="0">
-                <a:solidFill>
-                  <a:srgbClr val="CBD5E1"/>
-                </a:solidFill>
-                <a:latin typeface="Microsoft JhengHei"/>
-              </a:defRPr>
-            </a:pPr>
-            <a:r>
-              <a:t>Dashboard 手動</a:t>
-            </a:r>
-            <a:br/>
-            <a:r>
-              <a:t>開/關燈指令</a:t>
-            </a:r>
-          </a:p>
-        </p:txBody>
-      </p:sp>
-      <p:sp>
-        <p:nvSpPr>
-          <p:cNvPr id="34" name="Rounded Rectangle 33"/>
-          <p:cNvSpPr/>
-          <p:nvPr/>
-        </p:nvSpPr>
-        <p:spPr>
-          <a:xfrm>
-            <a:off x="457200" y="4114800"/>
-            <a:ext cx="11247120" cy="1097280"/>
-          </a:xfrm>
-          <a:prstGeom prst="roundRect">
-            <a:avLst/>
-          </a:prstGeom>
-          <a:solidFill>
-            <a:srgbClr val="1E293B"/>
-          </a:solidFill>
-          <a:ln w="19050">
-            <a:solidFill>
-              <a:srgbClr val="4ADE80"/>
-            </a:solidFill>
-          </a:ln>
-        </p:spPr>
-        <p:style>
-          <a:lnRef idx="1">
-            <a:schemeClr val="accent1"/>
-          </a:lnRef>
-          <a:fillRef idx="3">
-            <a:schemeClr val="accent1"/>
-          </a:fillRef>
-          <a:effectRef idx="2">
-            <a:schemeClr val="accent1"/>
-          </a:effectRef>
-          <a:fontRef idx="minor">
-            <a:schemeClr val="lt1"/>
-          </a:fontRef>
-        </p:style>
-        <p:txBody>
-          <a:bodyPr rtlCol="0" anchor="ctr"/>
-          <a:lstStyle/>
-          <a:p>
-            <a:pPr algn="ctr"/>
-          </a:p>
-        </p:txBody>
-      </p:sp>
-      <p:sp>
-        <p:nvSpPr>
           <p:cNvPr id="35" name="TextBox 34"/>
           <p:cNvSpPr txBox="1"/>
           <p:nvPr/>
@@ -13970,7 +13988,7 @@
               </a:defRPr>
             </a:pPr>
             <a:r>
-              <a:t>Dashboard 手動控燈後，自動模式暫停 60 秒，避免自動控制立即覆蓋手動操作。超時後自動恢復感測控制。每秒檢查 MQTT 訊息，確保控制指令即時響應。</a:t>
+              <a:t>智慧照明：有人時依亮度決定是否開燈（供攝影機夜間辨識），無人時自動關燈。Dashboard 手動控燈後暫停自動 60 秒。</a:t>
             </a:r>
           </a:p>
         </p:txBody>
@@ -14370,7 +14388,7 @@
               </a:defRPr>
             </a:pPr>
             <a:r>
-              <a:t>home/security/alert</a:t>
+              <a:t>home/security/pir</a:t>
             </a:r>
           </a:p>
         </p:txBody>
@@ -14406,7 +14424,7 @@
               </a:defRPr>
             </a:pPr>
             <a:r>
-              <a:t>RPi</a:t>
+              <a:t>ESP32</a:t>
             </a:r>
           </a:p>
         </p:txBody>
@@ -14442,11 +14460,11 @@
               </a:defRPr>
             </a:pPr>
             <a:r>
+              <a:t>RPi</a:t>
+            </a:r>
+            <a:br/>
+            <a:r>
               <a:t>Dashboard</a:t>
-            </a:r>
-            <a:br/>
-            <a:r>
-              <a:t>Discord</a:t>
             </a:r>
           </a:p>
         </p:txBody>
@@ -14482,11 +14500,11 @@
               </a:defRPr>
             </a:pPr>
             <a:r>
-              <a:t>{"timestamp":"...",</a:t>
+              <a:t>{"triggered":true,</a:t>
             </a:r>
             <a:br/>
             <a:r>
-              <a:t> "confidence":0.85}</a:t>
+              <a:t> "timestamp":12345}</a:t>
             </a:r>
           </a:p>
         </p:txBody>
@@ -14516,13 +14534,13 @@
             <a:pPr>
               <a:defRPr sz="1300">
                 <a:solidFill>
-                  <a:srgbClr val="F87171"/>
-                </a:solidFill>
-                <a:latin typeface="Microsoft JhengHei"/>
-              </a:defRPr>
-            </a:pPr>
-            <a:r>
-              <a:t>入侵警報</a:t>
+                  <a:srgbClr val="38BDF8"/>
+                </a:solidFill>
+                <a:latin typeface="Microsoft JhengHei"/>
+              </a:defRPr>
+            </a:pPr>
+            <a:r>
+              <a:t>PIR 觸發</a:t>
             </a:r>
           </a:p>
         </p:txBody>
@@ -14535,7 +14553,7 @@
         </p:nvSpPr>
         <p:spPr>
           <a:xfrm>
-            <a:off x="731520" y="2788920"/>
+            <a:off x="731520" y="2697479"/>
             <a:ext cx="2560320" cy="640080"/>
           </a:xfrm>
           <a:prstGeom prst="rect">
@@ -14558,7 +14576,7 @@
               </a:defRPr>
             </a:pPr>
             <a:r>
-              <a:t>home/security/snapshot</a:t>
+              <a:t>home/security/alert</a:t>
             </a:r>
           </a:p>
         </p:txBody>
@@ -14571,7 +14589,7 @@
         </p:nvSpPr>
         <p:spPr>
           <a:xfrm>
-            <a:off x="3291840" y="2788920"/>
+            <a:off x="3291840" y="2697479"/>
             <a:ext cx="914400" cy="640080"/>
           </a:xfrm>
           <a:prstGeom prst="rect">
@@ -14607,7 +14625,7 @@
         </p:nvSpPr>
         <p:spPr>
           <a:xfrm>
-            <a:off x="4206240" y="2788920"/>
+            <a:off x="4206240" y="2697479"/>
             <a:ext cx="1097280" cy="640080"/>
           </a:xfrm>
           <a:prstGeom prst="rect">
@@ -14643,7 +14661,7 @@
         </p:nvSpPr>
         <p:spPr>
           <a:xfrm>
-            <a:off x="5303520" y="2788920"/>
+            <a:off x="5303520" y="2697479"/>
             <a:ext cx="3200400" cy="640080"/>
           </a:xfrm>
           <a:prstGeom prst="rect">
@@ -14670,7 +14688,7 @@
             </a:r>
             <a:br/>
             <a:r>
-              <a:t> "image":"&lt;Base64&gt;"}</a:t>
+              <a:t> "confidence":0.85}</a:t>
             </a:r>
           </a:p>
         </p:txBody>
@@ -14683,7 +14701,7 @@
         </p:nvSpPr>
         <p:spPr>
           <a:xfrm>
-            <a:off x="8503920" y="2788920"/>
+            <a:off x="8503920" y="2697479"/>
             <a:ext cx="1371600" cy="640080"/>
           </a:xfrm>
           <a:prstGeom prst="rect">
@@ -14706,7 +14724,7 @@
               </a:defRPr>
             </a:pPr>
             <a:r>
-              <a:t>截圖影像</a:t>
+              <a:t>入侵警報</a:t>
             </a:r>
           </a:p>
         </p:txBody>
@@ -14719,7 +14737,7 @@
         </p:nvSpPr>
         <p:spPr>
           <a:xfrm>
-            <a:off x="731520" y="3474720"/>
+            <a:off x="731520" y="3291839"/>
             <a:ext cx="2560320" cy="640080"/>
           </a:xfrm>
           <a:prstGeom prst="rect">
@@ -14742,7 +14760,7 @@
               </a:defRPr>
             </a:pPr>
             <a:r>
-              <a:t>home/sensor/light</a:t>
+              <a:t>home/security/snapshot</a:t>
             </a:r>
           </a:p>
         </p:txBody>
@@ -14755,7 +14773,7 @@
         </p:nvSpPr>
         <p:spPr>
           <a:xfrm>
-            <a:off x="3291840" y="3474720"/>
+            <a:off x="3291840" y="3291839"/>
             <a:ext cx="914400" cy="640080"/>
           </a:xfrm>
           <a:prstGeom prst="rect">
@@ -14778,7 +14796,7 @@
               </a:defRPr>
             </a:pPr>
             <a:r>
-              <a:t>ESP32</a:t>
+              <a:t>RPi</a:t>
             </a:r>
           </a:p>
         </p:txBody>
@@ -14791,7 +14809,7 @@
         </p:nvSpPr>
         <p:spPr>
           <a:xfrm>
-            <a:off x="4206240" y="3474720"/>
+            <a:off x="4206240" y="3291839"/>
             <a:ext cx="1097280" cy="640080"/>
           </a:xfrm>
           <a:prstGeom prst="rect">
@@ -14827,7 +14845,7 @@
         </p:nvSpPr>
         <p:spPr>
           <a:xfrm>
-            <a:off x="5303520" y="3474720"/>
+            <a:off x="5303520" y="3291839"/>
             <a:ext cx="3200400" cy="640080"/>
           </a:xfrm>
           <a:prstGeom prst="rect">
@@ -14850,7 +14868,11 @@
               </a:defRPr>
             </a:pPr>
             <a:r>
-              <a:t>{"value": 2048}</a:t>
+              <a:t>{"timestamp":"...",</a:t>
+            </a:r>
+            <a:br/>
+            <a:r>
+              <a:t> "image":"&lt;Base64&gt;"}</a:t>
             </a:r>
           </a:p>
         </p:txBody>
@@ -14863,7 +14885,7 @@
         </p:nvSpPr>
         <p:spPr>
           <a:xfrm>
-            <a:off x="8503920" y="3474720"/>
+            <a:off x="8503920" y="3291839"/>
             <a:ext cx="1371600" cy="640080"/>
           </a:xfrm>
           <a:prstGeom prst="rect">
@@ -14880,13 +14902,13 @@
             <a:pPr>
               <a:defRPr sz="1300">
                 <a:solidFill>
-                  <a:srgbClr val="4ADE80"/>
-                </a:solidFill>
-                <a:latin typeface="Microsoft JhengHei"/>
-              </a:defRPr>
-            </a:pPr>
-            <a:r>
-              <a:t>亮度數值</a:t>
+                  <a:srgbClr val="F87171"/>
+                </a:solidFill>
+                <a:latin typeface="Microsoft JhengHei"/>
+              </a:defRPr>
+            </a:pPr>
+            <a:r>
+              <a:t>截圖影像</a:t>
             </a:r>
           </a:p>
         </p:txBody>
@@ -14899,7 +14921,7 @@
         </p:nvSpPr>
         <p:spPr>
           <a:xfrm>
-            <a:off x="731520" y="4160520"/>
+            <a:off x="731520" y="3886200"/>
             <a:ext cx="2560320" cy="640080"/>
           </a:xfrm>
           <a:prstGeom prst="rect">
@@ -14922,7 +14944,7 @@
               </a:defRPr>
             </a:pPr>
             <a:r>
-              <a:t>home/light/status</a:t>
+              <a:t>home/sensor/light</a:t>
             </a:r>
           </a:p>
         </p:txBody>
@@ -14935,7 +14957,7 @@
         </p:nvSpPr>
         <p:spPr>
           <a:xfrm>
-            <a:off x="3291840" y="4160520"/>
+            <a:off x="3291840" y="3886200"/>
             <a:ext cx="914400" cy="640080"/>
           </a:xfrm>
           <a:prstGeom prst="rect">
@@ -14971,7 +14993,7 @@
         </p:nvSpPr>
         <p:spPr>
           <a:xfrm>
-            <a:off x="4206240" y="4160520"/>
+            <a:off x="4206240" y="3886200"/>
             <a:ext cx="1097280" cy="640080"/>
           </a:xfrm>
           <a:prstGeom prst="rect">
@@ -15007,7 +15029,7 @@
         </p:nvSpPr>
         <p:spPr>
           <a:xfrm>
-            <a:off x="5303520" y="4160520"/>
+            <a:off x="5303520" y="3886200"/>
             <a:ext cx="3200400" cy="640080"/>
           </a:xfrm>
           <a:prstGeom prst="rect">
@@ -15030,7 +15052,7 @@
               </a:defRPr>
             </a:pPr>
             <a:r>
-              <a:t>{"status": "on"}</a:t>
+              <a:t>{"value": 2048}</a:t>
             </a:r>
           </a:p>
         </p:txBody>
@@ -15043,7 +15065,7 @@
         </p:nvSpPr>
         <p:spPr>
           <a:xfrm>
-            <a:off x="8503920" y="4160520"/>
+            <a:off x="8503920" y="3886200"/>
             <a:ext cx="1371600" cy="640080"/>
           </a:xfrm>
           <a:prstGeom prst="rect">
@@ -15066,7 +15088,7 @@
               </a:defRPr>
             </a:pPr>
             <a:r>
-              <a:t>燈光狀態</a:t>
+              <a:t>亮度數值</a:t>
             </a:r>
           </a:p>
         </p:txBody>
@@ -15079,7 +15101,7 @@
         </p:nvSpPr>
         <p:spPr>
           <a:xfrm>
-            <a:off x="731520" y="4846320"/>
+            <a:off x="731520" y="4480560"/>
             <a:ext cx="2560320" cy="640080"/>
           </a:xfrm>
           <a:prstGeom prst="rect">
@@ -15102,7 +15124,7 @@
               </a:defRPr>
             </a:pPr>
             <a:r>
-              <a:t>home/light/control</a:t>
+              <a:t>home/light/status</a:t>
             </a:r>
           </a:p>
         </p:txBody>
@@ -15115,7 +15137,7 @@
         </p:nvSpPr>
         <p:spPr>
           <a:xfrm>
-            <a:off x="3291840" y="4846320"/>
+            <a:off x="3291840" y="4480560"/>
             <a:ext cx="914400" cy="640080"/>
           </a:xfrm>
           <a:prstGeom prst="rect">
@@ -15138,7 +15160,7 @@
               </a:defRPr>
             </a:pPr>
             <a:r>
-              <a:t>Dashboard</a:t>
+              <a:t>ESP32</a:t>
             </a:r>
           </a:p>
         </p:txBody>
@@ -15151,7 +15173,7 @@
         </p:nvSpPr>
         <p:spPr>
           <a:xfrm>
-            <a:off x="4206240" y="4846320"/>
+            <a:off x="4206240" y="4480560"/>
             <a:ext cx="1097280" cy="640080"/>
           </a:xfrm>
           <a:prstGeom prst="rect">
@@ -15174,7 +15196,7 @@
               </a:defRPr>
             </a:pPr>
             <a:r>
-              <a:t>ESP32</a:t>
+              <a:t>Dashboard</a:t>
             </a:r>
           </a:p>
         </p:txBody>
@@ -15187,7 +15209,7 @@
         </p:nvSpPr>
         <p:spPr>
           <a:xfrm>
-            <a:off x="5303520" y="4846320"/>
+            <a:off x="5303520" y="4480560"/>
             <a:ext cx="3200400" cy="640080"/>
           </a:xfrm>
           <a:prstGeom prst="rect">
@@ -15210,7 +15232,7 @@
               </a:defRPr>
             </a:pPr>
             <a:r>
-              <a:t>{"action": "on"}</a:t>
+              <a:t>{"status": "on"}</a:t>
             </a:r>
           </a:p>
         </p:txBody>
@@ -15223,7 +15245,7 @@
         </p:nvSpPr>
         <p:spPr>
           <a:xfrm>
-            <a:off x="8503920" y="4846320"/>
+            <a:off x="8503920" y="4480560"/>
             <a:ext cx="1371600" cy="640080"/>
           </a:xfrm>
           <a:prstGeom prst="rect">
@@ -15240,13 +15262,13 @@
             <a:pPr>
               <a:defRPr sz="1300">
                 <a:solidFill>
-                  <a:srgbClr val="FBBF24"/>
-                </a:solidFill>
-                <a:latin typeface="Microsoft JhengHei"/>
-              </a:defRPr>
-            </a:pPr>
-            <a:r>
-              <a:t>遠端控燈</a:t>
+                  <a:srgbClr val="4ADE80"/>
+                </a:solidFill>
+                <a:latin typeface="Microsoft JhengHei"/>
+              </a:defRPr>
+            </a:pPr>
+            <a:r>
+              <a:t>燈光狀態</a:t>
             </a:r>
           </a:p>
         </p:txBody>
@@ -15259,7 +15281,7 @@
         </p:nvSpPr>
         <p:spPr>
           <a:xfrm>
-            <a:off x="731520" y="5532120"/>
+            <a:off x="731520" y="5074920"/>
             <a:ext cx="2560320" cy="640080"/>
           </a:xfrm>
           <a:prstGeom prst="rect">
@@ -15282,7 +15304,7 @@
               </a:defRPr>
             </a:pPr>
             <a:r>
-              <a:t>home/system/status</a:t>
+              <a:t>home/light/control</a:t>
             </a:r>
           </a:p>
         </p:txBody>
@@ -15295,7 +15317,7 @@
         </p:nvSpPr>
         <p:spPr>
           <a:xfrm>
-            <a:off x="3291840" y="5532120"/>
+            <a:off x="3291840" y="5074920"/>
             <a:ext cx="914400" cy="640080"/>
           </a:xfrm>
           <a:prstGeom prst="rect">
@@ -15318,7 +15340,7 @@
               </a:defRPr>
             </a:pPr>
             <a:r>
-              <a:t>RPi</a:t>
+              <a:t>Dashboard</a:t>
             </a:r>
           </a:p>
         </p:txBody>
@@ -15331,7 +15353,7 @@
         </p:nvSpPr>
         <p:spPr>
           <a:xfrm>
-            <a:off x="4206240" y="5532120"/>
+            <a:off x="4206240" y="5074920"/>
             <a:ext cx="1097280" cy="640080"/>
           </a:xfrm>
           <a:prstGeom prst="rect">
@@ -15354,7 +15376,7 @@
               </a:defRPr>
             </a:pPr>
             <a:r>
-              <a:t>Dashboard</a:t>
+              <a:t>ESP32</a:t>
             </a:r>
           </a:p>
         </p:txBody>
@@ -15367,7 +15389,7 @@
         </p:nvSpPr>
         <p:spPr>
           <a:xfrm>
-            <a:off x="5303520" y="5532120"/>
+            <a:off x="5303520" y="5074920"/>
             <a:ext cx="3200400" cy="640080"/>
           </a:xfrm>
           <a:prstGeom prst="rect">
@@ -15390,6 +15412,186 @@
               </a:defRPr>
             </a:pPr>
             <a:r>
+              <a:t>{"action": "on"}</a:t>
+            </a:r>
+          </a:p>
+        </p:txBody>
+      </p:sp>
+      <p:sp>
+        <p:nvSpPr>
+          <p:cNvPr id="40" name="TextBox 39"/>
+          <p:cNvSpPr txBox="1"/>
+          <p:nvPr/>
+        </p:nvSpPr>
+        <p:spPr>
+          <a:xfrm>
+            <a:off x="8503920" y="5074920"/>
+            <a:ext cx="1371600" cy="640080"/>
+          </a:xfrm>
+          <a:prstGeom prst="rect">
+            <a:avLst/>
+          </a:prstGeom>
+          <a:noFill/>
+        </p:spPr>
+        <p:txBody>
+          <a:bodyPr wrap="square">
+            <a:spAutoFit/>
+          </a:bodyPr>
+          <a:lstStyle/>
+          <a:p>
+            <a:pPr>
+              <a:defRPr sz="1300">
+                <a:solidFill>
+                  <a:srgbClr val="FBBF24"/>
+                </a:solidFill>
+                <a:latin typeface="Microsoft JhengHei"/>
+              </a:defRPr>
+            </a:pPr>
+            <a:r>
+              <a:t>遠端控燈</a:t>
+            </a:r>
+          </a:p>
+        </p:txBody>
+      </p:sp>
+      <p:sp>
+        <p:nvSpPr>
+          <p:cNvPr id="41" name="TextBox 40"/>
+          <p:cNvSpPr txBox="1"/>
+          <p:nvPr/>
+        </p:nvSpPr>
+        <p:spPr>
+          <a:xfrm>
+            <a:off x="731520" y="5669280"/>
+            <a:ext cx="2560320" cy="640080"/>
+          </a:xfrm>
+          <a:prstGeom prst="rect">
+            <a:avLst/>
+          </a:prstGeom>
+          <a:noFill/>
+        </p:spPr>
+        <p:txBody>
+          <a:bodyPr wrap="square">
+            <a:spAutoFit/>
+          </a:bodyPr>
+          <a:lstStyle/>
+          <a:p>
+            <a:pPr>
+              <a:defRPr sz="1100">
+                <a:solidFill>
+                  <a:srgbClr val="4ADE80"/>
+                </a:solidFill>
+                <a:latin typeface="Consolas"/>
+              </a:defRPr>
+            </a:pPr>
+            <a:r>
+              <a:t>home/system/status</a:t>
+            </a:r>
+          </a:p>
+        </p:txBody>
+      </p:sp>
+      <p:sp>
+        <p:nvSpPr>
+          <p:cNvPr id="42" name="TextBox 41"/>
+          <p:cNvSpPr txBox="1"/>
+          <p:nvPr/>
+        </p:nvSpPr>
+        <p:spPr>
+          <a:xfrm>
+            <a:off x="3291840" y="5669280"/>
+            <a:ext cx="914400" cy="640080"/>
+          </a:xfrm>
+          <a:prstGeom prst="rect">
+            <a:avLst/>
+          </a:prstGeom>
+          <a:noFill/>
+        </p:spPr>
+        <p:txBody>
+          <a:bodyPr wrap="square">
+            <a:spAutoFit/>
+          </a:bodyPr>
+          <a:lstStyle/>
+          <a:p>
+            <a:pPr>
+              <a:defRPr sz="1300">
+                <a:solidFill>
+                  <a:srgbClr val="CBD5E1"/>
+                </a:solidFill>
+                <a:latin typeface="Microsoft JhengHei"/>
+              </a:defRPr>
+            </a:pPr>
+            <a:r>
+              <a:t>RPi</a:t>
+            </a:r>
+          </a:p>
+        </p:txBody>
+      </p:sp>
+      <p:sp>
+        <p:nvSpPr>
+          <p:cNvPr id="43" name="TextBox 42"/>
+          <p:cNvSpPr txBox="1"/>
+          <p:nvPr/>
+        </p:nvSpPr>
+        <p:spPr>
+          <a:xfrm>
+            <a:off x="4206240" y="5669280"/>
+            <a:ext cx="1097280" cy="640080"/>
+          </a:xfrm>
+          <a:prstGeom prst="rect">
+            <a:avLst/>
+          </a:prstGeom>
+          <a:noFill/>
+        </p:spPr>
+        <p:txBody>
+          <a:bodyPr wrap="square">
+            <a:spAutoFit/>
+          </a:bodyPr>
+          <a:lstStyle/>
+          <a:p>
+            <a:pPr>
+              <a:defRPr sz="1300">
+                <a:solidFill>
+                  <a:srgbClr val="CBD5E1"/>
+                </a:solidFill>
+                <a:latin typeface="Microsoft JhengHei"/>
+              </a:defRPr>
+            </a:pPr>
+            <a:r>
+              <a:t>Dashboard</a:t>
+            </a:r>
+          </a:p>
+        </p:txBody>
+      </p:sp>
+      <p:sp>
+        <p:nvSpPr>
+          <p:cNvPr id="44" name="TextBox 43"/>
+          <p:cNvSpPr txBox="1"/>
+          <p:nvPr/>
+        </p:nvSpPr>
+        <p:spPr>
+          <a:xfrm>
+            <a:off x="5303520" y="5669280"/>
+            <a:ext cx="3200400" cy="640080"/>
+          </a:xfrm>
+          <a:prstGeom prst="rect">
+            <a:avLst/>
+          </a:prstGeom>
+          <a:noFill/>
+        </p:spPr>
+        <p:txBody>
+          <a:bodyPr wrap="square">
+            <a:spAutoFit/>
+          </a:bodyPr>
+          <a:lstStyle/>
+          <a:p>
+            <a:pPr>
+              <a:defRPr sz="1100">
+                <a:solidFill>
+                  <a:srgbClr val="CBD5E1"/>
+                </a:solidFill>
+                <a:latin typeface="Consolas"/>
+              </a:defRPr>
+            </a:pPr>
+            <a:r>
               <a:t>{"cpu_temp":45,</a:t>
             </a:r>
             <a:br/>
@@ -15401,13 +15603,13 @@
       </p:sp>
       <p:sp>
         <p:nvSpPr>
-          <p:cNvPr id="40" name="TextBox 39"/>
-          <p:cNvSpPr txBox="1"/>
-          <p:nvPr/>
-        </p:nvSpPr>
-        <p:spPr>
-          <a:xfrm>
-            <a:off x="8503920" y="5532120"/>
+          <p:cNvPr id="45" name="TextBox 44"/>
+          <p:cNvSpPr txBox="1"/>
+          <p:nvPr/>
+        </p:nvSpPr>
+        <p:spPr>
+          <a:xfrm>
+            <a:off x="8503920" y="5669280"/>
             <a:ext cx="1371600" cy="640080"/>
           </a:xfrm>
           <a:prstGeom prst="rect">
@@ -15689,7 +15891,7 @@
                 </a:solidFill>
                 <a:latin typeface="Microsoft JhengHei"/>
               </a:rPr>
-              <a:t>USB Webcam — 影像擷取（OpenCV）</a:t>
+              <a:t>USB Webcam (Logitech C270) — 影像擷取</a:t>
             </a:r>
           </a:p>
           <a:p>
@@ -15714,7 +15916,7 @@
                 </a:solidFill>
                 <a:latin typeface="Microsoft JhengHei"/>
               </a:rPr>
-              <a:t>PIR 紅外線感測器（HW-456 SR505）— GPIO 17</a:t>
+              <a:t>OpenCV DNN + MobileNet SSD 人形偵測</a:t>
             </a:r>
           </a:p>
           <a:p>
@@ -15797,7 +15999,7 @@
                 </a:solidFill>
                 <a:latin typeface="Consolas"/>
               </a:rPr>
-              <a:t>PIR 接線：</a:t>
+              <a:t>無需 GPIO 感測器</a:t>
             </a:r>
           </a:p>
           <a:p>
@@ -15813,7 +16015,7 @@
                 </a:solidFill>
                 <a:latin typeface="Consolas"/>
               </a:rPr>
-              <a:t>  OUT → GPIO 17</a:t>
+              <a:t>PIR 觸發訊號由 ESP32</a:t>
             </a:r>
           </a:p>
           <a:p>
@@ -15829,23 +16031,7 @@
                 </a:solidFill>
                 <a:latin typeface="Consolas"/>
               </a:rPr>
-              <a:t>  GND → GND</a:t>
-            </a:r>
-          </a:p>
-          <a:p>
-            <a:pPr>
-              <a:spcAft>
-                <a:spcPts val="200"/>
-              </a:spcAft>
-            </a:pPr>
-            <a:r>
-              <a:rPr sz="1200">
-                <a:solidFill>
-                  <a:srgbClr val="4ADE80"/>
-                </a:solidFill>
-                <a:latin typeface="Consolas"/>
-              </a:rPr>
-              <a:t>  VCC → 5V</a:t>
+              <a:t>透過 MQTT 遠端傳送</a:t>
             </a:r>
           </a:p>
         </p:txBody>
@@ -15974,7 +16160,7 @@
                 </a:solidFill>
                 <a:latin typeface="Microsoft JhengHei"/>
               </a:rPr>
-              <a:t>ESP32-WROOM-32 — 照明主控</a:t>
+              <a:t>ESP32-WROOM-32 — 感測 + 照明主控</a:t>
             </a:r>
           </a:p>
           <a:p>
@@ -15999,7 +16185,7 @@
                 </a:solidFill>
                 <a:latin typeface="Microsoft JhengHei"/>
               </a:rPr>
-              <a:t>光敏電阻（LDR）— GPIO 34（ADC）</a:t>
+              <a:t>PIR 紅外線感測器 (SR505) — GPIO 27</a:t>
             </a:r>
           </a:p>
           <a:p>
@@ -16024,7 +16210,7 @@
                 </a:solidFill>
                 <a:latin typeface="Microsoft JhengHei"/>
               </a:rPr>
-              <a:t>LED — GPIO 2</a:t>
+              <a:t>光敏電阻（LDR）— GPIO 34（ADC）</a:t>
             </a:r>
           </a:p>
           <a:p>
@@ -16049,6 +16235,31 @@
                 </a:solidFill>
                 <a:latin typeface="Microsoft JhengHei"/>
               </a:rPr>
+              <a:t>LED — GPIO 2</a:t>
+            </a:r>
+          </a:p>
+          <a:p>
+            <a:pPr>
+              <a:spcAft>
+                <a:spcPts val="800"/>
+              </a:spcAft>
+            </a:pPr>
+            <a:r>
+              <a:rPr sz="1300">
+                <a:solidFill>
+                  <a:srgbClr val="4ADE80"/>
+                </a:solidFill>
+                <a:latin typeface="Microsoft JhengHei"/>
+              </a:rPr>
+              <a:t>●  </a:t>
+            </a:r>
+            <a:r>
+              <a:rPr sz="1500">
+                <a:solidFill>
+                  <a:srgbClr val="FFFFFF"/>
+                </a:solidFill>
+                <a:latin typeface="Microsoft JhengHei"/>
+              </a:rPr>
               <a:t>供電：USB（獨立運作）</a:t>
             </a:r>
           </a:p>
@@ -16062,7 +16273,7 @@
         </p:nvSpPr>
         <p:spPr>
           <a:xfrm>
-            <a:off x="6675120" y="4114800"/>
+            <a:off x="6675120" y="4389120"/>
             <a:ext cx="4754880" cy="1371600"/>
           </a:xfrm>
           <a:prstGeom prst="roundRect">
@@ -16101,13 +16312,13 @@
               </a:spcAft>
             </a:pPr>
             <a:r>
-              <a:rPr sz="1200">
+              <a:rPr sz="1100">
                 <a:solidFill>
                   <a:srgbClr val="4ADE80"/>
                 </a:solidFill>
                 <a:latin typeface="Consolas"/>
               </a:rPr>
-              <a:t>LDR 接線：</a:t>
+              <a:t>PIR：OUT→GPIO 27, VCC→5V, GND→GND</a:t>
             </a:r>
           </a:p>
           <a:p>
@@ -16117,13 +16328,13 @@
               </a:spcAft>
             </a:pPr>
             <a:r>
-              <a:rPr sz="1200">
+              <a:rPr sz="1100">
                 <a:solidFill>
                   <a:srgbClr val="4ADE80"/>
                 </a:solidFill>
                 <a:latin typeface="Consolas"/>
               </a:rPr>
-              <a:t>  一端 → 3.3V</a:t>
+              <a:t>LDR：一端→3.3V, 另一端→GPIO 34+10K</a:t>
             </a:r>
           </a:p>
           <a:p>
@@ -16133,61 +16344,13 @@
               </a:spcAft>
             </a:pPr>
             <a:r>
-              <a:rPr sz="1200">
+              <a:rPr sz="1100">
                 <a:solidFill>
                   <a:srgbClr val="4ADE80"/>
                 </a:solidFill>
                 <a:latin typeface="Consolas"/>
               </a:rPr>
-              <a:t>  另一端 → GPIO 34 + 10K 下拉電阻</a:t>
-            </a:r>
-          </a:p>
-          <a:p>
-            <a:pPr>
-              <a:spcAft>
-                <a:spcPts val="200"/>
-              </a:spcAft>
-            </a:pPr>
-            <a:r>
-              <a:rPr sz="1200">
-                <a:solidFill>
-                  <a:srgbClr val="4ADE80"/>
-                </a:solidFill>
-                <a:latin typeface="Consolas"/>
-              </a:rPr>
-              <a:t>LED 接線：</a:t>
-            </a:r>
-          </a:p>
-          <a:p>
-            <a:pPr>
-              <a:spcAft>
-                <a:spcPts val="200"/>
-              </a:spcAft>
-            </a:pPr>
-            <a:r>
-              <a:rPr sz="1200">
-                <a:solidFill>
-                  <a:srgbClr val="4ADE80"/>
-                </a:solidFill>
-                <a:latin typeface="Consolas"/>
-              </a:rPr>
-              <a:t>  長腳 → GPIO 2（經電阻）</a:t>
-            </a:r>
-          </a:p>
-          <a:p>
-            <a:pPr>
-              <a:spcAft>
-                <a:spcPts val="200"/>
-              </a:spcAft>
-            </a:pPr>
-            <a:r>
-              <a:rPr sz="1200">
-                <a:solidFill>
-                  <a:srgbClr val="4ADE80"/>
-                </a:solidFill>
-                <a:latin typeface="Consolas"/>
-              </a:rPr>
-              <a:t>  短腳 → GND</a:t>
+              <a:t>LED：長腳→GPIO 2（經電阻）, 短腳→GND</a:t>
             </a:r>
           </a:p>
         </p:txBody>
@@ -16481,7 +16644,7 @@
               </a:defRPr>
             </a:pPr>
             <a:r>
-              <a:t>OpenCV</a:t>
+              <a:t>OpenCV DNN</a:t>
             </a:r>
           </a:p>
         </p:txBody>
@@ -16517,7 +16680,7 @@
               </a:defRPr>
             </a:pPr>
             <a:r>
-              <a:t>HOG+SVM 人形偵測</a:t>
+              <a:t>MobileNet SSD 人形偵測</a:t>
             </a:r>
           </a:p>
         </p:txBody>
@@ -16553,7 +16716,7 @@
               </a:defRPr>
             </a:pPr>
             <a:r>
-              <a:t>paho-mqtt</a:t>
+              <a:t>paho-mqtt v2</a:t>
             </a:r>
           </a:p>
         </p:txBody>
@@ -16625,7 +16788,7 @@
               </a:defRPr>
             </a:pPr>
             <a:r>
-              <a:t>RPi.GPIO</a:t>
+              <a:t>requests</a:t>
             </a:r>
           </a:p>
         </p:txBody>
@@ -16661,7 +16824,7 @@
               </a:defRPr>
             </a:pPr>
             <a:r>
-              <a:t>GPIO 控制</a:t>
+              <a:t>Discord Webhook</a:t>
             </a:r>
           </a:p>
         </p:txBody>
@@ -16697,7 +16860,7 @@
               </a:defRPr>
             </a:pPr>
             <a:r>
-              <a:t>requests</a:t>
+              <a:t>threading</a:t>
             </a:r>
           </a:p>
         </p:txBody>
@@ -16733,7 +16896,7 @@
               </a:defRPr>
             </a:pPr>
             <a:r>
-              <a:t>Discord Webhook</a:t>
+              <a:t>多線程安防 + 狀態</a:t>
             </a:r>
           </a:p>
         </p:txBody>
@@ -17569,7 +17732,7 @@
               </a:defRPr>
             </a:pPr>
             <a:r>
-              <a:t>main.py → security_loop()</a:t>
+              <a:t>main.py → security_loop()（MQTT 觸發）</a:t>
             </a:r>
           </a:p>
         </p:txBody>
@@ -17670,7 +17833,7 @@
                 </a:solidFill>
                 <a:latin typeface="Consolas"/>
               </a:rPr>
-              <a:t>def security_loop():</a:t>
+              <a:t>pir_triggered = threading.Event()</a:t>
             </a:r>
           </a:p>
           <a:p>
@@ -17686,7 +17849,7 @@
                 </a:solidFill>
                 <a:latin typeface="Consolas"/>
               </a:rPr>
-              <a:t>    pir.setup()</a:t>
+              <a:t/>
             </a:r>
           </a:p>
           <a:p>
@@ -17702,7 +17865,7 @@
                 </a:solidFill>
                 <a:latin typeface="Consolas"/>
               </a:rPr>
-              <a:t>    capture.init()</a:t>
+              <a:t>def on_pir_trigger(topic, payload):</a:t>
             </a:r>
           </a:p>
           <a:p>
@@ -17718,7 +17881,7 @@
                 </a:solidFill>
                 <a:latin typeface="Consolas"/>
               </a:rPr>
-              <a:t>    last_trigger_time = 0</a:t>
+              <a:t>    pir_triggered.set()  # ESP32 PIR 觸發</a:t>
             </a:r>
           </a:p>
           <a:p>
@@ -17734,7 +17897,7 @@
                 </a:solidFill>
                 <a:latin typeface="Consolas"/>
               </a:rPr>
-              <a:t>    COOLDOWN = 15</a:t>
+              <a:t/>
             </a:r>
           </a:p>
           <a:p>
@@ -17750,7 +17913,7 @@
                 </a:solidFill>
                 <a:latin typeface="Consolas"/>
               </a:rPr>
-              <a:t/>
+              <a:t>def security_loop():</a:t>
             </a:r>
           </a:p>
           <a:p>
@@ -17766,7 +17929,7 @@
                 </a:solidFill>
                 <a:latin typeface="Consolas"/>
               </a:rPr>
-              <a:t>    while running:</a:t>
+              <a:t>    capture.init()</a:t>
             </a:r>
           </a:p>
           <a:p>
@@ -17782,7 +17945,7 @@
                 </a:solidFill>
                 <a:latin typeface="Consolas"/>
               </a:rPr>
-              <a:t>        if pir.detect():</a:t>
+              <a:t>    COOLDOWN = 15</a:t>
             </a:r>
           </a:p>
           <a:p>
@@ -17798,7 +17961,7 @@
                 </a:solidFill>
                 <a:latin typeface="Consolas"/>
               </a:rPr>
-              <a:t>            now = time.time()</a:t>
+              <a:t/>
             </a:r>
           </a:p>
           <a:p>
@@ -17814,7 +17977,7 @@
                 </a:solidFill>
                 <a:latin typeface="Consolas"/>
               </a:rPr>
-              <a:t>            if now - last_trigger_time &lt; COOLDOWN:</a:t>
+              <a:t>    while running:</a:t>
             </a:r>
           </a:p>
           <a:p>
@@ -17830,7 +17993,7 @@
                 </a:solidFill>
                 <a:latin typeface="Consolas"/>
               </a:rPr>
-              <a:t>                time.sleep(1)</a:t>
+              <a:t>        if pir_triggered.wait(timeout=1):</a:t>
             </a:r>
           </a:p>
           <a:p>
@@ -17846,7 +18009,7 @@
                 </a:solidFill>
                 <a:latin typeface="Consolas"/>
               </a:rPr>
-              <a:t>                continue</a:t>
+              <a:t>            pir_triggered.clear()</a:t>
             </a:r>
           </a:p>
           <a:p>
@@ -17878,7 +18041,7 @@
                 </a:solidFill>
                 <a:latin typeface="Consolas"/>
               </a:rPr>
-              <a:t>            last_trigger_time = now</a:t>
+              <a:t>            # 多幀驗證：連拍 3 張</a:t>
             </a:r>
           </a:p>
           <a:p>
@@ -17894,7 +18057,7 @@
                 </a:solidFill>
                 <a:latin typeface="Consolas"/>
               </a:rPr>
-              <a:t>            frame = capture.capture_frame()</a:t>
+              <a:t>            detect_count = 0</a:t>
             </a:r>
           </a:p>
           <a:p>
@@ -17910,7 +18073,7 @@
                 </a:solidFill>
                 <a:latin typeface="Consolas"/>
               </a:rPr>
-              <a:t>            detected, boxes, confidence = detector.detect_person(frame)</a:t>
+              <a:t>            for attempt in range(3):</a:t>
             </a:r>
           </a:p>
           <a:p>
@@ -17926,7 +18089,7 @@
                 </a:solidFill>
                 <a:latin typeface="Consolas"/>
               </a:rPr>
-              <a:t/>
+              <a:t>                frame = capture.capture_frame()</a:t>
             </a:r>
           </a:p>
           <a:p>
@@ -17942,7 +18105,7 @@
                 </a:solidFill>
                 <a:latin typeface="Consolas"/>
               </a:rPr>
-              <a:t>            if detected:</a:t>
+              <a:t>                detected, boxes, conf = \</a:t>
             </a:r>
           </a:p>
           <a:p>
@@ -17958,7 +18121,7 @@
                 </a:solidFill>
                 <a:latin typeface="Consolas"/>
               </a:rPr>
-              <a:t>                frame = detector.draw_boxes(frame, boxes)</a:t>
+              <a:t>                    detector.detect_person(frame)</a:t>
             </a:r>
           </a:p>
           <a:p>
@@ -17974,7 +18137,7 @@
                 </a:solidFill>
                 <a:latin typeface="Consolas"/>
               </a:rPr>
-              <a:t>                img_base64 = capture.capture_to_base64(frame)</a:t>
+              <a:t>                if detected:</a:t>
             </a:r>
           </a:p>
           <a:p>
@@ -17990,7 +18153,7 @@
                 </a:solidFill>
                 <a:latin typeface="Consolas"/>
               </a:rPr>
-              <a:t>                capture.save_snapshot(frame)</a:t>
+              <a:t>                    detect_count += 1</a:t>
             </a:r>
           </a:p>
           <a:p>
@@ -18006,7 +18169,7 @@
                 </a:solidFill>
                 <a:latin typeface="Consolas"/>
               </a:rPr>
-              <a:t/>
+              <a:t>                time.sleep(0.3)</a:t>
             </a:r>
           </a:p>
           <a:p>
@@ -18022,7 +18185,7 @@
                 </a:solidFill>
                 <a:latin typeface="Consolas"/>
               </a:rPr>
-              <a:t>                mqtt_client.publish("home/security/alert", {</a:t>
+              <a:t/>
             </a:r>
           </a:p>
           <a:p>
@@ -18038,7 +18201,7 @@
                 </a:solidFill>
                 <a:latin typeface="Consolas"/>
               </a:rPr>
-              <a:t>                    "timestamp": timestamp,</a:t>
+              <a:t>            if detect_count &gt;= 2:  # 2/3 通過</a:t>
             </a:r>
           </a:p>
           <a:p>
@@ -18054,7 +18217,7 @@
                 </a:solidFill>
                 <a:latin typeface="Consolas"/>
               </a:rPr>
-              <a:t>                    "confidence": round(confidence, 2),</a:t>
+              <a:t>                mqtt_client.publish(TOPIC_ALERT, {...})</a:t>
             </a:r>
           </a:p>
           <a:p>
@@ -18070,7 +18233,7 @@
                 </a:solidFill>
                 <a:latin typeface="Consolas"/>
               </a:rPr>
-              <a:t>                })</a:t>
+              <a:t>                discord_bot.send_alert(</a:t>
             </a:r>
           </a:p>
           <a:p>
@@ -18086,7 +18249,7 @@
                 </a:solidFill>
                 <a:latin typeface="Consolas"/>
               </a:rPr>
-              <a:t>                discord_bot.send_alert(</a:t>
+              <a:t>                    f"偵測到入侵！信心值: {conf:.0%}",</a:t>
             </a:r>
           </a:p>
           <a:p>
@@ -18102,7 +18265,7 @@
                 </a:solidFill>
                 <a:latin typeface="Consolas"/>
               </a:rPr>
-              <a:t>                    f"偵測到入侵！信心值: {confidence:.0%}",</a:t>
+              <a:t>                    image_base64=img_base64)</a:t>
             </a:r>
           </a:p>
           <a:p>
@@ -18118,23 +18281,7 @@
                 </a:solidFill>
                 <a:latin typeface="Consolas"/>
               </a:rPr>
-              <a:t>                    image_base64=img_base64,</a:t>
-            </a:r>
-          </a:p>
-          <a:p>
-            <a:pPr>
-              <a:spcAft>
-                <a:spcPts val="200"/>
-              </a:spcAft>
-            </a:pPr>
-            <a:r>
-              <a:rPr sz="1100">
-                <a:solidFill>
-                  <a:srgbClr val="4ADE80"/>
-                </a:solidFill>
-                <a:latin typeface="Consolas"/>
-              </a:rPr>
-              <a:t>                )</a:t>
+              <a:t>            time.sleep(COOLDOWN)</a:t>
             </a:r>
           </a:p>
         </p:txBody>
@@ -18158,7 +18305,7 @@
           </a:solidFill>
           <a:ln w="19050">
             <a:solidFill>
-              <a:srgbClr val="38BDF8"/>
+              <a:srgbClr val="4ADE80"/>
             </a:solidFill>
           </a:ln>
         </p:spPr>
@@ -18209,13 +18356,13 @@
             <a:pPr algn="l">
               <a:defRPr sz="1400" b="1">
                 <a:solidFill>
-                  <a:srgbClr val="38BDF8"/>
-                </a:solidFill>
-                <a:latin typeface="Microsoft JhengHei"/>
-              </a:defRPr>
-            </a:pPr>
-            <a:r>
-              <a:t>PIR 觸發</a:t>
+                  <a:srgbClr val="4ADE80"/>
+                </a:solidFill>
+                <a:latin typeface="Microsoft JhengHei"/>
+              </a:defRPr>
+            </a:pPr>
+            <a:r>
+              <a:t>MQTT 觸發</a:t>
             </a:r>
           </a:p>
         </p:txBody>
@@ -18251,11 +18398,11 @@
               </a:defRPr>
             </a:pPr>
             <a:r>
-              <a:t>GPIO 17 偵測到高電位</a:t>
+              <a:t>ESP32 PIR 偵測移動</a:t>
             </a:r>
             <a:br/>
             <a:r>
-              <a:t>表示有人體移動</a:t>
+              <a:t>透過 MQTT 遠端觸發</a:t>
             </a:r>
           </a:p>
         </p:txBody>
@@ -18336,7 +18483,7 @@
               </a:defRPr>
             </a:pPr>
             <a:r>
-              <a:t>冷卻機制</a:t>
+              <a:t>多幀驗證</a:t>
             </a:r>
           </a:p>
         </p:txBody>
@@ -18372,11 +18519,11 @@
               </a:defRPr>
             </a:pPr>
             <a:r>
-              <a:t>15 秒內不重複觸發</a:t>
+              <a:t>連拍 3 張照片</a:t>
             </a:r>
             <a:br/>
             <a:r>
-              <a:t>防止連續誤報</a:t>
+              <a:t>至少 2/3 通過才警報</a:t>
             </a:r>
           </a:p>
         </p:txBody>
@@ -18457,7 +18604,7 @@
               </a:defRPr>
             </a:pPr>
             <a:r>
-              <a:t>OpenCV 辨識</a:t>
+              <a:t>MobileNet SSD</a:t>
             </a:r>
           </a:p>
         </p:txBody>
@@ -18493,11 +18640,11 @@
               </a:defRPr>
             </a:pPr>
             <a:r>
-              <a:t>HOG + SVM 演算法</a:t>
+              <a:t>深度學習模型</a:t>
             </a:r>
             <a:br/>
             <a:r>
-              <a:t>判斷是否為人形</a:t>
+              <a:t>精準人形偵測</a:t>
             </a:r>
           </a:p>
         </p:txBody>

--- a/AIoT_期末專題報告.pptx
+++ b/AIoT_期末專題報告.pptx
@@ -3119,8 +3119,8 @@
         </p:nvSpPr>
         <p:spPr>
           <a:xfrm>
-            <a:off x="731520" y="1371600"/>
-            <a:ext cx="10515600" cy="1097280"/>
+            <a:off x="457200" y="1645920"/>
+            <a:ext cx="11247120" cy="914400"/>
           </a:xfrm>
           <a:prstGeom prst="rect">
             <a:avLst/>
@@ -3155,8 +3155,8 @@
         </p:nvSpPr>
         <p:spPr>
           <a:xfrm>
-            <a:off x="731520" y="2560320"/>
-            <a:ext cx="10515600" cy="731520"/>
+            <a:off x="457200" y="2743200"/>
+            <a:ext cx="11247120" cy="548640"/>
           </a:xfrm>
           <a:prstGeom prst="rect">
             <a:avLst/>
@@ -3191,8 +3191,8 @@
         </p:nvSpPr>
         <p:spPr>
           <a:xfrm>
-            <a:off x="3840480" y="3474720"/>
-            <a:ext cx="1371600" cy="411480"/>
+            <a:off x="3657600" y="3657600"/>
+            <a:ext cx="1554480" cy="457200"/>
           </a:xfrm>
           <a:prstGeom prst="roundRect">
             <a:avLst/>
@@ -3245,8 +3245,8 @@
         </p:nvSpPr>
         <p:spPr>
           <a:xfrm>
-            <a:off x="5486400" y="3474720"/>
-            <a:ext cx="1371600" cy="411480"/>
+            <a:off x="5486400" y="3657600"/>
+            <a:ext cx="1554480" cy="457200"/>
           </a:xfrm>
           <a:prstGeom prst="roundRect">
             <a:avLst/>
@@ -3299,8 +3299,8 @@
         </p:nvSpPr>
         <p:spPr>
           <a:xfrm>
-            <a:off x="7132320" y="3474720"/>
-            <a:ext cx="1371600" cy="411480"/>
+            <a:off x="7315200" y="3657600"/>
+            <a:ext cx="1554480" cy="457200"/>
           </a:xfrm>
           <a:prstGeom prst="roundRect">
             <a:avLst/>
@@ -3353,8 +3353,8 @@
         </p:nvSpPr>
         <p:spPr>
           <a:xfrm>
-            <a:off x="731520" y="5029200"/>
-            <a:ext cx="10515600" cy="457200"/>
+            <a:off x="457200" y="5303520"/>
+            <a:ext cx="11247120" cy="365760"/>
           </a:xfrm>
           <a:prstGeom prst="rect">
             <a:avLst/>
@@ -3430,7 +3430,7 @@
           <a:lstStyle/>
           <a:p>
             <a:pPr algn="l">
-              <a:defRPr sz="3200" b="1">
+              <a:defRPr sz="3000" b="1">
                 <a:solidFill>
                   <a:srgbClr val="FFFFFF"/>
                 </a:solidFill>
@@ -3451,7 +3451,7 @@
         </p:nvSpPr>
         <p:spPr>
           <a:xfrm>
-            <a:off x="731520" y="914400"/>
+            <a:off x="731520" y="868680"/>
             <a:ext cx="10058400" cy="365760"/>
           </a:xfrm>
           <a:prstGeom prst="rect">
@@ -3466,7 +3466,7 @@
           <a:lstStyle/>
           <a:p>
             <a:pPr algn="l">
-              <a:defRPr sz="1600" b="0">
+              <a:defRPr sz="1500" b="0">
                 <a:solidFill>
                   <a:srgbClr val="94A3B8"/>
                 </a:solidFill>
@@ -3487,8 +3487,8 @@
         </p:nvSpPr>
         <p:spPr>
           <a:xfrm>
-            <a:off x="731520" y="1325880"/>
-            <a:ext cx="1828800" cy="38100"/>
+            <a:off x="731520" y="1280160"/>
+            <a:ext cx="1645920" cy="38100"/>
           </a:xfrm>
           <a:prstGeom prst="rect">
             <a:avLst/>
@@ -3530,8 +3530,8 @@
         </p:nvSpPr>
         <p:spPr>
           <a:xfrm>
-            <a:off x="457200" y="1554480"/>
-            <a:ext cx="6858000" cy="5029200"/>
+            <a:off x="457200" y="1463040"/>
+            <a:ext cx="7132320" cy="4937760"/>
           </a:xfrm>
           <a:prstGeom prst="roundRect">
             <a:avLst/>
@@ -3560,7 +3560,7 @@
           </a:fontRef>
         </p:style>
         <p:txBody>
-          <a:bodyPr rtlCol="0" anchor="ctr" wrap="square" lIns="152400" rIns="152400" tIns="101600" bIns="101600"/>
+          <a:bodyPr rtlCol="0" anchor="ctr" wrap="square" lIns="177800" rIns="177800" tIns="127000" bIns="127000"/>
           <a:lstStyle/>
           <a:p>
             <a:pPr algn="ctr">
@@ -3623,7 +3623,7 @@
                 </a:solidFill>
                 <a:latin typeface="Consolas"/>
               </a:rPr>
-              <a:t>ldr.atten(ADC.ATTN_11DB)  # 0-3.3V, ADC 0-4095</a:t>
+              <a:t>ldr.atten(ADC.ATTN_11DB)  # 0-3.3V</a:t>
             </a:r>
           </a:p>
           <a:p>
@@ -3719,7 +3719,7 @@
                 </a:solidFill>
                 <a:latin typeface="Consolas"/>
               </a:rPr>
-              <a:t/>
+              <a:t>    now = time.time()</a:t>
             </a:r>
           </a:p>
           <a:p>
@@ -3735,7 +3735,7 @@
                 </a:solidFill>
                 <a:latin typeface="Consolas"/>
               </a:rPr>
-              <a:t>    # 手動覆蓋超時，恢復自動</a:t>
+              <a:t/>
             </a:r>
           </a:p>
           <a:p>
@@ -3751,7 +3751,7 @@
                 </a:solidFill>
                 <a:latin typeface="Consolas"/>
               </a:rPr>
-              <a:t>    if manual_override and \</a:t>
+              <a:t>    # 手動覆蓋超時 → 恢復自動</a:t>
             </a:r>
           </a:p>
           <a:p>
@@ -3767,7 +3767,7 @@
                 </a:solidFill>
                 <a:latin typeface="Consolas"/>
               </a:rPr>
-              <a:t>       (now - manual_override_time &gt; 60):</a:t>
+              <a:t>    if manual_override and \</a:t>
             </a:r>
           </a:p>
           <a:p>
@@ -3783,7 +3783,7 @@
                 </a:solidFill>
                 <a:latin typeface="Consolas"/>
               </a:rPr>
-              <a:t>        manual_override = False</a:t>
+              <a:t>       (now - override_time &gt; 60):</a:t>
             </a:r>
           </a:p>
           <a:p>
@@ -3799,7 +3799,7 @@
                 </a:solidFill>
                 <a:latin typeface="Consolas"/>
               </a:rPr>
-              <a:t/>
+              <a:t>        manual_override = False</a:t>
             </a:r>
           </a:p>
           <a:p>
@@ -3815,7 +3815,7 @@
                 </a:solidFill>
                 <a:latin typeface="Consolas"/>
               </a:rPr>
-              <a:t>    # 智慧照明（手動模式下跳過）</a:t>
+              <a:t/>
             </a:r>
           </a:p>
           <a:p>
@@ -3831,7 +3831,7 @@
                 </a:solidFill>
                 <a:latin typeface="Consolas"/>
               </a:rPr>
-              <a:t>    if not manual_override:</a:t>
+              <a:t>    # 智慧照明（手動模式下跳過）</a:t>
             </a:r>
           </a:p>
           <a:p>
@@ -3847,7 +3847,7 @@
                 </a:solidFill>
                 <a:latin typeface="Consolas"/>
               </a:rPr>
-              <a:t>        if pir_value == 1:</a:t>
+              <a:t>    if not manual_override:</a:t>
             </a:r>
           </a:p>
           <a:p>
@@ -3863,7 +3863,7 @@
                 </a:solidFill>
                 <a:latin typeface="Consolas"/>
               </a:rPr>
-              <a:t>            # 有人 + 暗 → 開燈（供攝影機夜間辨識）</a:t>
+              <a:t>        if pir_value == 1:</a:t>
             </a:r>
           </a:p>
           <a:p>
@@ -3879,7 +3879,7 @@
                 </a:solidFill>
                 <a:latin typeface="Consolas"/>
               </a:rPr>
-              <a:t>            if ldr_value &lt; LIGHT_THRESHOLD:</a:t>
+              <a:t>            if ldr_value &lt; THRESHOLD:</a:t>
             </a:r>
           </a:p>
           <a:p>
@@ -3911,7 +3911,7 @@
                 </a:solidFill>
                 <a:latin typeface="Consolas"/>
               </a:rPr>
-              <a:t>        else:</a:t>
+              <a:t>                # 有人+暗 → 開燈</a:t>
             </a:r>
           </a:p>
           <a:p>
@@ -3927,7 +3927,7 @@
                 </a:solidFill>
                 <a:latin typeface="Consolas"/>
               </a:rPr>
-              <a:t>            set_led(client, False)  # 沒人 → 關燈</a:t>
+              <a:t>        else:</a:t>
             </a:r>
           </a:p>
           <a:p>
@@ -3943,7 +3943,7 @@
                 </a:solidFill>
                 <a:latin typeface="Consolas"/>
               </a:rPr>
-              <a:t/>
+              <a:t>            set_led(client, False)</a:t>
             </a:r>
           </a:p>
           <a:p>
@@ -3959,7 +3959,7 @@
                 </a:solidFill>
                 <a:latin typeface="Consolas"/>
               </a:rPr>
-              <a:t>    # PIR 觸發 → MQTT 通知 RPi 拍照</a:t>
+              <a:t>            # 沒人 → 關燈</a:t>
             </a:r>
           </a:p>
           <a:p>
@@ -3975,7 +3975,7 @@
                 </a:solidFill>
                 <a:latin typeface="Consolas"/>
               </a:rPr>
-              <a:t>    if pir_value == 1 and \</a:t>
+              <a:t/>
             </a:r>
           </a:p>
           <a:p>
@@ -3991,7 +3991,7 @@
                 </a:solidFill>
                 <a:latin typeface="Consolas"/>
               </a:rPr>
-              <a:t>       (now - last_pir_time &gt;= PIR_COOLDOWN):</a:t>
+              <a:t>    # PIR → MQTT 通知 RPi 拍照</a:t>
             </a:r>
           </a:p>
           <a:p>
@@ -4007,7 +4007,7 @@
                 </a:solidFill>
                 <a:latin typeface="Consolas"/>
               </a:rPr>
-              <a:t>        client.publish("home/security/pir",</a:t>
+              <a:t>    if pir_value == 1 and \</a:t>
             </a:r>
           </a:p>
           <a:p>
@@ -4023,7 +4023,55 @@
                 </a:solidFill>
                 <a:latin typeface="Consolas"/>
               </a:rPr>
-              <a:t>            json.dumps({"triggered": True}))</a:t>
+              <a:t>       (now - last_pir &gt;= COOLDOWN):</a:t>
+            </a:r>
+          </a:p>
+          <a:p>
+            <a:pPr>
+              <a:spcAft>
+                <a:spcPts val="200"/>
+              </a:spcAft>
+            </a:pPr>
+            <a:r>
+              <a:rPr sz="1100">
+                <a:solidFill>
+                  <a:srgbClr val="4ADE80"/>
+                </a:solidFill>
+                <a:latin typeface="Consolas"/>
+              </a:rPr>
+              <a:t>        client.publish(</a:t>
+            </a:r>
+          </a:p>
+          <a:p>
+            <a:pPr>
+              <a:spcAft>
+                <a:spcPts val="200"/>
+              </a:spcAft>
+            </a:pPr>
+            <a:r>
+              <a:rPr sz="1100">
+                <a:solidFill>
+                  <a:srgbClr val="4ADE80"/>
+                </a:solidFill>
+                <a:latin typeface="Consolas"/>
+              </a:rPr>
+              <a:t>            "home/security/pir",</a:t>
+            </a:r>
+          </a:p>
+          <a:p>
+            <a:pPr>
+              <a:spcAft>
+                <a:spcPts val="200"/>
+              </a:spcAft>
+            </a:pPr>
+            <a:r>
+              <a:rPr sz="1100">
+                <a:solidFill>
+                  <a:srgbClr val="4ADE80"/>
+                </a:solidFill>
+                <a:latin typeface="Consolas"/>
+              </a:rPr>
+              <a:t>            '{"triggered":true}')</a:t>
             </a:r>
           </a:p>
         </p:txBody>
@@ -4036,8 +4084,8 @@
         </p:nvSpPr>
         <p:spPr>
           <a:xfrm>
-            <a:off x="7772400" y="1645920"/>
-            <a:ext cx="3931920" cy="1005840"/>
+            <a:off x="8046720" y="1554480"/>
+            <a:ext cx="3657600" cy="1005840"/>
           </a:xfrm>
           <a:prstGeom prst="roundRect">
             <a:avLst/>
@@ -4081,8 +4129,8 @@
         </p:nvSpPr>
         <p:spPr>
           <a:xfrm>
-            <a:off x="8046720" y="1737360"/>
-            <a:ext cx="3383280" cy="274320"/>
+            <a:off x="8321040" y="1645920"/>
+            <a:ext cx="3200400" cy="274320"/>
           </a:xfrm>
           <a:prstGeom prst="rect">
             <a:avLst/>
@@ -4096,7 +4144,7 @@
           <a:lstStyle/>
           <a:p>
             <a:pPr algn="l">
-              <a:defRPr sz="1400" b="1">
+              <a:defRPr sz="1300" b="1">
                 <a:solidFill>
                   <a:srgbClr val="4ADE80"/>
                 </a:solidFill>
@@ -4117,8 +4165,8 @@
         </p:nvSpPr>
         <p:spPr>
           <a:xfrm>
-            <a:off x="8046720" y="2057400"/>
-            <a:ext cx="3383280" cy="548640"/>
+            <a:off x="8321040" y="1920240"/>
+            <a:ext cx="3200400" cy="548640"/>
           </a:xfrm>
           <a:prstGeom prst="rect">
             <a:avLst/>
@@ -4132,7 +4180,7 @@
           <a:lstStyle/>
           <a:p>
             <a:pPr algn="l">
-              <a:defRPr sz="1200" b="0">
+              <a:defRPr sz="1100" b="0">
                 <a:solidFill>
                   <a:srgbClr val="CBD5E1"/>
                 </a:solidFill>
@@ -4144,7 +4192,7 @@
             </a:r>
             <a:br/>
             <a:r>
-              <a:t>觸發 MQTT 通知 RPi</a:t>
+              <a:t>觸發 MQTT 通知 RPi 拍照</a:t>
             </a:r>
           </a:p>
         </p:txBody>
@@ -4157,8 +4205,8 @@
         </p:nvSpPr>
         <p:spPr>
           <a:xfrm>
-            <a:off x="7772400" y="2834640"/>
-            <a:ext cx="3931920" cy="1005840"/>
+            <a:off x="8046720" y="2743200"/>
+            <a:ext cx="3657600" cy="1005840"/>
           </a:xfrm>
           <a:prstGeom prst="roundRect">
             <a:avLst/>
@@ -4202,8 +4250,8 @@
         </p:nvSpPr>
         <p:spPr>
           <a:xfrm>
-            <a:off x="8046720" y="2926080"/>
-            <a:ext cx="3383280" cy="274320"/>
+            <a:off x="8321040" y="2834640"/>
+            <a:ext cx="3200400" cy="274320"/>
           </a:xfrm>
           <a:prstGeom prst="rect">
             <a:avLst/>
@@ -4217,7 +4265,7 @@
           <a:lstStyle/>
           <a:p>
             <a:pPr algn="l">
-              <a:defRPr sz="1400" b="1">
+              <a:defRPr sz="1300" b="1">
                 <a:solidFill>
                   <a:srgbClr val="FBBF24"/>
                 </a:solidFill>
@@ -4238,8 +4286,8 @@
         </p:nvSpPr>
         <p:spPr>
           <a:xfrm>
-            <a:off x="8046720" y="3246120"/>
-            <a:ext cx="3383280" cy="548640"/>
+            <a:off x="8321040" y="3108960"/>
+            <a:ext cx="3200400" cy="548640"/>
           </a:xfrm>
           <a:prstGeom prst="rect">
             <a:avLst/>
@@ -4253,7 +4301,7 @@
           <a:lstStyle/>
           <a:p>
             <a:pPr algn="l">
-              <a:defRPr sz="1200" b="0">
+              <a:defRPr sz="1100" b="0">
                 <a:solidFill>
                   <a:srgbClr val="CBD5E1"/>
                 </a:solidFill>
@@ -4261,11 +4309,11 @@
               </a:defRPr>
             </a:pPr>
             <a:r>
-              <a:t>有人+暗→開燈</a:t>
+              <a:t>有人 + 暗 → 開燈</a:t>
             </a:r>
             <a:br/>
             <a:r>
-              <a:t>無人→關燈（省電）</a:t>
+              <a:t>無人 → 關燈（省電）</a:t>
             </a:r>
           </a:p>
         </p:txBody>
@@ -4278,8 +4326,8 @@
         </p:nvSpPr>
         <p:spPr>
           <a:xfrm>
-            <a:off x="7772400" y="4023360"/>
-            <a:ext cx="3931920" cy="1005840"/>
+            <a:off x="8046720" y="3931920"/>
+            <a:ext cx="3657600" cy="1005840"/>
           </a:xfrm>
           <a:prstGeom prst="roundRect">
             <a:avLst/>
@@ -4323,8 +4371,8 @@
         </p:nvSpPr>
         <p:spPr>
           <a:xfrm>
-            <a:off x="8046720" y="4114800"/>
-            <a:ext cx="3383280" cy="274320"/>
+            <a:off x="8321040" y="4023360"/>
+            <a:ext cx="3200400" cy="274320"/>
           </a:xfrm>
           <a:prstGeom prst="rect">
             <a:avLst/>
@@ -4338,7 +4386,7 @@
           <a:lstStyle/>
           <a:p>
             <a:pPr algn="l">
-              <a:defRPr sz="1400" b="1">
+              <a:defRPr sz="1300" b="1">
                 <a:solidFill>
                   <a:srgbClr val="A78BFA"/>
                 </a:solidFill>
@@ -4359,8 +4407,8 @@
         </p:nvSpPr>
         <p:spPr>
           <a:xfrm>
-            <a:off x="8046720" y="4434840"/>
-            <a:ext cx="3383280" cy="548640"/>
+            <a:off x="8321040" y="4297680"/>
+            <a:ext cx="3200400" cy="548640"/>
           </a:xfrm>
           <a:prstGeom prst="rect">
             <a:avLst/>
@@ -4374,7 +4422,7 @@
           <a:lstStyle/>
           <a:p>
             <a:pPr algn="l">
-              <a:defRPr sz="1200" b="0">
+              <a:defRPr sz="1100" b="0">
                 <a:solidFill>
                   <a:srgbClr val="CBD5E1"/>
                 </a:solidFill>
@@ -4386,7 +4434,7 @@
             </a:r>
             <a:br/>
             <a:r>
-              <a:t>暫停自動 60 秒</a:t>
+              <a:t>暫停自動模式 60 秒</a:t>
             </a:r>
           </a:p>
         </p:txBody>
@@ -4399,8 +4447,8 @@
         </p:nvSpPr>
         <p:spPr>
           <a:xfrm>
-            <a:off x="7772400" y="5212080"/>
-            <a:ext cx="3931920" cy="1005840"/>
+            <a:off x="8046720" y="5120640"/>
+            <a:ext cx="3657600" cy="1005840"/>
           </a:xfrm>
           <a:prstGeom prst="roundRect">
             <a:avLst/>
@@ -4444,8 +4492,8 @@
         </p:nvSpPr>
         <p:spPr>
           <a:xfrm>
-            <a:off x="8046720" y="5303520"/>
-            <a:ext cx="3383280" cy="274320"/>
+            <a:off x="8321040" y="5212080"/>
+            <a:ext cx="3200400" cy="274320"/>
           </a:xfrm>
           <a:prstGeom prst="rect">
             <a:avLst/>
@@ -4459,7 +4507,7 @@
           <a:lstStyle/>
           <a:p>
             <a:pPr algn="l">
-              <a:defRPr sz="1400" b="1">
+              <a:defRPr sz="1300" b="1">
                 <a:solidFill>
                   <a:srgbClr val="38BDF8"/>
                 </a:solidFill>
@@ -4467,7 +4515,7 @@
               </a:defRPr>
             </a:pPr>
             <a:r>
-              <a:t>MQTT 觸發</a:t>
+              <a:t>雙重角色</a:t>
             </a:r>
           </a:p>
         </p:txBody>
@@ -4480,8 +4528,8 @@
         </p:nvSpPr>
         <p:spPr>
           <a:xfrm>
-            <a:off x="8046720" y="5623560"/>
-            <a:ext cx="3383280" cy="548640"/>
+            <a:off x="8321040" y="5486400"/>
+            <a:ext cx="3200400" cy="548640"/>
           </a:xfrm>
           <a:prstGeom prst="rect">
             <a:avLst/>
@@ -4495,7 +4543,7 @@
           <a:lstStyle/>
           <a:p>
             <a:pPr algn="l">
-              <a:defRPr sz="1200" b="0">
+              <a:defRPr sz="1100" b="0">
                 <a:solidFill>
                   <a:srgbClr val="CBD5E1"/>
                 </a:solidFill>
@@ -4503,11 +4551,11 @@
               </a:defRPr>
             </a:pPr>
             <a:r>
-              <a:t>PIR 觸發通知 RPi</a:t>
+              <a:t>感測端 + 照明控制</a:t>
             </a:r>
             <a:br/>
             <a:r>
-              <a:t>遠端啟動攝影機拍照</a:t>
+              <a:t>單一 ESP32 完成</a:t>
             </a:r>
           </a:p>
         </p:txBody>
@@ -4561,7 +4609,7 @@
           <a:lstStyle/>
           <a:p>
             <a:pPr algn="l">
-              <a:defRPr sz="3200" b="1">
+              <a:defRPr sz="3000" b="1">
                 <a:solidFill>
                   <a:srgbClr val="FFFFFF"/>
                 </a:solidFill>
@@ -4582,7 +4630,7 @@
         </p:nvSpPr>
         <p:spPr>
           <a:xfrm>
-            <a:off x="731520" y="914400"/>
+            <a:off x="731520" y="868680"/>
             <a:ext cx="10058400" cy="365760"/>
           </a:xfrm>
           <a:prstGeom prst="rect">
@@ -4597,7 +4645,7 @@
           <a:lstStyle/>
           <a:p>
             <a:pPr algn="l">
-              <a:defRPr sz="1600" b="0">
+              <a:defRPr sz="1500" b="0">
                 <a:solidFill>
                   <a:srgbClr val="94A3B8"/>
                 </a:solidFill>
@@ -4618,8 +4666,8 @@
         </p:nvSpPr>
         <p:spPr>
           <a:xfrm>
-            <a:off x="731520" y="1325880"/>
-            <a:ext cx="1828800" cy="38100"/>
+            <a:off x="731520" y="1280160"/>
+            <a:ext cx="1645920" cy="38100"/>
           </a:xfrm>
           <a:prstGeom prst="rect">
             <a:avLst/>
@@ -4661,8 +4709,8 @@
         </p:nvSpPr>
         <p:spPr>
           <a:xfrm>
-            <a:off x="457200" y="1645920"/>
-            <a:ext cx="3474720" cy="1828800"/>
+            <a:off x="457200" y="1554480"/>
+            <a:ext cx="3520440" cy="1737360"/>
           </a:xfrm>
           <a:prstGeom prst="roundRect">
             <a:avLst/>
@@ -4706,8 +4754,8 @@
         </p:nvSpPr>
         <p:spPr>
           <a:xfrm>
-            <a:off x="731520" y="1828800"/>
-            <a:ext cx="2926080" cy="365760"/>
+            <a:off x="731520" y="1737360"/>
+            <a:ext cx="3017520" cy="320040"/>
           </a:xfrm>
           <a:prstGeom prst="rect">
             <a:avLst/>
@@ -4721,7 +4769,7 @@
           <a:lstStyle/>
           <a:p>
             <a:pPr algn="l">
-              <a:defRPr sz="1800" b="1">
+              <a:defRPr sz="1700" b="1">
                 <a:solidFill>
                   <a:srgbClr val="F87171"/>
                 </a:solidFill>
@@ -4742,8 +4790,8 @@
         </p:nvSpPr>
         <p:spPr>
           <a:xfrm>
-            <a:off x="731520" y="2286000"/>
-            <a:ext cx="2926080" cy="914400"/>
+            <a:off x="731520" y="2148840"/>
+            <a:ext cx="3017520" cy="822960"/>
           </a:xfrm>
           <a:prstGeom prst="rect">
             <a:avLst/>
@@ -4757,7 +4805,7 @@
           <a:lstStyle/>
           <a:p>
             <a:pPr algn="l">
-              <a:defRPr sz="1400" b="0">
+              <a:defRPr sz="1300" b="0">
                 <a:solidFill>
                   <a:srgbClr val="CBD5E1"/>
                 </a:solidFill>
@@ -4765,7 +4813,7 @@
               </a:defRPr>
             </a:pPr>
             <a:r>
-              <a:t>subscribe home/security/snapshot</a:t>
+              <a:t>subscribe snapshot</a:t>
             </a:r>
             <a:br/>
             <a:r>
@@ -4782,8 +4830,8 @@
         </p:nvSpPr>
         <p:spPr>
           <a:xfrm>
-            <a:off x="4297680" y="1645920"/>
-            <a:ext cx="3474720" cy="1828800"/>
+            <a:off x="4251960" y="1554480"/>
+            <a:ext cx="3520440" cy="1737360"/>
           </a:xfrm>
           <a:prstGeom prst="roundRect">
             <a:avLst/>
@@ -4827,8 +4875,8 @@
         </p:nvSpPr>
         <p:spPr>
           <a:xfrm>
-            <a:off x="4572000" y="1828800"/>
-            <a:ext cx="2926080" cy="365760"/>
+            <a:off x="4526280" y="1737360"/>
+            <a:ext cx="3017520" cy="320040"/>
           </a:xfrm>
           <a:prstGeom prst="rect">
             <a:avLst/>
@@ -4842,7 +4890,7 @@
           <a:lstStyle/>
           <a:p>
             <a:pPr algn="l">
-              <a:defRPr sz="1800" b="1">
+              <a:defRPr sz="1700" b="1">
                 <a:solidFill>
                   <a:srgbClr val="38BDF8"/>
                 </a:solidFill>
@@ -4863,8 +4911,8 @@
         </p:nvSpPr>
         <p:spPr>
           <a:xfrm>
-            <a:off x="4572000" y="2286000"/>
-            <a:ext cx="2926080" cy="914400"/>
+            <a:off x="4526280" y="2148840"/>
+            <a:ext cx="3017520" cy="822960"/>
           </a:xfrm>
           <a:prstGeom prst="rect">
             <a:avLst/>
@@ -4878,7 +4926,7 @@
           <a:lstStyle/>
           <a:p>
             <a:pPr algn="l">
-              <a:defRPr sz="1400" b="0">
+              <a:defRPr sz="1300" b="0">
                 <a:solidFill>
                   <a:srgbClr val="CBD5E1"/>
                 </a:solidFill>
@@ -4886,7 +4934,7 @@
               </a:defRPr>
             </a:pPr>
             <a:r>
-              <a:t>subscribe home/security/pir</a:t>
+              <a:t>subscribe pir</a:t>
             </a:r>
             <a:br/>
             <a:r>
@@ -4903,8 +4951,8 @@
         </p:nvSpPr>
         <p:spPr>
           <a:xfrm>
-            <a:off x="8138160" y="1645920"/>
-            <a:ext cx="3474720" cy="1828800"/>
+            <a:off x="8046720" y="1554480"/>
+            <a:ext cx="3520440" cy="1737360"/>
           </a:xfrm>
           <a:prstGeom prst="roundRect">
             <a:avLst/>
@@ -4948,8 +4996,8 @@
         </p:nvSpPr>
         <p:spPr>
           <a:xfrm>
-            <a:off x="8412480" y="1828800"/>
-            <a:ext cx="2926080" cy="365760"/>
+            <a:off x="8321040" y="1737360"/>
+            <a:ext cx="3017520" cy="320040"/>
           </a:xfrm>
           <a:prstGeom prst="rect">
             <a:avLst/>
@@ -4963,7 +5011,7 @@
           <a:lstStyle/>
           <a:p>
             <a:pPr algn="l">
-              <a:defRPr sz="1800" b="1">
+              <a:defRPr sz="1700" b="1">
                 <a:solidFill>
                   <a:srgbClr val="F87171"/>
                 </a:solidFill>
@@ -4971,7 +5019,7 @@
               </a:defRPr>
             </a:pPr>
             <a:r>
-              <a:t>警報事件列表</a:t>
+              <a:t>警報事件</a:t>
             </a:r>
           </a:p>
         </p:txBody>
@@ -4984,8 +5032,8 @@
         </p:nvSpPr>
         <p:spPr>
           <a:xfrm>
-            <a:off x="8412480" y="2286000"/>
-            <a:ext cx="2926080" cy="914400"/>
+            <a:off x="8321040" y="2148840"/>
+            <a:ext cx="3017520" cy="822960"/>
           </a:xfrm>
           <a:prstGeom prst="rect">
             <a:avLst/>
@@ -4999,7 +5047,7 @@
           <a:lstStyle/>
           <a:p>
             <a:pPr algn="l">
-              <a:defRPr sz="1400" b="0">
+              <a:defRPr sz="1300" b="0">
                 <a:solidFill>
                   <a:srgbClr val="CBD5E1"/>
                 </a:solidFill>
@@ -5007,11 +5055,11 @@
               </a:defRPr>
             </a:pPr>
             <a:r>
-              <a:t>subscribe home/security/alert</a:t>
+              <a:t>subscribe alert</a:t>
             </a:r>
             <a:br/>
             <a:r>
-              <a:t>入侵警報即時顯示</a:t>
+              <a:t>入侵警報列表顯示</a:t>
             </a:r>
           </a:p>
         </p:txBody>
@@ -5024,8 +5072,8 @@
         </p:nvSpPr>
         <p:spPr>
           <a:xfrm>
-            <a:off x="457200" y="3931920"/>
-            <a:ext cx="3474720" cy="1828800"/>
+            <a:off x="457200" y="3657600"/>
+            <a:ext cx="3520440" cy="1737360"/>
           </a:xfrm>
           <a:prstGeom prst="roundRect">
             <a:avLst/>
@@ -5069,8 +5117,8 @@
         </p:nvSpPr>
         <p:spPr>
           <a:xfrm>
-            <a:off x="731520" y="4114800"/>
-            <a:ext cx="2926080" cy="365760"/>
+            <a:off x="731520" y="3840480"/>
+            <a:ext cx="3017520" cy="320040"/>
           </a:xfrm>
           <a:prstGeom prst="rect">
             <a:avLst/>
@@ -5084,7 +5132,7 @@
           <a:lstStyle/>
           <a:p>
             <a:pPr algn="l">
-              <a:defRPr sz="1800" b="1">
+              <a:defRPr sz="1700" b="1">
                 <a:solidFill>
                   <a:srgbClr val="4ADE80"/>
                 </a:solidFill>
@@ -5105,8 +5153,8 @@
         </p:nvSpPr>
         <p:spPr>
           <a:xfrm>
-            <a:off x="731520" y="4572000"/>
-            <a:ext cx="2926080" cy="914400"/>
+            <a:off x="731520" y="4251960"/>
+            <a:ext cx="3017520" cy="822960"/>
           </a:xfrm>
           <a:prstGeom prst="rect">
             <a:avLst/>
@@ -5120,7 +5168,7 @@
           <a:lstStyle/>
           <a:p>
             <a:pPr algn="l">
-              <a:defRPr sz="1400" b="0">
+              <a:defRPr sz="1300" b="0">
                 <a:solidFill>
                   <a:srgbClr val="CBD5E1"/>
                 </a:solidFill>
@@ -5128,7 +5176,7 @@
               </a:defRPr>
             </a:pPr>
             <a:r>
-              <a:t>subscribe home/sensor/light</a:t>
+              <a:t>subscribe light</a:t>
             </a:r>
             <a:br/>
             <a:r>
@@ -5145,8 +5193,8 @@
         </p:nvSpPr>
         <p:spPr>
           <a:xfrm>
-            <a:off x="4297680" y="3931920"/>
-            <a:ext cx="3474720" cy="1828800"/>
+            <a:off x="4251960" y="3657600"/>
+            <a:ext cx="3520440" cy="1737360"/>
           </a:xfrm>
           <a:prstGeom prst="roundRect">
             <a:avLst/>
@@ -5190,8 +5238,8 @@
         </p:nvSpPr>
         <p:spPr>
           <a:xfrm>
-            <a:off x="4572000" y="4114800"/>
-            <a:ext cx="2926080" cy="365760"/>
+            <a:off x="4526280" y="3840480"/>
+            <a:ext cx="3017520" cy="320040"/>
           </a:xfrm>
           <a:prstGeom prst="rect">
             <a:avLst/>
@@ -5205,7 +5253,7 @@
           <a:lstStyle/>
           <a:p>
             <a:pPr algn="l">
-              <a:defRPr sz="1800" b="1">
+              <a:defRPr sz="1700" b="1">
                 <a:solidFill>
                   <a:srgbClr val="FBBF24"/>
                 </a:solidFill>
@@ -5226,8 +5274,8 @@
         </p:nvSpPr>
         <p:spPr>
           <a:xfrm>
-            <a:off x="4572000" y="4572000"/>
-            <a:ext cx="2926080" cy="914400"/>
+            <a:off x="4526280" y="4251960"/>
+            <a:ext cx="3017520" cy="822960"/>
           </a:xfrm>
           <a:prstGeom prst="rect">
             <a:avLst/>
@@ -5241,7 +5289,7 @@
           <a:lstStyle/>
           <a:p>
             <a:pPr algn="l">
-              <a:defRPr sz="1400" b="0">
+              <a:defRPr sz="1300" b="0">
                 <a:solidFill>
                   <a:srgbClr val="CBD5E1"/>
                 </a:solidFill>
@@ -5249,11 +5297,11 @@
               </a:defRPr>
             </a:pPr>
             <a:r>
-              <a:t>publish home/light/control</a:t>
+              <a:t>publish control</a:t>
             </a:r>
             <a:br/>
             <a:r>
-              <a:t>手動開關燈按鈕</a:t>
+              <a:t>手動開/關燈按鈕</a:t>
             </a:r>
           </a:p>
         </p:txBody>
@@ -5266,8 +5314,8 @@
         </p:nvSpPr>
         <p:spPr>
           <a:xfrm>
-            <a:off x="8138160" y="3931920"/>
-            <a:ext cx="3474720" cy="1828800"/>
+            <a:off x="8046720" y="3657600"/>
+            <a:ext cx="3520440" cy="1737360"/>
           </a:xfrm>
           <a:prstGeom prst="roundRect">
             <a:avLst/>
@@ -5311,8 +5359,8 @@
         </p:nvSpPr>
         <p:spPr>
           <a:xfrm>
-            <a:off x="8412480" y="4114800"/>
-            <a:ext cx="2926080" cy="365760"/>
+            <a:off x="8321040" y="3840480"/>
+            <a:ext cx="3017520" cy="320040"/>
           </a:xfrm>
           <a:prstGeom prst="rect">
             <a:avLst/>
@@ -5326,7 +5374,7 @@
           <a:lstStyle/>
           <a:p>
             <a:pPr algn="l">
-              <a:defRPr sz="1800" b="1">
+              <a:defRPr sz="1700" b="1">
                 <a:solidFill>
                   <a:srgbClr val="A78BFA"/>
                 </a:solidFill>
@@ -5347,8 +5395,8 @@
         </p:nvSpPr>
         <p:spPr>
           <a:xfrm>
-            <a:off x="8412480" y="4572000"/>
-            <a:ext cx="2926080" cy="914400"/>
+            <a:off x="8321040" y="4251960"/>
+            <a:ext cx="3017520" cy="822960"/>
           </a:xfrm>
           <a:prstGeom prst="rect">
             <a:avLst/>
@@ -5362,7 +5410,7 @@
           <a:lstStyle/>
           <a:p>
             <a:pPr algn="l">
-              <a:defRPr sz="1400" b="0">
+              <a:defRPr sz="1300" b="0">
                 <a:solidFill>
                   <a:srgbClr val="CBD5E1"/>
                 </a:solidFill>
@@ -5370,7 +5418,7 @@
               </a:defRPr>
             </a:pPr>
             <a:r>
-              <a:t>subscribe home/system/status</a:t>
+              <a:t>subscribe status</a:t>
             </a:r>
             <a:br/>
             <a:r>
@@ -5387,8 +5435,8 @@
         </p:nvSpPr>
         <p:spPr>
           <a:xfrm>
-            <a:off x="457200" y="5669280"/>
-            <a:ext cx="11247120" cy="822960"/>
+            <a:off x="457200" y="5760720"/>
+            <a:ext cx="11247120" cy="731520"/>
           </a:xfrm>
           <a:prstGeom prst="roundRect">
             <a:avLst/>
@@ -5432,8 +5480,8 @@
         </p:nvSpPr>
         <p:spPr>
           <a:xfrm>
-            <a:off x="731520" y="5760720"/>
-            <a:ext cx="10515600" cy="640080"/>
+            <a:off x="731520" y="5852160"/>
+            <a:ext cx="10698480" cy="548640"/>
           </a:xfrm>
           <a:prstGeom prst="rect">
             <a:avLst/>
@@ -5447,7 +5495,7 @@
           <a:lstStyle/>
           <a:p>
             <a:pPr algn="l">
-              <a:defRPr sz="1400" b="0">
+              <a:defRPr sz="1300" b="0">
                 <a:solidFill>
                   <a:srgbClr val="CBD5E1"/>
                 </a:solidFill>
@@ -5455,7 +5503,7 @@
               </a:defRPr>
             </a:pPr>
             <a:r>
-              <a:t>技術亮點：MQTT.js 透過 WebSocket Secure（WSS）直連 HiveMQ Cloud，無需後端伺服器。前端純靜態 HTML/JS，可部署於任何 Web Server 或直接本地開啟。</a:t>
+              <a:t>MQTT.js 透過 WSS 直連 HiveMQ Cloud，無需後端。純靜態 HTML/JS，可部署於任何 Web Server 或直接本地開啟。</a:t>
             </a:r>
           </a:p>
         </p:txBody>
@@ -5509,7 +5557,7 @@
           <a:lstStyle/>
           <a:p>
             <a:pPr algn="l">
-              <a:defRPr sz="3200" b="1">
+              <a:defRPr sz="3000" b="1">
                 <a:solidFill>
                   <a:srgbClr val="FFFFFF"/>
                 </a:solidFill>
@@ -5530,7 +5578,7 @@
         </p:nvSpPr>
         <p:spPr>
           <a:xfrm>
-            <a:off x="731520" y="914400"/>
+            <a:off x="731520" y="868680"/>
             <a:ext cx="10058400" cy="365760"/>
           </a:xfrm>
           <a:prstGeom prst="rect">
@@ -5545,7 +5593,7 @@
           <a:lstStyle/>
           <a:p>
             <a:pPr algn="l">
-              <a:defRPr sz="1600" b="0">
+              <a:defRPr sz="1500" b="0">
                 <a:solidFill>
                   <a:srgbClr val="94A3B8"/>
                 </a:solidFill>
@@ -5566,8 +5614,8 @@
         </p:nvSpPr>
         <p:spPr>
           <a:xfrm>
-            <a:off x="731520" y="1325880"/>
-            <a:ext cx="1828800" cy="38100"/>
+            <a:off x="731520" y="1280160"/>
+            <a:ext cx="1645920" cy="38100"/>
           </a:xfrm>
           <a:prstGeom prst="rect">
             <a:avLst/>
@@ -5609,8 +5657,8 @@
         </p:nvSpPr>
         <p:spPr>
           <a:xfrm>
-            <a:off x="457200" y="1554480"/>
-            <a:ext cx="5943600" cy="3840480"/>
+            <a:off x="457200" y="1463040"/>
+            <a:ext cx="6217920" cy="4114800"/>
           </a:xfrm>
           <a:prstGeom prst="roundRect">
             <a:avLst/>
@@ -5639,7 +5687,7 @@
           </a:fontRef>
         </p:style>
         <p:txBody>
-          <a:bodyPr rtlCol="0" anchor="ctr" wrap="square" lIns="152400" rIns="152400" tIns="101600" bIns="101600"/>
+          <a:bodyPr rtlCol="0" anchor="ctr" wrap="square" lIns="177800" rIns="177800" tIns="127000" bIns="127000"/>
           <a:lstStyle/>
           <a:p>
             <a:pPr algn="ctr">
@@ -5750,7 +5798,7 @@
                 </a:solidFill>
                 <a:latin typeface="Consolas"/>
               </a:rPr>
-              <a:t>        "image": {"url": "attachment://snapshot.jpg"},</a:t>
+              <a:t>        "image": {</a:t>
             </a:r>
           </a:p>
           <a:p>
@@ -5766,7 +5814,7 @@
                 </a:solidFill>
                 <a:latin typeface="Consolas"/>
               </a:rPr>
-              <a:t>    }</a:t>
+              <a:t>            "url": "attachment://snapshot.jpg"</a:t>
             </a:r>
           </a:p>
           <a:p>
@@ -5782,7 +5830,7 @@
                 </a:solidFill>
                 <a:latin typeface="Consolas"/>
               </a:rPr>
-              <a:t/>
+              <a:t>        },</a:t>
             </a:r>
           </a:p>
           <a:p>
@@ -5798,7 +5846,7 @@
                 </a:solidFill>
                 <a:latin typeface="Consolas"/>
               </a:rPr>
-              <a:t>    # 圖片用 multipart/form-data 上傳</a:t>
+              <a:t>    }</a:t>
             </a:r>
           </a:p>
           <a:p>
@@ -5814,7 +5862,7 @@
                 </a:solidFill>
                 <a:latin typeface="Consolas"/>
               </a:rPr>
-              <a:t>    image_data = base64.b64decode(image_base64)</a:t>
+              <a:t/>
             </a:r>
           </a:p>
           <a:p>
@@ -5830,7 +5878,7 @@
                 </a:solidFill>
                 <a:latin typeface="Consolas"/>
               </a:rPr>
-              <a:t>    files = {</a:t>
+              <a:t>    # multipart/form-data 上傳圖片</a:t>
             </a:r>
           </a:p>
           <a:p>
@@ -5846,7 +5894,7 @@
                 </a:solidFill>
                 <a:latin typeface="Consolas"/>
               </a:rPr>
-              <a:t>        "payload_json": (None, json.dumps(payload)),</a:t>
+              <a:t>    image_data = base64.b64decode(image_base64)</a:t>
             </a:r>
           </a:p>
           <a:p>
@@ -5862,7 +5910,7 @@
                 </a:solidFill>
                 <a:latin typeface="Consolas"/>
               </a:rPr>
-              <a:t>        "files[0]": ("snapshot.jpg", BytesIO(image_data)),</a:t>
+              <a:t>    files = {</a:t>
             </a:r>
           </a:p>
           <a:p>
@@ -5878,7 +5926,7 @@
                 </a:solidFill>
                 <a:latin typeface="Consolas"/>
               </a:rPr>
-              <a:t>    }</a:t>
+              <a:t>        "payload_json": (</a:t>
             </a:r>
           </a:p>
           <a:p>
@@ -5894,7 +5942,7 @@
                 </a:solidFill>
                 <a:latin typeface="Consolas"/>
               </a:rPr>
-              <a:t/>
+              <a:t>            None, json.dumps(payload)),</a:t>
             </a:r>
           </a:p>
           <a:p>
@@ -5910,7 +5958,55 @@
                 </a:solidFill>
                 <a:latin typeface="Consolas"/>
               </a:rPr>
-              <a:t>    requests.post(DISCORD_WEBHOOK_URL, files=files)</a:t>
+              <a:t>        "files[0]": (</a:t>
+            </a:r>
+          </a:p>
+          <a:p>
+            <a:pPr>
+              <a:spcAft>
+                <a:spcPts val="200"/>
+              </a:spcAft>
+            </a:pPr>
+            <a:r>
+              <a:rPr sz="1100">
+                <a:solidFill>
+                  <a:srgbClr val="4ADE80"/>
+                </a:solidFill>
+                <a:latin typeface="Consolas"/>
+              </a:rPr>
+              <a:t>            "snapshot.jpg", BytesIO(image_data)),</a:t>
+            </a:r>
+          </a:p>
+          <a:p>
+            <a:pPr>
+              <a:spcAft>
+                <a:spcPts val="200"/>
+              </a:spcAft>
+            </a:pPr>
+            <a:r>
+              <a:rPr sz="1100">
+                <a:solidFill>
+                  <a:srgbClr val="4ADE80"/>
+                </a:solidFill>
+                <a:latin typeface="Consolas"/>
+              </a:rPr>
+              <a:t>    }</a:t>
+            </a:r>
+          </a:p>
+          <a:p>
+            <a:pPr>
+              <a:spcAft>
+                <a:spcPts val="200"/>
+              </a:spcAft>
+            </a:pPr>
+            <a:r>
+              <a:rPr sz="1100">
+                <a:solidFill>
+                  <a:srgbClr val="4ADE80"/>
+                </a:solidFill>
+                <a:latin typeface="Consolas"/>
+              </a:rPr>
+              <a:t>    requests.post(WEBHOOK_URL, files=files)</a:t>
             </a:r>
           </a:p>
         </p:txBody>
@@ -5923,8 +6019,8 @@
         </p:nvSpPr>
         <p:spPr>
           <a:xfrm>
-            <a:off x="6858000" y="1554480"/>
-            <a:ext cx="4846320" cy="3840480"/>
+            <a:off x="7132320" y="1463040"/>
+            <a:ext cx="4572000" cy="4114800"/>
           </a:xfrm>
           <a:prstGeom prst="roundRect">
             <a:avLst/>
@@ -5968,8 +6064,8 @@
         </p:nvSpPr>
         <p:spPr>
           <a:xfrm>
-            <a:off x="7132320" y="1645920"/>
-            <a:ext cx="4297680" cy="365760"/>
+            <a:off x="7406640" y="1554480"/>
+            <a:ext cx="4023360" cy="365760"/>
           </a:xfrm>
           <a:prstGeom prst="rect">
             <a:avLst/>
@@ -6004,8 +6100,8 @@
         </p:nvSpPr>
         <p:spPr>
           <a:xfrm>
-            <a:off x="7132320" y="2194560"/>
-            <a:ext cx="4297680" cy="2743200"/>
+            <a:off x="7406640" y="2011680"/>
+            <a:ext cx="4023360" cy="3200400"/>
           </a:xfrm>
           <a:prstGeom prst="rect">
             <a:avLst/>
@@ -6020,7 +6116,7 @@
           <a:p>
             <a:pPr>
               <a:spcAft>
-                <a:spcPts val="800"/>
+                <a:spcPts val="1000"/>
               </a:spcAft>
             </a:pPr>
             <a:r>
@@ -6045,7 +6141,7 @@
           <a:p>
             <a:pPr>
               <a:spcAft>
-                <a:spcPts val="800"/>
+                <a:spcPts val="1000"/>
               </a:spcAft>
             </a:pPr>
             <a:r>
@@ -6070,7 +6166,7 @@
           <a:p>
             <a:pPr>
               <a:spcAft>
-                <a:spcPts val="800"/>
+                <a:spcPts val="1000"/>
               </a:spcAft>
             </a:pPr>
             <a:r>
@@ -6089,13 +6185,13 @@
                 </a:solidFill>
                 <a:latin typeface="Microsoft JhengHei"/>
               </a:rPr>
-              <a:t>multipart/form-data 上傳圖片</a:t>
+              <a:t>multipart/form-data 上傳</a:t>
             </a:r>
           </a:p>
           <a:p>
             <a:pPr>
               <a:spcAft>
-                <a:spcPts val="800"/>
+                <a:spcPts val="1000"/>
               </a:spcAft>
             </a:pPr>
             <a:r>
@@ -6120,7 +6216,7 @@
           <a:p>
             <a:pPr>
               <a:spcAft>
-                <a:spcPts val="800"/>
+                <a:spcPts val="1000"/>
               </a:spcAft>
             </a:pPr>
             <a:r>
@@ -6139,7 +6235,7 @@
                 </a:solidFill>
                 <a:latin typeface="Microsoft JhengHei"/>
               </a:rPr>
-              <a:t>無需 Bot Token，使用 Webhook URL</a:t>
+              <a:t>無需 Bot Token，僅用 Webhook URL</a:t>
             </a:r>
           </a:p>
         </p:txBody>
@@ -6193,7 +6289,7 @@
           <a:lstStyle/>
           <a:p>
             <a:pPr algn="l">
-              <a:defRPr sz="3200" b="1">
+              <a:defRPr sz="3000" b="1">
                 <a:solidFill>
                   <a:srgbClr val="FFFFFF"/>
                 </a:solidFill>
@@ -6214,8 +6310,8 @@
         </p:nvSpPr>
         <p:spPr>
           <a:xfrm>
-            <a:off x="731520" y="1325880"/>
-            <a:ext cx="1828800" cy="38100"/>
+            <a:off x="731520" y="1280160"/>
+            <a:ext cx="1645920" cy="38100"/>
           </a:xfrm>
           <a:prstGeom prst="rect">
             <a:avLst/>
@@ -6257,8 +6353,8 @@
         </p:nvSpPr>
         <p:spPr>
           <a:xfrm>
-            <a:off x="457200" y="1554480"/>
-            <a:ext cx="6400800" cy="5029200"/>
+            <a:off x="457200" y="1463040"/>
+            <a:ext cx="6675120" cy="5029200"/>
           </a:xfrm>
           <a:prstGeom prst="roundRect">
             <a:avLst/>
@@ -6287,7 +6383,7 @@
           </a:fontRef>
         </p:style>
         <p:txBody>
-          <a:bodyPr rtlCol="0" anchor="ctr" wrap="square" lIns="152400" rIns="152400" tIns="101600" bIns="101600"/>
+          <a:bodyPr rtlCol="0" anchor="ctr" wrap="square" lIns="177800" rIns="177800" tIns="127000" bIns="127000"/>
           <a:lstStyle/>
           <a:p>
             <a:pPr algn="ctr">
@@ -6318,7 +6414,7 @@
                 </a:solidFill>
                 <a:latin typeface="Consolas"/>
               </a:rPr>
-              <a:t>├── config.py                  # RPi 設定檔（MQTT、Discord）</a:t>
+              <a:t>├── config.py              # RPi 設定檔</a:t>
             </a:r>
           </a:p>
           <a:p>
@@ -6334,7 +6430,7 @@
                 </a:solidFill>
                 <a:latin typeface="Consolas"/>
               </a:rPr>
-              <a:t>├── main.py                    # RPi 主程式入口</a:t>
+              <a:t>├── main.py                # RPi 主程式入口</a:t>
             </a:r>
           </a:p>
           <a:p>
@@ -6350,7 +6446,7 @@
                 </a:solidFill>
                 <a:latin typeface="Consolas"/>
               </a:rPr>
-              <a:t>├── .env                       # 敏感資訊（MQTT 密碼、Webhook URL）</a:t>
+              <a:t>├── .env                   # 敏感資訊</a:t>
             </a:r>
           </a:p>
           <a:p>
@@ -6398,7 +6494,7 @@
                 </a:solidFill>
                 <a:latin typeface="Consolas"/>
               </a:rPr>
-              <a:t>│   ├── capture.py             # 攝影機擷取（OpenCV）</a:t>
+              <a:t>│   ├── capture.py         # 攝影機擷取</a:t>
             </a:r>
           </a:p>
           <a:p>
@@ -6414,7 +6510,7 @@
                 </a:solidFill>
                 <a:latin typeface="Consolas"/>
               </a:rPr>
-              <a:t>│   ├── detector.py            # MobileNet SSD 人形偵測</a:t>
+              <a:t>│   ├── detector.py        # MobileNet SSD</a:t>
             </a:r>
           </a:p>
           <a:p>
@@ -6446,7 +6542,7 @@
                 </a:solidFill>
                 <a:latin typeface="Consolas"/>
               </a:rPr>
-              <a:t>│       ├── deploy.prototxt    # 模型定義</a:t>
+              <a:t>│       ├── deploy.prototxt</a:t>
             </a:r>
           </a:p>
           <a:p>
@@ -6462,7 +6558,7 @@
                 </a:solidFill>
                 <a:latin typeface="Consolas"/>
               </a:rPr>
-              <a:t>│       └── mobilenet_ssd.caffemodel  # 預訓練權重</a:t>
+              <a:t>│       └── mobilenet_ssd.caffemodel</a:t>
             </a:r>
           </a:p>
           <a:p>
@@ -6510,7 +6606,7 @@
                 </a:solidFill>
                 <a:latin typeface="Consolas"/>
               </a:rPr>
-              <a:t>│   └── client.py              # MQTT 連線封裝（paho-mqtt v2）</a:t>
+              <a:t>│   └── client.py          # paho-mqtt v2</a:t>
             </a:r>
           </a:p>
           <a:p>
@@ -6558,7 +6654,7 @@
                 </a:solidFill>
                 <a:latin typeface="Consolas"/>
               </a:rPr>
-              <a:t>│   └── discord_bot.py         # Discord Webhook 通知</a:t>
+              <a:t>│   └── discord_bot.py     # Discord Webhook</a:t>
             </a:r>
           </a:p>
           <a:p>
@@ -6606,7 +6702,7 @@
                 </a:solidFill>
                 <a:latin typeface="Consolas"/>
               </a:rPr>
-              <a:t>│   └── index.html             # Dashboard（Tailwind + MQTT.js）</a:t>
+              <a:t>│   └── index.html         # Dashboard</a:t>
             </a:r>
           </a:p>
           <a:p>
@@ -6638,7 +6734,7 @@
                 </a:solidFill>
                 <a:latin typeface="Consolas"/>
               </a:rPr>
-              <a:t>├── esp32/                     # ESP32 MicroPython</a:t>
+              <a:t>├── esp32/                  # MicroPython</a:t>
             </a:r>
           </a:p>
           <a:p>
@@ -6654,7 +6750,7 @@
                 </a:solidFill>
                 <a:latin typeface="Consolas"/>
               </a:rPr>
-              <a:t>│   ├── boot.py                # WiFi 自動連線</a:t>
+              <a:t>│   ├── boot.py            # WiFi 連線</a:t>
             </a:r>
           </a:p>
           <a:p>
@@ -6670,7 +6766,7 @@
                 </a:solidFill>
                 <a:latin typeface="Consolas"/>
               </a:rPr>
-              <a:t>│   ├── main.py                # PIR+光敏+LED+MQTT</a:t>
+              <a:t>│   ├── main.py            # PIR+LDR+LED</a:t>
             </a:r>
           </a:p>
           <a:p>
@@ -6686,7 +6782,7 @@
                 </a:solidFill>
                 <a:latin typeface="Consolas"/>
               </a:rPr>
-              <a:t>│   ├── config.py              # ESP32 設定</a:t>
+              <a:t>│   ├── config.py</a:t>
             </a:r>
           </a:p>
           <a:p>
@@ -6702,7 +6798,7 @@
                 </a:solidFill>
                 <a:latin typeface="Consolas"/>
               </a:rPr>
-              <a:t>│   └── lib/</a:t>
+              <a:t>│   └── lib/umqtt_simple.py</a:t>
             </a:r>
           </a:p>
           <a:p>
@@ -6718,7 +6814,7 @@
                 </a:solidFill>
                 <a:latin typeface="Consolas"/>
               </a:rPr>
-              <a:t>│       └── umqtt_simple.py    # MQTT 函式庫</a:t>
+              <a:t>│</a:t>
             </a:r>
           </a:p>
           <a:p>
@@ -6734,23 +6830,7 @@
                 </a:solidFill>
                 <a:latin typeface="Consolas"/>
               </a:rPr>
-              <a:t>│</a:t>
-            </a:r>
-          </a:p>
-          <a:p>
-            <a:pPr>
-              <a:spcAft>
-                <a:spcPts val="200"/>
-              </a:spcAft>
-            </a:pPr>
-            <a:r>
-              <a:rPr sz="1100">
-                <a:solidFill>
-                  <a:srgbClr val="4ADE80"/>
-                </a:solidFill>
-                <a:latin typeface="Consolas"/>
-              </a:rPr>
-              <a:t>└── snapshots/                 # 截圖儲存目錄</a:t>
+              <a:t>└── snapshots/</a:t>
             </a:r>
           </a:p>
         </p:txBody>
@@ -6763,8 +6843,8 @@
         </p:nvSpPr>
         <p:spPr>
           <a:xfrm>
-            <a:off x="7315200" y="1645920"/>
-            <a:ext cx="4389120" cy="1005840"/>
+            <a:off x="7589520" y="1554480"/>
+            <a:ext cx="4114800" cy="1051560"/>
           </a:xfrm>
           <a:prstGeom prst="roundRect">
             <a:avLst/>
@@ -6808,8 +6888,8 @@
         </p:nvSpPr>
         <p:spPr>
           <a:xfrm>
-            <a:off x="7589520" y="1737360"/>
-            <a:ext cx="3840480" cy="274320"/>
+            <a:off x="7863840" y="1645920"/>
+            <a:ext cx="3657600" cy="274320"/>
           </a:xfrm>
           <a:prstGeom prst="rect">
             <a:avLst/>
@@ -6823,7 +6903,7 @@
           <a:lstStyle/>
           <a:p>
             <a:pPr algn="l">
-              <a:defRPr sz="1500" b="1">
+              <a:defRPr sz="1400" b="1">
                 <a:solidFill>
                   <a:srgbClr val="38BDF8"/>
                 </a:solidFill>
@@ -6844,8 +6924,8 @@
         </p:nvSpPr>
         <p:spPr>
           <a:xfrm>
-            <a:off x="7589520" y="2057400"/>
-            <a:ext cx="3840480" cy="548640"/>
+            <a:off x="7863840" y="1920240"/>
+            <a:ext cx="3657600" cy="640080"/>
           </a:xfrm>
           <a:prstGeom prst="rect">
             <a:avLst/>
@@ -6859,7 +6939,7 @@
           <a:lstStyle/>
           <a:p>
             <a:pPr algn="l">
-              <a:defRPr sz="1300" b="0">
+              <a:defRPr sz="1200" b="0">
                 <a:solidFill>
                   <a:srgbClr val="CBD5E1"/>
                 </a:solidFill>
@@ -6871,7 +6951,11 @@
             </a:r>
             <a:br/>
             <a:r>
-              <a:t>Python 3 + OpenCV + paho-mqtt</a:t>
+              <a:t>Python 3 + OpenCV DNN</a:t>
+            </a:r>
+            <a:br/>
+            <a:r>
+              <a:t>+ paho-mqtt v2</a:t>
             </a:r>
           </a:p>
         </p:txBody>
@@ -6884,8 +6968,8 @@
         </p:nvSpPr>
         <p:spPr>
           <a:xfrm>
-            <a:off x="7315200" y="2834640"/>
-            <a:ext cx="4389120" cy="1005840"/>
+            <a:off x="7589520" y="2788920"/>
+            <a:ext cx="4114800" cy="1051560"/>
           </a:xfrm>
           <a:prstGeom prst="roundRect">
             <a:avLst/>
@@ -6929,8 +7013,8 @@
         </p:nvSpPr>
         <p:spPr>
           <a:xfrm>
-            <a:off x="7589520" y="2926080"/>
-            <a:ext cx="3840480" cy="274320"/>
+            <a:off x="7863840" y="2880360"/>
+            <a:ext cx="3657600" cy="274320"/>
           </a:xfrm>
           <a:prstGeom prst="rect">
             <a:avLst/>
@@ -6944,7 +7028,7 @@
           <a:lstStyle/>
           <a:p>
             <a:pPr algn="l">
-              <a:defRPr sz="1500" b="1">
+              <a:defRPr sz="1400" b="1">
                 <a:solidFill>
                   <a:srgbClr val="4ADE80"/>
                 </a:solidFill>
@@ -6965,8 +7049,8 @@
         </p:nvSpPr>
         <p:spPr>
           <a:xfrm>
-            <a:off x="7589520" y="3246120"/>
-            <a:ext cx="3840480" cy="548640"/>
+            <a:off x="7863840" y="3154680"/>
+            <a:ext cx="3657600" cy="640080"/>
           </a:xfrm>
           <a:prstGeom prst="rect">
             <a:avLst/>
@@ -6980,7 +7064,7 @@
           <a:lstStyle/>
           <a:p>
             <a:pPr algn="l">
-              <a:defRPr sz="1300" b="0">
+              <a:defRPr sz="1200" b="0">
                 <a:solidFill>
                   <a:srgbClr val="CBD5E1"/>
                 </a:solidFill>
@@ -6988,7 +7072,7 @@
               </a:defRPr>
             </a:pPr>
             <a:r>
-              <a:t>照明控制</a:t>
+              <a:t>PIR 感測 + 照明控制</a:t>
             </a:r>
             <a:br/>
             <a:r>
@@ -7005,8 +7089,8 @@
         </p:nvSpPr>
         <p:spPr>
           <a:xfrm>
-            <a:off x="7315200" y="4023360"/>
-            <a:ext cx="4389120" cy="1005840"/>
+            <a:off x="7589520" y="4023360"/>
+            <a:ext cx="4114800" cy="1051560"/>
           </a:xfrm>
           <a:prstGeom prst="roundRect">
             <a:avLst/>
@@ -7050,8 +7134,8 @@
         </p:nvSpPr>
         <p:spPr>
           <a:xfrm>
-            <a:off x="7589520" y="4114800"/>
-            <a:ext cx="3840480" cy="274320"/>
+            <a:off x="7863840" y="4114800"/>
+            <a:ext cx="3657600" cy="274320"/>
           </a:xfrm>
           <a:prstGeom prst="rect">
             <a:avLst/>
@@ -7065,7 +7149,7 @@
           <a:lstStyle/>
           <a:p>
             <a:pPr algn="l">
-              <a:defRPr sz="1500" b="1">
+              <a:defRPr sz="1400" b="1">
                 <a:solidFill>
                   <a:srgbClr val="FBBF24"/>
                 </a:solidFill>
@@ -7086,8 +7170,8 @@
         </p:nvSpPr>
         <p:spPr>
           <a:xfrm>
-            <a:off x="7589520" y="4434840"/>
-            <a:ext cx="3840480" cy="548640"/>
+            <a:off x="7863840" y="4389120"/>
+            <a:ext cx="3657600" cy="640080"/>
           </a:xfrm>
           <a:prstGeom prst="rect">
             <a:avLst/>
@@ -7101,7 +7185,7 @@
           <a:lstStyle/>
           <a:p>
             <a:pPr algn="l">
-              <a:defRPr sz="1300" b="0">
+              <a:defRPr sz="1200" b="0">
                 <a:solidFill>
                   <a:srgbClr val="CBD5E1"/>
                 </a:solidFill>
@@ -7113,7 +7197,7 @@
             </a:r>
             <a:br/>
             <a:r>
-              <a:t>HTML/JS + Tailwind + MQTT.js</a:t>
+              <a:t>Tailwind + MQTT.js</a:t>
             </a:r>
           </a:p>
         </p:txBody>
@@ -7126,8 +7210,8 @@
         </p:nvSpPr>
         <p:spPr>
           <a:xfrm>
-            <a:off x="7315200" y="5212080"/>
-            <a:ext cx="4389120" cy="1005840"/>
+            <a:off x="7589520" y="5257800"/>
+            <a:ext cx="4114800" cy="1051560"/>
           </a:xfrm>
           <a:prstGeom prst="roundRect">
             <a:avLst/>
@@ -7171,8 +7255,8 @@
         </p:nvSpPr>
         <p:spPr>
           <a:xfrm>
-            <a:off x="7589520" y="5303520"/>
-            <a:ext cx="3840480" cy="274320"/>
+            <a:off x="7863840" y="5349240"/>
+            <a:ext cx="3657600" cy="274320"/>
           </a:xfrm>
           <a:prstGeom prst="rect">
             <a:avLst/>
@@ -7186,7 +7270,7 @@
           <a:lstStyle/>
           <a:p>
             <a:pPr algn="l">
-              <a:defRPr sz="1500" b="1">
+              <a:defRPr sz="1400" b="1">
                 <a:solidFill>
                   <a:srgbClr val="A78BFA"/>
                 </a:solidFill>
@@ -7207,8 +7291,8 @@
         </p:nvSpPr>
         <p:spPr>
           <a:xfrm>
-            <a:off x="7589520" y="5623560"/>
-            <a:ext cx="3840480" cy="548640"/>
+            <a:off x="7863840" y="5623560"/>
+            <a:ext cx="3657600" cy="640080"/>
           </a:xfrm>
           <a:prstGeom prst="rect">
             <a:avLst/>
@@ -7222,7 +7306,7 @@
           <a:lstStyle/>
           <a:p>
             <a:pPr algn="l">
-              <a:defRPr sz="1300" b="0">
+              <a:defRPr sz="1200" b="0">
                 <a:solidFill>
                   <a:srgbClr val="CBD5E1"/>
                 </a:solidFill>
@@ -7288,7 +7372,7 @@
           <a:lstStyle/>
           <a:p>
             <a:pPr algn="l">
-              <a:defRPr sz="3200" b="1">
+              <a:defRPr sz="3000" b="1">
                 <a:solidFill>
                   <a:srgbClr val="FFFFFF"/>
                 </a:solidFill>
@@ -7309,8 +7393,8 @@
         </p:nvSpPr>
         <p:spPr>
           <a:xfrm>
-            <a:off x="731520" y="1325880"/>
-            <a:ext cx="1828800" cy="38100"/>
+            <a:off x="731520" y="1280160"/>
+            <a:ext cx="1645920" cy="38100"/>
           </a:xfrm>
           <a:prstGeom prst="rect">
             <a:avLst/>
@@ -7352,8 +7436,8 @@
         </p:nvSpPr>
         <p:spPr>
           <a:xfrm>
-            <a:off x="457200" y="1554480"/>
-            <a:ext cx="11247120" cy="868680"/>
+            <a:off x="457200" y="1508760"/>
+            <a:ext cx="11247120" cy="822960"/>
           </a:xfrm>
           <a:prstGeom prst="roundRect">
             <a:avLst/>
@@ -7398,7 +7482,7 @@
         <p:spPr>
           <a:xfrm>
             <a:off x="731520" y="1600200"/>
-            <a:ext cx="2560320" cy="274320"/>
+            <a:ext cx="2743200" cy="640080"/>
           </a:xfrm>
           <a:prstGeom prst="rect">
             <a:avLst/>
@@ -7412,7 +7496,7 @@
           <a:lstStyle/>
           <a:p>
             <a:pPr algn="l">
-              <a:defRPr sz="1400" b="1">
+              <a:defRPr sz="1300" b="1">
                 <a:solidFill>
                   <a:srgbClr val="F87171"/>
                 </a:solidFill>
@@ -7434,7 +7518,7 @@
         <p:spPr>
           <a:xfrm>
             <a:off x="3474720" y="1600200"/>
-            <a:ext cx="3657600" cy="777240"/>
+            <a:ext cx="3474720" cy="640080"/>
           </a:xfrm>
           <a:prstGeom prst="rect">
             <a:avLst/>
@@ -7448,7 +7532,7 @@
           <a:lstStyle/>
           <a:p>
             <a:pPr algn="l">
-              <a:defRPr sz="1200" b="0">
+              <a:defRPr sz="1100" b="0">
                 <a:solidFill>
                   <a:srgbClr val="94A3B8"/>
                 </a:solidFill>
@@ -7456,7 +7540,7 @@
               </a:defRPr>
             </a:pPr>
             <a:r>
-              <a:t>原因：GPIO 浮接導致持續高電位</a:t>
+              <a:t>原因：GPIO 浮接 → 持續高電位</a:t>
             </a:r>
           </a:p>
         </p:txBody>
@@ -7470,7 +7554,7 @@
         <p:spPr>
           <a:xfrm>
             <a:off x="7132320" y="1600200"/>
-            <a:ext cx="4389120" cy="777240"/>
+            <a:ext cx="4389120" cy="640080"/>
           </a:xfrm>
           <a:prstGeom prst="rect">
             <a:avLst/>
@@ -7484,7 +7568,7 @@
           <a:lstStyle/>
           <a:p>
             <a:pPr algn="l">
-              <a:defRPr sz="1200" b="0">
+              <a:defRPr sz="1100" b="0">
                 <a:solidFill>
                   <a:srgbClr val="4ADE80"/>
                 </a:solidFill>
@@ -7492,7 +7576,7 @@
               </a:defRPr>
             </a:pPr>
             <a:r>
-              <a:t>解法：加入 pull-down 電阻 + 軟體冷卻機制</a:t>
+              <a:t>解法：pull-down 電阻 + 軟體冷卻</a:t>
             </a:r>
           </a:p>
         </p:txBody>
@@ -7505,8 +7589,8 @@
         </p:nvSpPr>
         <p:spPr>
           <a:xfrm>
-            <a:off x="457200" y="2560320"/>
-            <a:ext cx="11247120" cy="868680"/>
+            <a:off x="457200" y="2468880"/>
+            <a:ext cx="11247120" cy="822960"/>
           </a:xfrm>
           <a:prstGeom prst="roundRect">
             <a:avLst/>
@@ -7550,8 +7634,8 @@
         </p:nvSpPr>
         <p:spPr>
           <a:xfrm>
-            <a:off x="731520" y="2606040"/>
-            <a:ext cx="2560320" cy="274320"/>
+            <a:off x="731520" y="2560320"/>
+            <a:ext cx="2743200" cy="640080"/>
           </a:xfrm>
           <a:prstGeom prst="rect">
             <a:avLst/>
@@ -7565,7 +7649,7 @@
           <a:lstStyle/>
           <a:p>
             <a:pPr algn="l">
-              <a:defRPr sz="1400" b="1">
+              <a:defRPr sz="1300" b="1">
                 <a:solidFill>
                   <a:srgbClr val="FBBF24"/>
                 </a:solidFill>
@@ -7586,8 +7670,8 @@
         </p:nvSpPr>
         <p:spPr>
           <a:xfrm>
-            <a:off x="3474720" y="2606040"/>
-            <a:ext cx="3657600" cy="777240"/>
+            <a:off x="3474720" y="2560320"/>
+            <a:ext cx="3474720" cy="640080"/>
           </a:xfrm>
           <a:prstGeom prst="rect">
             <a:avLst/>
@@ -7601,7 +7685,7 @@
           <a:lstStyle/>
           <a:p>
             <a:pPr algn="l">
-              <a:defRPr sz="1200" b="0">
+              <a:defRPr sz="1100" b="0">
                 <a:solidFill>
                   <a:srgbClr val="94A3B8"/>
                 </a:solidFill>
@@ -7622,8 +7706,8 @@
         </p:nvSpPr>
         <p:spPr>
           <a:xfrm>
-            <a:off x="7132320" y="2606040"/>
-            <a:ext cx="4389120" cy="777240"/>
+            <a:off x="7132320" y="2560320"/>
+            <a:ext cx="4389120" cy="640080"/>
           </a:xfrm>
           <a:prstGeom prst="rect">
             <a:avLst/>
@@ -7637,7 +7721,7 @@
           <a:lstStyle/>
           <a:p>
             <a:pPr algn="l">
-              <a:defRPr sz="1200" b="0">
+              <a:defRPr sz="1100" b="0">
                 <a:solidFill>
                   <a:srgbClr val="4ADE80"/>
                 </a:solidFill>
@@ -7658,8 +7742,8 @@
         </p:nvSpPr>
         <p:spPr>
           <a:xfrm>
-            <a:off x="457200" y="3566160"/>
-            <a:ext cx="11247120" cy="868680"/>
+            <a:off x="457200" y="3429000"/>
+            <a:ext cx="11247120" cy="822960"/>
           </a:xfrm>
           <a:prstGeom prst="roundRect">
             <a:avLst/>
@@ -7703,8 +7787,8 @@
         </p:nvSpPr>
         <p:spPr>
           <a:xfrm>
-            <a:off x="731520" y="3611880"/>
-            <a:ext cx="2560320" cy="274320"/>
+            <a:off x="731520" y="3520440"/>
+            <a:ext cx="2743200" cy="640080"/>
           </a:xfrm>
           <a:prstGeom prst="rect">
             <a:avLst/>
@@ -7718,7 +7802,7 @@
           <a:lstStyle/>
           <a:p>
             <a:pPr algn="l">
-              <a:defRPr sz="1400" b="1">
+              <a:defRPr sz="1300" b="1">
                 <a:solidFill>
                   <a:srgbClr val="4ADE80"/>
                 </a:solidFill>
@@ -7739,8 +7823,8 @@
         </p:nvSpPr>
         <p:spPr>
           <a:xfrm>
-            <a:off x="3474720" y="3611880"/>
-            <a:ext cx="3657600" cy="777240"/>
+            <a:off x="3474720" y="3520440"/>
+            <a:ext cx="3474720" cy="640080"/>
           </a:xfrm>
           <a:prstGeom prst="rect">
             <a:avLst/>
@@ -7754,7 +7838,7 @@
           <a:lstStyle/>
           <a:p>
             <a:pPr algn="l">
-              <a:defRPr sz="1200" b="0">
+              <a:defRPr sz="1100" b="0">
                 <a:solidFill>
                   <a:srgbClr val="94A3B8"/>
                 </a:solidFill>
@@ -7775,8 +7859,8 @@
         </p:nvSpPr>
         <p:spPr>
           <a:xfrm>
-            <a:off x="7132320" y="3611880"/>
-            <a:ext cx="4389120" cy="777240"/>
+            <a:off x="7132320" y="3520440"/>
+            <a:ext cx="4389120" cy="640080"/>
           </a:xfrm>
           <a:prstGeom prst="rect">
             <a:avLst/>
@@ -7790,7 +7874,7 @@
           <a:lstStyle/>
           <a:p>
             <a:pPr algn="l">
-              <a:defRPr sz="1200" b="0">
+              <a:defRPr sz="1100" b="0">
                 <a:solidFill>
                   <a:srgbClr val="4ADE80"/>
                 </a:solidFill>
@@ -7798,7 +7882,7 @@
               </a:defRPr>
             </a:pPr>
             <a:r>
-              <a:t>解法：PIR 移至 ESP32，MQTT 遠端觸發 RPi</a:t>
+              <a:t>解法：PIR 移至 ESP32，MQTT 遠端觸發</a:t>
             </a:r>
           </a:p>
         </p:txBody>
@@ -7811,8 +7895,8 @@
         </p:nvSpPr>
         <p:spPr>
           <a:xfrm>
-            <a:off x="457200" y="4572000"/>
-            <a:ext cx="11247120" cy="868680"/>
+            <a:off x="457200" y="4389120"/>
+            <a:ext cx="11247120" cy="822960"/>
           </a:xfrm>
           <a:prstGeom prst="roundRect">
             <a:avLst/>
@@ -7856,8 +7940,8 @@
         </p:nvSpPr>
         <p:spPr>
           <a:xfrm>
-            <a:off x="731520" y="4617720"/>
-            <a:ext cx="2560320" cy="274320"/>
+            <a:off x="731520" y="4480560"/>
+            <a:ext cx="2743200" cy="640080"/>
           </a:xfrm>
           <a:prstGeom prst="rect">
             <a:avLst/>
@@ -7871,7 +7955,7 @@
           <a:lstStyle/>
           <a:p>
             <a:pPr algn="l">
-              <a:defRPr sz="1400" b="1">
+              <a:defRPr sz="1300" b="1">
                 <a:solidFill>
                   <a:srgbClr val="38BDF8"/>
                 </a:solidFill>
@@ -7892,8 +7976,8 @@
         </p:nvSpPr>
         <p:spPr>
           <a:xfrm>
-            <a:off x="3474720" y="4617720"/>
-            <a:ext cx="3657600" cy="777240"/>
+            <a:off x="3474720" y="4480560"/>
+            <a:ext cx="3474720" cy="640080"/>
           </a:xfrm>
           <a:prstGeom prst="rect">
             <a:avLst/>
@@ -7907,7 +7991,7 @@
           <a:lstStyle/>
           <a:p>
             <a:pPr algn="l">
-              <a:defRPr sz="1200" b="0">
+              <a:defRPr sz="1100" b="0">
                 <a:solidFill>
                   <a:srgbClr val="94A3B8"/>
                 </a:solidFill>
@@ -7928,8 +8012,8 @@
         </p:nvSpPr>
         <p:spPr>
           <a:xfrm>
-            <a:off x="7132320" y="4617720"/>
-            <a:ext cx="4389120" cy="777240"/>
+            <a:off x="7132320" y="4480560"/>
+            <a:ext cx="4389120" cy="640080"/>
           </a:xfrm>
           <a:prstGeom prst="rect">
             <a:avLst/>
@@ -7943,7 +8027,7 @@
           <a:lstStyle/>
           <a:p>
             <a:pPr algn="l">
-              <a:defRPr sz="1200" b="0">
+              <a:defRPr sz="1100" b="0">
                 <a:solidFill>
                   <a:srgbClr val="4ADE80"/>
                 </a:solidFill>
@@ -7951,7 +8035,7 @@
               </a:defRPr>
             </a:pPr>
             <a:r>
-              <a:t>解法：manual_override 機制，暫停自動 60 秒</a:t>
+              <a:t>解法：manual_override，暫停自動 60 秒</a:t>
             </a:r>
           </a:p>
         </p:txBody>
@@ -7964,8 +8048,8 @@
         </p:nvSpPr>
         <p:spPr>
           <a:xfrm>
-            <a:off x="457200" y="5577840"/>
-            <a:ext cx="11247120" cy="868680"/>
+            <a:off x="457200" y="5349240"/>
+            <a:ext cx="11247120" cy="822960"/>
           </a:xfrm>
           <a:prstGeom prst="roundRect">
             <a:avLst/>
@@ -8009,8 +8093,8 @@
         </p:nvSpPr>
         <p:spPr>
           <a:xfrm>
-            <a:off x="731520" y="5623560"/>
-            <a:ext cx="2560320" cy="274320"/>
+            <a:off x="731520" y="5440680"/>
+            <a:ext cx="2743200" cy="640080"/>
           </a:xfrm>
           <a:prstGeom prst="rect">
             <a:avLst/>
@@ -8024,7 +8108,7 @@
           <a:lstStyle/>
           <a:p>
             <a:pPr algn="l">
-              <a:defRPr sz="1400" b="1">
+              <a:defRPr sz="1300" b="1">
                 <a:solidFill>
                   <a:srgbClr val="A78BFA"/>
                 </a:solidFill>
@@ -8045,8 +8129,8 @@
         </p:nvSpPr>
         <p:spPr>
           <a:xfrm>
-            <a:off x="3474720" y="5623560"/>
-            <a:ext cx="3657600" cy="777240"/>
+            <a:off x="3474720" y="5440680"/>
+            <a:ext cx="3474720" cy="640080"/>
           </a:xfrm>
           <a:prstGeom prst="rect">
             <a:avLst/>
@@ -8060,7 +8144,7 @@
           <a:lstStyle/>
           <a:p>
             <a:pPr algn="l">
-              <a:defRPr sz="1200" b="0">
+              <a:defRPr sz="1100" b="0">
                 <a:solidFill>
                   <a:srgbClr val="94A3B8"/>
                 </a:solidFill>
@@ -8068,7 +8152,7 @@
               </a:defRPr>
             </a:pPr>
             <a:r>
-              <a:t>原因：MicroPython v1.25 ussl→ssl</a:t>
+              <a:t>原因：MicroPython v1.25 ussl → ssl</a:t>
             </a:r>
           </a:p>
         </p:txBody>
@@ -8081,8 +8165,8 @@
         </p:nvSpPr>
         <p:spPr>
           <a:xfrm>
-            <a:off x="7132320" y="5623560"/>
-            <a:ext cx="4389120" cy="777240"/>
+            <a:off x="7132320" y="5440680"/>
+            <a:ext cx="4389120" cy="640080"/>
           </a:xfrm>
           <a:prstGeom prst="rect">
             <a:avLst/>
@@ -8096,7 +8180,7 @@
           <a:lstStyle/>
           <a:p>
             <a:pPr algn="l">
-              <a:defRPr sz="1200" b="0">
+              <a:defRPr sz="1100" b="0">
                 <a:solidFill>
                   <a:srgbClr val="4ADE80"/>
                 </a:solidFill>
@@ -8104,7 +8188,7 @@
               </a:defRPr>
             </a:pPr>
             <a:r>
-              <a:t>解法：umqtt_simple.py 加入 try/except 相容</a:t>
+              <a:t>解法：umqtt_simple 加入 try/except 相容</a:t>
             </a:r>
           </a:p>
         </p:txBody>
@@ -8158,7 +8242,7 @@
           <a:lstStyle/>
           <a:p>
             <a:pPr algn="l">
-              <a:defRPr sz="3200" b="1">
+              <a:defRPr sz="3000" b="1">
                 <a:solidFill>
                   <a:srgbClr val="FFFFFF"/>
                 </a:solidFill>
@@ -8179,8 +8263,8 @@
         </p:nvSpPr>
         <p:spPr>
           <a:xfrm>
-            <a:off x="731520" y="1325880"/>
-            <a:ext cx="1828800" cy="38100"/>
+            <a:off x="731520" y="1280160"/>
+            <a:ext cx="1645920" cy="38100"/>
           </a:xfrm>
           <a:prstGeom prst="rect">
             <a:avLst/>
@@ -8222,8 +8306,8 @@
         </p:nvSpPr>
         <p:spPr>
           <a:xfrm>
-            <a:off x="457200" y="1645920"/>
-            <a:ext cx="5486400" cy="2011680"/>
+            <a:off x="457200" y="1554480"/>
+            <a:ext cx="5394960" cy="2103120"/>
           </a:xfrm>
           <a:prstGeom prst="roundRect">
             <a:avLst/>
@@ -8267,8 +8351,8 @@
         </p:nvSpPr>
         <p:spPr>
           <a:xfrm>
-            <a:off x="731520" y="1828800"/>
-            <a:ext cx="4937760" cy="365760"/>
+            <a:off x="731520" y="1737360"/>
+            <a:ext cx="4846320" cy="320040"/>
           </a:xfrm>
           <a:prstGeom prst="rect">
             <a:avLst/>
@@ -8282,7 +8366,7 @@
           <a:lstStyle/>
           <a:p>
             <a:pPr algn="l">
-              <a:defRPr sz="1800" b="1">
+              <a:defRPr sz="1700" b="1">
                 <a:solidFill>
                   <a:srgbClr val="F87171"/>
                 </a:solidFill>
@@ -8303,8 +8387,8 @@
         </p:nvSpPr>
         <p:spPr>
           <a:xfrm>
-            <a:off x="731520" y="2286000"/>
-            <a:ext cx="4937760" cy="1097280"/>
+            <a:off x="731520" y="2148840"/>
+            <a:ext cx="4846320" cy="1280160"/>
           </a:xfrm>
           <a:prstGeom prst="rect">
             <a:avLst/>
@@ -8318,7 +8402,7 @@
           <a:lstStyle/>
           <a:p>
             <a:pPr algn="l">
-              <a:defRPr sz="1500" b="0">
+              <a:defRPr sz="1400" b="0">
                 <a:solidFill>
                   <a:srgbClr val="CBD5E1"/>
                 </a:solidFill>
@@ -8326,11 +8410,15 @@
               </a:defRPr>
             </a:pPr>
             <a:r>
-              <a:t>ESP32 PIR → MQTT → RPi 連拍 3 張 → MobileNet SSD</a:t>
+              <a:t>ESP32 PIR → MQTT → RPi 連拍 3 張</a:t>
             </a:r>
             <a:br/>
             <a:r>
-              <a:t>多幀驗證（2/3 通過）→ Discord 推播（含截圖）</a:t>
+              <a:t>→ MobileNet SSD 多幀驗證（2/3 通過）</a:t>
+            </a:r>
+            <a:br/>
+            <a:r>
+              <a:t>→ Discord 推播通知（含截圖）</a:t>
             </a:r>
           </a:p>
         </p:txBody>
@@ -8343,8 +8431,8 @@
         </p:nvSpPr>
         <p:spPr>
           <a:xfrm>
-            <a:off x="6309360" y="1645920"/>
-            <a:ext cx="5486400" cy="2011680"/>
+            <a:off x="6217920" y="1554480"/>
+            <a:ext cx="5394960" cy="2103120"/>
           </a:xfrm>
           <a:prstGeom prst="roundRect">
             <a:avLst/>
@@ -8388,8 +8476,8 @@
         </p:nvSpPr>
         <p:spPr>
           <a:xfrm>
-            <a:off x="6583680" y="1828800"/>
-            <a:ext cx="4937760" cy="365760"/>
+            <a:off x="6492240" y="1737360"/>
+            <a:ext cx="4846320" cy="320040"/>
           </a:xfrm>
           <a:prstGeom prst="rect">
             <a:avLst/>
@@ -8403,7 +8491,7 @@
           <a:lstStyle/>
           <a:p>
             <a:pPr algn="l">
-              <a:defRPr sz="1800" b="1">
+              <a:defRPr sz="1700" b="1">
                 <a:solidFill>
                   <a:srgbClr val="4ADE80"/>
                 </a:solidFill>
@@ -8424,8 +8512,8 @@
         </p:nvSpPr>
         <p:spPr>
           <a:xfrm>
-            <a:off x="6583680" y="2286000"/>
-            <a:ext cx="4937760" cy="1097280"/>
+            <a:off x="6492240" y="2148840"/>
+            <a:ext cx="4846320" cy="1280160"/>
           </a:xfrm>
           <a:prstGeom prst="rect">
             <a:avLst/>
@@ -8439,7 +8527,7 @@
           <a:lstStyle/>
           <a:p>
             <a:pPr algn="l">
-              <a:defRPr sz="1500" b="0">
+              <a:defRPr sz="1400" b="0">
                 <a:solidFill>
                   <a:srgbClr val="CBD5E1"/>
                 </a:solidFill>
@@ -8447,11 +8535,15 @@
               </a:defRPr>
             </a:pPr>
             <a:r>
-              <a:t>PIR 偵測有人 + 光敏判斷環境暗 → 自動開燈</a:t>
+              <a:t>PIR 偵測有人 + 光敏判斷環境暗</a:t>
             </a:r>
             <a:br/>
             <a:r>
-              <a:t>供攝影機夜間辨識。Dashboard 可手動控制（60 秒覆蓋）</a:t>
+              <a:t>→ 自動開燈（供攝影機夜間辨識）</a:t>
+            </a:r>
+            <a:br/>
+            <a:r>
+              <a:t>→ Dashboard 手動控制（60 秒覆蓋）</a:t>
             </a:r>
           </a:p>
         </p:txBody>
@@ -8465,7 +8557,7 @@
         <p:spPr>
           <a:xfrm>
             <a:off x="457200" y="3931920"/>
-            <a:ext cx="5486400" cy="2011680"/>
+            <a:ext cx="5394960" cy="2103120"/>
           </a:xfrm>
           <a:prstGeom prst="roundRect">
             <a:avLst/>
@@ -8510,7 +8602,7 @@
         <p:spPr>
           <a:xfrm>
             <a:off x="731520" y="4114800"/>
-            <a:ext cx="4937760" cy="365760"/>
+            <a:ext cx="4846320" cy="320040"/>
           </a:xfrm>
           <a:prstGeom prst="rect">
             <a:avLst/>
@@ -8524,7 +8616,7 @@
           <a:lstStyle/>
           <a:p>
             <a:pPr algn="l">
-              <a:defRPr sz="1800" b="1">
+              <a:defRPr sz="1700" b="1">
                 <a:solidFill>
                   <a:srgbClr val="FBBF24"/>
                 </a:solidFill>
@@ -8545,8 +8637,8 @@
         </p:nvSpPr>
         <p:spPr>
           <a:xfrm>
-            <a:off x="731520" y="4572000"/>
-            <a:ext cx="4937760" cy="1097280"/>
+            <a:off x="731520" y="4526280"/>
+            <a:ext cx="4846320" cy="1280160"/>
           </a:xfrm>
           <a:prstGeom prst="rect">
             <a:avLst/>
@@ -8560,7 +8652,7 @@
           <a:lstStyle/>
           <a:p>
             <a:pPr algn="l">
-              <a:defRPr sz="1500" b="0">
+              <a:defRPr sz="1400" b="0">
                 <a:solidFill>
                   <a:srgbClr val="CBD5E1"/>
                 </a:solidFill>
@@ -8568,11 +8660,15 @@
               </a:defRPr>
             </a:pPr>
             <a:r>
-              <a:t>MQTT.js 直連雲端 → 即時截圖、PIR 狀態、亮度數據</a:t>
+              <a:t>MQTT.js 直連雲端 Broker</a:t>
             </a:r>
             <a:br/>
             <a:r>
-              <a:t>燈光手動控制、警報記錄、系統狀態監控</a:t>
+              <a:t>→ 即時截圖、PIR 狀態、亮度、燈光控制</a:t>
+            </a:r>
+            <a:br/>
+            <a:r>
+              <a:t>→ 警報記錄、系統狀態監控</a:t>
             </a:r>
           </a:p>
         </p:txBody>
@@ -8585,8 +8681,8 @@
         </p:nvSpPr>
         <p:spPr>
           <a:xfrm>
-            <a:off x="6309360" y="3931920"/>
-            <a:ext cx="5486400" cy="2011680"/>
+            <a:off x="6217920" y="3931920"/>
+            <a:ext cx="5394960" cy="2103120"/>
           </a:xfrm>
           <a:prstGeom prst="roundRect">
             <a:avLst/>
@@ -8630,8 +8726,8 @@
         </p:nvSpPr>
         <p:spPr>
           <a:xfrm>
-            <a:off x="6583680" y="4114800"/>
-            <a:ext cx="4937760" cy="365760"/>
+            <a:off x="6492240" y="4114800"/>
+            <a:ext cx="4846320" cy="320040"/>
           </a:xfrm>
           <a:prstGeom prst="rect">
             <a:avLst/>
@@ -8645,7 +8741,7 @@
           <a:lstStyle/>
           <a:p>
             <a:pPr algn="l">
-              <a:defRPr sz="1800" b="1">
+              <a:defRPr sz="1700" b="1">
                 <a:solidFill>
                   <a:srgbClr val="38BDF8"/>
                 </a:solidFill>
@@ -8666,8 +8762,8 @@
         </p:nvSpPr>
         <p:spPr>
           <a:xfrm>
-            <a:off x="6583680" y="4572000"/>
-            <a:ext cx="4937760" cy="1097280"/>
+            <a:off x="6492240" y="4526280"/>
+            <a:ext cx="4846320" cy="1280160"/>
           </a:xfrm>
           <a:prstGeom prst="rect">
             <a:avLst/>
@@ -8681,7 +8777,7 @@
           <a:lstStyle/>
           <a:p>
             <a:pPr algn="l">
-              <a:defRPr sz="1500" b="0">
+              <a:defRPr sz="1400" b="0">
                 <a:solidFill>
                   <a:srgbClr val="CBD5E1"/>
                 </a:solidFill>
@@ -8689,11 +8785,15 @@
               </a:defRPr>
             </a:pPr>
             <a:r>
-              <a:t>PIR 在 ESP32、攝影機在 RPi，MQTT 解耦</a:t>
+              <a:t>PIR 在 ESP32、攝影機在 RPi</a:t>
             </a:r>
             <a:br/>
             <a:r>
-              <a:t>支援外網存取 + systemd 開機自啟動</a:t>
+              <a:t>→ MQTT 解耦，支援外網存取</a:t>
+            </a:r>
+            <a:br/>
+            <a:r>
+              <a:t>→ systemd 開機自啟動</a:t>
             </a:r>
           </a:p>
         </p:txBody>
@@ -8732,8 +8832,8 @@
         </p:nvSpPr>
         <p:spPr>
           <a:xfrm>
-            <a:off x="731520" y="1828800"/>
-            <a:ext cx="10515600" cy="914400"/>
+            <a:off x="457200" y="2011680"/>
+            <a:ext cx="11247120" cy="914400"/>
           </a:xfrm>
           <a:prstGeom prst="rect">
             <a:avLst/>
@@ -8768,8 +8868,8 @@
         </p:nvSpPr>
         <p:spPr>
           <a:xfrm>
-            <a:off x="731520" y="3017520"/>
-            <a:ext cx="10515600" cy="548640"/>
+            <a:off x="457200" y="3200400"/>
+            <a:ext cx="11247120" cy="548640"/>
           </a:xfrm>
           <a:prstGeom prst="rect">
             <a:avLst/>
@@ -8804,8 +8904,8 @@
         </p:nvSpPr>
         <p:spPr>
           <a:xfrm>
-            <a:off x="2103120" y="4114800"/>
-            <a:ext cx="1188720" cy="365760"/>
+            <a:off x="1920240" y="4389120"/>
+            <a:ext cx="1234440" cy="365760"/>
           </a:xfrm>
           <a:prstGeom prst="roundRect">
             <a:avLst/>
@@ -8858,8 +8958,8 @@
         </p:nvSpPr>
         <p:spPr>
           <a:xfrm>
-            <a:off x="3474720" y="4114800"/>
-            <a:ext cx="1188720" cy="365760"/>
+            <a:off x="3337560" y="4389120"/>
+            <a:ext cx="1234440" cy="365760"/>
           </a:xfrm>
           <a:prstGeom prst="roundRect">
             <a:avLst/>
@@ -8912,8 +9012,8 @@
         </p:nvSpPr>
         <p:spPr>
           <a:xfrm>
-            <a:off x="4846320" y="4114800"/>
-            <a:ext cx="1188720" cy="365760"/>
+            <a:off x="4754880" y="4389120"/>
+            <a:ext cx="1234440" cy="365760"/>
           </a:xfrm>
           <a:prstGeom prst="roundRect">
             <a:avLst/>
@@ -8966,8 +9066,8 @@
         </p:nvSpPr>
         <p:spPr>
           <a:xfrm>
-            <a:off x="6217920" y="4114800"/>
-            <a:ext cx="1188720" cy="365760"/>
+            <a:off x="6172200" y="4389120"/>
+            <a:ext cx="1234440" cy="365760"/>
           </a:xfrm>
           <a:prstGeom prst="roundRect">
             <a:avLst/>
@@ -9020,8 +9120,8 @@
         </p:nvSpPr>
         <p:spPr>
           <a:xfrm>
-            <a:off x="7589520" y="4114800"/>
-            <a:ext cx="1188720" cy="365760"/>
+            <a:off x="7589520" y="4389120"/>
+            <a:ext cx="1234440" cy="365760"/>
           </a:xfrm>
           <a:prstGeom prst="roundRect">
             <a:avLst/>
@@ -9074,8 +9174,8 @@
         </p:nvSpPr>
         <p:spPr>
           <a:xfrm>
-            <a:off x="8961120" y="4114800"/>
-            <a:ext cx="1188720" cy="365760"/>
+            <a:off x="9006840" y="4389120"/>
+            <a:ext cx="1234440" cy="365760"/>
           </a:xfrm>
           <a:prstGeom prst="roundRect">
             <a:avLst/>
@@ -9169,7 +9269,7 @@
           <a:lstStyle/>
           <a:p>
             <a:pPr algn="l">
-              <a:defRPr sz="3200" b="1">
+              <a:defRPr sz="3000" b="1">
                 <a:solidFill>
                   <a:srgbClr val="FFFFFF"/>
                 </a:solidFill>
@@ -9190,8 +9290,8 @@
         </p:nvSpPr>
         <p:spPr>
           <a:xfrm>
-            <a:off x="731520" y="1325880"/>
-            <a:ext cx="1828800" cy="38100"/>
+            <a:off x="731520" y="1280160"/>
+            <a:ext cx="1645920" cy="38100"/>
           </a:xfrm>
           <a:prstGeom prst="rect">
             <a:avLst/>
@@ -9249,11 +9349,11 @@
           <a:p>
             <a:pPr>
               <a:spcAft>
-                <a:spcPts val="800"/>
+                <a:spcPts val="1000"/>
               </a:spcAft>
             </a:pPr>
             <a:r>
-              <a:rPr sz="1600">
+              <a:rPr sz="1500">
                 <a:solidFill>
                   <a:srgbClr val="38BDF8"/>
                 </a:solidFill>
@@ -9262,23 +9362,23 @@
               <a:t>●  </a:t>
             </a:r>
             <a:r>
-              <a:rPr sz="1800">
+              <a:rPr sz="1700">
                 <a:solidFill>
                   <a:srgbClr val="FFFFFF"/>
                 </a:solidFill>
                 <a:latin typeface="Microsoft JhengHei"/>
               </a:rPr>
-              <a:t>隨著 IoT 技術普及，智慧家庭安防成為重要應用領域</a:t>
+              <a:t>IoT 技術普及，智慧家庭安防成為重要應用</a:t>
             </a:r>
           </a:p>
           <a:p>
             <a:pPr>
               <a:spcAft>
-                <a:spcPts val="800"/>
+                <a:spcPts val="1000"/>
               </a:spcAft>
             </a:pPr>
             <a:r>
-              <a:rPr sz="1600">
+              <a:rPr sz="1500">
                 <a:solidFill>
                   <a:srgbClr val="38BDF8"/>
                 </a:solidFill>
@@ -9287,23 +9387,23 @@
               <a:t>●  </a:t>
             </a:r>
             <a:r>
-              <a:rPr sz="1800">
+              <a:rPr sz="1700">
                 <a:solidFill>
                   <a:srgbClr val="FFFFFF"/>
                 </a:solidFill>
                 <a:latin typeface="Microsoft JhengHei"/>
               </a:rPr>
-              <a:t>結合 AI 影像辨識與 IoT 感測，打造智慧化安防系統</a:t>
+              <a:t>結合 AI 影像辨識與 IoT 感測技術</a:t>
             </a:r>
           </a:p>
           <a:p>
             <a:pPr>
               <a:spcAft>
-                <a:spcPts val="800"/>
+                <a:spcPts val="1000"/>
               </a:spcAft>
             </a:pPr>
             <a:r>
-              <a:rPr sz="1600">
+              <a:rPr sz="1500">
                 <a:solidFill>
                   <a:srgbClr val="38BDF8"/>
                 </a:solidFill>
@@ -9312,23 +9412,23 @@
               <a:t>●  </a:t>
             </a:r>
             <a:r>
-              <a:rPr sz="1800">
+              <a:rPr sz="1700">
                 <a:solidFill>
                   <a:srgbClr val="FFFFFF"/>
                 </a:solidFill>
                 <a:latin typeface="Microsoft JhengHei"/>
               </a:rPr>
-              <a:t>採用 Raspberry Pi + ESP32 雙裝置分散式架構</a:t>
+              <a:t>Raspberry Pi + ESP32 雙裝置分散式架構</a:t>
             </a:r>
           </a:p>
           <a:p>
             <a:pPr>
               <a:spcAft>
-                <a:spcPts val="800"/>
+                <a:spcPts val="1000"/>
               </a:spcAft>
             </a:pPr>
             <a:r>
-              <a:rPr sz="1600">
+              <a:rPr sz="1500">
                 <a:solidFill>
                   <a:srgbClr val="38BDF8"/>
                 </a:solidFill>
@@ -9337,13 +9437,13 @@
               <a:t>●  </a:t>
             </a:r>
             <a:r>
-              <a:rPr sz="1800">
+              <a:rPr sz="1700">
                 <a:solidFill>
                   <a:srgbClr val="FFFFFF"/>
                 </a:solidFill>
                 <a:latin typeface="Microsoft JhengHei"/>
               </a:rPr>
-              <a:t>透過雲端 MQTT Broker 實現跨裝置、跨網路通訊</a:t>
+              <a:t>雲端 MQTT Broker 實現跨裝置通訊</a:t>
             </a:r>
           </a:p>
         </p:txBody>
@@ -9356,8 +9456,8 @@
         </p:nvSpPr>
         <p:spPr>
           <a:xfrm>
-            <a:off x="6583680" y="1645920"/>
-            <a:ext cx="4846320" cy="1280160"/>
+            <a:off x="6400800" y="1645920"/>
+            <a:ext cx="5029200" cy="1280160"/>
           </a:xfrm>
           <a:prstGeom prst="roundRect">
             <a:avLst/>
@@ -9401,8 +9501,8 @@
         </p:nvSpPr>
         <p:spPr>
           <a:xfrm>
-            <a:off x="6858000" y="1783080"/>
-            <a:ext cx="4114800" cy="365760"/>
+            <a:off x="6766560" y="1783080"/>
+            <a:ext cx="4389120" cy="320040"/>
           </a:xfrm>
           <a:prstGeom prst="rect">
             <a:avLst/>
@@ -9416,7 +9516,7 @@
           <a:lstStyle/>
           <a:p>
             <a:pPr algn="l">
-              <a:defRPr sz="1800" b="1">
+              <a:defRPr sz="1700" b="1">
                 <a:solidFill>
                   <a:srgbClr val="F87171"/>
                 </a:solidFill>
@@ -9437,8 +9537,8 @@
         </p:nvSpPr>
         <p:spPr>
           <a:xfrm>
-            <a:off x="6858000" y="2194560"/>
-            <a:ext cx="4114800" cy="640080"/>
+            <a:off x="6766560" y="2148840"/>
+            <a:ext cx="4389120" cy="640080"/>
           </a:xfrm>
           <a:prstGeom prst="rect">
             <a:avLst/>
@@ -9452,7 +9552,7 @@
           <a:lstStyle/>
           <a:p>
             <a:pPr algn="l">
-              <a:defRPr sz="1400" b="0">
+              <a:defRPr sz="1300" b="0">
                 <a:solidFill>
                   <a:srgbClr val="CBD5E1"/>
                 </a:solidFill>
@@ -9460,7 +9560,7 @@
               </a:defRPr>
             </a:pPr>
             <a:r>
-              <a:t>PIR → 攝影機 → OpenCV</a:t>
+              <a:t>PIR → 攝影機 → MobileNet SSD</a:t>
             </a:r>
             <a:br/>
             <a:r>
@@ -9477,8 +9577,8 @@
         </p:nvSpPr>
         <p:spPr>
           <a:xfrm>
-            <a:off x="6583680" y="3200400"/>
-            <a:ext cx="4846320" cy="1280160"/>
+            <a:off x="6400800" y="3200400"/>
+            <a:ext cx="5029200" cy="1280160"/>
           </a:xfrm>
           <a:prstGeom prst="roundRect">
             <a:avLst/>
@@ -9522,8 +9622,8 @@
         </p:nvSpPr>
         <p:spPr>
           <a:xfrm>
-            <a:off x="6858000" y="3337560"/>
-            <a:ext cx="4114800" cy="365760"/>
+            <a:off x="6766560" y="3337560"/>
+            <a:ext cx="4389120" cy="320040"/>
           </a:xfrm>
           <a:prstGeom prst="rect">
             <a:avLst/>
@@ -9537,7 +9637,7 @@
           <a:lstStyle/>
           <a:p>
             <a:pPr algn="l">
-              <a:defRPr sz="1800" b="1">
+              <a:defRPr sz="1700" b="1">
                 <a:solidFill>
                   <a:srgbClr val="FBBF24"/>
                 </a:solidFill>
@@ -9545,7 +9645,7 @@
               </a:defRPr>
             </a:pPr>
             <a:r>
-              <a:t>環境自動照明</a:t>
+              <a:t>智慧自動照明</a:t>
             </a:r>
           </a:p>
         </p:txBody>
@@ -9558,8 +9658,8 @@
         </p:nvSpPr>
         <p:spPr>
           <a:xfrm>
-            <a:off x="6858000" y="3749040"/>
-            <a:ext cx="4114800" cy="640080"/>
+            <a:off x="6766560" y="3703320"/>
+            <a:ext cx="4389120" cy="640080"/>
           </a:xfrm>
           <a:prstGeom prst="rect">
             <a:avLst/>
@@ -9573,7 +9673,7 @@
           <a:lstStyle/>
           <a:p>
             <a:pPr algn="l">
-              <a:defRPr sz="1400" b="0">
+              <a:defRPr sz="1300" b="0">
                 <a:solidFill>
                   <a:srgbClr val="CBD5E1"/>
                 </a:solidFill>
@@ -9581,11 +9681,11 @@
               </a:defRPr>
             </a:pPr>
             <a:r>
-              <a:t>光敏電阻 → ADC 判斷</a:t>
+              <a:t>PIR + 光敏電阻聯動判斷</a:t>
             </a:r>
             <a:br/>
             <a:r>
-              <a:t>→ LED 自動開關</a:t>
+              <a:t>→ 有人且暗時自動開燈</a:t>
             </a:r>
           </a:p>
         </p:txBody>
@@ -9598,8 +9698,8 @@
         </p:nvSpPr>
         <p:spPr>
           <a:xfrm>
-            <a:off x="6583680" y="4754880"/>
-            <a:ext cx="4846320" cy="1280160"/>
+            <a:off x="6400800" y="4754880"/>
+            <a:ext cx="5029200" cy="1280160"/>
           </a:xfrm>
           <a:prstGeom prst="roundRect">
             <a:avLst/>
@@ -9643,8 +9743,8 @@
         </p:nvSpPr>
         <p:spPr>
           <a:xfrm>
-            <a:off x="6858000" y="4892040"/>
-            <a:ext cx="4114800" cy="365760"/>
+            <a:off x="6766560" y="4892040"/>
+            <a:ext cx="4389120" cy="320040"/>
           </a:xfrm>
           <a:prstGeom prst="rect">
             <a:avLst/>
@@ -9658,7 +9758,7 @@
           <a:lstStyle/>
           <a:p>
             <a:pPr algn="l">
-              <a:defRPr sz="1800" b="1">
+              <a:defRPr sz="1700" b="1">
                 <a:solidFill>
                   <a:srgbClr val="38BDF8"/>
                 </a:solidFill>
@@ -9679,8 +9779,8 @@
         </p:nvSpPr>
         <p:spPr>
           <a:xfrm>
-            <a:off x="6858000" y="5303520"/>
-            <a:ext cx="4114800" cy="640080"/>
+            <a:off x="6766560" y="5257800"/>
+            <a:ext cx="4389120" cy="640080"/>
           </a:xfrm>
           <a:prstGeom prst="rect">
             <a:avLst/>
@@ -9694,7 +9794,7 @@
           <a:lstStyle/>
           <a:p>
             <a:pPr algn="l">
-              <a:defRPr sz="1400" b="0">
+              <a:defRPr sz="1300" b="0">
                 <a:solidFill>
                   <a:srgbClr val="CBD5E1"/>
                 </a:solidFill>
@@ -9760,7 +9860,7 @@
           <a:lstStyle/>
           <a:p>
             <a:pPr algn="l">
-              <a:defRPr sz="3200" b="1">
+              <a:defRPr sz="3000" b="1">
                 <a:solidFill>
                   <a:srgbClr val="FFFFFF"/>
                 </a:solidFill>
@@ -9781,8 +9881,8 @@
         </p:nvSpPr>
         <p:spPr>
           <a:xfrm>
-            <a:off x="731520" y="1325880"/>
-            <a:ext cx="1828800" cy="38100"/>
+            <a:off x="731520" y="1280160"/>
+            <a:ext cx="1645920" cy="38100"/>
           </a:xfrm>
           <a:prstGeom prst="rect">
             <a:avLst/>
@@ -9824,8 +9924,8 @@
         </p:nvSpPr>
         <p:spPr>
           <a:xfrm>
-            <a:off x="457200" y="1645920"/>
-            <a:ext cx="3200400" cy="2926080"/>
+            <a:off x="457200" y="1554480"/>
+            <a:ext cx="3017520" cy="4572000"/>
           </a:xfrm>
           <a:prstGeom prst="roundRect">
             <a:avLst/>
@@ -9869,8 +9969,8 @@
         </p:nvSpPr>
         <p:spPr>
           <a:xfrm>
-            <a:off x="731520" y="1737360"/>
-            <a:ext cx="2743200" cy="365760"/>
+            <a:off x="731520" y="1645920"/>
+            <a:ext cx="2560320" cy="320040"/>
           </a:xfrm>
           <a:prstGeom prst="rect">
             <a:avLst/>
@@ -9884,7 +9984,7 @@
           <a:lstStyle/>
           <a:p>
             <a:pPr algn="l">
-              <a:defRPr sz="1600" b="1">
+              <a:defRPr sz="1500" b="1">
                 <a:solidFill>
                   <a:srgbClr val="4ADE80"/>
                 </a:solidFill>
@@ -9905,8 +10005,8 @@
         </p:nvSpPr>
         <p:spPr>
           <a:xfrm>
-            <a:off x="731520" y="2103120"/>
-            <a:ext cx="2743200" cy="274320"/>
+            <a:off x="731520" y="1965960"/>
+            <a:ext cx="2560320" cy="228600"/>
           </a:xfrm>
           <a:prstGeom prst="rect">
             <a:avLst/>
@@ -9920,7 +10020,7 @@
           <a:lstStyle/>
           <a:p>
             <a:pPr algn="l">
-              <a:defRPr sz="1300" b="0">
+              <a:defRPr sz="1200" b="0">
                 <a:solidFill>
                   <a:srgbClr val="94A3B8"/>
                 </a:solidFill>
@@ -9928,7 +10028,7 @@
               </a:defRPr>
             </a:pPr>
             <a:r>
-              <a:t>照明控制線路</a:t>
+              <a:t>感測 + 照明控制</a:t>
             </a:r>
           </a:p>
         </p:txBody>
@@ -9941,8 +10041,8 @@
         </p:nvSpPr>
         <p:spPr>
           <a:xfrm>
-            <a:off x="731520" y="2468880"/>
-            <a:ext cx="2743200" cy="2011680"/>
+            <a:off x="731520" y="2286000"/>
+            <a:ext cx="2560320" cy="3200400"/>
           </a:xfrm>
           <a:prstGeom prst="rect">
             <a:avLst/>
@@ -9957,11 +10057,11 @@
           <a:p>
             <a:pPr>
               <a:spcAft>
-                <a:spcPts val="800"/>
+                <a:spcPts val="600"/>
               </a:spcAft>
             </a:pPr>
             <a:r>
-              <a:rPr sz="1100">
+              <a:rPr sz="1000">
                 <a:solidFill>
                   <a:srgbClr val="4ADE80"/>
                 </a:solidFill>
@@ -9970,23 +10070,23 @@
               <a:t>●  </a:t>
             </a:r>
             <a:r>
-              <a:rPr sz="1300">
+              <a:rPr sz="1200">
                 <a:solidFill>
                   <a:srgbClr val="FFFFFF"/>
                 </a:solidFill>
                 <a:latin typeface="Microsoft JhengHei"/>
               </a:rPr>
-              <a:t>PIR 紅外線感測器（GPIO 27）</a:t>
+              <a:t>PIR 感測器 (GPIO 27)</a:t>
             </a:r>
           </a:p>
           <a:p>
             <a:pPr>
               <a:spcAft>
-                <a:spcPts val="800"/>
+                <a:spcPts val="600"/>
               </a:spcAft>
             </a:pPr>
             <a:r>
-              <a:rPr sz="1100">
+              <a:rPr sz="1000">
                 <a:solidFill>
                   <a:srgbClr val="4ADE80"/>
                 </a:solidFill>
@@ -9995,23 +10095,23 @@
               <a:t>●  </a:t>
             </a:r>
             <a:r>
-              <a:rPr sz="1300">
+              <a:rPr sz="1200">
                 <a:solidFill>
                   <a:srgbClr val="FFFFFF"/>
                 </a:solidFill>
                 <a:latin typeface="Microsoft JhengHei"/>
               </a:rPr>
-              <a:t>光敏電阻（ADC 直讀）</a:t>
+              <a:t>光敏電阻 ADC (GPIO 34)</a:t>
             </a:r>
           </a:p>
           <a:p>
             <a:pPr>
               <a:spcAft>
-                <a:spcPts val="800"/>
+                <a:spcPts val="600"/>
               </a:spcAft>
             </a:pPr>
             <a:r>
-              <a:rPr sz="1100">
+              <a:rPr sz="1000">
                 <a:solidFill>
                   <a:srgbClr val="4ADE80"/>
                 </a:solidFill>
@@ -10020,7 +10120,7 @@
               <a:t>●  </a:t>
             </a:r>
             <a:r>
-              <a:rPr sz="1300">
+              <a:rPr sz="1200">
                 <a:solidFill>
                   <a:srgbClr val="FFFFFF"/>
                 </a:solidFill>
@@ -10032,11 +10132,11 @@
           <a:p>
             <a:pPr>
               <a:spcAft>
-                <a:spcPts val="800"/>
+                <a:spcPts val="600"/>
               </a:spcAft>
             </a:pPr>
             <a:r>
-              <a:rPr sz="1100">
+              <a:rPr sz="1000">
                 <a:solidFill>
                   <a:srgbClr val="4ADE80"/>
                 </a:solidFill>
@@ -10045,23 +10145,23 @@
               <a:t>●  </a:t>
             </a:r>
             <a:r>
-              <a:rPr sz="1300">
+              <a:rPr sz="1200">
                 <a:solidFill>
                   <a:srgbClr val="FFFFFF"/>
                 </a:solidFill>
                 <a:latin typeface="Microsoft JhengHei"/>
               </a:rPr>
-              <a:t>MQTT 發布 PIR + 亮度數據</a:t>
+              <a:t>MQTT 發布 PIR + 亮度</a:t>
             </a:r>
           </a:p>
           <a:p>
             <a:pPr>
               <a:spcAft>
-                <a:spcPts val="800"/>
+                <a:spcPts val="600"/>
               </a:spcAft>
             </a:pPr>
             <a:r>
-              <a:rPr sz="1100">
+              <a:rPr sz="1000">
                 <a:solidFill>
                   <a:srgbClr val="4ADE80"/>
                 </a:solidFill>
@@ -10070,7 +10170,7 @@
               <a:t>●  </a:t>
             </a:r>
             <a:r>
-              <a:rPr sz="1300">
+              <a:rPr sz="1200">
                 <a:solidFill>
                   <a:srgbClr val="FFFFFF"/>
                 </a:solidFill>
@@ -10089,8 +10189,8 @@
         </p:nvSpPr>
         <p:spPr>
           <a:xfrm>
-            <a:off x="457200" y="4754880"/>
-            <a:ext cx="3200400" cy="1828800"/>
+            <a:off x="457200" y="4206240"/>
+            <a:ext cx="3017520" cy="1920240"/>
           </a:xfrm>
           <a:prstGeom prst="roundRect">
             <a:avLst/>
@@ -10134,8 +10234,8 @@
         </p:nvSpPr>
         <p:spPr>
           <a:xfrm>
-            <a:off x="731520" y="4846320"/>
-            <a:ext cx="2743200" cy="365760"/>
+            <a:off x="731520" y="4297680"/>
+            <a:ext cx="2560320" cy="320040"/>
           </a:xfrm>
           <a:prstGeom prst="rect">
             <a:avLst/>
@@ -10149,7 +10249,7 @@
           <a:lstStyle/>
           <a:p>
             <a:pPr algn="l">
-              <a:defRPr sz="1600" b="1">
+              <a:defRPr sz="1500" b="1">
                 <a:solidFill>
                   <a:srgbClr val="38BDF8"/>
                 </a:solidFill>
@@ -10170,8 +10270,8 @@
         </p:nvSpPr>
         <p:spPr>
           <a:xfrm>
-            <a:off x="731520" y="5212080"/>
-            <a:ext cx="2743200" cy="274320"/>
+            <a:off x="731520" y="4617720"/>
+            <a:ext cx="2560320" cy="228600"/>
           </a:xfrm>
           <a:prstGeom prst="rect">
             <a:avLst/>
@@ -10185,7 +10285,7 @@
           <a:lstStyle/>
           <a:p>
             <a:pPr algn="l">
-              <a:defRPr sz="1300" b="0">
+              <a:defRPr sz="1200" b="0">
                 <a:solidFill>
                   <a:srgbClr val="94A3B8"/>
                 </a:solidFill>
@@ -10206,8 +10306,8 @@
         </p:nvSpPr>
         <p:spPr>
           <a:xfrm>
-            <a:off x="731520" y="5577840"/>
-            <a:ext cx="2743200" cy="1371600"/>
+            <a:off x="731520" y="4892040"/>
+            <a:ext cx="2560320" cy="1371600"/>
           </a:xfrm>
           <a:prstGeom prst="rect">
             <a:avLst/>
@@ -10222,11 +10322,11 @@
           <a:p>
             <a:pPr>
               <a:spcAft>
-                <a:spcPts val="800"/>
+                <a:spcPts val="500"/>
               </a:spcAft>
             </a:pPr>
             <a:r>
-              <a:rPr sz="1100">
+              <a:rPr sz="1000">
                 <a:solidFill>
                   <a:srgbClr val="38BDF8"/>
                 </a:solidFill>
@@ -10235,7 +10335,7 @@
               <a:t>●  </a:t>
             </a:r>
             <a:r>
-              <a:rPr sz="1300">
+              <a:rPr sz="1200">
                 <a:solidFill>
                   <a:srgbClr val="FFFFFF"/>
                 </a:solidFill>
@@ -10247,11 +10347,11 @@
           <a:p>
             <a:pPr>
               <a:spcAft>
-                <a:spcPts val="800"/>
+                <a:spcPts val="500"/>
               </a:spcAft>
             </a:pPr>
             <a:r>
-              <a:rPr sz="1100">
+              <a:rPr sz="1000">
                 <a:solidFill>
                   <a:srgbClr val="38BDF8"/>
                 </a:solidFill>
@@ -10260,7 +10360,7 @@
               <a:t>●  </a:t>
             </a:r>
             <a:r>
-              <a:rPr sz="1300">
+              <a:rPr sz="1200">
                 <a:solidFill>
                   <a:srgbClr val="FFFFFF"/>
                 </a:solidFill>
@@ -10272,11 +10372,11 @@
           <a:p>
             <a:pPr>
               <a:spcAft>
-                <a:spcPts val="800"/>
+                <a:spcPts val="500"/>
               </a:spcAft>
             </a:pPr>
             <a:r>
-              <a:rPr sz="1100">
+              <a:rPr sz="1000">
                 <a:solidFill>
                   <a:srgbClr val="38BDF8"/>
                 </a:solidFill>
@@ -10285,32 +10385,7 @@
               <a:t>●  </a:t>
             </a:r>
             <a:r>
-              <a:rPr sz="1300">
-                <a:solidFill>
-                  <a:srgbClr val="FFFFFF"/>
-                </a:solidFill>
-                <a:latin typeface="Microsoft JhengHei"/>
-              </a:rPr>
-              <a:t>MQTT 接收 PIR 觸發訊號</a:t>
-            </a:r>
-          </a:p>
-          <a:p>
-            <a:pPr>
-              <a:spcAft>
-                <a:spcPts val="800"/>
-              </a:spcAft>
-            </a:pPr>
-            <a:r>
-              <a:rPr sz="1100">
-                <a:solidFill>
-                  <a:srgbClr val="38BDF8"/>
-                </a:solidFill>
-                <a:latin typeface="Microsoft JhengHei"/>
-              </a:rPr>
-              <a:t>●  </a:t>
-            </a:r>
-            <a:r>
-              <a:rPr sz="1300">
+              <a:rPr sz="1200">
                 <a:solidFill>
                   <a:srgbClr val="FFFFFF"/>
                 </a:solidFill>
@@ -10329,8 +10404,8 @@
         </p:nvSpPr>
         <p:spPr>
           <a:xfrm>
-            <a:off x="4572000" y="2560320"/>
-            <a:ext cx="3017520" cy="1828800"/>
+            <a:off x="4389120" y="2560320"/>
+            <a:ext cx="3200400" cy="2011680"/>
           </a:xfrm>
           <a:prstGeom prst="roundRect">
             <a:avLst/>
@@ -10374,8 +10449,8 @@
         </p:nvSpPr>
         <p:spPr>
           <a:xfrm>
-            <a:off x="4846320" y="2651760"/>
-            <a:ext cx="2468880" cy="365760"/>
+            <a:off x="4663440" y="2651760"/>
+            <a:ext cx="2743200" cy="320040"/>
           </a:xfrm>
           <a:prstGeom prst="rect">
             <a:avLst/>
@@ -10389,7 +10464,7 @@
           <a:lstStyle/>
           <a:p>
             <a:pPr algn="l">
-              <a:defRPr sz="1800" b="1">
+              <a:defRPr sz="1700" b="1">
                 <a:solidFill>
                   <a:srgbClr val="A78BFA"/>
                 </a:solidFill>
@@ -10410,8 +10485,8 @@
         </p:nvSpPr>
         <p:spPr>
           <a:xfrm>
-            <a:off x="4846320" y="3063240"/>
-            <a:ext cx="2468880" cy="274320"/>
+            <a:off x="4663440" y="3017520"/>
+            <a:ext cx="2743200" cy="228600"/>
           </a:xfrm>
           <a:prstGeom prst="rect">
             <a:avLst/>
@@ -10425,7 +10500,7 @@
           <a:lstStyle/>
           <a:p>
             <a:pPr algn="l">
-              <a:defRPr sz="1300" b="0">
+              <a:defRPr sz="1200" b="0">
                 <a:solidFill>
                   <a:srgbClr val="94A3B8"/>
                 </a:solidFill>
@@ -10446,8 +10521,8 @@
         </p:nvSpPr>
         <p:spPr>
           <a:xfrm>
-            <a:off x="4846320" y="3474720"/>
-            <a:ext cx="2468880" cy="1371600"/>
+            <a:off x="4663440" y="3337560"/>
+            <a:ext cx="2743200" cy="1097280"/>
           </a:xfrm>
           <a:prstGeom prst="rect">
             <a:avLst/>
@@ -10462,11 +10537,11 @@
           <a:p>
             <a:pPr>
               <a:spcAft>
-                <a:spcPts val="800"/>
+                <a:spcPts val="500"/>
               </a:spcAft>
             </a:pPr>
             <a:r>
-              <a:rPr sz="1000">
+              <a:rPr sz="900">
                 <a:solidFill>
                   <a:srgbClr val="A78BFA"/>
                 </a:solidFill>
@@ -10475,23 +10550,23 @@
               <a:t>●  </a:t>
             </a:r>
             <a:r>
-              <a:rPr sz="1200">
+              <a:rPr sz="1100">
                 <a:solidFill>
                   <a:srgbClr val="FFFFFF"/>
                 </a:solidFill>
                 <a:latin typeface="Microsoft JhengHei"/>
               </a:rPr>
-              <a:t>TLS 加密（port 8883）</a:t>
+              <a:t>TLS 加密 (port 8883)</a:t>
             </a:r>
           </a:p>
           <a:p>
             <a:pPr>
               <a:spcAft>
-                <a:spcPts val="800"/>
+                <a:spcPts val="500"/>
               </a:spcAft>
             </a:pPr>
             <a:r>
-              <a:rPr sz="1000">
+              <a:rPr sz="900">
                 <a:solidFill>
                   <a:srgbClr val="A78BFA"/>
                 </a:solidFill>
@@ -10500,23 +10575,23 @@
               <a:t>●  </a:t>
             </a:r>
             <a:r>
-              <a:rPr sz="1200">
+              <a:rPr sz="1100">
                 <a:solidFill>
                   <a:srgbClr val="FFFFFF"/>
                 </a:solidFill>
                 <a:latin typeface="Microsoft JhengHei"/>
               </a:rPr>
-              <a:t>WSS 連線（port 8884）</a:t>
+              <a:t>WSS 連線 (port 8884)</a:t>
             </a:r>
           </a:p>
           <a:p>
             <a:pPr>
               <a:spcAft>
-                <a:spcPts val="800"/>
+                <a:spcPts val="500"/>
               </a:spcAft>
             </a:pPr>
             <a:r>
-              <a:rPr sz="1000">
+              <a:rPr sz="900">
                 <a:solidFill>
                   <a:srgbClr val="A78BFA"/>
                 </a:solidFill>
@@ -10525,7 +10600,7 @@
               <a:t>●  </a:t>
             </a:r>
             <a:r>
-              <a:rPr sz="1200">
+              <a:rPr sz="1100">
                 <a:solidFill>
                   <a:srgbClr val="FFFFFF"/>
                 </a:solidFill>
@@ -10544,8 +10619,8 @@
         </p:nvSpPr>
         <p:spPr>
           <a:xfrm>
-            <a:off x="8503920" y="1645920"/>
-            <a:ext cx="3200400" cy="2011680"/>
+            <a:off x="8503920" y="1554480"/>
+            <a:ext cx="3200400" cy="2286000"/>
           </a:xfrm>
           <a:prstGeom prst="roundRect">
             <a:avLst/>
@@ -10589,8 +10664,8 @@
         </p:nvSpPr>
         <p:spPr>
           <a:xfrm>
-            <a:off x="8778240" y="1737360"/>
-            <a:ext cx="2743200" cy="365760"/>
+            <a:off x="8778240" y="1645920"/>
+            <a:ext cx="2743200" cy="320040"/>
           </a:xfrm>
           <a:prstGeom prst="rect">
             <a:avLst/>
@@ -10604,7 +10679,7 @@
           <a:lstStyle/>
           <a:p>
             <a:pPr algn="l">
-              <a:defRPr sz="1600" b="1">
+              <a:defRPr sz="1500" b="1">
                 <a:solidFill>
                   <a:srgbClr val="FBBF24"/>
                 </a:solidFill>
@@ -10625,8 +10700,8 @@
         </p:nvSpPr>
         <p:spPr>
           <a:xfrm>
-            <a:off x="8778240" y="2103120"/>
-            <a:ext cx="2743200" cy="274320"/>
+            <a:off x="8778240" y="1965960"/>
+            <a:ext cx="2743200" cy="228600"/>
           </a:xfrm>
           <a:prstGeom prst="rect">
             <a:avLst/>
@@ -10640,7 +10715,7 @@
           <a:lstStyle/>
           <a:p>
             <a:pPr algn="l">
-              <a:defRPr sz="1300" b="0">
+              <a:defRPr sz="1200" b="0">
                 <a:solidFill>
                   <a:srgbClr val="94A3B8"/>
                 </a:solidFill>
@@ -10661,8 +10736,8 @@
         </p:nvSpPr>
         <p:spPr>
           <a:xfrm>
-            <a:off x="8778240" y="2468880"/>
-            <a:ext cx="2743200" cy="1645920"/>
+            <a:off x="8778240" y="2286000"/>
+            <a:ext cx="2743200" cy="1371600"/>
           </a:xfrm>
           <a:prstGeom prst="rect">
             <a:avLst/>
@@ -10677,11 +10752,11 @@
           <a:p>
             <a:pPr>
               <a:spcAft>
-                <a:spcPts val="800"/>
+                <a:spcPts val="500"/>
               </a:spcAft>
             </a:pPr>
             <a:r>
-              <a:rPr sz="1100">
+              <a:rPr sz="1000">
                 <a:solidFill>
                   <a:srgbClr val="FBBF24"/>
                 </a:solidFill>
@@ -10690,23 +10765,23 @@
               <a:t>●  </a:t>
             </a:r>
             <a:r>
-              <a:rPr sz="1300">
+              <a:rPr sz="1200">
                 <a:solidFill>
                   <a:srgbClr val="FFFFFF"/>
                 </a:solidFill>
                 <a:latin typeface="Microsoft JhengHei"/>
               </a:rPr>
-              <a:t>即時截圖顯示</a:t>
+              <a:t>即時截圖 + PIR 狀態</a:t>
             </a:r>
           </a:p>
           <a:p>
             <a:pPr>
               <a:spcAft>
-                <a:spcPts val="800"/>
+                <a:spcPts val="500"/>
               </a:spcAft>
             </a:pPr>
             <a:r>
-              <a:rPr sz="1100">
+              <a:rPr sz="1000">
                 <a:solidFill>
                   <a:srgbClr val="FBBF24"/>
                 </a:solidFill>
@@ -10715,7 +10790,7 @@
               <a:t>●  </a:t>
             </a:r>
             <a:r>
-              <a:rPr sz="1300">
+              <a:rPr sz="1200">
                 <a:solidFill>
                   <a:srgbClr val="FFFFFF"/>
                 </a:solidFill>
@@ -10727,11 +10802,11 @@
           <a:p>
             <a:pPr>
               <a:spcAft>
-                <a:spcPts val="800"/>
+                <a:spcPts val="500"/>
               </a:spcAft>
             </a:pPr>
             <a:r>
-              <a:rPr sz="1100">
+              <a:rPr sz="1000">
                 <a:solidFill>
                   <a:srgbClr val="FBBF24"/>
                 </a:solidFill>
@@ -10740,38 +10815,13 @@
               <a:t>●  </a:t>
             </a:r>
             <a:r>
-              <a:rPr sz="1300">
+              <a:rPr sz="1200">
                 <a:solidFill>
                   <a:srgbClr val="FFFFFF"/>
                 </a:solidFill>
                 <a:latin typeface="Microsoft JhengHei"/>
               </a:rPr>
-              <a:t>警報事件列表</a:t>
-            </a:r>
-          </a:p>
-          <a:p>
-            <a:pPr>
-              <a:spcAft>
-                <a:spcPts val="800"/>
-              </a:spcAft>
-            </a:pPr>
-            <a:r>
-              <a:rPr sz="1100">
-                <a:solidFill>
-                  <a:srgbClr val="FBBF24"/>
-                </a:solidFill>
-                <a:latin typeface="Microsoft JhengHei"/>
-              </a:rPr>
-              <a:t>●  </a:t>
-            </a:r>
-            <a:r>
-              <a:rPr sz="1300">
-                <a:solidFill>
-                  <a:srgbClr val="FFFFFF"/>
-                </a:solidFill>
-                <a:latin typeface="Microsoft JhengHei"/>
-              </a:rPr>
-              <a:t>系統狀態監控</a:t>
+              <a:t>警報事件 + 系統狀態</a:t>
             </a:r>
           </a:p>
         </p:txBody>
@@ -10784,8 +10834,8 @@
         </p:nvSpPr>
         <p:spPr>
           <a:xfrm>
-            <a:off x="8503920" y="3931920"/>
-            <a:ext cx="3200400" cy="1097280"/>
+            <a:off x="8503920" y="4114800"/>
+            <a:ext cx="3200400" cy="1188720"/>
           </a:xfrm>
           <a:prstGeom prst="roundRect">
             <a:avLst/>
@@ -10829,8 +10879,8 @@
         </p:nvSpPr>
         <p:spPr>
           <a:xfrm>
-            <a:off x="8778240" y="4023360"/>
-            <a:ext cx="2743200" cy="365760"/>
+            <a:off x="8778240" y="4206240"/>
+            <a:ext cx="2743200" cy="320040"/>
           </a:xfrm>
           <a:prstGeom prst="rect">
             <a:avLst/>
@@ -10844,7 +10894,7 @@
           <a:lstStyle/>
           <a:p>
             <a:pPr algn="l">
-              <a:defRPr sz="1600" b="1">
+              <a:defRPr sz="1500" b="1">
                 <a:solidFill>
                   <a:srgbClr val="F87171"/>
                 </a:solidFill>
@@ -10865,8 +10915,8 @@
         </p:nvSpPr>
         <p:spPr>
           <a:xfrm>
-            <a:off x="8778240" y="4389120"/>
-            <a:ext cx="2743200" cy="457200"/>
+            <a:off x="8778240" y="4572000"/>
+            <a:ext cx="2743200" cy="548640"/>
           </a:xfrm>
           <a:prstGeom prst="rect">
             <a:avLst/>
@@ -10880,7 +10930,7 @@
           <a:lstStyle/>
           <a:p>
             <a:pPr algn="l">
-              <a:defRPr sz="1300" b="0">
+              <a:defRPr sz="1200" b="0">
                 <a:solidFill>
                   <a:srgbClr val="CBD5E1"/>
                 </a:solidFill>
@@ -10905,8 +10955,8 @@
         </p:nvSpPr>
         <p:spPr>
           <a:xfrm>
-            <a:off x="3749039" y="2743200"/>
-            <a:ext cx="914400" cy="274320"/>
+            <a:off x="3566160" y="2926080"/>
+            <a:ext cx="822960" cy="274320"/>
           </a:xfrm>
           <a:prstGeom prst="rect">
             <a:avLst/>
@@ -10920,7 +10970,7 @@
           <a:lstStyle/>
           <a:p>
             <a:pPr algn="l">
-              <a:defRPr sz="1200" b="1">
+              <a:defRPr sz="1100" b="1">
                 <a:solidFill>
                   <a:srgbClr val="4ADE80"/>
                 </a:solidFill>
@@ -10941,8 +10991,8 @@
         </p:nvSpPr>
         <p:spPr>
           <a:xfrm>
-            <a:off x="3749039" y="5303520"/>
-            <a:ext cx="914400" cy="274320"/>
+            <a:off x="3566160" y="4754880"/>
+            <a:ext cx="822960" cy="274320"/>
           </a:xfrm>
           <a:prstGeom prst="rect">
             <a:avLst/>
@@ -10956,7 +11006,7 @@
           <a:lstStyle/>
           <a:p>
             <a:pPr algn="l">
-              <a:defRPr sz="1200" b="1">
+              <a:defRPr sz="1100" b="1">
                 <a:solidFill>
                   <a:srgbClr val="38BDF8"/>
                 </a:solidFill>
@@ -10978,7 +11028,7 @@
         <p:spPr>
           <a:xfrm>
             <a:off x="7680960" y="2286000"/>
-            <a:ext cx="914400" cy="274320"/>
+            <a:ext cx="822960" cy="274320"/>
           </a:xfrm>
           <a:prstGeom prst="rect">
             <a:avLst/>
@@ -10992,7 +11042,7 @@
           <a:lstStyle/>
           <a:p>
             <a:pPr algn="l">
-              <a:defRPr sz="1200" b="1">
+              <a:defRPr sz="1100" b="1">
                 <a:solidFill>
                   <a:srgbClr val="FBBF24"/>
                 </a:solidFill>
@@ -11013,8 +11063,8 @@
         </p:nvSpPr>
         <p:spPr>
           <a:xfrm>
-            <a:off x="7680960" y="4206240"/>
-            <a:ext cx="914400" cy="274320"/>
+            <a:off x="7680960" y="4389120"/>
+            <a:ext cx="822960" cy="274320"/>
           </a:xfrm>
           <a:prstGeom prst="rect">
             <a:avLst/>
@@ -11028,7 +11078,7 @@
           <a:lstStyle/>
           <a:p>
             <a:pPr algn="l">
-              <a:defRPr sz="1200" b="1">
+              <a:defRPr sz="1100" b="1">
                 <a:solidFill>
                   <a:srgbClr val="F87171"/>
                 </a:solidFill>
@@ -11090,7 +11140,7 @@
           <a:lstStyle/>
           <a:p>
             <a:pPr algn="l">
-              <a:defRPr sz="3200" b="1">
+              <a:defRPr sz="3000" b="1">
                 <a:solidFill>
                   <a:srgbClr val="FFFFFF"/>
                 </a:solidFill>
@@ -11111,7 +11161,7 @@
         </p:nvSpPr>
         <p:spPr>
           <a:xfrm>
-            <a:off x="731520" y="914400"/>
+            <a:off x="731520" y="868680"/>
             <a:ext cx="10058400" cy="365760"/>
           </a:xfrm>
           <a:prstGeom prst="rect">
@@ -11126,7 +11176,7 @@
           <a:lstStyle/>
           <a:p>
             <a:pPr algn="l">
-              <a:defRPr sz="1600" b="0">
+              <a:defRPr sz="1500" b="0">
                 <a:solidFill>
                   <a:srgbClr val="94A3B8"/>
                 </a:solidFill>
@@ -11147,8 +11197,8 @@
         </p:nvSpPr>
         <p:spPr>
           <a:xfrm>
-            <a:off x="731520" y="1325880"/>
-            <a:ext cx="1828800" cy="38100"/>
+            <a:off x="731520" y="1280160"/>
+            <a:ext cx="1645920" cy="38100"/>
           </a:xfrm>
           <a:prstGeom prst="rect">
             <a:avLst/>
@@ -11190,8 +11240,8 @@
         </p:nvSpPr>
         <p:spPr>
           <a:xfrm>
-            <a:off x="457200" y="1828800"/>
-            <a:ext cx="1691640" cy="1828800"/>
+            <a:off x="723747" y="1645920"/>
+            <a:ext cx="1600200" cy="1737360"/>
           </a:xfrm>
           <a:prstGeom prst="roundRect">
             <a:avLst/>
@@ -11235,8 +11285,8 @@
         </p:nvSpPr>
         <p:spPr>
           <a:xfrm>
-            <a:off x="1051560" y="1965960"/>
-            <a:ext cx="502920" cy="502920"/>
+            <a:off x="1318107" y="1755648"/>
+            <a:ext cx="411480" cy="411480"/>
           </a:xfrm>
           <a:prstGeom prst="roundRect">
             <a:avLst/>
@@ -11268,7 +11318,7 @@
           <a:p>
             <a:pPr algn="ctr"/>
             <a:r>
-              <a:rPr sz="2000" b="1">
+              <a:rPr sz="1800" b="1">
                 <a:solidFill>
                   <a:srgbClr val="0F172A"/>
                 </a:solidFill>
@@ -11287,8 +11337,8 @@
         </p:nvSpPr>
         <p:spPr>
           <a:xfrm>
-            <a:off x="548640" y="2560320"/>
-            <a:ext cx="1508760" cy="320040"/>
+            <a:off x="769467" y="2240280"/>
+            <a:ext cx="1508760" cy="274320"/>
           </a:xfrm>
           <a:prstGeom prst="rect">
             <a:avLst/>
@@ -11302,7 +11352,7 @@
           <a:lstStyle/>
           <a:p>
             <a:pPr algn="ctr">
-              <a:defRPr sz="1500" b="1">
+              <a:defRPr sz="1300" b="1">
                 <a:solidFill>
                   <a:srgbClr val="4ADE80"/>
                 </a:solidFill>
@@ -11323,8 +11373,8 @@
         </p:nvSpPr>
         <p:spPr>
           <a:xfrm>
-            <a:off x="548640" y="2926080"/>
-            <a:ext cx="1508760" cy="640080"/>
+            <a:off x="769467" y="2560320"/>
+            <a:ext cx="1508760" cy="731520"/>
           </a:xfrm>
           <a:prstGeom prst="rect">
             <a:avLst/>
@@ -11338,7 +11388,7 @@
           <a:lstStyle/>
           <a:p>
             <a:pPr algn="ctr">
-              <a:defRPr sz="1200" b="0">
+              <a:defRPr sz="1100" b="0">
                 <a:solidFill>
                   <a:srgbClr val="CBD5E1"/>
                 </a:solidFill>
@@ -11350,7 +11400,7 @@
             </a:r>
             <a:br/>
             <a:r>
-              <a:t>GPIO 27 偵測移動</a:t>
+              <a:t>GPIO 27 偵測</a:t>
             </a:r>
           </a:p>
         </p:txBody>
@@ -11363,8 +11413,8 @@
         </p:nvSpPr>
         <p:spPr>
           <a:xfrm>
-            <a:off x="2148840" y="2514600"/>
-            <a:ext cx="274320" cy="365760"/>
+            <a:off x="2323947" y="2286000"/>
+            <a:ext cx="228600" cy="274320"/>
           </a:xfrm>
           <a:prstGeom prst="rect">
             <a:avLst/>
@@ -11378,7 +11428,7 @@
           <a:lstStyle/>
           <a:p>
             <a:pPr algn="ctr">
-              <a:defRPr sz="2000" b="0">
+              <a:defRPr sz="1800" b="0">
                 <a:solidFill>
                   <a:srgbClr val="94A3B8"/>
                 </a:solidFill>
@@ -11399,8 +11449,8 @@
         </p:nvSpPr>
         <p:spPr>
           <a:xfrm>
-            <a:off x="2377440" y="1828800"/>
-            <a:ext cx="1691640" cy="1828800"/>
+            <a:off x="2552547" y="1645920"/>
+            <a:ext cx="1600200" cy="1737360"/>
           </a:xfrm>
           <a:prstGeom prst="roundRect">
             <a:avLst/>
@@ -11444,8 +11494,8 @@
         </p:nvSpPr>
         <p:spPr>
           <a:xfrm>
-            <a:off x="2971800" y="1965960"/>
-            <a:ext cx="502920" cy="502920"/>
+            <a:off x="3146907" y="1755648"/>
+            <a:ext cx="411480" cy="411480"/>
           </a:xfrm>
           <a:prstGeom prst="roundRect">
             <a:avLst/>
@@ -11477,7 +11527,7 @@
           <a:p>
             <a:pPr algn="ctr"/>
             <a:r>
-              <a:rPr sz="2000" b="1">
+              <a:rPr sz="1800" b="1">
                 <a:solidFill>
                   <a:srgbClr val="0F172A"/>
                 </a:solidFill>
@@ -11496,8 +11546,8 @@
         </p:nvSpPr>
         <p:spPr>
           <a:xfrm>
-            <a:off x="2468880" y="2560320"/>
-            <a:ext cx="1508760" cy="320040"/>
+            <a:off x="2598267" y="2240280"/>
+            <a:ext cx="1508760" cy="274320"/>
           </a:xfrm>
           <a:prstGeom prst="rect">
             <a:avLst/>
@@ -11511,7 +11561,7 @@
           <a:lstStyle/>
           <a:p>
             <a:pPr algn="ctr">
-              <a:defRPr sz="1500" b="1">
+              <a:defRPr sz="1300" b="1">
                 <a:solidFill>
                   <a:srgbClr val="A78BFA"/>
                 </a:solidFill>
@@ -11532,8 +11582,8 @@
         </p:nvSpPr>
         <p:spPr>
           <a:xfrm>
-            <a:off x="2468880" y="2926080"/>
-            <a:ext cx="1508760" cy="640080"/>
+            <a:off x="2598267" y="2560320"/>
+            <a:ext cx="1508760" cy="731520"/>
           </a:xfrm>
           <a:prstGeom prst="rect">
             <a:avLst/>
@@ -11547,7 +11597,7 @@
           <a:lstStyle/>
           <a:p>
             <a:pPr algn="ctr">
-              <a:defRPr sz="1200" b="0">
+              <a:defRPr sz="1100" b="0">
                 <a:solidFill>
                   <a:srgbClr val="CBD5E1"/>
                 </a:solidFill>
@@ -11572,8 +11622,8 @@
         </p:nvSpPr>
         <p:spPr>
           <a:xfrm>
-            <a:off x="4069080" y="2514600"/>
-            <a:ext cx="274320" cy="365760"/>
+            <a:off x="4152747" y="2286000"/>
+            <a:ext cx="228600" cy="274320"/>
           </a:xfrm>
           <a:prstGeom prst="rect">
             <a:avLst/>
@@ -11587,7 +11637,7 @@
           <a:lstStyle/>
           <a:p>
             <a:pPr algn="ctr">
-              <a:defRPr sz="2000" b="0">
+              <a:defRPr sz="1800" b="0">
                 <a:solidFill>
                   <a:srgbClr val="94A3B8"/>
                 </a:solidFill>
@@ -11608,8 +11658,8 @@
         </p:nvSpPr>
         <p:spPr>
           <a:xfrm>
-            <a:off x="4297680" y="1828800"/>
-            <a:ext cx="1691640" cy="1828800"/>
+            <a:off x="4381347" y="1645920"/>
+            <a:ext cx="1600200" cy="1737360"/>
           </a:xfrm>
           <a:prstGeom prst="roundRect">
             <a:avLst/>
@@ -11653,8 +11703,8 @@
         </p:nvSpPr>
         <p:spPr>
           <a:xfrm>
-            <a:off x="4892040" y="1965960"/>
-            <a:ext cx="502920" cy="502920"/>
+            <a:off x="4975707" y="1755648"/>
+            <a:ext cx="411480" cy="411480"/>
           </a:xfrm>
           <a:prstGeom prst="roundRect">
             <a:avLst/>
@@ -11686,7 +11736,7 @@
           <a:p>
             <a:pPr algn="ctr"/>
             <a:r>
-              <a:rPr sz="2000" b="1">
+              <a:rPr sz="1800" b="1">
                 <a:solidFill>
                   <a:srgbClr val="0F172A"/>
                 </a:solidFill>
@@ -11705,8 +11755,8 @@
         </p:nvSpPr>
         <p:spPr>
           <a:xfrm>
-            <a:off x="4389120" y="2560320"/>
-            <a:ext cx="1508760" cy="320040"/>
+            <a:off x="4427067" y="2240280"/>
+            <a:ext cx="1508760" cy="274320"/>
           </a:xfrm>
           <a:prstGeom prst="rect">
             <a:avLst/>
@@ -11720,7 +11770,7 @@
           <a:lstStyle/>
           <a:p>
             <a:pPr algn="ctr">
-              <a:defRPr sz="1500" b="1">
+              <a:defRPr sz="1300" b="1">
                 <a:solidFill>
                   <a:srgbClr val="38BDF8"/>
                 </a:solidFill>
@@ -11741,8 +11791,8 @@
         </p:nvSpPr>
         <p:spPr>
           <a:xfrm>
-            <a:off x="4389120" y="2926080"/>
-            <a:ext cx="1508760" cy="640080"/>
+            <a:off x="4427067" y="2560320"/>
+            <a:ext cx="1508760" cy="731520"/>
           </a:xfrm>
           <a:prstGeom prst="rect">
             <a:avLst/>
@@ -11756,7 +11806,7 @@
           <a:lstStyle/>
           <a:p>
             <a:pPr algn="ctr">
-              <a:defRPr sz="1200" b="0">
+              <a:defRPr sz="1100" b="0">
                 <a:solidFill>
                   <a:srgbClr val="CBD5E1"/>
                 </a:solidFill>
@@ -11768,7 +11818,7 @@
             </a:r>
             <a:br/>
             <a:r>
-              <a:t>連拍 3 張照片</a:t>
+              <a:t>連拍 3 張</a:t>
             </a:r>
           </a:p>
         </p:txBody>
@@ -11781,8 +11831,8 @@
         </p:nvSpPr>
         <p:spPr>
           <a:xfrm>
-            <a:off x="5989320" y="2514600"/>
-            <a:ext cx="274320" cy="365760"/>
+            <a:off x="5981547" y="2286000"/>
+            <a:ext cx="228600" cy="274320"/>
           </a:xfrm>
           <a:prstGeom prst="rect">
             <a:avLst/>
@@ -11796,7 +11846,7 @@
           <a:lstStyle/>
           <a:p>
             <a:pPr algn="ctr">
-              <a:defRPr sz="2000" b="0">
+              <a:defRPr sz="1800" b="0">
                 <a:solidFill>
                   <a:srgbClr val="94A3B8"/>
                 </a:solidFill>
@@ -11817,8 +11867,8 @@
         </p:nvSpPr>
         <p:spPr>
           <a:xfrm>
-            <a:off x="6217920" y="1828800"/>
-            <a:ext cx="1691640" cy="1828800"/>
+            <a:off x="6210147" y="1645920"/>
+            <a:ext cx="1600200" cy="1737360"/>
           </a:xfrm>
           <a:prstGeom prst="roundRect">
             <a:avLst/>
@@ -11862,8 +11912,8 @@
         </p:nvSpPr>
         <p:spPr>
           <a:xfrm>
-            <a:off x="6812280" y="1965960"/>
-            <a:ext cx="502920" cy="502920"/>
+            <a:off x="6804507" y="1755648"/>
+            <a:ext cx="411480" cy="411480"/>
           </a:xfrm>
           <a:prstGeom prst="roundRect">
             <a:avLst/>
@@ -11895,7 +11945,7 @@
           <a:p>
             <a:pPr algn="ctr"/>
             <a:r>
-              <a:rPr sz="2000" b="1">
+              <a:rPr sz="1800" b="1">
                 <a:solidFill>
                   <a:srgbClr val="0F172A"/>
                 </a:solidFill>
@@ -11914,8 +11964,8 @@
         </p:nvSpPr>
         <p:spPr>
           <a:xfrm>
-            <a:off x="6309360" y="2560320"/>
-            <a:ext cx="1508760" cy="320040"/>
+            <a:off x="6255867" y="2240280"/>
+            <a:ext cx="1508760" cy="274320"/>
           </a:xfrm>
           <a:prstGeom prst="rect">
             <a:avLst/>
@@ -11929,7 +11979,7 @@
           <a:lstStyle/>
           <a:p>
             <a:pPr algn="ctr">
-              <a:defRPr sz="1500" b="1">
+              <a:defRPr sz="1300" b="1">
                 <a:solidFill>
                   <a:srgbClr val="FBBF24"/>
                 </a:solidFill>
@@ -11950,8 +12000,8 @@
         </p:nvSpPr>
         <p:spPr>
           <a:xfrm>
-            <a:off x="6309360" y="2926080"/>
-            <a:ext cx="1508760" cy="640080"/>
+            <a:off x="6255867" y="2560320"/>
+            <a:ext cx="1508760" cy="731520"/>
           </a:xfrm>
           <a:prstGeom prst="rect">
             <a:avLst/>
@@ -11965,7 +12015,7 @@
           <a:lstStyle/>
           <a:p>
             <a:pPr algn="ctr">
-              <a:defRPr sz="1200" b="0">
+              <a:defRPr sz="1100" b="0">
                 <a:solidFill>
                   <a:srgbClr val="CBD5E1"/>
                 </a:solidFill>
@@ -11977,7 +12027,7 @@
             </a:r>
             <a:br/>
             <a:r>
-              <a:t>2/3 幀通過才算</a:t>
+              <a:t>2/3 通過才算</a:t>
             </a:r>
           </a:p>
         </p:txBody>
@@ -11990,8 +12040,8 @@
         </p:nvSpPr>
         <p:spPr>
           <a:xfrm>
-            <a:off x="7909560" y="2514600"/>
-            <a:ext cx="274320" cy="365760"/>
+            <a:off x="7810347" y="2286000"/>
+            <a:ext cx="228600" cy="274320"/>
           </a:xfrm>
           <a:prstGeom prst="rect">
             <a:avLst/>
@@ -12005,7 +12055,7 @@
           <a:lstStyle/>
           <a:p>
             <a:pPr algn="ctr">
-              <a:defRPr sz="2000" b="0">
+              <a:defRPr sz="1800" b="0">
                 <a:solidFill>
                   <a:srgbClr val="94A3B8"/>
                 </a:solidFill>
@@ -12026,8 +12076,8 @@
         </p:nvSpPr>
         <p:spPr>
           <a:xfrm>
-            <a:off x="8138160" y="1828800"/>
-            <a:ext cx="1691640" cy="1828800"/>
+            <a:off x="8038947" y="1645920"/>
+            <a:ext cx="1600200" cy="1737360"/>
           </a:xfrm>
           <a:prstGeom prst="roundRect">
             <a:avLst/>
@@ -12071,8 +12121,8 @@
         </p:nvSpPr>
         <p:spPr>
           <a:xfrm>
-            <a:off x="8732520" y="1965960"/>
-            <a:ext cx="502920" cy="502920"/>
+            <a:off x="8633307" y="1755648"/>
+            <a:ext cx="411480" cy="411480"/>
           </a:xfrm>
           <a:prstGeom prst="roundRect">
             <a:avLst/>
@@ -12104,7 +12154,7 @@
           <a:p>
             <a:pPr algn="ctr"/>
             <a:r>
-              <a:rPr sz="2000" b="1">
+              <a:rPr sz="1800" b="1">
                 <a:solidFill>
                   <a:srgbClr val="0F172A"/>
                 </a:solidFill>
@@ -12123,8 +12173,8 @@
         </p:nvSpPr>
         <p:spPr>
           <a:xfrm>
-            <a:off x="8229600" y="2560320"/>
-            <a:ext cx="1508760" cy="320040"/>
+            <a:off x="8084667" y="2240280"/>
+            <a:ext cx="1508760" cy="274320"/>
           </a:xfrm>
           <a:prstGeom prst="rect">
             <a:avLst/>
@@ -12138,7 +12188,7 @@
           <a:lstStyle/>
           <a:p>
             <a:pPr algn="ctr">
-              <a:defRPr sz="1500" b="1">
+              <a:defRPr sz="1300" b="1">
                 <a:solidFill>
                   <a:srgbClr val="38BDF8"/>
                 </a:solidFill>
@@ -12159,8 +12209,8 @@
         </p:nvSpPr>
         <p:spPr>
           <a:xfrm>
-            <a:off x="8229600" y="2926080"/>
-            <a:ext cx="1508760" cy="640080"/>
+            <a:off x="8084667" y="2560320"/>
+            <a:ext cx="1508760" cy="731520"/>
           </a:xfrm>
           <a:prstGeom prst="rect">
             <a:avLst/>
@@ -12174,7 +12224,7 @@
           <a:lstStyle/>
           <a:p>
             <a:pPr algn="ctr">
-              <a:defRPr sz="1200" b="0">
+              <a:defRPr sz="1100" b="0">
                 <a:solidFill>
                   <a:srgbClr val="CBD5E1"/>
                 </a:solidFill>
@@ -12199,8 +12249,8 @@
         </p:nvSpPr>
         <p:spPr>
           <a:xfrm>
-            <a:off x="9829800" y="2514600"/>
-            <a:ext cx="274320" cy="365760"/>
+            <a:off x="9639147" y="2286000"/>
+            <a:ext cx="228600" cy="274320"/>
           </a:xfrm>
           <a:prstGeom prst="rect">
             <a:avLst/>
@@ -12214,7 +12264,7 @@
           <a:lstStyle/>
           <a:p>
             <a:pPr algn="ctr">
-              <a:defRPr sz="2000" b="0">
+              <a:defRPr sz="1800" b="0">
                 <a:solidFill>
                   <a:srgbClr val="94A3B8"/>
                 </a:solidFill>
@@ -12235,8 +12285,8 @@
         </p:nvSpPr>
         <p:spPr>
           <a:xfrm>
-            <a:off x="10058400" y="1828800"/>
-            <a:ext cx="1691640" cy="1828800"/>
+            <a:off x="9867747" y="1645920"/>
+            <a:ext cx="1600200" cy="1737360"/>
           </a:xfrm>
           <a:prstGeom prst="roundRect">
             <a:avLst/>
@@ -12280,8 +12330,8 @@
         </p:nvSpPr>
         <p:spPr>
           <a:xfrm>
-            <a:off x="10652760" y="1965960"/>
-            <a:ext cx="502920" cy="502920"/>
+            <a:off x="10462107" y="1755648"/>
+            <a:ext cx="411480" cy="411480"/>
           </a:xfrm>
           <a:prstGeom prst="roundRect">
             <a:avLst/>
@@ -12313,7 +12363,7 @@
           <a:p>
             <a:pPr algn="ctr"/>
             <a:r>
-              <a:rPr sz="2000" b="1">
+              <a:rPr sz="1800" b="1">
                 <a:solidFill>
                   <a:srgbClr val="0F172A"/>
                 </a:solidFill>
@@ -12332,8 +12382,8 @@
         </p:nvSpPr>
         <p:spPr>
           <a:xfrm>
-            <a:off x="10149840" y="2560320"/>
-            <a:ext cx="1508760" cy="320040"/>
+            <a:off x="9913467" y="2240280"/>
+            <a:ext cx="1508760" cy="274320"/>
           </a:xfrm>
           <a:prstGeom prst="rect">
             <a:avLst/>
@@ -12347,7 +12397,7 @@
           <a:lstStyle/>
           <a:p>
             <a:pPr algn="ctr">
-              <a:defRPr sz="1500" b="1">
+              <a:defRPr sz="1300" b="1">
                 <a:solidFill>
                   <a:srgbClr val="F87171"/>
                 </a:solidFill>
@@ -12368,8 +12418,8 @@
         </p:nvSpPr>
         <p:spPr>
           <a:xfrm>
-            <a:off x="10149840" y="2926080"/>
-            <a:ext cx="1508760" cy="640080"/>
+            <a:off x="9913467" y="2560320"/>
+            <a:ext cx="1508760" cy="731520"/>
           </a:xfrm>
           <a:prstGeom prst="rect">
             <a:avLst/>
@@ -12383,7 +12433,7 @@
           <a:lstStyle/>
           <a:p>
             <a:pPr algn="ctr">
-              <a:defRPr sz="1200" b="0">
+              <a:defRPr sz="1100" b="0">
                 <a:solidFill>
                   <a:srgbClr val="CBD5E1"/>
                 </a:solidFill>
@@ -12408,8 +12458,8 @@
         </p:nvSpPr>
         <p:spPr>
           <a:xfrm>
-            <a:off x="457200" y="4114800"/>
-            <a:ext cx="11247120" cy="1097280"/>
+            <a:off x="731520" y="3840480"/>
+            <a:ext cx="10698480" cy="914400"/>
           </a:xfrm>
           <a:prstGeom prst="roundRect">
             <a:avLst/>
@@ -12453,8 +12503,8 @@
         </p:nvSpPr>
         <p:spPr>
           <a:xfrm>
-            <a:off x="731520" y="4206240"/>
-            <a:ext cx="10515600" cy="320040"/>
+            <a:off x="1005840" y="3931920"/>
+            <a:ext cx="10058400" cy="274320"/>
           </a:xfrm>
           <a:prstGeom prst="rect">
             <a:avLst/>
@@ -12468,7 +12518,7 @@
           <a:lstStyle/>
           <a:p>
             <a:pPr algn="l">
-              <a:defRPr sz="1600" b="1">
+              <a:defRPr sz="1500" b="1">
                 <a:solidFill>
                   <a:srgbClr val="FBBF24"/>
                 </a:solidFill>
@@ -12489,8 +12539,8 @@
         </p:nvSpPr>
         <p:spPr>
           <a:xfrm>
-            <a:off x="731520" y="4572000"/>
-            <a:ext cx="10515600" cy="548640"/>
+            <a:off x="1005840" y="4251960"/>
+            <a:ext cx="10058400" cy="457200"/>
           </a:xfrm>
           <a:prstGeom prst="rect">
             <a:avLst/>
@@ -12504,7 +12554,7 @@
           <a:lstStyle/>
           <a:p>
             <a:pPr algn="l">
-              <a:defRPr sz="1400" b="0">
+              <a:defRPr sz="1300" b="0">
                 <a:solidFill>
                   <a:srgbClr val="CBD5E1"/>
                 </a:solidFill>
@@ -12512,7 +12562,7 @@
               </a:defRPr>
             </a:pPr>
             <a:r>
-              <a:t>多幀驗證：連拍 3 張，至少 2 張偵測到人形才觸發警報。冷卻時間 15 秒，避免連續誤觸發。ESP32 PIR 額外設定 10 秒冷卻。</a:t>
+              <a:t>多幀驗證：連拍 3 張，至少 2 張偵測到人形才觸發警報。RPi 冷卻 15 秒，ESP32 PIR 冷卻 10 秒。</a:t>
             </a:r>
           </a:p>
         </p:txBody>
@@ -12566,7 +12616,7 @@
           <a:lstStyle/>
           <a:p>
             <a:pPr algn="l">
-              <a:defRPr sz="3200" b="1">
+              <a:defRPr sz="3000" b="1">
                 <a:solidFill>
                   <a:srgbClr val="FFFFFF"/>
                 </a:solidFill>
@@ -12587,7 +12637,7 @@
         </p:nvSpPr>
         <p:spPr>
           <a:xfrm>
-            <a:off x="731520" y="914400"/>
+            <a:off x="731520" y="868680"/>
             <a:ext cx="10058400" cy="365760"/>
           </a:xfrm>
           <a:prstGeom prst="rect">
@@ -12602,7 +12652,7 @@
           <a:lstStyle/>
           <a:p>
             <a:pPr algn="l">
-              <a:defRPr sz="1600" b="0">
+              <a:defRPr sz="1500" b="0">
                 <a:solidFill>
                   <a:srgbClr val="94A3B8"/>
                 </a:solidFill>
@@ -12610,7 +12660,7 @@
               </a:defRPr>
             </a:pPr>
             <a:r>
-              <a:t>ESP32（MicroPython）— PIR + 光敏電阻 → 智慧 LED 控制 → MQTT</a:t>
+              <a:t>ESP32 — PIR + 光敏電阻 → 智慧 LED 控制 → MQTT</a:t>
             </a:r>
           </a:p>
         </p:txBody>
@@ -12623,8 +12673,8 @@
         </p:nvSpPr>
         <p:spPr>
           <a:xfrm>
-            <a:off x="731520" y="1325880"/>
-            <a:ext cx="1828800" cy="38100"/>
+            <a:off x="731520" y="1280160"/>
+            <a:ext cx="1645920" cy="38100"/>
           </a:xfrm>
           <a:prstGeom prst="rect">
             <a:avLst/>
@@ -12666,8 +12716,8 @@
         </p:nvSpPr>
         <p:spPr>
           <a:xfrm>
-            <a:off x="457200" y="1828800"/>
-            <a:ext cx="1691640" cy="1828800"/>
+            <a:off x="723747" y="1645920"/>
+            <a:ext cx="1600200" cy="1737360"/>
           </a:xfrm>
           <a:prstGeom prst="roundRect">
             <a:avLst/>
@@ -12711,8 +12761,8 @@
         </p:nvSpPr>
         <p:spPr>
           <a:xfrm>
-            <a:off x="1051560" y="1965960"/>
-            <a:ext cx="502920" cy="502920"/>
+            <a:off x="1318107" y="1755648"/>
+            <a:ext cx="411480" cy="411480"/>
           </a:xfrm>
           <a:prstGeom prst="roundRect">
             <a:avLst/>
@@ -12744,7 +12794,7 @@
           <a:p>
             <a:pPr algn="ctr"/>
             <a:r>
-              <a:rPr sz="2000" b="1">
+              <a:rPr sz="1800" b="1">
                 <a:solidFill>
                   <a:srgbClr val="0F172A"/>
                 </a:solidFill>
@@ -12763,8 +12813,8 @@
         </p:nvSpPr>
         <p:spPr>
           <a:xfrm>
-            <a:off x="548640" y="2560320"/>
-            <a:ext cx="1508760" cy="320040"/>
+            <a:off x="769467" y="2240280"/>
+            <a:ext cx="1508760" cy="274320"/>
           </a:xfrm>
           <a:prstGeom prst="rect">
             <a:avLst/>
@@ -12778,7 +12828,7 @@
           <a:lstStyle/>
           <a:p>
             <a:pPr algn="ctr">
-              <a:defRPr sz="1500" b="1">
+              <a:defRPr sz="1300" b="1">
                 <a:solidFill>
                   <a:srgbClr val="38BDF8"/>
                 </a:solidFill>
@@ -12799,8 +12849,8 @@
         </p:nvSpPr>
         <p:spPr>
           <a:xfrm>
-            <a:off x="548640" y="2926080"/>
-            <a:ext cx="1508760" cy="640080"/>
+            <a:off x="769467" y="2560320"/>
+            <a:ext cx="1508760" cy="731520"/>
           </a:xfrm>
           <a:prstGeom prst="rect">
             <a:avLst/>
@@ -12814,7 +12864,7 @@
           <a:lstStyle/>
           <a:p>
             <a:pPr algn="ctr">
-              <a:defRPr sz="1200" b="0">
+              <a:defRPr sz="1100" b="0">
                 <a:solidFill>
                   <a:srgbClr val="CBD5E1"/>
                 </a:solidFill>
@@ -12822,7 +12872,7 @@
               </a:defRPr>
             </a:pPr>
             <a:r>
-              <a:t>GPIO 27 偵測</a:t>
+              <a:t>GPIO 27</a:t>
             </a:r>
             <a:br/>
             <a:r>
@@ -12839,8 +12889,8 @@
         </p:nvSpPr>
         <p:spPr>
           <a:xfrm>
-            <a:off x="2148840" y="2514600"/>
-            <a:ext cx="274320" cy="365760"/>
+            <a:off x="2323947" y="2286000"/>
+            <a:ext cx="228600" cy="274320"/>
           </a:xfrm>
           <a:prstGeom prst="rect">
             <a:avLst/>
@@ -12854,7 +12904,7 @@
           <a:lstStyle/>
           <a:p>
             <a:pPr algn="ctr">
-              <a:defRPr sz="2000" b="0">
+              <a:defRPr sz="1800" b="0">
                 <a:solidFill>
                   <a:srgbClr val="94A3B8"/>
                 </a:solidFill>
@@ -12875,8 +12925,8 @@
         </p:nvSpPr>
         <p:spPr>
           <a:xfrm>
-            <a:off x="2377440" y="1828800"/>
-            <a:ext cx="1691640" cy="1828800"/>
+            <a:off x="2552547" y="1645920"/>
+            <a:ext cx="1600200" cy="1737360"/>
           </a:xfrm>
           <a:prstGeom prst="roundRect">
             <a:avLst/>
@@ -12920,8 +12970,8 @@
         </p:nvSpPr>
         <p:spPr>
           <a:xfrm>
-            <a:off x="2971800" y="1965960"/>
-            <a:ext cx="502920" cy="502920"/>
+            <a:off x="3146907" y="1755648"/>
+            <a:ext cx="411480" cy="411480"/>
           </a:xfrm>
           <a:prstGeom prst="roundRect">
             <a:avLst/>
@@ -12953,7 +13003,7 @@
           <a:p>
             <a:pPr algn="ctr"/>
             <a:r>
-              <a:rPr sz="2000" b="1">
+              <a:rPr sz="1800" b="1">
                 <a:solidFill>
                   <a:srgbClr val="0F172A"/>
                 </a:solidFill>
@@ -12972,8 +13022,8 @@
         </p:nvSpPr>
         <p:spPr>
           <a:xfrm>
-            <a:off x="2468880" y="2560320"/>
-            <a:ext cx="1508760" cy="320040"/>
+            <a:off x="2598267" y="2240280"/>
+            <a:ext cx="1508760" cy="274320"/>
           </a:xfrm>
           <a:prstGeom prst="rect">
             <a:avLst/>
@@ -12987,7 +13037,7 @@
           <a:lstStyle/>
           <a:p>
             <a:pPr algn="ctr">
-              <a:defRPr sz="1500" b="1">
+              <a:defRPr sz="1300" b="1">
                 <a:solidFill>
                   <a:srgbClr val="4ADE80"/>
                 </a:solidFill>
@@ -13008,8 +13058,8 @@
         </p:nvSpPr>
         <p:spPr>
           <a:xfrm>
-            <a:off x="2468880" y="2926080"/>
-            <a:ext cx="1508760" cy="640080"/>
+            <a:off x="2598267" y="2560320"/>
+            <a:ext cx="1508760" cy="731520"/>
           </a:xfrm>
           <a:prstGeom prst="rect">
             <a:avLst/>
@@ -13023,7 +13073,7 @@
           <a:lstStyle/>
           <a:p>
             <a:pPr algn="ctr">
-              <a:defRPr sz="1200" b="0">
+              <a:defRPr sz="1100" b="0">
                 <a:solidFill>
                   <a:srgbClr val="CBD5E1"/>
                 </a:solidFill>
@@ -13035,7 +13085,7 @@
             </a:r>
             <a:br/>
             <a:r>
-              <a:t>亮度值 0-4095</a:t>
+              <a:t>亮度 0-4095</a:t>
             </a:r>
           </a:p>
         </p:txBody>
@@ -13048,8 +13098,8 @@
         </p:nvSpPr>
         <p:spPr>
           <a:xfrm>
-            <a:off x="4069080" y="2514600"/>
-            <a:ext cx="274320" cy="365760"/>
+            <a:off x="4152747" y="2286000"/>
+            <a:ext cx="228600" cy="274320"/>
           </a:xfrm>
           <a:prstGeom prst="rect">
             <a:avLst/>
@@ -13063,7 +13113,7 @@
           <a:lstStyle/>
           <a:p>
             <a:pPr algn="ctr">
-              <a:defRPr sz="2000" b="0">
+              <a:defRPr sz="1800" b="0">
                 <a:solidFill>
                   <a:srgbClr val="94A3B8"/>
                 </a:solidFill>
@@ -13084,8 +13134,8 @@
         </p:nvSpPr>
         <p:spPr>
           <a:xfrm>
-            <a:off x="4297680" y="1828800"/>
-            <a:ext cx="1691640" cy="1828800"/>
+            <a:off x="4381347" y="1645920"/>
+            <a:ext cx="1600200" cy="1737360"/>
           </a:xfrm>
           <a:prstGeom prst="roundRect">
             <a:avLst/>
@@ -13129,8 +13179,8 @@
         </p:nvSpPr>
         <p:spPr>
           <a:xfrm>
-            <a:off x="4892040" y="1965960"/>
-            <a:ext cx="502920" cy="502920"/>
+            <a:off x="4975707" y="1755648"/>
+            <a:ext cx="411480" cy="411480"/>
           </a:xfrm>
           <a:prstGeom prst="roundRect">
             <a:avLst/>
@@ -13162,7 +13212,7 @@
           <a:p>
             <a:pPr algn="ctr"/>
             <a:r>
-              <a:rPr sz="2000" b="1">
+              <a:rPr sz="1800" b="1">
                 <a:solidFill>
                   <a:srgbClr val="0F172A"/>
                 </a:solidFill>
@@ -13181,8 +13231,8 @@
         </p:nvSpPr>
         <p:spPr>
           <a:xfrm>
-            <a:off x="4389120" y="2560320"/>
-            <a:ext cx="1508760" cy="320040"/>
+            <a:off x="4427067" y="2240280"/>
+            <a:ext cx="1508760" cy="274320"/>
           </a:xfrm>
           <a:prstGeom prst="rect">
             <a:avLst/>
@@ -13196,7 +13246,7 @@
           <a:lstStyle/>
           <a:p>
             <a:pPr algn="ctr">
-              <a:defRPr sz="1500" b="1">
+              <a:defRPr sz="1300" b="1">
                 <a:solidFill>
                   <a:srgbClr val="FBBF24"/>
                 </a:solidFill>
@@ -13217,8 +13267,8 @@
         </p:nvSpPr>
         <p:spPr>
           <a:xfrm>
-            <a:off x="4389120" y="2926080"/>
-            <a:ext cx="1508760" cy="640080"/>
+            <a:off x="4427067" y="2560320"/>
+            <a:ext cx="1508760" cy="731520"/>
           </a:xfrm>
           <a:prstGeom prst="rect">
             <a:avLst/>
@@ -13232,7 +13282,7 @@
           <a:lstStyle/>
           <a:p>
             <a:pPr algn="ctr">
-              <a:defRPr sz="1200" b="0">
+              <a:defRPr sz="1100" b="0">
                 <a:solidFill>
                   <a:srgbClr val="CBD5E1"/>
                 </a:solidFill>
@@ -13240,11 +13290,11 @@
               </a:defRPr>
             </a:pPr>
             <a:r>
-              <a:t>有人 + 暗 → 開燈</a:t>
+              <a:t>有人+暗→開燈</a:t>
             </a:r>
             <a:br/>
             <a:r>
-              <a:t>無人 → 關燈</a:t>
+              <a:t>無人→關燈</a:t>
             </a:r>
           </a:p>
         </p:txBody>
@@ -13257,8 +13307,8 @@
         </p:nvSpPr>
         <p:spPr>
           <a:xfrm>
-            <a:off x="5989320" y="2514600"/>
-            <a:ext cx="274320" cy="365760"/>
+            <a:off x="5981547" y="2286000"/>
+            <a:ext cx="228600" cy="274320"/>
           </a:xfrm>
           <a:prstGeom prst="rect">
             <a:avLst/>
@@ -13272,7 +13322,7 @@
           <a:lstStyle/>
           <a:p>
             <a:pPr algn="ctr">
-              <a:defRPr sz="2000" b="0">
+              <a:defRPr sz="1800" b="0">
                 <a:solidFill>
                   <a:srgbClr val="94A3B8"/>
                 </a:solidFill>
@@ -13293,8 +13343,8 @@
         </p:nvSpPr>
         <p:spPr>
           <a:xfrm>
-            <a:off x="6217920" y="1828800"/>
-            <a:ext cx="1691640" cy="1828800"/>
+            <a:off x="6210147" y="1645920"/>
+            <a:ext cx="1600200" cy="1737360"/>
           </a:xfrm>
           <a:prstGeom prst="roundRect">
             <a:avLst/>
@@ -13338,8 +13388,8 @@
         </p:nvSpPr>
         <p:spPr>
           <a:xfrm>
-            <a:off x="6812280" y="1965960"/>
-            <a:ext cx="502920" cy="502920"/>
+            <a:off x="6804507" y="1755648"/>
+            <a:ext cx="411480" cy="411480"/>
           </a:xfrm>
           <a:prstGeom prst="roundRect">
             <a:avLst/>
@@ -13371,7 +13421,7 @@
           <a:p>
             <a:pPr algn="ctr"/>
             <a:r>
-              <a:rPr sz="2000" b="1">
+              <a:rPr sz="1800" b="1">
                 <a:solidFill>
                   <a:srgbClr val="0F172A"/>
                 </a:solidFill>
@@ -13390,8 +13440,8 @@
         </p:nvSpPr>
         <p:spPr>
           <a:xfrm>
-            <a:off x="6309360" y="2560320"/>
-            <a:ext cx="1508760" cy="320040"/>
+            <a:off x="6255867" y="2240280"/>
+            <a:ext cx="1508760" cy="274320"/>
           </a:xfrm>
           <a:prstGeom prst="rect">
             <a:avLst/>
@@ -13405,7 +13455,7 @@
           <a:lstStyle/>
           <a:p>
             <a:pPr algn="ctr">
-              <a:defRPr sz="1500" b="1">
+              <a:defRPr sz="1300" b="1">
                 <a:solidFill>
                   <a:srgbClr val="A78BFA"/>
                 </a:solidFill>
@@ -13426,8 +13476,8 @@
         </p:nvSpPr>
         <p:spPr>
           <a:xfrm>
-            <a:off x="6309360" y="2926080"/>
-            <a:ext cx="1508760" cy="640080"/>
+            <a:off x="6255867" y="2560320"/>
+            <a:ext cx="1508760" cy="731520"/>
           </a:xfrm>
           <a:prstGeom prst="rect">
             <a:avLst/>
@@ -13441,7 +13491,7 @@
           <a:lstStyle/>
           <a:p>
             <a:pPr algn="ctr">
-              <a:defRPr sz="1200" b="0">
+              <a:defRPr sz="1100" b="0">
                 <a:solidFill>
                   <a:srgbClr val="CBD5E1"/>
                 </a:solidFill>
@@ -13449,11 +13499,11 @@
               </a:defRPr>
             </a:pPr>
             <a:r>
-              <a:t>亮度數據</a:t>
+              <a:t>亮度 + 燈光</a:t>
             </a:r>
             <a:br/>
             <a:r>
-              <a:t>+ 燈光 + PIR 狀態</a:t>
+              <a:t>+ PIR 狀態</a:t>
             </a:r>
           </a:p>
         </p:txBody>
@@ -13466,8 +13516,8 @@
         </p:nvSpPr>
         <p:spPr>
           <a:xfrm>
-            <a:off x="7909560" y="2514600"/>
-            <a:ext cx="274320" cy="365760"/>
+            <a:off x="7810347" y="2286000"/>
+            <a:ext cx="228600" cy="274320"/>
           </a:xfrm>
           <a:prstGeom prst="rect">
             <a:avLst/>
@@ -13481,7 +13531,7 @@
           <a:lstStyle/>
           <a:p>
             <a:pPr algn="ctr">
-              <a:defRPr sz="2000" b="0">
+              <a:defRPr sz="1800" b="0">
                 <a:solidFill>
                   <a:srgbClr val="94A3B8"/>
                 </a:solidFill>
@@ -13502,8 +13552,8 @@
         </p:nvSpPr>
         <p:spPr>
           <a:xfrm>
-            <a:off x="8138160" y="1828800"/>
-            <a:ext cx="1691640" cy="1828800"/>
+            <a:off x="8038947" y="1645920"/>
+            <a:ext cx="1600200" cy="1737360"/>
           </a:xfrm>
           <a:prstGeom prst="roundRect">
             <a:avLst/>
@@ -13547,8 +13597,8 @@
         </p:nvSpPr>
         <p:spPr>
           <a:xfrm>
-            <a:off x="8732520" y="1965960"/>
-            <a:ext cx="502920" cy="502920"/>
+            <a:off x="8633307" y="1755648"/>
+            <a:ext cx="411480" cy="411480"/>
           </a:xfrm>
           <a:prstGeom prst="roundRect">
             <a:avLst/>
@@ -13580,7 +13630,7 @@
           <a:p>
             <a:pPr algn="ctr"/>
             <a:r>
-              <a:rPr sz="2000" b="1">
+              <a:rPr sz="1800" b="1">
                 <a:solidFill>
                   <a:srgbClr val="0F172A"/>
                 </a:solidFill>
@@ -13599,8 +13649,8 @@
         </p:nvSpPr>
         <p:spPr>
           <a:xfrm>
-            <a:off x="8229600" y="2560320"/>
-            <a:ext cx="1508760" cy="320040"/>
+            <a:off x="8084667" y="2240280"/>
+            <a:ext cx="1508760" cy="274320"/>
           </a:xfrm>
           <a:prstGeom prst="rect">
             <a:avLst/>
@@ -13614,7 +13664,7 @@
           <a:lstStyle/>
           <a:p>
             <a:pPr algn="ctr">
-              <a:defRPr sz="1500" b="1">
+              <a:defRPr sz="1300" b="1">
                 <a:solidFill>
                   <a:srgbClr val="F87171"/>
                 </a:solidFill>
@@ -13635,8 +13685,8 @@
         </p:nvSpPr>
         <p:spPr>
           <a:xfrm>
-            <a:off x="8229600" y="2926080"/>
-            <a:ext cx="1508760" cy="640080"/>
+            <a:off x="8084667" y="2560320"/>
+            <a:ext cx="1508760" cy="731520"/>
           </a:xfrm>
           <a:prstGeom prst="rect">
             <a:avLst/>
@@ -13650,7 +13700,7 @@
           <a:lstStyle/>
           <a:p>
             <a:pPr algn="ctr">
-              <a:defRPr sz="1200" b="0">
+              <a:defRPr sz="1100" b="0">
                 <a:solidFill>
                   <a:srgbClr val="CBD5E1"/>
                 </a:solidFill>
@@ -13662,7 +13712,7 @@
             </a:r>
             <a:br/>
             <a:r>
-              <a:t>開/關燈指令</a:t>
+              <a:t>開/關燈</a:t>
             </a:r>
           </a:p>
         </p:txBody>
@@ -13675,8 +13725,8 @@
         </p:nvSpPr>
         <p:spPr>
           <a:xfrm>
-            <a:off x="9829800" y="2514600"/>
-            <a:ext cx="274320" cy="365760"/>
+            <a:off x="9639147" y="2286000"/>
+            <a:ext cx="228600" cy="274320"/>
           </a:xfrm>
           <a:prstGeom prst="rect">
             <a:avLst/>
@@ -13690,7 +13740,7 @@
           <a:lstStyle/>
           <a:p>
             <a:pPr algn="ctr">
-              <a:defRPr sz="2000" b="0">
+              <a:defRPr sz="1800" b="0">
                 <a:solidFill>
                   <a:srgbClr val="94A3B8"/>
                 </a:solidFill>
@@ -13711,8 +13761,8 @@
         </p:nvSpPr>
         <p:spPr>
           <a:xfrm>
-            <a:off x="10058400" y="1828800"/>
-            <a:ext cx="1691640" cy="1828800"/>
+            <a:off x="9867747" y="1645920"/>
+            <a:ext cx="1600200" cy="1737360"/>
           </a:xfrm>
           <a:prstGeom prst="roundRect">
             <a:avLst/>
@@ -13756,8 +13806,8 @@
         </p:nvSpPr>
         <p:spPr>
           <a:xfrm>
-            <a:off x="10652760" y="1965960"/>
-            <a:ext cx="502920" cy="502920"/>
+            <a:off x="10462107" y="1755648"/>
+            <a:ext cx="411480" cy="411480"/>
           </a:xfrm>
           <a:prstGeom prst="roundRect">
             <a:avLst/>
@@ -13789,7 +13839,7 @@
           <a:p>
             <a:pPr algn="ctr"/>
             <a:r>
-              <a:rPr sz="2000" b="1">
+              <a:rPr sz="1800" b="1">
                 <a:solidFill>
                   <a:srgbClr val="0F172A"/>
                 </a:solidFill>
@@ -13808,8 +13858,8 @@
         </p:nvSpPr>
         <p:spPr>
           <a:xfrm>
-            <a:off x="10149840" y="2560320"/>
-            <a:ext cx="1508760" cy="320040"/>
+            <a:off x="9913467" y="2240280"/>
+            <a:ext cx="1508760" cy="274320"/>
           </a:xfrm>
           <a:prstGeom prst="rect">
             <a:avLst/>
@@ -13823,7 +13873,7 @@
           <a:lstStyle/>
           <a:p>
             <a:pPr algn="ctr">
-              <a:defRPr sz="1500" b="1">
+              <a:defRPr sz="1300" b="1">
                 <a:solidFill>
                   <a:srgbClr val="38BDF8"/>
                 </a:solidFill>
@@ -13844,8 +13894,8 @@
         </p:nvSpPr>
         <p:spPr>
           <a:xfrm>
-            <a:off x="10149840" y="2926080"/>
-            <a:ext cx="1508760" cy="640080"/>
+            <a:off x="9913467" y="2560320"/>
+            <a:ext cx="1508760" cy="731520"/>
           </a:xfrm>
           <a:prstGeom prst="rect">
             <a:avLst/>
@@ -13859,7 +13909,7 @@
           <a:lstStyle/>
           <a:p>
             <a:pPr algn="ctr">
-              <a:defRPr sz="1200" b="0">
+              <a:defRPr sz="1100" b="0">
                 <a:solidFill>
                   <a:srgbClr val="CBD5E1"/>
                 </a:solidFill>
@@ -13871,7 +13921,7 @@
             </a:r>
             <a:br/>
             <a:r>
-              <a:t>暫停自動 60 秒</a:t>
+              <a:t>暫停自動 60s</a:t>
             </a:r>
           </a:p>
         </p:txBody>
@@ -13884,8 +13934,8 @@
         </p:nvSpPr>
         <p:spPr>
           <a:xfrm>
-            <a:off x="457200" y="4114800"/>
-            <a:ext cx="11247120" cy="1097280"/>
+            <a:off x="731520" y="3840480"/>
+            <a:ext cx="10698480" cy="914400"/>
           </a:xfrm>
           <a:prstGeom prst="roundRect">
             <a:avLst/>
@@ -13929,8 +13979,8 @@
         </p:nvSpPr>
         <p:spPr>
           <a:xfrm>
-            <a:off x="731520" y="4206240"/>
-            <a:ext cx="10515600" cy="320040"/>
+            <a:off x="1005840" y="3931920"/>
+            <a:ext cx="10058400" cy="274320"/>
           </a:xfrm>
           <a:prstGeom prst="rect">
             <a:avLst/>
@@ -13944,7 +13994,7 @@
           <a:lstStyle/>
           <a:p>
             <a:pPr algn="l">
-              <a:defRPr sz="1600" b="1">
+              <a:defRPr sz="1500" b="1">
                 <a:solidFill>
                   <a:srgbClr val="4ADE80"/>
                 </a:solidFill>
@@ -13952,7 +14002,7 @@
               </a:defRPr>
             </a:pPr>
             <a:r>
-              <a:t>手動覆蓋機制</a:t>
+              <a:t>智慧照明邏輯</a:t>
             </a:r>
           </a:p>
         </p:txBody>
@@ -13965,8 +14015,8 @@
         </p:nvSpPr>
         <p:spPr>
           <a:xfrm>
-            <a:off x="731520" y="4572000"/>
-            <a:ext cx="10515600" cy="548640"/>
+            <a:off x="1005840" y="4251960"/>
+            <a:ext cx="10058400" cy="457200"/>
           </a:xfrm>
           <a:prstGeom prst="rect">
             <a:avLst/>
@@ -13980,7 +14030,7 @@
           <a:lstStyle/>
           <a:p>
             <a:pPr algn="l">
-              <a:defRPr sz="1400" b="0">
+              <a:defRPr sz="1300" b="0">
                 <a:solidFill>
                   <a:srgbClr val="CBD5E1"/>
                 </a:solidFill>
@@ -13988,7 +14038,7 @@
               </a:defRPr>
             </a:pPr>
             <a:r>
-              <a:t>智慧照明：有人時依亮度決定是否開燈（供攝影機夜間辨識），無人時自動關燈。Dashboard 手動控燈後暫停自動 60 秒。</a:t>
+              <a:t>有人時依亮度決定是否開燈（供攝影機夜間辨識），無人時自動關燈。Dashboard 手動控燈後暫停自動模式 60 秒。</a:t>
             </a:r>
           </a:p>
         </p:txBody>
@@ -14042,7 +14092,7 @@
           <a:lstStyle/>
           <a:p>
             <a:pPr algn="l">
-              <a:defRPr sz="3200" b="1">
+              <a:defRPr sz="3000" b="1">
                 <a:solidFill>
                   <a:srgbClr val="FFFFFF"/>
                 </a:solidFill>
@@ -14063,7 +14113,7 @@
         </p:nvSpPr>
         <p:spPr>
           <a:xfrm>
-            <a:off x="731520" y="914400"/>
+            <a:off x="731520" y="868680"/>
             <a:ext cx="10058400" cy="365760"/>
           </a:xfrm>
           <a:prstGeom prst="rect">
@@ -14078,7 +14128,7 @@
           <a:lstStyle/>
           <a:p>
             <a:pPr algn="l">
-              <a:defRPr sz="1600" b="0">
+              <a:defRPr sz="1500" b="0">
                 <a:solidFill>
                   <a:srgbClr val="94A3B8"/>
                 </a:solidFill>
@@ -14099,8 +14149,8 @@
         </p:nvSpPr>
         <p:spPr>
           <a:xfrm>
-            <a:off x="731520" y="1325880"/>
-            <a:ext cx="1828800" cy="38100"/>
+            <a:off x="731520" y="1280160"/>
+            <a:ext cx="1645920" cy="38100"/>
           </a:xfrm>
           <a:prstGeom prst="rect">
             <a:avLst/>
@@ -14142,8 +14192,8 @@
         </p:nvSpPr>
         <p:spPr>
           <a:xfrm>
-            <a:off x="731520" y="1645920"/>
-            <a:ext cx="2560320" cy="320040"/>
+            <a:off x="731520" y="1554480"/>
+            <a:ext cx="2377440" cy="274320"/>
           </a:xfrm>
           <a:prstGeom prst="rect">
             <a:avLst/>
@@ -14178,8 +14228,8 @@
         </p:nvSpPr>
         <p:spPr>
           <a:xfrm>
-            <a:off x="3291840" y="1645920"/>
-            <a:ext cx="914400" cy="320040"/>
+            <a:off x="3108960" y="1554480"/>
+            <a:ext cx="1097280" cy="274320"/>
           </a:xfrm>
           <a:prstGeom prst="rect">
             <a:avLst/>
@@ -14214,8 +14264,8 @@
         </p:nvSpPr>
         <p:spPr>
           <a:xfrm>
-            <a:off x="4206240" y="1645920"/>
-            <a:ext cx="1097280" cy="320040"/>
+            <a:off x="4206240" y="1554480"/>
+            <a:ext cx="1463040" cy="274320"/>
           </a:xfrm>
           <a:prstGeom prst="rect">
             <a:avLst/>
@@ -14250,8 +14300,8 @@
         </p:nvSpPr>
         <p:spPr>
           <a:xfrm>
-            <a:off x="5303520" y="1645920"/>
-            <a:ext cx="3200400" cy="320040"/>
+            <a:off x="5669280" y="1554480"/>
+            <a:ext cx="2560320" cy="274320"/>
           </a:xfrm>
           <a:prstGeom prst="rect">
             <a:avLst/>
@@ -14273,7 +14323,7 @@
               </a:defRPr>
             </a:pPr>
             <a:r>
-              <a:t>Payload</a:t>
+              <a:t>Payload 範例</a:t>
             </a:r>
           </a:p>
         </p:txBody>
@@ -14286,8 +14336,8 @@
         </p:nvSpPr>
         <p:spPr>
           <a:xfrm>
-            <a:off x="8503920" y="1645920"/>
-            <a:ext cx="1371600" cy="320040"/>
+            <a:off x="8229600" y="1554480"/>
+            <a:ext cx="1371600" cy="274320"/>
           </a:xfrm>
           <a:prstGeom prst="rect">
             <a:avLst/>
@@ -14322,8 +14372,8 @@
         </p:nvSpPr>
         <p:spPr>
           <a:xfrm>
-            <a:off x="731520" y="1965960"/>
-            <a:ext cx="9144000" cy="12700"/>
+            <a:off x="731520" y="1828800"/>
+            <a:ext cx="8869680" cy="12700"/>
           </a:xfrm>
           <a:prstGeom prst="rect">
             <a:avLst/>
@@ -14365,22 +14415,22 @@
         </p:nvSpPr>
         <p:spPr>
           <a:xfrm>
-            <a:off x="731520" y="2103120"/>
-            <a:ext cx="2560320" cy="640080"/>
-          </a:xfrm>
-          <a:prstGeom prst="rect">
-            <a:avLst/>
-          </a:prstGeom>
-          <a:noFill/>
-        </p:spPr>
-        <p:txBody>
-          <a:bodyPr wrap="square">
-            <a:spAutoFit/>
-          </a:bodyPr>
-          <a:lstStyle/>
-          <a:p>
-            <a:pPr>
-              <a:defRPr sz="1100">
+            <a:off x="731520" y="1965960"/>
+            <a:ext cx="2377440" cy="548640"/>
+          </a:xfrm>
+          <a:prstGeom prst="rect">
+            <a:avLst/>
+          </a:prstGeom>
+          <a:noFill/>
+        </p:spPr>
+        <p:txBody>
+          <a:bodyPr wrap="square">
+            <a:spAutoFit/>
+          </a:bodyPr>
+          <a:lstStyle/>
+          <a:p>
+            <a:pPr algn="l">
+              <a:defRPr sz="1000" b="0">
                 <a:solidFill>
                   <a:srgbClr val="4ADE80"/>
                 </a:solidFill>
@@ -14401,22 +14451,22 @@
         </p:nvSpPr>
         <p:spPr>
           <a:xfrm>
-            <a:off x="3291840" y="2103120"/>
-            <a:ext cx="914400" cy="640080"/>
-          </a:xfrm>
-          <a:prstGeom prst="rect">
-            <a:avLst/>
-          </a:prstGeom>
-          <a:noFill/>
-        </p:spPr>
-        <p:txBody>
-          <a:bodyPr wrap="square">
-            <a:spAutoFit/>
-          </a:bodyPr>
-          <a:lstStyle/>
-          <a:p>
-            <a:pPr>
-              <a:defRPr sz="1300">
+            <a:off x="3108960" y="1965960"/>
+            <a:ext cx="1097280" cy="548640"/>
+          </a:xfrm>
+          <a:prstGeom prst="rect">
+            <a:avLst/>
+          </a:prstGeom>
+          <a:noFill/>
+        </p:spPr>
+        <p:txBody>
+          <a:bodyPr wrap="square">
+            <a:spAutoFit/>
+          </a:bodyPr>
+          <a:lstStyle/>
+          <a:p>
+            <a:pPr algn="l">
+              <a:defRPr sz="1200" b="0">
                 <a:solidFill>
                   <a:srgbClr val="CBD5E1"/>
                 </a:solidFill>
@@ -14437,22 +14487,22 @@
         </p:nvSpPr>
         <p:spPr>
           <a:xfrm>
-            <a:off x="4206240" y="2103120"/>
-            <a:ext cx="1097280" cy="640080"/>
-          </a:xfrm>
-          <a:prstGeom prst="rect">
-            <a:avLst/>
-          </a:prstGeom>
-          <a:noFill/>
-        </p:spPr>
-        <p:txBody>
-          <a:bodyPr wrap="square">
-            <a:spAutoFit/>
-          </a:bodyPr>
-          <a:lstStyle/>
-          <a:p>
-            <a:pPr>
-              <a:defRPr sz="1300">
+            <a:off x="4206240" y="1965960"/>
+            <a:ext cx="1463040" cy="548640"/>
+          </a:xfrm>
+          <a:prstGeom prst="rect">
+            <a:avLst/>
+          </a:prstGeom>
+          <a:noFill/>
+        </p:spPr>
+        <p:txBody>
+          <a:bodyPr wrap="square">
+            <a:spAutoFit/>
+          </a:bodyPr>
+          <a:lstStyle/>
+          <a:p>
+            <a:pPr algn="l">
+              <a:defRPr sz="1200" b="0">
                 <a:solidFill>
                   <a:srgbClr val="CBD5E1"/>
                 </a:solidFill>
@@ -14460,9 +14510,185 @@
               </a:defRPr>
             </a:pPr>
             <a:r>
+              <a:t>RPi, Dashboard</a:t>
+            </a:r>
+          </a:p>
+        </p:txBody>
+      </p:sp>
+      <p:sp>
+        <p:nvSpPr>
+          <p:cNvPr id="14" name="TextBox 13"/>
+          <p:cNvSpPr txBox="1"/>
+          <p:nvPr/>
+        </p:nvSpPr>
+        <p:spPr>
+          <a:xfrm>
+            <a:off x="5669280" y="1965960"/>
+            <a:ext cx="2560320" cy="548640"/>
+          </a:xfrm>
+          <a:prstGeom prst="rect">
+            <a:avLst/>
+          </a:prstGeom>
+          <a:noFill/>
+        </p:spPr>
+        <p:txBody>
+          <a:bodyPr wrap="square">
+            <a:spAutoFit/>
+          </a:bodyPr>
+          <a:lstStyle/>
+          <a:p>
+            <a:pPr algn="l">
+              <a:defRPr sz="1000" b="0">
+                <a:solidFill>
+                  <a:srgbClr val="CBD5E1"/>
+                </a:solidFill>
+                <a:latin typeface="Consolas"/>
+              </a:defRPr>
+            </a:pPr>
+            <a:r>
+              <a:t>{"triggered":true}</a:t>
+            </a:r>
+          </a:p>
+        </p:txBody>
+      </p:sp>
+      <p:sp>
+        <p:nvSpPr>
+          <p:cNvPr id="15" name="TextBox 14"/>
+          <p:cNvSpPr txBox="1"/>
+          <p:nvPr/>
+        </p:nvSpPr>
+        <p:spPr>
+          <a:xfrm>
+            <a:off x="8229600" y="1965960"/>
+            <a:ext cx="1371600" cy="548640"/>
+          </a:xfrm>
+          <a:prstGeom prst="rect">
+            <a:avLst/>
+          </a:prstGeom>
+          <a:noFill/>
+        </p:spPr>
+        <p:txBody>
+          <a:bodyPr wrap="square">
+            <a:spAutoFit/>
+          </a:bodyPr>
+          <a:lstStyle/>
+          <a:p>
+            <a:pPr algn="l">
+              <a:defRPr sz="1200" b="0">
+                <a:solidFill>
+                  <a:srgbClr val="38BDF8"/>
+                </a:solidFill>
+                <a:latin typeface="Microsoft JhengHei"/>
+              </a:defRPr>
+            </a:pPr>
+            <a:r>
+              <a:t>PIR 觸發</a:t>
+            </a:r>
+          </a:p>
+        </p:txBody>
+      </p:sp>
+      <p:sp>
+        <p:nvSpPr>
+          <p:cNvPr id="16" name="TextBox 15"/>
+          <p:cNvSpPr txBox="1"/>
+          <p:nvPr/>
+        </p:nvSpPr>
+        <p:spPr>
+          <a:xfrm>
+            <a:off x="731520" y="2606039"/>
+            <a:ext cx="2377440" cy="548640"/>
+          </a:xfrm>
+          <a:prstGeom prst="rect">
+            <a:avLst/>
+          </a:prstGeom>
+          <a:noFill/>
+        </p:spPr>
+        <p:txBody>
+          <a:bodyPr wrap="square">
+            <a:spAutoFit/>
+          </a:bodyPr>
+          <a:lstStyle/>
+          <a:p>
+            <a:pPr algn="l">
+              <a:defRPr sz="1000" b="0">
+                <a:solidFill>
+                  <a:srgbClr val="4ADE80"/>
+                </a:solidFill>
+                <a:latin typeface="Consolas"/>
+              </a:defRPr>
+            </a:pPr>
+            <a:r>
+              <a:t>home/security/alert</a:t>
+            </a:r>
+          </a:p>
+        </p:txBody>
+      </p:sp>
+      <p:sp>
+        <p:nvSpPr>
+          <p:cNvPr id="17" name="TextBox 16"/>
+          <p:cNvSpPr txBox="1"/>
+          <p:nvPr/>
+        </p:nvSpPr>
+        <p:spPr>
+          <a:xfrm>
+            <a:off x="3108960" y="2606039"/>
+            <a:ext cx="1097280" cy="548640"/>
+          </a:xfrm>
+          <a:prstGeom prst="rect">
+            <a:avLst/>
+          </a:prstGeom>
+          <a:noFill/>
+        </p:spPr>
+        <p:txBody>
+          <a:bodyPr wrap="square">
+            <a:spAutoFit/>
+          </a:bodyPr>
+          <a:lstStyle/>
+          <a:p>
+            <a:pPr algn="l">
+              <a:defRPr sz="1200" b="0">
+                <a:solidFill>
+                  <a:srgbClr val="CBD5E1"/>
+                </a:solidFill>
+                <a:latin typeface="Microsoft JhengHei"/>
+              </a:defRPr>
+            </a:pPr>
+            <a:r>
               <a:t>RPi</a:t>
             </a:r>
-            <a:br/>
+          </a:p>
+        </p:txBody>
+      </p:sp>
+      <p:sp>
+        <p:nvSpPr>
+          <p:cNvPr id="18" name="TextBox 17"/>
+          <p:cNvSpPr txBox="1"/>
+          <p:nvPr/>
+        </p:nvSpPr>
+        <p:spPr>
+          <a:xfrm>
+            <a:off x="4206240" y="2606039"/>
+            <a:ext cx="1463040" cy="548640"/>
+          </a:xfrm>
+          <a:prstGeom prst="rect">
+            <a:avLst/>
+          </a:prstGeom>
+          <a:noFill/>
+        </p:spPr>
+        <p:txBody>
+          <a:bodyPr wrap="square">
+            <a:spAutoFit/>
+          </a:bodyPr>
+          <a:lstStyle/>
+          <a:p>
+            <a:pPr algn="l">
+              <a:defRPr sz="1200" b="0">
+                <a:solidFill>
+                  <a:srgbClr val="CBD5E1"/>
+                </a:solidFill>
+                <a:latin typeface="Microsoft JhengHei"/>
+              </a:defRPr>
+            </a:pPr>
             <a:r>
               <a:t>Dashboard</a:t>
             </a:r>
@@ -14471,28 +14697,28 @@
       </p:sp>
       <p:sp>
         <p:nvSpPr>
-          <p:cNvPr id="14" name="TextBox 13"/>
-          <p:cNvSpPr txBox="1"/>
-          <p:nvPr/>
-        </p:nvSpPr>
-        <p:spPr>
-          <a:xfrm>
-            <a:off x="5303520" y="2103120"/>
-            <a:ext cx="3200400" cy="640080"/>
-          </a:xfrm>
-          <a:prstGeom prst="rect">
-            <a:avLst/>
-          </a:prstGeom>
-          <a:noFill/>
-        </p:spPr>
-        <p:txBody>
-          <a:bodyPr wrap="square">
-            <a:spAutoFit/>
-          </a:bodyPr>
-          <a:lstStyle/>
-          <a:p>
-            <a:pPr>
-              <a:defRPr sz="1100">
+          <p:cNvPr id="19" name="TextBox 18"/>
+          <p:cNvSpPr txBox="1"/>
+          <p:nvPr/>
+        </p:nvSpPr>
+        <p:spPr>
+          <a:xfrm>
+            <a:off x="5669280" y="2606039"/>
+            <a:ext cx="2560320" cy="548640"/>
+          </a:xfrm>
+          <a:prstGeom prst="rect">
+            <a:avLst/>
+          </a:prstGeom>
+          <a:noFill/>
+        </p:spPr>
+        <p:txBody>
+          <a:bodyPr wrap="square">
+            <a:spAutoFit/>
+          </a:bodyPr>
+          <a:lstStyle/>
+          <a:p>
+            <a:pPr algn="l">
+              <a:defRPr sz="1000" b="0">
                 <a:solidFill>
                   <a:srgbClr val="CBD5E1"/>
                 </a:solidFill>
@@ -14500,75 +14726,71 @@
               </a:defRPr>
             </a:pPr>
             <a:r>
-              <a:t>{"triggered":true,</a:t>
-            </a:r>
-            <a:br/>
-            <a:r>
-              <a:t> "timestamp":12345}</a:t>
-            </a:r>
-          </a:p>
-        </p:txBody>
-      </p:sp>
-      <p:sp>
-        <p:nvSpPr>
-          <p:cNvPr id="15" name="TextBox 14"/>
-          <p:cNvSpPr txBox="1"/>
-          <p:nvPr/>
-        </p:nvSpPr>
-        <p:spPr>
-          <a:xfrm>
-            <a:off x="8503920" y="2103120"/>
-            <a:ext cx="1371600" cy="640080"/>
-          </a:xfrm>
-          <a:prstGeom prst="rect">
-            <a:avLst/>
-          </a:prstGeom>
-          <a:noFill/>
-        </p:spPr>
-        <p:txBody>
-          <a:bodyPr wrap="square">
-            <a:spAutoFit/>
-          </a:bodyPr>
-          <a:lstStyle/>
-          <a:p>
-            <a:pPr>
-              <a:defRPr sz="1300">
-                <a:solidFill>
-                  <a:srgbClr val="38BDF8"/>
-                </a:solidFill>
-                <a:latin typeface="Microsoft JhengHei"/>
-              </a:defRPr>
-            </a:pPr>
-            <a:r>
-              <a:t>PIR 觸發</a:t>
-            </a:r>
-          </a:p>
-        </p:txBody>
-      </p:sp>
-      <p:sp>
-        <p:nvSpPr>
-          <p:cNvPr id="16" name="TextBox 15"/>
-          <p:cNvSpPr txBox="1"/>
-          <p:nvPr/>
-        </p:nvSpPr>
-        <p:spPr>
-          <a:xfrm>
-            <a:off x="731520" y="2697479"/>
-            <a:ext cx="2560320" cy="640080"/>
-          </a:xfrm>
-          <a:prstGeom prst="rect">
-            <a:avLst/>
-          </a:prstGeom>
-          <a:noFill/>
-        </p:spPr>
-        <p:txBody>
-          <a:bodyPr wrap="square">
-            <a:spAutoFit/>
-          </a:bodyPr>
-          <a:lstStyle/>
-          <a:p>
-            <a:pPr>
-              <a:defRPr sz="1100">
+              <a:t>{"confidence":0.85}</a:t>
+            </a:r>
+          </a:p>
+        </p:txBody>
+      </p:sp>
+      <p:sp>
+        <p:nvSpPr>
+          <p:cNvPr id="20" name="TextBox 19"/>
+          <p:cNvSpPr txBox="1"/>
+          <p:nvPr/>
+        </p:nvSpPr>
+        <p:spPr>
+          <a:xfrm>
+            <a:off x="8229600" y="2606039"/>
+            <a:ext cx="1371600" cy="548640"/>
+          </a:xfrm>
+          <a:prstGeom prst="rect">
+            <a:avLst/>
+          </a:prstGeom>
+          <a:noFill/>
+        </p:spPr>
+        <p:txBody>
+          <a:bodyPr wrap="square">
+            <a:spAutoFit/>
+          </a:bodyPr>
+          <a:lstStyle/>
+          <a:p>
+            <a:pPr algn="l">
+              <a:defRPr sz="1200" b="0">
+                <a:solidFill>
+                  <a:srgbClr val="F87171"/>
+                </a:solidFill>
+                <a:latin typeface="Microsoft JhengHei"/>
+              </a:defRPr>
+            </a:pPr>
+            <a:r>
+              <a:t>入侵警報</a:t>
+            </a:r>
+          </a:p>
+        </p:txBody>
+      </p:sp>
+      <p:sp>
+        <p:nvSpPr>
+          <p:cNvPr id="21" name="TextBox 20"/>
+          <p:cNvSpPr txBox="1"/>
+          <p:nvPr/>
+        </p:nvSpPr>
+        <p:spPr>
+          <a:xfrm>
+            <a:off x="731520" y="3246120"/>
+            <a:ext cx="2377440" cy="548640"/>
+          </a:xfrm>
+          <a:prstGeom prst="rect">
+            <a:avLst/>
+          </a:prstGeom>
+          <a:noFill/>
+        </p:spPr>
+        <p:txBody>
+          <a:bodyPr wrap="square">
+            <a:spAutoFit/>
+          </a:bodyPr>
+          <a:lstStyle/>
+          <a:p>
+            <a:pPr algn="l">
+              <a:defRPr sz="1000" b="0">
                 <a:solidFill>
                   <a:srgbClr val="4ADE80"/>
                 </a:solidFill>
@@ -14576,35 +14798,35 @@
               </a:defRPr>
             </a:pPr>
             <a:r>
-              <a:t>home/security/alert</a:t>
-            </a:r>
-          </a:p>
-        </p:txBody>
-      </p:sp>
-      <p:sp>
-        <p:nvSpPr>
-          <p:cNvPr id="17" name="TextBox 16"/>
-          <p:cNvSpPr txBox="1"/>
-          <p:nvPr/>
-        </p:nvSpPr>
-        <p:spPr>
-          <a:xfrm>
-            <a:off x="3291840" y="2697479"/>
-            <a:ext cx="914400" cy="640080"/>
-          </a:xfrm>
-          <a:prstGeom prst="rect">
-            <a:avLst/>
-          </a:prstGeom>
-          <a:noFill/>
-        </p:spPr>
-        <p:txBody>
-          <a:bodyPr wrap="square">
-            <a:spAutoFit/>
-          </a:bodyPr>
-          <a:lstStyle/>
-          <a:p>
-            <a:pPr>
-              <a:defRPr sz="1300">
+              <a:t>home/security/snapshot</a:t>
+            </a:r>
+          </a:p>
+        </p:txBody>
+      </p:sp>
+      <p:sp>
+        <p:nvSpPr>
+          <p:cNvPr id="22" name="TextBox 21"/>
+          <p:cNvSpPr txBox="1"/>
+          <p:nvPr/>
+        </p:nvSpPr>
+        <p:spPr>
+          <a:xfrm>
+            <a:off x="3108960" y="3246120"/>
+            <a:ext cx="1097280" cy="548640"/>
+          </a:xfrm>
+          <a:prstGeom prst="rect">
+            <a:avLst/>
+          </a:prstGeom>
+          <a:noFill/>
+        </p:spPr>
+        <p:txBody>
+          <a:bodyPr wrap="square">
+            <a:spAutoFit/>
+          </a:bodyPr>
+          <a:lstStyle/>
+          <a:p>
+            <a:pPr algn="l">
+              <a:defRPr sz="1200" b="0">
                 <a:solidFill>
                   <a:srgbClr val="CBD5E1"/>
                 </a:solidFill>
@@ -14619,28 +14841,28 @@
       </p:sp>
       <p:sp>
         <p:nvSpPr>
-          <p:cNvPr id="18" name="TextBox 17"/>
-          <p:cNvSpPr txBox="1"/>
-          <p:nvPr/>
-        </p:nvSpPr>
-        <p:spPr>
-          <a:xfrm>
-            <a:off x="4206240" y="2697479"/>
-            <a:ext cx="1097280" cy="640080"/>
-          </a:xfrm>
-          <a:prstGeom prst="rect">
-            <a:avLst/>
-          </a:prstGeom>
-          <a:noFill/>
-        </p:spPr>
-        <p:txBody>
-          <a:bodyPr wrap="square">
-            <a:spAutoFit/>
-          </a:bodyPr>
-          <a:lstStyle/>
-          <a:p>
-            <a:pPr>
-              <a:defRPr sz="1300">
+          <p:cNvPr id="23" name="TextBox 22"/>
+          <p:cNvSpPr txBox="1"/>
+          <p:nvPr/>
+        </p:nvSpPr>
+        <p:spPr>
+          <a:xfrm>
+            <a:off x="4206240" y="3246120"/>
+            <a:ext cx="1463040" cy="548640"/>
+          </a:xfrm>
+          <a:prstGeom prst="rect">
+            <a:avLst/>
+          </a:prstGeom>
+          <a:noFill/>
+        </p:spPr>
+        <p:txBody>
+          <a:bodyPr wrap="square">
+            <a:spAutoFit/>
+          </a:bodyPr>
+          <a:lstStyle/>
+          <a:p>
+            <a:pPr algn="l">
+              <a:defRPr sz="1200" b="0">
                 <a:solidFill>
                   <a:srgbClr val="CBD5E1"/>
                 </a:solidFill>
@@ -14655,28 +14877,28 @@
       </p:sp>
       <p:sp>
         <p:nvSpPr>
-          <p:cNvPr id="19" name="TextBox 18"/>
-          <p:cNvSpPr txBox="1"/>
-          <p:nvPr/>
-        </p:nvSpPr>
-        <p:spPr>
-          <a:xfrm>
-            <a:off x="5303520" y="2697479"/>
-            <a:ext cx="3200400" cy="640080"/>
-          </a:xfrm>
-          <a:prstGeom prst="rect">
-            <a:avLst/>
-          </a:prstGeom>
-          <a:noFill/>
-        </p:spPr>
-        <p:txBody>
-          <a:bodyPr wrap="square">
-            <a:spAutoFit/>
-          </a:bodyPr>
-          <a:lstStyle/>
-          <a:p>
-            <a:pPr>
-              <a:defRPr sz="1100">
+          <p:cNvPr id="24" name="TextBox 23"/>
+          <p:cNvSpPr txBox="1"/>
+          <p:nvPr/>
+        </p:nvSpPr>
+        <p:spPr>
+          <a:xfrm>
+            <a:off x="5669280" y="3246120"/>
+            <a:ext cx="2560320" cy="548640"/>
+          </a:xfrm>
+          <a:prstGeom prst="rect">
+            <a:avLst/>
+          </a:prstGeom>
+          <a:noFill/>
+        </p:spPr>
+        <p:txBody>
+          <a:bodyPr wrap="square">
+            <a:spAutoFit/>
+          </a:bodyPr>
+          <a:lstStyle/>
+          <a:p>
+            <a:pPr algn="l">
+              <a:defRPr sz="1000" b="0">
                 <a:solidFill>
                   <a:srgbClr val="CBD5E1"/>
                 </a:solidFill>
@@ -14684,39 +14906,35 @@
               </a:defRPr>
             </a:pPr>
             <a:r>
-              <a:t>{"timestamp":"...",</a:t>
-            </a:r>
-            <a:br/>
-            <a:r>
-              <a:t> "confidence":0.85}</a:t>
-            </a:r>
-          </a:p>
-        </p:txBody>
-      </p:sp>
-      <p:sp>
-        <p:nvSpPr>
-          <p:cNvPr id="20" name="TextBox 19"/>
-          <p:cNvSpPr txBox="1"/>
-          <p:nvPr/>
-        </p:nvSpPr>
-        <p:spPr>
-          <a:xfrm>
-            <a:off x="8503920" y="2697479"/>
-            <a:ext cx="1371600" cy="640080"/>
-          </a:xfrm>
-          <a:prstGeom prst="rect">
-            <a:avLst/>
-          </a:prstGeom>
-          <a:noFill/>
-        </p:spPr>
-        <p:txBody>
-          <a:bodyPr wrap="square">
-            <a:spAutoFit/>
-          </a:bodyPr>
-          <a:lstStyle/>
-          <a:p>
-            <a:pPr>
-              <a:defRPr sz="1300">
+              <a:t>{"image":"&lt;Base64&gt;"}</a:t>
+            </a:r>
+          </a:p>
+        </p:txBody>
+      </p:sp>
+      <p:sp>
+        <p:nvSpPr>
+          <p:cNvPr id="25" name="TextBox 24"/>
+          <p:cNvSpPr txBox="1"/>
+          <p:nvPr/>
+        </p:nvSpPr>
+        <p:spPr>
+          <a:xfrm>
+            <a:off x="8229600" y="3246120"/>
+            <a:ext cx="1371600" cy="548640"/>
+          </a:xfrm>
+          <a:prstGeom prst="rect">
+            <a:avLst/>
+          </a:prstGeom>
+          <a:noFill/>
+        </p:spPr>
+        <p:txBody>
+          <a:bodyPr wrap="square">
+            <a:spAutoFit/>
+          </a:bodyPr>
+          <a:lstStyle/>
+          <a:p>
+            <a:pPr algn="l">
+              <a:defRPr sz="1200" b="0">
                 <a:solidFill>
                   <a:srgbClr val="F87171"/>
                 </a:solidFill>
@@ -14724,35 +14942,35 @@
               </a:defRPr>
             </a:pPr>
             <a:r>
-              <a:t>入侵警報</a:t>
-            </a:r>
-          </a:p>
-        </p:txBody>
-      </p:sp>
-      <p:sp>
-        <p:nvSpPr>
-          <p:cNvPr id="21" name="TextBox 20"/>
-          <p:cNvSpPr txBox="1"/>
-          <p:nvPr/>
-        </p:nvSpPr>
-        <p:spPr>
-          <a:xfrm>
-            <a:off x="731520" y="3291839"/>
-            <a:ext cx="2560320" cy="640080"/>
-          </a:xfrm>
-          <a:prstGeom prst="rect">
-            <a:avLst/>
-          </a:prstGeom>
-          <a:noFill/>
-        </p:spPr>
-        <p:txBody>
-          <a:bodyPr wrap="square">
-            <a:spAutoFit/>
-          </a:bodyPr>
-          <a:lstStyle/>
-          <a:p>
-            <a:pPr>
-              <a:defRPr sz="1100">
+              <a:t>截圖影像</a:t>
+            </a:r>
+          </a:p>
+        </p:txBody>
+      </p:sp>
+      <p:sp>
+        <p:nvSpPr>
+          <p:cNvPr id="26" name="TextBox 25"/>
+          <p:cNvSpPr txBox="1"/>
+          <p:nvPr/>
+        </p:nvSpPr>
+        <p:spPr>
+          <a:xfrm>
+            <a:off x="731520" y="3886200"/>
+            <a:ext cx="2377440" cy="548640"/>
+          </a:xfrm>
+          <a:prstGeom prst="rect">
+            <a:avLst/>
+          </a:prstGeom>
+          <a:noFill/>
+        </p:spPr>
+        <p:txBody>
+          <a:bodyPr wrap="square">
+            <a:spAutoFit/>
+          </a:bodyPr>
+          <a:lstStyle/>
+          <a:p>
+            <a:pPr algn="l">
+              <a:defRPr sz="1000" b="0">
                 <a:solidFill>
                   <a:srgbClr val="4ADE80"/>
                 </a:solidFill>
@@ -14760,35 +14978,35 @@
               </a:defRPr>
             </a:pPr>
             <a:r>
-              <a:t>home/security/snapshot</a:t>
-            </a:r>
-          </a:p>
-        </p:txBody>
-      </p:sp>
-      <p:sp>
-        <p:nvSpPr>
-          <p:cNvPr id="22" name="TextBox 21"/>
-          <p:cNvSpPr txBox="1"/>
-          <p:nvPr/>
-        </p:nvSpPr>
-        <p:spPr>
-          <a:xfrm>
-            <a:off x="3291840" y="3291839"/>
-            <a:ext cx="914400" cy="640080"/>
-          </a:xfrm>
-          <a:prstGeom prst="rect">
-            <a:avLst/>
-          </a:prstGeom>
-          <a:noFill/>
-        </p:spPr>
-        <p:txBody>
-          <a:bodyPr wrap="square">
-            <a:spAutoFit/>
-          </a:bodyPr>
-          <a:lstStyle/>
-          <a:p>
-            <a:pPr>
-              <a:defRPr sz="1300">
+              <a:t>home/sensor/light</a:t>
+            </a:r>
+          </a:p>
+        </p:txBody>
+      </p:sp>
+      <p:sp>
+        <p:nvSpPr>
+          <p:cNvPr id="27" name="TextBox 26"/>
+          <p:cNvSpPr txBox="1"/>
+          <p:nvPr/>
+        </p:nvSpPr>
+        <p:spPr>
+          <a:xfrm>
+            <a:off x="3108960" y="3886200"/>
+            <a:ext cx="1097280" cy="548640"/>
+          </a:xfrm>
+          <a:prstGeom prst="rect">
+            <a:avLst/>
+          </a:prstGeom>
+          <a:noFill/>
+        </p:spPr>
+        <p:txBody>
+          <a:bodyPr wrap="square">
+            <a:spAutoFit/>
+          </a:bodyPr>
+          <a:lstStyle/>
+          <a:p>
+            <a:pPr algn="l">
+              <a:defRPr sz="1200" b="0">
                 <a:solidFill>
                   <a:srgbClr val="CBD5E1"/>
                 </a:solidFill>
@@ -14796,6 +15014,546 @@
               </a:defRPr>
             </a:pPr>
             <a:r>
+              <a:t>ESP32</a:t>
+            </a:r>
+          </a:p>
+        </p:txBody>
+      </p:sp>
+      <p:sp>
+        <p:nvSpPr>
+          <p:cNvPr id="28" name="TextBox 27"/>
+          <p:cNvSpPr txBox="1"/>
+          <p:nvPr/>
+        </p:nvSpPr>
+        <p:spPr>
+          <a:xfrm>
+            <a:off x="4206240" y="3886200"/>
+            <a:ext cx="1463040" cy="548640"/>
+          </a:xfrm>
+          <a:prstGeom prst="rect">
+            <a:avLst/>
+          </a:prstGeom>
+          <a:noFill/>
+        </p:spPr>
+        <p:txBody>
+          <a:bodyPr wrap="square">
+            <a:spAutoFit/>
+          </a:bodyPr>
+          <a:lstStyle/>
+          <a:p>
+            <a:pPr algn="l">
+              <a:defRPr sz="1200" b="0">
+                <a:solidFill>
+                  <a:srgbClr val="CBD5E1"/>
+                </a:solidFill>
+                <a:latin typeface="Microsoft JhengHei"/>
+              </a:defRPr>
+            </a:pPr>
+            <a:r>
+              <a:t>Dashboard</a:t>
+            </a:r>
+          </a:p>
+        </p:txBody>
+      </p:sp>
+      <p:sp>
+        <p:nvSpPr>
+          <p:cNvPr id="29" name="TextBox 28"/>
+          <p:cNvSpPr txBox="1"/>
+          <p:nvPr/>
+        </p:nvSpPr>
+        <p:spPr>
+          <a:xfrm>
+            <a:off x="5669280" y="3886200"/>
+            <a:ext cx="2560320" cy="548640"/>
+          </a:xfrm>
+          <a:prstGeom prst="rect">
+            <a:avLst/>
+          </a:prstGeom>
+          <a:noFill/>
+        </p:spPr>
+        <p:txBody>
+          <a:bodyPr wrap="square">
+            <a:spAutoFit/>
+          </a:bodyPr>
+          <a:lstStyle/>
+          <a:p>
+            <a:pPr algn="l">
+              <a:defRPr sz="1000" b="0">
+                <a:solidFill>
+                  <a:srgbClr val="CBD5E1"/>
+                </a:solidFill>
+                <a:latin typeface="Consolas"/>
+              </a:defRPr>
+            </a:pPr>
+            <a:r>
+              <a:t>{"value":2048}</a:t>
+            </a:r>
+          </a:p>
+        </p:txBody>
+      </p:sp>
+      <p:sp>
+        <p:nvSpPr>
+          <p:cNvPr id="30" name="TextBox 29"/>
+          <p:cNvSpPr txBox="1"/>
+          <p:nvPr/>
+        </p:nvSpPr>
+        <p:spPr>
+          <a:xfrm>
+            <a:off x="8229600" y="3886200"/>
+            <a:ext cx="1371600" cy="548640"/>
+          </a:xfrm>
+          <a:prstGeom prst="rect">
+            <a:avLst/>
+          </a:prstGeom>
+          <a:noFill/>
+        </p:spPr>
+        <p:txBody>
+          <a:bodyPr wrap="square">
+            <a:spAutoFit/>
+          </a:bodyPr>
+          <a:lstStyle/>
+          <a:p>
+            <a:pPr algn="l">
+              <a:defRPr sz="1200" b="0">
+                <a:solidFill>
+                  <a:srgbClr val="4ADE80"/>
+                </a:solidFill>
+                <a:latin typeface="Microsoft JhengHei"/>
+              </a:defRPr>
+            </a:pPr>
+            <a:r>
+              <a:t>亮度數值</a:t>
+            </a:r>
+          </a:p>
+        </p:txBody>
+      </p:sp>
+      <p:sp>
+        <p:nvSpPr>
+          <p:cNvPr id="31" name="TextBox 30"/>
+          <p:cNvSpPr txBox="1"/>
+          <p:nvPr/>
+        </p:nvSpPr>
+        <p:spPr>
+          <a:xfrm>
+            <a:off x="731520" y="4526279"/>
+            <a:ext cx="2377440" cy="548640"/>
+          </a:xfrm>
+          <a:prstGeom prst="rect">
+            <a:avLst/>
+          </a:prstGeom>
+          <a:noFill/>
+        </p:spPr>
+        <p:txBody>
+          <a:bodyPr wrap="square">
+            <a:spAutoFit/>
+          </a:bodyPr>
+          <a:lstStyle/>
+          <a:p>
+            <a:pPr algn="l">
+              <a:defRPr sz="1000" b="0">
+                <a:solidFill>
+                  <a:srgbClr val="4ADE80"/>
+                </a:solidFill>
+                <a:latin typeface="Consolas"/>
+              </a:defRPr>
+            </a:pPr>
+            <a:r>
+              <a:t>home/light/status</a:t>
+            </a:r>
+          </a:p>
+        </p:txBody>
+      </p:sp>
+      <p:sp>
+        <p:nvSpPr>
+          <p:cNvPr id="32" name="TextBox 31"/>
+          <p:cNvSpPr txBox="1"/>
+          <p:nvPr/>
+        </p:nvSpPr>
+        <p:spPr>
+          <a:xfrm>
+            <a:off x="3108960" y="4526279"/>
+            <a:ext cx="1097280" cy="548640"/>
+          </a:xfrm>
+          <a:prstGeom prst="rect">
+            <a:avLst/>
+          </a:prstGeom>
+          <a:noFill/>
+        </p:spPr>
+        <p:txBody>
+          <a:bodyPr wrap="square">
+            <a:spAutoFit/>
+          </a:bodyPr>
+          <a:lstStyle/>
+          <a:p>
+            <a:pPr algn="l">
+              <a:defRPr sz="1200" b="0">
+                <a:solidFill>
+                  <a:srgbClr val="CBD5E1"/>
+                </a:solidFill>
+                <a:latin typeface="Microsoft JhengHei"/>
+              </a:defRPr>
+            </a:pPr>
+            <a:r>
+              <a:t>ESP32</a:t>
+            </a:r>
+          </a:p>
+        </p:txBody>
+      </p:sp>
+      <p:sp>
+        <p:nvSpPr>
+          <p:cNvPr id="33" name="TextBox 32"/>
+          <p:cNvSpPr txBox="1"/>
+          <p:nvPr/>
+        </p:nvSpPr>
+        <p:spPr>
+          <a:xfrm>
+            <a:off x="4206240" y="4526279"/>
+            <a:ext cx="1463040" cy="548640"/>
+          </a:xfrm>
+          <a:prstGeom prst="rect">
+            <a:avLst/>
+          </a:prstGeom>
+          <a:noFill/>
+        </p:spPr>
+        <p:txBody>
+          <a:bodyPr wrap="square">
+            <a:spAutoFit/>
+          </a:bodyPr>
+          <a:lstStyle/>
+          <a:p>
+            <a:pPr algn="l">
+              <a:defRPr sz="1200" b="0">
+                <a:solidFill>
+                  <a:srgbClr val="CBD5E1"/>
+                </a:solidFill>
+                <a:latin typeface="Microsoft JhengHei"/>
+              </a:defRPr>
+            </a:pPr>
+            <a:r>
+              <a:t>Dashboard</a:t>
+            </a:r>
+          </a:p>
+        </p:txBody>
+      </p:sp>
+      <p:sp>
+        <p:nvSpPr>
+          <p:cNvPr id="34" name="TextBox 33"/>
+          <p:cNvSpPr txBox="1"/>
+          <p:nvPr/>
+        </p:nvSpPr>
+        <p:spPr>
+          <a:xfrm>
+            <a:off x="5669280" y="4526279"/>
+            <a:ext cx="2560320" cy="548640"/>
+          </a:xfrm>
+          <a:prstGeom prst="rect">
+            <a:avLst/>
+          </a:prstGeom>
+          <a:noFill/>
+        </p:spPr>
+        <p:txBody>
+          <a:bodyPr wrap="square">
+            <a:spAutoFit/>
+          </a:bodyPr>
+          <a:lstStyle/>
+          <a:p>
+            <a:pPr algn="l">
+              <a:defRPr sz="1000" b="0">
+                <a:solidFill>
+                  <a:srgbClr val="CBD5E1"/>
+                </a:solidFill>
+                <a:latin typeface="Consolas"/>
+              </a:defRPr>
+            </a:pPr>
+            <a:r>
+              <a:t>{"status":"on"}</a:t>
+            </a:r>
+          </a:p>
+        </p:txBody>
+      </p:sp>
+      <p:sp>
+        <p:nvSpPr>
+          <p:cNvPr id="35" name="TextBox 34"/>
+          <p:cNvSpPr txBox="1"/>
+          <p:nvPr/>
+        </p:nvSpPr>
+        <p:spPr>
+          <a:xfrm>
+            <a:off x="8229600" y="4526279"/>
+            <a:ext cx="1371600" cy="548640"/>
+          </a:xfrm>
+          <a:prstGeom prst="rect">
+            <a:avLst/>
+          </a:prstGeom>
+          <a:noFill/>
+        </p:spPr>
+        <p:txBody>
+          <a:bodyPr wrap="square">
+            <a:spAutoFit/>
+          </a:bodyPr>
+          <a:lstStyle/>
+          <a:p>
+            <a:pPr algn="l">
+              <a:defRPr sz="1200" b="0">
+                <a:solidFill>
+                  <a:srgbClr val="4ADE80"/>
+                </a:solidFill>
+                <a:latin typeface="Microsoft JhengHei"/>
+              </a:defRPr>
+            </a:pPr>
+            <a:r>
+              <a:t>燈光狀態</a:t>
+            </a:r>
+          </a:p>
+        </p:txBody>
+      </p:sp>
+      <p:sp>
+        <p:nvSpPr>
+          <p:cNvPr id="36" name="TextBox 35"/>
+          <p:cNvSpPr txBox="1"/>
+          <p:nvPr/>
+        </p:nvSpPr>
+        <p:spPr>
+          <a:xfrm>
+            <a:off x="731520" y="5166360"/>
+            <a:ext cx="2377440" cy="548640"/>
+          </a:xfrm>
+          <a:prstGeom prst="rect">
+            <a:avLst/>
+          </a:prstGeom>
+          <a:noFill/>
+        </p:spPr>
+        <p:txBody>
+          <a:bodyPr wrap="square">
+            <a:spAutoFit/>
+          </a:bodyPr>
+          <a:lstStyle/>
+          <a:p>
+            <a:pPr algn="l">
+              <a:defRPr sz="1000" b="0">
+                <a:solidFill>
+                  <a:srgbClr val="4ADE80"/>
+                </a:solidFill>
+                <a:latin typeface="Consolas"/>
+              </a:defRPr>
+            </a:pPr>
+            <a:r>
+              <a:t>home/light/control</a:t>
+            </a:r>
+          </a:p>
+        </p:txBody>
+      </p:sp>
+      <p:sp>
+        <p:nvSpPr>
+          <p:cNvPr id="37" name="TextBox 36"/>
+          <p:cNvSpPr txBox="1"/>
+          <p:nvPr/>
+        </p:nvSpPr>
+        <p:spPr>
+          <a:xfrm>
+            <a:off x="3108960" y="5166360"/>
+            <a:ext cx="1097280" cy="548640"/>
+          </a:xfrm>
+          <a:prstGeom prst="rect">
+            <a:avLst/>
+          </a:prstGeom>
+          <a:noFill/>
+        </p:spPr>
+        <p:txBody>
+          <a:bodyPr wrap="square">
+            <a:spAutoFit/>
+          </a:bodyPr>
+          <a:lstStyle/>
+          <a:p>
+            <a:pPr algn="l">
+              <a:defRPr sz="1200" b="0">
+                <a:solidFill>
+                  <a:srgbClr val="CBD5E1"/>
+                </a:solidFill>
+                <a:latin typeface="Microsoft JhengHei"/>
+              </a:defRPr>
+            </a:pPr>
+            <a:r>
+              <a:t>Dashboard</a:t>
+            </a:r>
+          </a:p>
+        </p:txBody>
+      </p:sp>
+      <p:sp>
+        <p:nvSpPr>
+          <p:cNvPr id="38" name="TextBox 37"/>
+          <p:cNvSpPr txBox="1"/>
+          <p:nvPr/>
+        </p:nvSpPr>
+        <p:spPr>
+          <a:xfrm>
+            <a:off x="4206240" y="5166360"/>
+            <a:ext cx="1463040" cy="548640"/>
+          </a:xfrm>
+          <a:prstGeom prst="rect">
+            <a:avLst/>
+          </a:prstGeom>
+          <a:noFill/>
+        </p:spPr>
+        <p:txBody>
+          <a:bodyPr wrap="square">
+            <a:spAutoFit/>
+          </a:bodyPr>
+          <a:lstStyle/>
+          <a:p>
+            <a:pPr algn="l">
+              <a:defRPr sz="1200" b="0">
+                <a:solidFill>
+                  <a:srgbClr val="CBD5E1"/>
+                </a:solidFill>
+                <a:latin typeface="Microsoft JhengHei"/>
+              </a:defRPr>
+            </a:pPr>
+            <a:r>
+              <a:t>ESP32</a:t>
+            </a:r>
+          </a:p>
+        </p:txBody>
+      </p:sp>
+      <p:sp>
+        <p:nvSpPr>
+          <p:cNvPr id="39" name="TextBox 38"/>
+          <p:cNvSpPr txBox="1"/>
+          <p:nvPr/>
+        </p:nvSpPr>
+        <p:spPr>
+          <a:xfrm>
+            <a:off x="5669280" y="5166360"/>
+            <a:ext cx="2560320" cy="548640"/>
+          </a:xfrm>
+          <a:prstGeom prst="rect">
+            <a:avLst/>
+          </a:prstGeom>
+          <a:noFill/>
+        </p:spPr>
+        <p:txBody>
+          <a:bodyPr wrap="square">
+            <a:spAutoFit/>
+          </a:bodyPr>
+          <a:lstStyle/>
+          <a:p>
+            <a:pPr algn="l">
+              <a:defRPr sz="1000" b="0">
+                <a:solidFill>
+                  <a:srgbClr val="CBD5E1"/>
+                </a:solidFill>
+                <a:latin typeface="Consolas"/>
+              </a:defRPr>
+            </a:pPr>
+            <a:r>
+              <a:t>{"action":"on"}</a:t>
+            </a:r>
+          </a:p>
+        </p:txBody>
+      </p:sp>
+      <p:sp>
+        <p:nvSpPr>
+          <p:cNvPr id="40" name="TextBox 39"/>
+          <p:cNvSpPr txBox="1"/>
+          <p:nvPr/>
+        </p:nvSpPr>
+        <p:spPr>
+          <a:xfrm>
+            <a:off x="8229600" y="5166360"/>
+            <a:ext cx="1371600" cy="548640"/>
+          </a:xfrm>
+          <a:prstGeom prst="rect">
+            <a:avLst/>
+          </a:prstGeom>
+          <a:noFill/>
+        </p:spPr>
+        <p:txBody>
+          <a:bodyPr wrap="square">
+            <a:spAutoFit/>
+          </a:bodyPr>
+          <a:lstStyle/>
+          <a:p>
+            <a:pPr algn="l">
+              <a:defRPr sz="1200" b="0">
+                <a:solidFill>
+                  <a:srgbClr val="FBBF24"/>
+                </a:solidFill>
+                <a:latin typeface="Microsoft JhengHei"/>
+              </a:defRPr>
+            </a:pPr>
+            <a:r>
+              <a:t>遠端控燈</a:t>
+            </a:r>
+          </a:p>
+        </p:txBody>
+      </p:sp>
+      <p:sp>
+        <p:nvSpPr>
+          <p:cNvPr id="41" name="TextBox 40"/>
+          <p:cNvSpPr txBox="1"/>
+          <p:nvPr/>
+        </p:nvSpPr>
+        <p:spPr>
+          <a:xfrm>
+            <a:off x="731520" y="5806440"/>
+            <a:ext cx="2377440" cy="548640"/>
+          </a:xfrm>
+          <a:prstGeom prst="rect">
+            <a:avLst/>
+          </a:prstGeom>
+          <a:noFill/>
+        </p:spPr>
+        <p:txBody>
+          <a:bodyPr wrap="square">
+            <a:spAutoFit/>
+          </a:bodyPr>
+          <a:lstStyle/>
+          <a:p>
+            <a:pPr algn="l">
+              <a:defRPr sz="1000" b="0">
+                <a:solidFill>
+                  <a:srgbClr val="4ADE80"/>
+                </a:solidFill>
+                <a:latin typeface="Consolas"/>
+              </a:defRPr>
+            </a:pPr>
+            <a:r>
+              <a:t>home/system/status</a:t>
+            </a:r>
+          </a:p>
+        </p:txBody>
+      </p:sp>
+      <p:sp>
+        <p:nvSpPr>
+          <p:cNvPr id="42" name="TextBox 41"/>
+          <p:cNvSpPr txBox="1"/>
+          <p:nvPr/>
+        </p:nvSpPr>
+        <p:spPr>
+          <a:xfrm>
+            <a:off x="3108960" y="5806440"/>
+            <a:ext cx="1097280" cy="548640"/>
+          </a:xfrm>
+          <a:prstGeom prst="rect">
+            <a:avLst/>
+          </a:prstGeom>
+          <a:noFill/>
+        </p:spPr>
+        <p:txBody>
+          <a:bodyPr wrap="square">
+            <a:spAutoFit/>
+          </a:bodyPr>
+          <a:lstStyle/>
+          <a:p>
+            <a:pPr algn="l">
+              <a:defRPr sz="1200" b="0">
+                <a:solidFill>
+                  <a:srgbClr val="CBD5E1"/>
+                </a:solidFill>
+                <a:latin typeface="Microsoft JhengHei"/>
+              </a:defRPr>
+            </a:pPr>
+            <a:r>
               <a:t>RPi</a:t>
             </a:r>
           </a:p>
@@ -14803,28 +15561,28 @@
       </p:sp>
       <p:sp>
         <p:nvSpPr>
-          <p:cNvPr id="23" name="TextBox 22"/>
-          <p:cNvSpPr txBox="1"/>
-          <p:nvPr/>
-        </p:nvSpPr>
-        <p:spPr>
-          <a:xfrm>
-            <a:off x="4206240" y="3291839"/>
-            <a:ext cx="1097280" cy="640080"/>
-          </a:xfrm>
-          <a:prstGeom prst="rect">
-            <a:avLst/>
-          </a:prstGeom>
-          <a:noFill/>
-        </p:spPr>
-        <p:txBody>
-          <a:bodyPr wrap="square">
-            <a:spAutoFit/>
-          </a:bodyPr>
-          <a:lstStyle/>
-          <a:p>
-            <a:pPr>
-              <a:defRPr sz="1300">
+          <p:cNvPr id="43" name="TextBox 42"/>
+          <p:cNvSpPr txBox="1"/>
+          <p:nvPr/>
+        </p:nvSpPr>
+        <p:spPr>
+          <a:xfrm>
+            <a:off x="4206240" y="5806440"/>
+            <a:ext cx="1463040" cy="548640"/>
+          </a:xfrm>
+          <a:prstGeom prst="rect">
+            <a:avLst/>
+          </a:prstGeom>
+          <a:noFill/>
+        </p:spPr>
+        <p:txBody>
+          <a:bodyPr wrap="square">
+            <a:spAutoFit/>
+          </a:bodyPr>
+          <a:lstStyle/>
+          <a:p>
+            <a:pPr algn="l">
+              <a:defRPr sz="1200" b="0">
                 <a:solidFill>
                   <a:srgbClr val="CBD5E1"/>
                 </a:solidFill>
@@ -14839,28 +15597,28 @@
       </p:sp>
       <p:sp>
         <p:nvSpPr>
-          <p:cNvPr id="24" name="TextBox 23"/>
-          <p:cNvSpPr txBox="1"/>
-          <p:nvPr/>
-        </p:nvSpPr>
-        <p:spPr>
-          <a:xfrm>
-            <a:off x="5303520" y="3291839"/>
-            <a:ext cx="3200400" cy="640080"/>
-          </a:xfrm>
-          <a:prstGeom prst="rect">
-            <a:avLst/>
-          </a:prstGeom>
-          <a:noFill/>
-        </p:spPr>
-        <p:txBody>
-          <a:bodyPr wrap="square">
-            <a:spAutoFit/>
-          </a:bodyPr>
-          <a:lstStyle/>
-          <a:p>
-            <a:pPr>
-              <a:defRPr sz="1100">
+          <p:cNvPr id="44" name="TextBox 43"/>
+          <p:cNvSpPr txBox="1"/>
+          <p:nvPr/>
+        </p:nvSpPr>
+        <p:spPr>
+          <a:xfrm>
+            <a:off x="5669280" y="5806440"/>
+            <a:ext cx="2560320" cy="548640"/>
+          </a:xfrm>
+          <a:prstGeom prst="rect">
+            <a:avLst/>
+          </a:prstGeom>
+          <a:noFill/>
+        </p:spPr>
+        <p:txBody>
+          <a:bodyPr wrap="square">
+            <a:spAutoFit/>
+          </a:bodyPr>
+          <a:lstStyle/>
+          <a:p>
+            <a:pPr algn="l">
+              <a:defRPr sz="1000" b="0">
                 <a:solidFill>
                   <a:srgbClr val="CBD5E1"/>
                 </a:solidFill>
@@ -14868,735 +15626,7 @@
               </a:defRPr>
             </a:pPr>
             <a:r>
-              <a:t>{"timestamp":"...",</a:t>
-            </a:r>
-            <a:br/>
-            <a:r>
-              <a:t> "image":"&lt;Base64&gt;"}</a:t>
-            </a:r>
-          </a:p>
-        </p:txBody>
-      </p:sp>
-      <p:sp>
-        <p:nvSpPr>
-          <p:cNvPr id="25" name="TextBox 24"/>
-          <p:cNvSpPr txBox="1"/>
-          <p:nvPr/>
-        </p:nvSpPr>
-        <p:spPr>
-          <a:xfrm>
-            <a:off x="8503920" y="3291839"/>
-            <a:ext cx="1371600" cy="640080"/>
-          </a:xfrm>
-          <a:prstGeom prst="rect">
-            <a:avLst/>
-          </a:prstGeom>
-          <a:noFill/>
-        </p:spPr>
-        <p:txBody>
-          <a:bodyPr wrap="square">
-            <a:spAutoFit/>
-          </a:bodyPr>
-          <a:lstStyle/>
-          <a:p>
-            <a:pPr>
-              <a:defRPr sz="1300">
-                <a:solidFill>
-                  <a:srgbClr val="F87171"/>
-                </a:solidFill>
-                <a:latin typeface="Microsoft JhengHei"/>
-              </a:defRPr>
-            </a:pPr>
-            <a:r>
-              <a:t>截圖影像</a:t>
-            </a:r>
-          </a:p>
-        </p:txBody>
-      </p:sp>
-      <p:sp>
-        <p:nvSpPr>
-          <p:cNvPr id="26" name="TextBox 25"/>
-          <p:cNvSpPr txBox="1"/>
-          <p:nvPr/>
-        </p:nvSpPr>
-        <p:spPr>
-          <a:xfrm>
-            <a:off x="731520" y="3886200"/>
-            <a:ext cx="2560320" cy="640080"/>
-          </a:xfrm>
-          <a:prstGeom prst="rect">
-            <a:avLst/>
-          </a:prstGeom>
-          <a:noFill/>
-        </p:spPr>
-        <p:txBody>
-          <a:bodyPr wrap="square">
-            <a:spAutoFit/>
-          </a:bodyPr>
-          <a:lstStyle/>
-          <a:p>
-            <a:pPr>
-              <a:defRPr sz="1100">
-                <a:solidFill>
-                  <a:srgbClr val="4ADE80"/>
-                </a:solidFill>
-                <a:latin typeface="Consolas"/>
-              </a:defRPr>
-            </a:pPr>
-            <a:r>
-              <a:t>home/sensor/light</a:t>
-            </a:r>
-          </a:p>
-        </p:txBody>
-      </p:sp>
-      <p:sp>
-        <p:nvSpPr>
-          <p:cNvPr id="27" name="TextBox 26"/>
-          <p:cNvSpPr txBox="1"/>
-          <p:nvPr/>
-        </p:nvSpPr>
-        <p:spPr>
-          <a:xfrm>
-            <a:off x="3291840" y="3886200"/>
-            <a:ext cx="914400" cy="640080"/>
-          </a:xfrm>
-          <a:prstGeom prst="rect">
-            <a:avLst/>
-          </a:prstGeom>
-          <a:noFill/>
-        </p:spPr>
-        <p:txBody>
-          <a:bodyPr wrap="square">
-            <a:spAutoFit/>
-          </a:bodyPr>
-          <a:lstStyle/>
-          <a:p>
-            <a:pPr>
-              <a:defRPr sz="1300">
-                <a:solidFill>
-                  <a:srgbClr val="CBD5E1"/>
-                </a:solidFill>
-                <a:latin typeface="Microsoft JhengHei"/>
-              </a:defRPr>
-            </a:pPr>
-            <a:r>
-              <a:t>ESP32</a:t>
-            </a:r>
-          </a:p>
-        </p:txBody>
-      </p:sp>
-      <p:sp>
-        <p:nvSpPr>
-          <p:cNvPr id="28" name="TextBox 27"/>
-          <p:cNvSpPr txBox="1"/>
-          <p:nvPr/>
-        </p:nvSpPr>
-        <p:spPr>
-          <a:xfrm>
-            <a:off x="4206240" y="3886200"/>
-            <a:ext cx="1097280" cy="640080"/>
-          </a:xfrm>
-          <a:prstGeom prst="rect">
-            <a:avLst/>
-          </a:prstGeom>
-          <a:noFill/>
-        </p:spPr>
-        <p:txBody>
-          <a:bodyPr wrap="square">
-            <a:spAutoFit/>
-          </a:bodyPr>
-          <a:lstStyle/>
-          <a:p>
-            <a:pPr>
-              <a:defRPr sz="1300">
-                <a:solidFill>
-                  <a:srgbClr val="CBD5E1"/>
-                </a:solidFill>
-                <a:latin typeface="Microsoft JhengHei"/>
-              </a:defRPr>
-            </a:pPr>
-            <a:r>
-              <a:t>Dashboard</a:t>
-            </a:r>
-          </a:p>
-        </p:txBody>
-      </p:sp>
-      <p:sp>
-        <p:nvSpPr>
-          <p:cNvPr id="29" name="TextBox 28"/>
-          <p:cNvSpPr txBox="1"/>
-          <p:nvPr/>
-        </p:nvSpPr>
-        <p:spPr>
-          <a:xfrm>
-            <a:off x="5303520" y="3886200"/>
-            <a:ext cx="3200400" cy="640080"/>
-          </a:xfrm>
-          <a:prstGeom prst="rect">
-            <a:avLst/>
-          </a:prstGeom>
-          <a:noFill/>
-        </p:spPr>
-        <p:txBody>
-          <a:bodyPr wrap="square">
-            <a:spAutoFit/>
-          </a:bodyPr>
-          <a:lstStyle/>
-          <a:p>
-            <a:pPr>
-              <a:defRPr sz="1100">
-                <a:solidFill>
-                  <a:srgbClr val="CBD5E1"/>
-                </a:solidFill>
-                <a:latin typeface="Consolas"/>
-              </a:defRPr>
-            </a:pPr>
-            <a:r>
-              <a:t>{"value": 2048}</a:t>
-            </a:r>
-          </a:p>
-        </p:txBody>
-      </p:sp>
-      <p:sp>
-        <p:nvSpPr>
-          <p:cNvPr id="30" name="TextBox 29"/>
-          <p:cNvSpPr txBox="1"/>
-          <p:nvPr/>
-        </p:nvSpPr>
-        <p:spPr>
-          <a:xfrm>
-            <a:off x="8503920" y="3886200"/>
-            <a:ext cx="1371600" cy="640080"/>
-          </a:xfrm>
-          <a:prstGeom prst="rect">
-            <a:avLst/>
-          </a:prstGeom>
-          <a:noFill/>
-        </p:spPr>
-        <p:txBody>
-          <a:bodyPr wrap="square">
-            <a:spAutoFit/>
-          </a:bodyPr>
-          <a:lstStyle/>
-          <a:p>
-            <a:pPr>
-              <a:defRPr sz="1300">
-                <a:solidFill>
-                  <a:srgbClr val="4ADE80"/>
-                </a:solidFill>
-                <a:latin typeface="Microsoft JhengHei"/>
-              </a:defRPr>
-            </a:pPr>
-            <a:r>
-              <a:t>亮度數值</a:t>
-            </a:r>
-          </a:p>
-        </p:txBody>
-      </p:sp>
-      <p:sp>
-        <p:nvSpPr>
-          <p:cNvPr id="31" name="TextBox 30"/>
-          <p:cNvSpPr txBox="1"/>
-          <p:nvPr/>
-        </p:nvSpPr>
-        <p:spPr>
-          <a:xfrm>
-            <a:off x="731520" y="4480560"/>
-            <a:ext cx="2560320" cy="640080"/>
-          </a:xfrm>
-          <a:prstGeom prst="rect">
-            <a:avLst/>
-          </a:prstGeom>
-          <a:noFill/>
-        </p:spPr>
-        <p:txBody>
-          <a:bodyPr wrap="square">
-            <a:spAutoFit/>
-          </a:bodyPr>
-          <a:lstStyle/>
-          <a:p>
-            <a:pPr>
-              <a:defRPr sz="1100">
-                <a:solidFill>
-                  <a:srgbClr val="4ADE80"/>
-                </a:solidFill>
-                <a:latin typeface="Consolas"/>
-              </a:defRPr>
-            </a:pPr>
-            <a:r>
-              <a:t>home/light/status</a:t>
-            </a:r>
-          </a:p>
-        </p:txBody>
-      </p:sp>
-      <p:sp>
-        <p:nvSpPr>
-          <p:cNvPr id="32" name="TextBox 31"/>
-          <p:cNvSpPr txBox="1"/>
-          <p:nvPr/>
-        </p:nvSpPr>
-        <p:spPr>
-          <a:xfrm>
-            <a:off x="3291840" y="4480560"/>
-            <a:ext cx="914400" cy="640080"/>
-          </a:xfrm>
-          <a:prstGeom prst="rect">
-            <a:avLst/>
-          </a:prstGeom>
-          <a:noFill/>
-        </p:spPr>
-        <p:txBody>
-          <a:bodyPr wrap="square">
-            <a:spAutoFit/>
-          </a:bodyPr>
-          <a:lstStyle/>
-          <a:p>
-            <a:pPr>
-              <a:defRPr sz="1300">
-                <a:solidFill>
-                  <a:srgbClr val="CBD5E1"/>
-                </a:solidFill>
-                <a:latin typeface="Microsoft JhengHei"/>
-              </a:defRPr>
-            </a:pPr>
-            <a:r>
-              <a:t>ESP32</a:t>
-            </a:r>
-          </a:p>
-        </p:txBody>
-      </p:sp>
-      <p:sp>
-        <p:nvSpPr>
-          <p:cNvPr id="33" name="TextBox 32"/>
-          <p:cNvSpPr txBox="1"/>
-          <p:nvPr/>
-        </p:nvSpPr>
-        <p:spPr>
-          <a:xfrm>
-            <a:off x="4206240" y="4480560"/>
-            <a:ext cx="1097280" cy="640080"/>
-          </a:xfrm>
-          <a:prstGeom prst="rect">
-            <a:avLst/>
-          </a:prstGeom>
-          <a:noFill/>
-        </p:spPr>
-        <p:txBody>
-          <a:bodyPr wrap="square">
-            <a:spAutoFit/>
-          </a:bodyPr>
-          <a:lstStyle/>
-          <a:p>
-            <a:pPr>
-              <a:defRPr sz="1300">
-                <a:solidFill>
-                  <a:srgbClr val="CBD5E1"/>
-                </a:solidFill>
-                <a:latin typeface="Microsoft JhengHei"/>
-              </a:defRPr>
-            </a:pPr>
-            <a:r>
-              <a:t>Dashboard</a:t>
-            </a:r>
-          </a:p>
-        </p:txBody>
-      </p:sp>
-      <p:sp>
-        <p:nvSpPr>
-          <p:cNvPr id="34" name="TextBox 33"/>
-          <p:cNvSpPr txBox="1"/>
-          <p:nvPr/>
-        </p:nvSpPr>
-        <p:spPr>
-          <a:xfrm>
-            <a:off x="5303520" y="4480560"/>
-            <a:ext cx="3200400" cy="640080"/>
-          </a:xfrm>
-          <a:prstGeom prst="rect">
-            <a:avLst/>
-          </a:prstGeom>
-          <a:noFill/>
-        </p:spPr>
-        <p:txBody>
-          <a:bodyPr wrap="square">
-            <a:spAutoFit/>
-          </a:bodyPr>
-          <a:lstStyle/>
-          <a:p>
-            <a:pPr>
-              <a:defRPr sz="1100">
-                <a:solidFill>
-                  <a:srgbClr val="CBD5E1"/>
-                </a:solidFill>
-                <a:latin typeface="Consolas"/>
-              </a:defRPr>
-            </a:pPr>
-            <a:r>
-              <a:t>{"status": "on"}</a:t>
-            </a:r>
-          </a:p>
-        </p:txBody>
-      </p:sp>
-      <p:sp>
-        <p:nvSpPr>
-          <p:cNvPr id="35" name="TextBox 34"/>
-          <p:cNvSpPr txBox="1"/>
-          <p:nvPr/>
-        </p:nvSpPr>
-        <p:spPr>
-          <a:xfrm>
-            <a:off x="8503920" y="4480560"/>
-            <a:ext cx="1371600" cy="640080"/>
-          </a:xfrm>
-          <a:prstGeom prst="rect">
-            <a:avLst/>
-          </a:prstGeom>
-          <a:noFill/>
-        </p:spPr>
-        <p:txBody>
-          <a:bodyPr wrap="square">
-            <a:spAutoFit/>
-          </a:bodyPr>
-          <a:lstStyle/>
-          <a:p>
-            <a:pPr>
-              <a:defRPr sz="1300">
-                <a:solidFill>
-                  <a:srgbClr val="4ADE80"/>
-                </a:solidFill>
-                <a:latin typeface="Microsoft JhengHei"/>
-              </a:defRPr>
-            </a:pPr>
-            <a:r>
-              <a:t>燈光狀態</a:t>
-            </a:r>
-          </a:p>
-        </p:txBody>
-      </p:sp>
-      <p:sp>
-        <p:nvSpPr>
-          <p:cNvPr id="36" name="TextBox 35"/>
-          <p:cNvSpPr txBox="1"/>
-          <p:nvPr/>
-        </p:nvSpPr>
-        <p:spPr>
-          <a:xfrm>
-            <a:off x="731520" y="5074920"/>
-            <a:ext cx="2560320" cy="640080"/>
-          </a:xfrm>
-          <a:prstGeom prst="rect">
-            <a:avLst/>
-          </a:prstGeom>
-          <a:noFill/>
-        </p:spPr>
-        <p:txBody>
-          <a:bodyPr wrap="square">
-            <a:spAutoFit/>
-          </a:bodyPr>
-          <a:lstStyle/>
-          <a:p>
-            <a:pPr>
-              <a:defRPr sz="1100">
-                <a:solidFill>
-                  <a:srgbClr val="4ADE80"/>
-                </a:solidFill>
-                <a:latin typeface="Consolas"/>
-              </a:defRPr>
-            </a:pPr>
-            <a:r>
-              <a:t>home/light/control</a:t>
-            </a:r>
-          </a:p>
-        </p:txBody>
-      </p:sp>
-      <p:sp>
-        <p:nvSpPr>
-          <p:cNvPr id="37" name="TextBox 36"/>
-          <p:cNvSpPr txBox="1"/>
-          <p:nvPr/>
-        </p:nvSpPr>
-        <p:spPr>
-          <a:xfrm>
-            <a:off x="3291840" y="5074920"/>
-            <a:ext cx="914400" cy="640080"/>
-          </a:xfrm>
-          <a:prstGeom prst="rect">
-            <a:avLst/>
-          </a:prstGeom>
-          <a:noFill/>
-        </p:spPr>
-        <p:txBody>
-          <a:bodyPr wrap="square">
-            <a:spAutoFit/>
-          </a:bodyPr>
-          <a:lstStyle/>
-          <a:p>
-            <a:pPr>
-              <a:defRPr sz="1300">
-                <a:solidFill>
-                  <a:srgbClr val="CBD5E1"/>
-                </a:solidFill>
-                <a:latin typeface="Microsoft JhengHei"/>
-              </a:defRPr>
-            </a:pPr>
-            <a:r>
-              <a:t>Dashboard</a:t>
-            </a:r>
-          </a:p>
-        </p:txBody>
-      </p:sp>
-      <p:sp>
-        <p:nvSpPr>
-          <p:cNvPr id="38" name="TextBox 37"/>
-          <p:cNvSpPr txBox="1"/>
-          <p:nvPr/>
-        </p:nvSpPr>
-        <p:spPr>
-          <a:xfrm>
-            <a:off x="4206240" y="5074920"/>
-            <a:ext cx="1097280" cy="640080"/>
-          </a:xfrm>
-          <a:prstGeom prst="rect">
-            <a:avLst/>
-          </a:prstGeom>
-          <a:noFill/>
-        </p:spPr>
-        <p:txBody>
-          <a:bodyPr wrap="square">
-            <a:spAutoFit/>
-          </a:bodyPr>
-          <a:lstStyle/>
-          <a:p>
-            <a:pPr>
-              <a:defRPr sz="1300">
-                <a:solidFill>
-                  <a:srgbClr val="CBD5E1"/>
-                </a:solidFill>
-                <a:latin typeface="Microsoft JhengHei"/>
-              </a:defRPr>
-            </a:pPr>
-            <a:r>
-              <a:t>ESP32</a:t>
-            </a:r>
-          </a:p>
-        </p:txBody>
-      </p:sp>
-      <p:sp>
-        <p:nvSpPr>
-          <p:cNvPr id="39" name="TextBox 38"/>
-          <p:cNvSpPr txBox="1"/>
-          <p:nvPr/>
-        </p:nvSpPr>
-        <p:spPr>
-          <a:xfrm>
-            <a:off x="5303520" y="5074920"/>
-            <a:ext cx="3200400" cy="640080"/>
-          </a:xfrm>
-          <a:prstGeom prst="rect">
-            <a:avLst/>
-          </a:prstGeom>
-          <a:noFill/>
-        </p:spPr>
-        <p:txBody>
-          <a:bodyPr wrap="square">
-            <a:spAutoFit/>
-          </a:bodyPr>
-          <a:lstStyle/>
-          <a:p>
-            <a:pPr>
-              <a:defRPr sz="1100">
-                <a:solidFill>
-                  <a:srgbClr val="CBD5E1"/>
-                </a:solidFill>
-                <a:latin typeface="Consolas"/>
-              </a:defRPr>
-            </a:pPr>
-            <a:r>
-              <a:t>{"action": "on"}</a:t>
-            </a:r>
-          </a:p>
-        </p:txBody>
-      </p:sp>
-      <p:sp>
-        <p:nvSpPr>
-          <p:cNvPr id="40" name="TextBox 39"/>
-          <p:cNvSpPr txBox="1"/>
-          <p:nvPr/>
-        </p:nvSpPr>
-        <p:spPr>
-          <a:xfrm>
-            <a:off x="8503920" y="5074920"/>
-            <a:ext cx="1371600" cy="640080"/>
-          </a:xfrm>
-          <a:prstGeom prst="rect">
-            <a:avLst/>
-          </a:prstGeom>
-          <a:noFill/>
-        </p:spPr>
-        <p:txBody>
-          <a:bodyPr wrap="square">
-            <a:spAutoFit/>
-          </a:bodyPr>
-          <a:lstStyle/>
-          <a:p>
-            <a:pPr>
-              <a:defRPr sz="1300">
-                <a:solidFill>
-                  <a:srgbClr val="FBBF24"/>
-                </a:solidFill>
-                <a:latin typeface="Microsoft JhengHei"/>
-              </a:defRPr>
-            </a:pPr>
-            <a:r>
-              <a:t>遠端控燈</a:t>
-            </a:r>
-          </a:p>
-        </p:txBody>
-      </p:sp>
-      <p:sp>
-        <p:nvSpPr>
-          <p:cNvPr id="41" name="TextBox 40"/>
-          <p:cNvSpPr txBox="1"/>
-          <p:nvPr/>
-        </p:nvSpPr>
-        <p:spPr>
-          <a:xfrm>
-            <a:off x="731520" y="5669280"/>
-            <a:ext cx="2560320" cy="640080"/>
-          </a:xfrm>
-          <a:prstGeom prst="rect">
-            <a:avLst/>
-          </a:prstGeom>
-          <a:noFill/>
-        </p:spPr>
-        <p:txBody>
-          <a:bodyPr wrap="square">
-            <a:spAutoFit/>
-          </a:bodyPr>
-          <a:lstStyle/>
-          <a:p>
-            <a:pPr>
-              <a:defRPr sz="1100">
-                <a:solidFill>
-                  <a:srgbClr val="4ADE80"/>
-                </a:solidFill>
-                <a:latin typeface="Consolas"/>
-              </a:defRPr>
-            </a:pPr>
-            <a:r>
-              <a:t>home/system/status</a:t>
-            </a:r>
-          </a:p>
-        </p:txBody>
-      </p:sp>
-      <p:sp>
-        <p:nvSpPr>
-          <p:cNvPr id="42" name="TextBox 41"/>
-          <p:cNvSpPr txBox="1"/>
-          <p:nvPr/>
-        </p:nvSpPr>
-        <p:spPr>
-          <a:xfrm>
-            <a:off x="3291840" y="5669280"/>
-            <a:ext cx="914400" cy="640080"/>
-          </a:xfrm>
-          <a:prstGeom prst="rect">
-            <a:avLst/>
-          </a:prstGeom>
-          <a:noFill/>
-        </p:spPr>
-        <p:txBody>
-          <a:bodyPr wrap="square">
-            <a:spAutoFit/>
-          </a:bodyPr>
-          <a:lstStyle/>
-          <a:p>
-            <a:pPr>
-              <a:defRPr sz="1300">
-                <a:solidFill>
-                  <a:srgbClr val="CBD5E1"/>
-                </a:solidFill>
-                <a:latin typeface="Microsoft JhengHei"/>
-              </a:defRPr>
-            </a:pPr>
-            <a:r>
-              <a:t>RPi</a:t>
-            </a:r>
-          </a:p>
-        </p:txBody>
-      </p:sp>
-      <p:sp>
-        <p:nvSpPr>
-          <p:cNvPr id="43" name="TextBox 42"/>
-          <p:cNvSpPr txBox="1"/>
-          <p:nvPr/>
-        </p:nvSpPr>
-        <p:spPr>
-          <a:xfrm>
-            <a:off x="4206240" y="5669280"/>
-            <a:ext cx="1097280" cy="640080"/>
-          </a:xfrm>
-          <a:prstGeom prst="rect">
-            <a:avLst/>
-          </a:prstGeom>
-          <a:noFill/>
-        </p:spPr>
-        <p:txBody>
-          <a:bodyPr wrap="square">
-            <a:spAutoFit/>
-          </a:bodyPr>
-          <a:lstStyle/>
-          <a:p>
-            <a:pPr>
-              <a:defRPr sz="1300">
-                <a:solidFill>
-                  <a:srgbClr val="CBD5E1"/>
-                </a:solidFill>
-                <a:latin typeface="Microsoft JhengHei"/>
-              </a:defRPr>
-            </a:pPr>
-            <a:r>
-              <a:t>Dashboard</a:t>
-            </a:r>
-          </a:p>
-        </p:txBody>
-      </p:sp>
-      <p:sp>
-        <p:nvSpPr>
-          <p:cNvPr id="44" name="TextBox 43"/>
-          <p:cNvSpPr txBox="1"/>
-          <p:nvPr/>
-        </p:nvSpPr>
-        <p:spPr>
-          <a:xfrm>
-            <a:off x="5303520" y="5669280"/>
-            <a:ext cx="3200400" cy="640080"/>
-          </a:xfrm>
-          <a:prstGeom prst="rect">
-            <a:avLst/>
-          </a:prstGeom>
-          <a:noFill/>
-        </p:spPr>
-        <p:txBody>
-          <a:bodyPr wrap="square">
-            <a:spAutoFit/>
-          </a:bodyPr>
-          <a:lstStyle/>
-          <a:p>
-            <a:pPr>
-              <a:defRPr sz="1100">
-                <a:solidFill>
-                  <a:srgbClr val="CBD5E1"/>
-                </a:solidFill>
-                <a:latin typeface="Consolas"/>
-              </a:defRPr>
-            </a:pPr>
-            <a:r>
-              <a:t>{"cpu_temp":45,</a:t>
-            </a:r>
-            <a:br/>
-            <a:r>
-              <a:t> "uptime":"2h 30m"}</a:t>
+              <a:t>{"cpu_temp":45}</a:t>
             </a:r>
           </a:p>
         </p:txBody>
@@ -15609,22 +15639,22 @@
         </p:nvSpPr>
         <p:spPr>
           <a:xfrm>
-            <a:off x="8503920" y="5669280"/>
-            <a:ext cx="1371600" cy="640080"/>
-          </a:xfrm>
-          <a:prstGeom prst="rect">
-            <a:avLst/>
-          </a:prstGeom>
-          <a:noFill/>
-        </p:spPr>
-        <p:txBody>
-          <a:bodyPr wrap="square">
-            <a:spAutoFit/>
-          </a:bodyPr>
-          <a:lstStyle/>
-          <a:p>
-            <a:pPr>
-              <a:defRPr sz="1300">
+            <a:off x="8229600" y="5806440"/>
+            <a:ext cx="1371600" cy="548640"/>
+          </a:xfrm>
+          <a:prstGeom prst="rect">
+            <a:avLst/>
+          </a:prstGeom>
+          <a:noFill/>
+        </p:spPr>
+        <p:txBody>
+          <a:bodyPr wrap="square">
+            <a:spAutoFit/>
+          </a:bodyPr>
+          <a:lstStyle/>
+          <a:p>
+            <a:pPr algn="l">
+              <a:defRPr sz="1200" b="0">
                 <a:solidFill>
                   <a:srgbClr val="38BDF8"/>
                 </a:solidFill>
@@ -15686,7 +15716,7 @@
           <a:lstStyle/>
           <a:p>
             <a:pPr algn="l">
-              <a:defRPr sz="3200" b="1">
+              <a:defRPr sz="3000" b="1">
                 <a:solidFill>
                   <a:srgbClr val="FFFFFF"/>
                 </a:solidFill>
@@ -15707,8 +15737,8 @@
         </p:nvSpPr>
         <p:spPr>
           <a:xfrm>
-            <a:off x="731520" y="1325880"/>
-            <a:ext cx="1828800" cy="38100"/>
+            <a:off x="731520" y="1280160"/>
+            <a:ext cx="1645920" cy="38100"/>
           </a:xfrm>
           <a:prstGeom prst="rect">
             <a:avLst/>
@@ -15750,8 +15780,8 @@
         </p:nvSpPr>
         <p:spPr>
           <a:xfrm>
-            <a:off x="457200" y="1645920"/>
-            <a:ext cx="5303520" cy="4114800"/>
+            <a:off x="457200" y="1554480"/>
+            <a:ext cx="5303520" cy="4572000"/>
           </a:xfrm>
           <a:prstGeom prst="roundRect">
             <a:avLst/>
@@ -15795,7 +15825,7 @@
         </p:nvSpPr>
         <p:spPr>
           <a:xfrm>
-            <a:off x="731520" y="1737360"/>
+            <a:off x="731520" y="1645920"/>
             <a:ext cx="4572000" cy="365760"/>
           </a:xfrm>
           <a:prstGeom prst="rect">
@@ -15831,8 +15861,8 @@
         </p:nvSpPr>
         <p:spPr>
           <a:xfrm>
-            <a:off x="731520" y="2286000"/>
-            <a:ext cx="4754880" cy="2286000"/>
+            <a:off x="731520" y="2194560"/>
+            <a:ext cx="4754880" cy="1828800"/>
           </a:xfrm>
           <a:prstGeom prst="rect">
             <a:avLst/>
@@ -15851,7 +15881,7 @@
               </a:spcAft>
             </a:pPr>
             <a:r>
-              <a:rPr sz="1300">
+              <a:rPr sz="1200">
                 <a:solidFill>
                   <a:srgbClr val="38BDF8"/>
                 </a:solidFill>
@@ -15860,7 +15890,7 @@
               <a:t>●  </a:t>
             </a:r>
             <a:r>
-              <a:rPr sz="1500">
+              <a:rPr sz="1400">
                 <a:solidFill>
                   <a:srgbClr val="FFFFFF"/>
                 </a:solidFill>
@@ -15876,7 +15906,7 @@
               </a:spcAft>
             </a:pPr>
             <a:r>
-              <a:rPr sz="1300">
+              <a:rPr sz="1200">
                 <a:solidFill>
                   <a:srgbClr val="38BDF8"/>
                 </a:solidFill>
@@ -15885,7 +15915,7 @@
               <a:t>●  </a:t>
             </a:r>
             <a:r>
-              <a:rPr sz="1500">
+              <a:rPr sz="1400">
                 <a:solidFill>
                   <a:srgbClr val="FFFFFF"/>
                 </a:solidFill>
@@ -15901,7 +15931,7 @@
               </a:spcAft>
             </a:pPr>
             <a:r>
-              <a:rPr sz="1300">
+              <a:rPr sz="1200">
                 <a:solidFill>
                   <a:srgbClr val="38BDF8"/>
                 </a:solidFill>
@@ -15910,7 +15940,7 @@
               <a:t>●  </a:t>
             </a:r>
             <a:r>
-              <a:rPr sz="1500">
+              <a:rPr sz="1400">
                 <a:solidFill>
                   <a:srgbClr val="FFFFFF"/>
                 </a:solidFill>
@@ -15926,7 +15956,7 @@
               </a:spcAft>
             </a:pPr>
             <a:r>
-              <a:rPr sz="1300">
+              <a:rPr sz="1200">
                 <a:solidFill>
                   <a:srgbClr val="38BDF8"/>
                 </a:solidFill>
@@ -15935,7 +15965,7 @@
               <a:t>●  </a:t>
             </a:r>
             <a:r>
-              <a:rPr sz="1500">
+              <a:rPr sz="1400">
                 <a:solidFill>
                   <a:srgbClr val="FFFFFF"/>
                 </a:solidFill>
@@ -15954,8 +15984,8 @@
         </p:nvSpPr>
         <p:spPr>
           <a:xfrm>
-            <a:off x="731520" y="4389120"/>
-            <a:ext cx="4754880" cy="1097280"/>
+            <a:off x="731520" y="4114800"/>
+            <a:ext cx="4754880" cy="1645920"/>
           </a:xfrm>
           <a:prstGeom prst="roundRect">
             <a:avLst/>
@@ -15984,7 +16014,7 @@
           </a:fontRef>
         </p:style>
         <p:txBody>
-          <a:bodyPr rtlCol="0" anchor="ctr" wrap="square" lIns="152400" rIns="152400" tIns="101600" bIns="101600"/>
+          <a:bodyPr rtlCol="0" anchor="ctr" wrap="square" lIns="177800" rIns="177800" tIns="127000" bIns="127000"/>
           <a:lstStyle/>
           <a:p>
             <a:pPr algn="ctr">
@@ -15993,13 +16023,13 @@
               </a:spcAft>
             </a:pPr>
             <a:r>
-              <a:rPr sz="1200">
+              <a:rPr sz="1100">
                 <a:solidFill>
                   <a:srgbClr val="4ADE80"/>
                 </a:solidFill>
                 <a:latin typeface="Consolas"/>
               </a:rPr>
-              <a:t>無需 GPIO 感測器</a:t>
+              <a:t># 無需 GPIO 感測器</a:t>
             </a:r>
           </a:p>
           <a:p>
@@ -16009,13 +16039,13 @@
               </a:spcAft>
             </a:pPr>
             <a:r>
-              <a:rPr sz="1200">
+              <a:rPr sz="1100">
                 <a:solidFill>
                   <a:srgbClr val="4ADE80"/>
                 </a:solidFill>
                 <a:latin typeface="Consolas"/>
               </a:rPr>
-              <a:t>PIR 觸發訊號由 ESP32</a:t>
+              <a:t># PIR 觸發訊號由 ESP32</a:t>
             </a:r>
           </a:p>
           <a:p>
@@ -16025,13 +16055,61 @@
               </a:spcAft>
             </a:pPr>
             <a:r>
-              <a:rPr sz="1200">
+              <a:rPr sz="1100">
                 <a:solidFill>
                   <a:srgbClr val="4ADE80"/>
                 </a:solidFill>
                 <a:latin typeface="Consolas"/>
               </a:rPr>
-              <a:t>透過 MQTT 遠端傳送</a:t>
+              <a:t># 透過 MQTT 遠端傳送</a:t>
+            </a:r>
+          </a:p>
+          <a:p>
+            <a:pPr>
+              <a:spcAft>
+                <a:spcPts val="200"/>
+              </a:spcAft>
+            </a:pPr>
+            <a:r>
+              <a:rPr sz="1100">
+                <a:solidFill>
+                  <a:srgbClr val="4ADE80"/>
+                </a:solidFill>
+                <a:latin typeface="Consolas"/>
+              </a:rPr>
+              <a:t/>
+            </a:r>
+          </a:p>
+          <a:p>
+            <a:pPr>
+              <a:spcAft>
+                <a:spcPts val="200"/>
+              </a:spcAft>
+            </a:pPr>
+            <a:r>
+              <a:rPr sz="1100">
+                <a:solidFill>
+                  <a:srgbClr val="4ADE80"/>
+                </a:solidFill>
+                <a:latin typeface="Consolas"/>
+              </a:rPr>
+              <a:t>mqtt.subscribe('home/security/pir',</a:t>
+            </a:r>
+          </a:p>
+          <a:p>
+            <a:pPr>
+              <a:spcAft>
+                <a:spcPts val="200"/>
+              </a:spcAft>
+            </a:pPr>
+            <a:r>
+              <a:rPr sz="1100">
+                <a:solidFill>
+                  <a:srgbClr val="4ADE80"/>
+                </a:solidFill>
+                <a:latin typeface="Consolas"/>
+              </a:rPr>
+              <a:t>               on_pir_trigger)</a:t>
             </a:r>
           </a:p>
         </p:txBody>
@@ -16044,8 +16122,8 @@
         </p:nvSpPr>
         <p:spPr>
           <a:xfrm>
-            <a:off x="6400800" y="1645920"/>
-            <a:ext cx="5303520" cy="4114800"/>
+            <a:off x="6400800" y="1554480"/>
+            <a:ext cx="5303520" cy="4572000"/>
           </a:xfrm>
           <a:prstGeom prst="roundRect">
             <a:avLst/>
@@ -16089,7 +16167,7 @@
         </p:nvSpPr>
         <p:spPr>
           <a:xfrm>
-            <a:off x="6675120" y="1737360"/>
+            <a:off x="6675120" y="1645920"/>
             <a:ext cx="4572000" cy="365760"/>
           </a:xfrm>
           <a:prstGeom prst="rect">
@@ -16125,8 +16203,8 @@
         </p:nvSpPr>
         <p:spPr>
           <a:xfrm>
-            <a:off x="6675120" y="2286000"/>
-            <a:ext cx="4754880" cy="2286000"/>
+            <a:off x="6675120" y="2194560"/>
+            <a:ext cx="4754880" cy="1828800"/>
           </a:xfrm>
           <a:prstGeom prst="rect">
             <a:avLst/>
@@ -16145,7 +16223,7 @@
               </a:spcAft>
             </a:pPr>
             <a:r>
-              <a:rPr sz="1300">
+              <a:rPr sz="1200">
                 <a:solidFill>
                   <a:srgbClr val="4ADE80"/>
                 </a:solidFill>
@@ -16154,7 +16232,7 @@
               <a:t>●  </a:t>
             </a:r>
             <a:r>
-              <a:rPr sz="1500">
+              <a:rPr sz="1400">
                 <a:solidFill>
                   <a:srgbClr val="FFFFFF"/>
                 </a:solidFill>
@@ -16170,7 +16248,7 @@
               </a:spcAft>
             </a:pPr>
             <a:r>
-              <a:rPr sz="1300">
+              <a:rPr sz="1200">
                 <a:solidFill>
                   <a:srgbClr val="4ADE80"/>
                 </a:solidFill>
@@ -16179,7 +16257,7 @@
               <a:t>●  </a:t>
             </a:r>
             <a:r>
-              <a:rPr sz="1500">
+              <a:rPr sz="1400">
                 <a:solidFill>
                   <a:srgbClr val="FFFFFF"/>
                 </a:solidFill>
@@ -16195,7 +16273,7 @@
               </a:spcAft>
             </a:pPr>
             <a:r>
-              <a:rPr sz="1300">
+              <a:rPr sz="1200">
                 <a:solidFill>
                   <a:srgbClr val="4ADE80"/>
                 </a:solidFill>
@@ -16204,13 +16282,13 @@
               <a:t>●  </a:t>
             </a:r>
             <a:r>
-              <a:rPr sz="1500">
+              <a:rPr sz="1400">
                 <a:solidFill>
                   <a:srgbClr val="FFFFFF"/>
                 </a:solidFill>
                 <a:latin typeface="Microsoft JhengHei"/>
               </a:rPr>
-              <a:t>光敏電阻（LDR）— GPIO 34（ADC）</a:t>
+              <a:t>光敏電阻 (LDR) — GPIO 34 (ADC)</a:t>
             </a:r>
           </a:p>
           <a:p>
@@ -16220,7 +16298,7 @@
               </a:spcAft>
             </a:pPr>
             <a:r>
-              <a:rPr sz="1300">
+              <a:rPr sz="1200">
                 <a:solidFill>
                   <a:srgbClr val="4ADE80"/>
                 </a:solidFill>
@@ -16229,38 +16307,13 @@
               <a:t>●  </a:t>
             </a:r>
             <a:r>
-              <a:rPr sz="1500">
+              <a:rPr sz="1400">
                 <a:solidFill>
                   <a:srgbClr val="FFFFFF"/>
                 </a:solidFill>
                 <a:latin typeface="Microsoft JhengHei"/>
               </a:rPr>
               <a:t>LED — GPIO 2</a:t>
-            </a:r>
-          </a:p>
-          <a:p>
-            <a:pPr>
-              <a:spcAft>
-                <a:spcPts val="800"/>
-              </a:spcAft>
-            </a:pPr>
-            <a:r>
-              <a:rPr sz="1300">
-                <a:solidFill>
-                  <a:srgbClr val="4ADE80"/>
-                </a:solidFill>
-                <a:latin typeface="Microsoft JhengHei"/>
-              </a:rPr>
-              <a:t>●  </a:t>
-            </a:r>
-            <a:r>
-              <a:rPr sz="1500">
-                <a:solidFill>
-                  <a:srgbClr val="FFFFFF"/>
-                </a:solidFill>
-                <a:latin typeface="Microsoft JhengHei"/>
-              </a:rPr>
-              <a:t>供電：USB（獨立運作）</a:t>
             </a:r>
           </a:p>
         </p:txBody>
@@ -16273,8 +16326,8 @@
         </p:nvSpPr>
         <p:spPr>
           <a:xfrm>
-            <a:off x="6675120" y="4389120"/>
-            <a:ext cx="4754880" cy="1371600"/>
+            <a:off x="6675120" y="4114800"/>
+            <a:ext cx="4754880" cy="1645920"/>
           </a:xfrm>
           <a:prstGeom prst="roundRect">
             <a:avLst/>
@@ -16303,7 +16356,7 @@
           </a:fontRef>
         </p:style>
         <p:txBody>
-          <a:bodyPr rtlCol="0" anchor="ctr" wrap="square" lIns="152400" rIns="152400" tIns="101600" bIns="101600"/>
+          <a:bodyPr rtlCol="0" anchor="ctr" wrap="square" lIns="177800" rIns="177800" tIns="127000" bIns="127000"/>
           <a:lstStyle/>
           <a:p>
             <a:pPr algn="ctr">
@@ -16312,13 +16365,13 @@
               </a:spcAft>
             </a:pPr>
             <a:r>
-              <a:rPr sz="1100">
+              <a:rPr sz="1000">
                 <a:solidFill>
                   <a:srgbClr val="4ADE80"/>
                 </a:solidFill>
                 <a:latin typeface="Consolas"/>
               </a:rPr>
-              <a:t>PIR：OUT→GPIO 27, VCC→5V, GND→GND</a:t>
+              <a:t># PIR 接線</a:t>
             </a:r>
           </a:p>
           <a:p>
@@ -16328,13 +16381,13 @@
               </a:spcAft>
             </a:pPr>
             <a:r>
-              <a:rPr sz="1100">
+              <a:rPr sz="1000">
                 <a:solidFill>
                   <a:srgbClr val="4ADE80"/>
                 </a:solidFill>
                 <a:latin typeface="Consolas"/>
               </a:rPr>
-              <a:t>LDR：一端→3.3V, 另一端→GPIO 34+10K</a:t>
+              <a:t>OUT → GPIO 27,  VCC → 5V,  GND → GND</a:t>
             </a:r>
           </a:p>
           <a:p>
@@ -16344,13 +16397,93 @@
               </a:spcAft>
             </a:pPr>
             <a:r>
-              <a:rPr sz="1100">
+              <a:rPr sz="1000">
                 <a:solidFill>
                   <a:srgbClr val="4ADE80"/>
                 </a:solidFill>
                 <a:latin typeface="Consolas"/>
               </a:rPr>
-              <a:t>LED：長腳→GPIO 2（經電阻）, 短腳→GND</a:t>
+              <a:t/>
+            </a:r>
+          </a:p>
+          <a:p>
+            <a:pPr>
+              <a:spcAft>
+                <a:spcPts val="200"/>
+              </a:spcAft>
+            </a:pPr>
+            <a:r>
+              <a:rPr sz="1000">
+                <a:solidFill>
+                  <a:srgbClr val="4ADE80"/>
+                </a:solidFill>
+                <a:latin typeface="Consolas"/>
+              </a:rPr>
+              <a:t># LDR 接線</a:t>
+            </a:r>
+          </a:p>
+          <a:p>
+            <a:pPr>
+              <a:spcAft>
+                <a:spcPts val="200"/>
+              </a:spcAft>
+            </a:pPr>
+            <a:r>
+              <a:rPr sz="1000">
+                <a:solidFill>
+                  <a:srgbClr val="4ADE80"/>
+                </a:solidFill>
+                <a:latin typeface="Consolas"/>
+              </a:rPr>
+              <a:t>一端 → 3.3V,  另一端 → GPIO 34 + 10K</a:t>
+            </a:r>
+          </a:p>
+          <a:p>
+            <a:pPr>
+              <a:spcAft>
+                <a:spcPts val="200"/>
+              </a:spcAft>
+            </a:pPr>
+            <a:r>
+              <a:rPr sz="1000">
+                <a:solidFill>
+                  <a:srgbClr val="4ADE80"/>
+                </a:solidFill>
+                <a:latin typeface="Consolas"/>
+              </a:rPr>
+              <a:t/>
+            </a:r>
+          </a:p>
+          <a:p>
+            <a:pPr>
+              <a:spcAft>
+                <a:spcPts val="200"/>
+              </a:spcAft>
+            </a:pPr>
+            <a:r>
+              <a:rPr sz="1000">
+                <a:solidFill>
+                  <a:srgbClr val="4ADE80"/>
+                </a:solidFill>
+                <a:latin typeface="Consolas"/>
+              </a:rPr>
+              <a:t># LED 接線</a:t>
+            </a:r>
+          </a:p>
+          <a:p>
+            <a:pPr>
+              <a:spcAft>
+                <a:spcPts val="200"/>
+              </a:spcAft>
+            </a:pPr>
+            <a:r>
+              <a:rPr sz="1000">
+                <a:solidFill>
+                  <a:srgbClr val="4ADE80"/>
+                </a:solidFill>
+                <a:latin typeface="Consolas"/>
+              </a:rPr>
+              <a:t>長腳 → GPIO 2（經電阻）,  短腳 → GND</a:t>
             </a:r>
           </a:p>
         </p:txBody>
@@ -16404,7 +16537,7 @@
           <a:lstStyle/>
           <a:p>
             <a:pPr algn="l">
-              <a:defRPr sz="3200" b="1">
+              <a:defRPr sz="3000" b="1">
                 <a:solidFill>
                   <a:srgbClr val="FFFFFF"/>
                 </a:solidFill>
@@ -16425,8 +16558,8 @@
         </p:nvSpPr>
         <p:spPr>
           <a:xfrm>
-            <a:off x="731520" y="1325880"/>
-            <a:ext cx="1828800" cy="38100"/>
+            <a:off x="731520" y="1280160"/>
+            <a:ext cx="1645920" cy="38100"/>
           </a:xfrm>
           <a:prstGeom prst="rect">
             <a:avLst/>
@@ -16468,8 +16601,8 @@
         </p:nvSpPr>
         <p:spPr>
           <a:xfrm>
-            <a:off x="457200" y="1645920"/>
-            <a:ext cx="3474720" cy="4572000"/>
+            <a:off x="457200" y="1554480"/>
+            <a:ext cx="3474720" cy="4754880"/>
           </a:xfrm>
           <a:prstGeom prst="roundRect">
             <a:avLst/>
@@ -16513,8 +16646,8 @@
         </p:nvSpPr>
         <p:spPr>
           <a:xfrm>
-            <a:off x="731520" y="1737360"/>
-            <a:ext cx="2926080" cy="365760"/>
+            <a:off x="731520" y="1691640"/>
+            <a:ext cx="2926080" cy="320040"/>
           </a:xfrm>
           <a:prstGeom prst="rect">
             <a:avLst/>
@@ -16528,7 +16661,7 @@
           <a:lstStyle/>
           <a:p>
             <a:pPr algn="l">
-              <a:defRPr sz="1800" b="1">
+              <a:defRPr sz="1700" b="1">
                 <a:solidFill>
                   <a:srgbClr val="38BDF8"/>
                 </a:solidFill>
@@ -16549,7 +16682,7 @@
         </p:nvSpPr>
         <p:spPr>
           <a:xfrm>
-            <a:off x="731520" y="2286000"/>
+            <a:off x="731520" y="2194560"/>
             <a:ext cx="2926080" cy="274320"/>
           </a:xfrm>
           <a:prstGeom prst="rect">
@@ -16564,7 +16697,7 @@
           <a:lstStyle/>
           <a:p>
             <a:pPr algn="l">
-              <a:defRPr sz="1500" b="1">
+              <a:defRPr sz="1400" b="1">
                 <a:solidFill>
                   <a:srgbClr val="FFFFFF"/>
                 </a:solidFill>
@@ -16585,7 +16718,7 @@
         </p:nvSpPr>
         <p:spPr>
           <a:xfrm>
-            <a:off x="731520" y="2560320"/>
+            <a:off x="731520" y="2468880"/>
             <a:ext cx="2926080" cy="274320"/>
           </a:xfrm>
           <a:prstGeom prst="rect">
@@ -16600,7 +16733,7 @@
           <a:lstStyle/>
           <a:p>
             <a:pPr algn="l">
-              <a:defRPr sz="1200" b="0">
+              <a:defRPr sz="1100" b="0">
                 <a:solidFill>
                   <a:srgbClr val="94A3B8"/>
                 </a:solidFill>
@@ -16621,7 +16754,7 @@
         </p:nvSpPr>
         <p:spPr>
           <a:xfrm>
-            <a:off x="731520" y="3063240"/>
+            <a:off x="731520" y="3017520"/>
             <a:ext cx="2926080" cy="274320"/>
           </a:xfrm>
           <a:prstGeom prst="rect">
@@ -16636,7 +16769,7 @@
           <a:lstStyle/>
           <a:p>
             <a:pPr algn="l">
-              <a:defRPr sz="1500" b="1">
+              <a:defRPr sz="1400" b="1">
                 <a:solidFill>
                   <a:srgbClr val="FFFFFF"/>
                 </a:solidFill>
@@ -16657,7 +16790,7 @@
         </p:nvSpPr>
         <p:spPr>
           <a:xfrm>
-            <a:off x="731520" y="3337560"/>
+            <a:off x="731520" y="3291840"/>
             <a:ext cx="2926080" cy="274320"/>
           </a:xfrm>
           <a:prstGeom prst="rect">
@@ -16672,7 +16805,7 @@
           <a:lstStyle/>
           <a:p>
             <a:pPr algn="l">
-              <a:defRPr sz="1200" b="0">
+              <a:defRPr sz="1100" b="0">
                 <a:solidFill>
                   <a:srgbClr val="94A3B8"/>
                 </a:solidFill>
@@ -16708,7 +16841,7 @@
           <a:lstStyle/>
           <a:p>
             <a:pPr algn="l">
-              <a:defRPr sz="1500" b="1">
+              <a:defRPr sz="1400" b="1">
                 <a:solidFill>
                   <a:srgbClr val="FFFFFF"/>
                 </a:solidFill>
@@ -16744,7 +16877,7 @@
           <a:lstStyle/>
           <a:p>
             <a:pPr algn="l">
-              <a:defRPr sz="1200" b="0">
+              <a:defRPr sz="1100" b="0">
                 <a:solidFill>
                   <a:srgbClr val="94A3B8"/>
                 </a:solidFill>
@@ -16752,7 +16885,7 @@
               </a:defRPr>
             </a:pPr>
             <a:r>
-              <a:t>MQTT Client（TLS）</a:t>
+              <a:t>MQTT Client（TLS 加密）</a:t>
             </a:r>
           </a:p>
         </p:txBody>
@@ -16765,7 +16898,7 @@
         </p:nvSpPr>
         <p:spPr>
           <a:xfrm>
-            <a:off x="731520" y="4617720"/>
+            <a:off x="731520" y="4663440"/>
             <a:ext cx="2926080" cy="274320"/>
           </a:xfrm>
           <a:prstGeom prst="rect">
@@ -16780,7 +16913,7 @@
           <a:lstStyle/>
           <a:p>
             <a:pPr algn="l">
-              <a:defRPr sz="1500" b="1">
+              <a:defRPr sz="1400" b="1">
                 <a:solidFill>
                   <a:srgbClr val="FFFFFF"/>
                 </a:solidFill>
@@ -16801,7 +16934,7 @@
         </p:nvSpPr>
         <p:spPr>
           <a:xfrm>
-            <a:off x="731520" y="4892040"/>
+            <a:off x="731520" y="4937760"/>
             <a:ext cx="2926080" cy="274320"/>
           </a:xfrm>
           <a:prstGeom prst="rect">
@@ -16816,7 +16949,7 @@
           <a:lstStyle/>
           <a:p>
             <a:pPr algn="l">
-              <a:defRPr sz="1200" b="0">
+              <a:defRPr sz="1100" b="0">
                 <a:solidFill>
                   <a:srgbClr val="94A3B8"/>
                 </a:solidFill>
@@ -16824,7 +16957,7 @@
               </a:defRPr>
             </a:pPr>
             <a:r>
-              <a:t>Discord Webhook</a:t>
+              <a:t>Discord Webhook 請求</a:t>
             </a:r>
           </a:p>
         </p:txBody>
@@ -16837,7 +16970,7 @@
         </p:nvSpPr>
         <p:spPr>
           <a:xfrm>
-            <a:off x="731520" y="5394960"/>
+            <a:off x="731520" y="5486400"/>
             <a:ext cx="2926080" cy="274320"/>
           </a:xfrm>
           <a:prstGeom prst="rect">
@@ -16852,7 +16985,7 @@
           <a:lstStyle/>
           <a:p>
             <a:pPr algn="l">
-              <a:defRPr sz="1500" b="1">
+              <a:defRPr sz="1400" b="1">
                 <a:solidFill>
                   <a:srgbClr val="FFFFFF"/>
                 </a:solidFill>
@@ -16873,7 +17006,7 @@
         </p:nvSpPr>
         <p:spPr>
           <a:xfrm>
-            <a:off x="731520" y="5669280"/>
+            <a:off x="731520" y="5760720"/>
             <a:ext cx="2926080" cy="274320"/>
           </a:xfrm>
           <a:prstGeom prst="rect">
@@ -16888,7 +17021,7 @@
           <a:lstStyle/>
           <a:p>
             <a:pPr algn="l">
-              <a:defRPr sz="1200" b="0">
+              <a:defRPr sz="1100" b="0">
                 <a:solidFill>
                   <a:srgbClr val="94A3B8"/>
                 </a:solidFill>
@@ -16896,7 +17029,7 @@
               </a:defRPr>
             </a:pPr>
             <a:r>
-              <a:t>多線程安防 + 狀態</a:t>
+              <a:t>多線程（安防 + 系統狀態）</a:t>
             </a:r>
           </a:p>
         </p:txBody>
@@ -16909,8 +17042,8 @@
         </p:nvSpPr>
         <p:spPr>
           <a:xfrm>
-            <a:off x="4297680" y="1645920"/>
-            <a:ext cx="3474720" cy="4572000"/>
+            <a:off x="4206240" y="1554480"/>
+            <a:ext cx="3474720" cy="4754880"/>
           </a:xfrm>
           <a:prstGeom prst="roundRect">
             <a:avLst/>
@@ -16954,8 +17087,8 @@
         </p:nvSpPr>
         <p:spPr>
           <a:xfrm>
-            <a:off x="4572000" y="1737360"/>
-            <a:ext cx="2926080" cy="365760"/>
+            <a:off x="4480560" y="1691640"/>
+            <a:ext cx="2926080" cy="320040"/>
           </a:xfrm>
           <a:prstGeom prst="rect">
             <a:avLst/>
@@ -16969,7 +17102,7 @@
           <a:lstStyle/>
           <a:p>
             <a:pPr algn="l">
-              <a:defRPr sz="1800" b="1">
+              <a:defRPr sz="1700" b="1">
                 <a:solidFill>
                   <a:srgbClr val="4ADE80"/>
                 </a:solidFill>
@@ -16990,7 +17123,7 @@
         </p:nvSpPr>
         <p:spPr>
           <a:xfrm>
-            <a:off x="4572000" y="2286000"/>
+            <a:off x="4480560" y="2194560"/>
             <a:ext cx="2926080" cy="274320"/>
           </a:xfrm>
           <a:prstGeom prst="rect">
@@ -17005,7 +17138,7 @@
           <a:lstStyle/>
           <a:p>
             <a:pPr algn="l">
-              <a:defRPr sz="1500" b="1">
+              <a:defRPr sz="1400" b="1">
                 <a:solidFill>
                   <a:srgbClr val="FFFFFF"/>
                 </a:solidFill>
@@ -17026,7 +17159,7 @@
         </p:nvSpPr>
         <p:spPr>
           <a:xfrm>
-            <a:off x="4572000" y="2560320"/>
+            <a:off x="4480560" y="2468880"/>
             <a:ext cx="2926080" cy="274320"/>
           </a:xfrm>
           <a:prstGeom prst="rect">
@@ -17041,7 +17174,7 @@
           <a:lstStyle/>
           <a:p>
             <a:pPr algn="l">
-              <a:defRPr sz="1200" b="0">
+              <a:defRPr sz="1100" b="0">
                 <a:solidFill>
                   <a:srgbClr val="94A3B8"/>
                 </a:solidFill>
@@ -17062,7 +17195,7 @@
         </p:nvSpPr>
         <p:spPr>
           <a:xfrm>
-            <a:off x="4572000" y="3063240"/>
+            <a:off x="4480560" y="3017520"/>
             <a:ext cx="2926080" cy="274320"/>
           </a:xfrm>
           <a:prstGeom prst="rect">
@@ -17077,7 +17210,7 @@
           <a:lstStyle/>
           <a:p>
             <a:pPr algn="l">
-              <a:defRPr sz="1500" b="1">
+              <a:defRPr sz="1400" b="1">
                 <a:solidFill>
                   <a:srgbClr val="FFFFFF"/>
                 </a:solidFill>
@@ -17098,7 +17231,7 @@
         </p:nvSpPr>
         <p:spPr>
           <a:xfrm>
-            <a:off x="4572000" y="3337560"/>
+            <a:off x="4480560" y="3291840"/>
             <a:ext cx="2926080" cy="274320"/>
           </a:xfrm>
           <a:prstGeom prst="rect">
@@ -17113,7 +17246,7 @@
           <a:lstStyle/>
           <a:p>
             <a:pPr algn="l">
-              <a:defRPr sz="1200" b="0">
+              <a:defRPr sz="1100" b="0">
                 <a:solidFill>
                   <a:srgbClr val="94A3B8"/>
                 </a:solidFill>
@@ -17121,7 +17254,7 @@
               </a:defRPr>
             </a:pPr>
             <a:r>
-              <a:t>輕量 MQTT Client</a:t>
+              <a:t>輕量 MQTT Client（SSL）</a:t>
             </a:r>
           </a:p>
         </p:txBody>
@@ -17134,7 +17267,7 @@
         </p:nvSpPr>
         <p:spPr>
           <a:xfrm>
-            <a:off x="4572000" y="3840480"/>
+            <a:off x="4480560" y="3840480"/>
             <a:ext cx="2926080" cy="274320"/>
           </a:xfrm>
           <a:prstGeom prst="rect">
@@ -17149,7 +17282,7 @@
           <a:lstStyle/>
           <a:p>
             <a:pPr algn="l">
-              <a:defRPr sz="1500" b="1">
+              <a:defRPr sz="1400" b="1">
                 <a:solidFill>
                   <a:srgbClr val="FFFFFF"/>
                 </a:solidFill>
@@ -17170,7 +17303,7 @@
         </p:nvSpPr>
         <p:spPr>
           <a:xfrm>
-            <a:off x="4572000" y="4114800"/>
+            <a:off x="4480560" y="4114800"/>
             <a:ext cx="2926080" cy="274320"/>
           </a:xfrm>
           <a:prstGeom prst="rect">
@@ -17185,7 +17318,7 @@
           <a:lstStyle/>
           <a:p>
             <a:pPr algn="l">
-              <a:defRPr sz="1200" b="0">
+              <a:defRPr sz="1100" b="0">
                 <a:solidFill>
                   <a:srgbClr val="94A3B8"/>
                 </a:solidFill>
@@ -17193,7 +17326,7 @@
               </a:defRPr>
             </a:pPr>
             <a:r>
-              <a:t>類比訊號讀取</a:t>
+              <a:t>光敏電阻類比讀取</a:t>
             </a:r>
           </a:p>
         </p:txBody>
@@ -17206,7 +17339,7 @@
         </p:nvSpPr>
         <p:spPr>
           <a:xfrm>
-            <a:off x="4572000" y="4617720"/>
+            <a:off x="4480560" y="4663440"/>
             <a:ext cx="2926080" cy="274320"/>
           </a:xfrm>
           <a:prstGeom prst="rect">
@@ -17221,7 +17354,7 @@
           <a:lstStyle/>
           <a:p>
             <a:pPr algn="l">
-              <a:defRPr sz="1500" b="1">
+              <a:defRPr sz="1400" b="1">
                 <a:solidFill>
                   <a:srgbClr val="FFFFFF"/>
                 </a:solidFill>
@@ -17242,7 +17375,7 @@
         </p:nvSpPr>
         <p:spPr>
           <a:xfrm>
-            <a:off x="4572000" y="4892040"/>
+            <a:off x="4480560" y="4937760"/>
             <a:ext cx="2926080" cy="274320"/>
           </a:xfrm>
           <a:prstGeom prst="rect">
@@ -17257,7 +17390,7 @@
           <a:lstStyle/>
           <a:p>
             <a:pPr algn="l">
-              <a:defRPr sz="1200" b="0">
+              <a:defRPr sz="1100" b="0">
                 <a:solidFill>
                   <a:srgbClr val="94A3B8"/>
                 </a:solidFill>
@@ -17265,7 +17398,7 @@
               </a:defRPr>
             </a:pPr>
             <a:r>
-              <a:t>GPIO 控制</a:t>
+              <a:t>GPIO 控制（PIR, LED）</a:t>
             </a:r>
           </a:p>
         </p:txBody>
@@ -17278,8 +17411,8 @@
         </p:nvSpPr>
         <p:spPr>
           <a:xfrm>
-            <a:off x="8138160" y="1645920"/>
-            <a:ext cx="3474720" cy="4572000"/>
+            <a:off x="7955280" y="1554480"/>
+            <a:ext cx="3474720" cy="4754880"/>
           </a:xfrm>
           <a:prstGeom prst="roundRect">
             <a:avLst/>
@@ -17323,8 +17456,8 @@
         </p:nvSpPr>
         <p:spPr>
           <a:xfrm>
-            <a:off x="8412480" y="1737360"/>
-            <a:ext cx="2926080" cy="365760"/>
+            <a:off x="8229600" y="1691640"/>
+            <a:ext cx="2926080" cy="320040"/>
           </a:xfrm>
           <a:prstGeom prst="rect">
             <a:avLst/>
@@ -17338,7 +17471,7 @@
           <a:lstStyle/>
           <a:p>
             <a:pPr algn="l">
-              <a:defRPr sz="1800" b="1">
+              <a:defRPr sz="1700" b="1">
                 <a:solidFill>
                   <a:srgbClr val="A78BFA"/>
                 </a:solidFill>
@@ -17359,7 +17492,7 @@
         </p:nvSpPr>
         <p:spPr>
           <a:xfrm>
-            <a:off x="8412480" y="2286000"/>
+            <a:off x="8229600" y="2194560"/>
             <a:ext cx="2926080" cy="274320"/>
           </a:xfrm>
           <a:prstGeom prst="rect">
@@ -17374,7 +17507,7 @@
           <a:lstStyle/>
           <a:p>
             <a:pPr algn="l">
-              <a:defRPr sz="1500" b="1">
+              <a:defRPr sz="1400" b="1">
                 <a:solidFill>
                   <a:srgbClr val="FFFFFF"/>
                 </a:solidFill>
@@ -17395,7 +17528,7 @@
         </p:nvSpPr>
         <p:spPr>
           <a:xfrm>
-            <a:off x="8412480" y="2560320"/>
+            <a:off x="8229600" y="2468880"/>
             <a:ext cx="2926080" cy="274320"/>
           </a:xfrm>
           <a:prstGeom prst="rect">
@@ -17410,7 +17543,7 @@
           <a:lstStyle/>
           <a:p>
             <a:pPr algn="l">
-              <a:defRPr sz="1200" b="0">
+              <a:defRPr sz="1100" b="0">
                 <a:solidFill>
                   <a:srgbClr val="94A3B8"/>
                 </a:solidFill>
@@ -17418,7 +17551,7 @@
               </a:defRPr>
             </a:pPr>
             <a:r>
-              <a:t>MQTT Broker（免費）</a:t>
+              <a:t>MQTT Broker（免費雲端）</a:t>
             </a:r>
           </a:p>
         </p:txBody>
@@ -17431,7 +17564,7 @@
         </p:nvSpPr>
         <p:spPr>
           <a:xfrm>
-            <a:off x="8412480" y="3063240"/>
+            <a:off x="8229600" y="3017520"/>
             <a:ext cx="2926080" cy="274320"/>
           </a:xfrm>
           <a:prstGeom prst="rect">
@@ -17446,7 +17579,7 @@
           <a:lstStyle/>
           <a:p>
             <a:pPr algn="l">
-              <a:defRPr sz="1500" b="1">
+              <a:defRPr sz="1400" b="1">
                 <a:solidFill>
                   <a:srgbClr val="FFFFFF"/>
                 </a:solidFill>
@@ -17467,7 +17600,7 @@
         </p:nvSpPr>
         <p:spPr>
           <a:xfrm>
-            <a:off x="8412480" y="3337560"/>
+            <a:off x="8229600" y="3291840"/>
             <a:ext cx="2926080" cy="274320"/>
           </a:xfrm>
           <a:prstGeom prst="rect">
@@ -17482,7 +17615,7 @@
           <a:lstStyle/>
           <a:p>
             <a:pPr algn="l">
-              <a:defRPr sz="1200" b="0">
+              <a:defRPr sz="1100" b="0">
                 <a:solidFill>
                   <a:srgbClr val="94A3B8"/>
                 </a:solidFill>
@@ -17490,7 +17623,7 @@
               </a:defRPr>
             </a:pPr>
             <a:r>
-              <a:t>前端 MQTT 直連</a:t>
+              <a:t>前端 WSS 直連 Broker</a:t>
             </a:r>
           </a:p>
         </p:txBody>
@@ -17503,7 +17636,7 @@
         </p:nvSpPr>
         <p:spPr>
           <a:xfrm>
-            <a:off x="8412480" y="3840480"/>
+            <a:off x="8229600" y="3840480"/>
             <a:ext cx="2926080" cy="274320"/>
           </a:xfrm>
           <a:prstGeom prst="rect">
@@ -17518,7 +17651,7 @@
           <a:lstStyle/>
           <a:p>
             <a:pPr algn="l">
-              <a:defRPr sz="1500" b="1">
+              <a:defRPr sz="1400" b="1">
                 <a:solidFill>
                   <a:srgbClr val="FFFFFF"/>
                 </a:solidFill>
@@ -17539,7 +17672,7 @@
         </p:nvSpPr>
         <p:spPr>
           <a:xfrm>
-            <a:off x="8412480" y="4114800"/>
+            <a:off x="8229600" y="4114800"/>
             <a:ext cx="2926080" cy="274320"/>
           </a:xfrm>
           <a:prstGeom prst="rect">
@@ -17554,7 +17687,7 @@
           <a:lstStyle/>
           <a:p>
             <a:pPr algn="l">
-              <a:defRPr sz="1200" b="0">
+              <a:defRPr sz="1100" b="0">
                 <a:solidFill>
                   <a:srgbClr val="94A3B8"/>
                 </a:solidFill>
@@ -17575,7 +17708,7 @@
         </p:nvSpPr>
         <p:spPr>
           <a:xfrm>
-            <a:off x="8412480" y="4617720"/>
+            <a:off x="8229600" y="4663440"/>
             <a:ext cx="2926080" cy="274320"/>
           </a:xfrm>
           <a:prstGeom prst="rect">
@@ -17590,7 +17723,7 @@
           <a:lstStyle/>
           <a:p>
             <a:pPr algn="l">
-              <a:defRPr sz="1500" b="1">
+              <a:defRPr sz="1400" b="1">
                 <a:solidFill>
                   <a:srgbClr val="FFFFFF"/>
                 </a:solidFill>
@@ -17611,7 +17744,7 @@
         </p:nvSpPr>
         <p:spPr>
           <a:xfrm>
-            <a:off x="8412480" y="4892040"/>
+            <a:off x="8229600" y="4937760"/>
             <a:ext cx="2926080" cy="274320"/>
           </a:xfrm>
           <a:prstGeom prst="rect">
@@ -17626,7 +17759,7 @@
           <a:lstStyle/>
           <a:p>
             <a:pPr algn="l">
-              <a:defRPr sz="1200" b="0">
+              <a:defRPr sz="1100" b="0">
                 <a:solidFill>
                   <a:srgbClr val="94A3B8"/>
                 </a:solidFill>
@@ -17634,7 +17767,7 @@
               </a:defRPr>
             </a:pPr>
             <a:r>
-              <a:t>警報推播通知</a:t>
+              <a:t>入侵警報推播通知</a:t>
             </a:r>
           </a:p>
         </p:txBody>
@@ -17688,7 +17821,7 @@
           <a:lstStyle/>
           <a:p>
             <a:pPr algn="l">
-              <a:defRPr sz="3200" b="1">
+              <a:defRPr sz="3000" b="1">
                 <a:solidFill>
                   <a:srgbClr val="FFFFFF"/>
                 </a:solidFill>
@@ -17709,7 +17842,7 @@
         </p:nvSpPr>
         <p:spPr>
           <a:xfrm>
-            <a:off x="731520" y="914400"/>
+            <a:off x="731520" y="868680"/>
             <a:ext cx="10058400" cy="365760"/>
           </a:xfrm>
           <a:prstGeom prst="rect">
@@ -17724,7 +17857,7 @@
           <a:lstStyle/>
           <a:p>
             <a:pPr algn="l">
-              <a:defRPr sz="1600" b="0">
+              <a:defRPr sz="1500" b="0">
                 <a:solidFill>
                   <a:srgbClr val="94A3B8"/>
                 </a:solidFill>
@@ -17732,7 +17865,7 @@
               </a:defRPr>
             </a:pPr>
             <a:r>
-              <a:t>main.py → security_loop()（MQTT 觸發）</a:t>
+              <a:t>main.py — MQTT 觸發 + 多幀驗證</a:t>
             </a:r>
           </a:p>
         </p:txBody>
@@ -17745,8 +17878,8 @@
         </p:nvSpPr>
         <p:spPr>
           <a:xfrm>
-            <a:off x="731520" y="1325880"/>
-            <a:ext cx="1828800" cy="38100"/>
+            <a:off x="731520" y="1280160"/>
+            <a:ext cx="1645920" cy="38100"/>
           </a:xfrm>
           <a:prstGeom prst="rect">
             <a:avLst/>
@@ -17788,8 +17921,8 @@
         </p:nvSpPr>
         <p:spPr>
           <a:xfrm>
-            <a:off x="457200" y="1554480"/>
-            <a:ext cx="6858000" cy="5029200"/>
+            <a:off x="457200" y="1463040"/>
+            <a:ext cx="7132320" cy="4937760"/>
           </a:xfrm>
           <a:prstGeom prst="roundRect">
             <a:avLst/>
@@ -17818,7 +17951,7 @@
           </a:fontRef>
         </p:style>
         <p:txBody>
-          <a:bodyPr rtlCol="0" anchor="ctr" wrap="square" lIns="152400" rIns="152400" tIns="101600" bIns="101600"/>
+          <a:bodyPr rtlCol="0" anchor="ctr" wrap="square" lIns="177800" rIns="177800" tIns="127000" bIns="127000"/>
           <a:lstStyle/>
           <a:p>
             <a:pPr algn="ctr">
@@ -18217,7 +18350,7 @@
                 </a:solidFill>
                 <a:latin typeface="Consolas"/>
               </a:rPr>
-              <a:t>                mqtt_client.publish(TOPIC_ALERT, {...})</a:t>
+              <a:t>                mqtt_client.publish(ALERT, {...})</a:t>
             </a:r>
           </a:p>
           <a:p>
@@ -18249,7 +18382,7 @@
                 </a:solidFill>
                 <a:latin typeface="Consolas"/>
               </a:rPr>
-              <a:t>                    f"偵測到入侵！信心值: {conf:.0%}",</a:t>
+              <a:t>                    f"偵測到入侵！{conf:.0%}",</a:t>
             </a:r>
           </a:p>
           <a:p>
@@ -18294,8 +18427,8 @@
         </p:nvSpPr>
         <p:spPr>
           <a:xfrm>
-            <a:off x="7772400" y="1645920"/>
-            <a:ext cx="3931920" cy="1005840"/>
+            <a:off x="8046720" y="1554480"/>
+            <a:ext cx="3657600" cy="1005840"/>
           </a:xfrm>
           <a:prstGeom prst="roundRect">
             <a:avLst/>
@@ -18339,8 +18472,8 @@
         </p:nvSpPr>
         <p:spPr>
           <a:xfrm>
-            <a:off x="8046720" y="1737360"/>
-            <a:ext cx="3383280" cy="274320"/>
+            <a:off x="8321040" y="1645920"/>
+            <a:ext cx="3200400" cy="274320"/>
           </a:xfrm>
           <a:prstGeom prst="rect">
             <a:avLst/>
@@ -18354,7 +18487,7 @@
           <a:lstStyle/>
           <a:p>
             <a:pPr algn="l">
-              <a:defRPr sz="1400" b="1">
+              <a:defRPr sz="1300" b="1">
                 <a:solidFill>
                   <a:srgbClr val="4ADE80"/>
                 </a:solidFill>
@@ -18375,8 +18508,8 @@
         </p:nvSpPr>
         <p:spPr>
           <a:xfrm>
-            <a:off x="8046720" y="2057400"/>
-            <a:ext cx="3383280" cy="548640"/>
+            <a:off x="8321040" y="1920240"/>
+            <a:ext cx="3200400" cy="548640"/>
           </a:xfrm>
           <a:prstGeom prst="rect">
             <a:avLst/>
@@ -18390,7 +18523,7 @@
           <a:lstStyle/>
           <a:p>
             <a:pPr algn="l">
-              <a:defRPr sz="1200" b="0">
+              <a:defRPr sz="1100" b="0">
                 <a:solidFill>
                   <a:srgbClr val="CBD5E1"/>
                 </a:solidFill>
@@ -18402,7 +18535,7 @@
             </a:r>
             <a:br/>
             <a:r>
-              <a:t>透過 MQTT 遠端觸發</a:t>
+              <a:t>透過 MQTT 遠端觸發 RPi</a:t>
             </a:r>
           </a:p>
         </p:txBody>
@@ -18415,8 +18548,8 @@
         </p:nvSpPr>
         <p:spPr>
           <a:xfrm>
-            <a:off x="7772400" y="2834640"/>
-            <a:ext cx="3931920" cy="1005840"/>
+            <a:off x="8046720" y="2743200"/>
+            <a:ext cx="3657600" cy="1005840"/>
           </a:xfrm>
           <a:prstGeom prst="roundRect">
             <a:avLst/>
@@ -18460,8 +18593,8 @@
         </p:nvSpPr>
         <p:spPr>
           <a:xfrm>
-            <a:off x="8046720" y="2926080"/>
-            <a:ext cx="3383280" cy="274320"/>
+            <a:off x="8321040" y="2834640"/>
+            <a:ext cx="3200400" cy="274320"/>
           </a:xfrm>
           <a:prstGeom prst="rect">
             <a:avLst/>
@@ -18475,7 +18608,7 @@
           <a:lstStyle/>
           <a:p>
             <a:pPr algn="l">
-              <a:defRPr sz="1400" b="1">
+              <a:defRPr sz="1300" b="1">
                 <a:solidFill>
                   <a:srgbClr val="FBBF24"/>
                 </a:solidFill>
@@ -18496,8 +18629,8 @@
         </p:nvSpPr>
         <p:spPr>
           <a:xfrm>
-            <a:off x="8046720" y="3246120"/>
-            <a:ext cx="3383280" cy="548640"/>
+            <a:off x="8321040" y="3108960"/>
+            <a:ext cx="3200400" cy="548640"/>
           </a:xfrm>
           <a:prstGeom prst="rect">
             <a:avLst/>
@@ -18511,7 +18644,7 @@
           <a:lstStyle/>
           <a:p>
             <a:pPr algn="l">
-              <a:defRPr sz="1200" b="0">
+              <a:defRPr sz="1100" b="0">
                 <a:solidFill>
                   <a:srgbClr val="CBD5E1"/>
                 </a:solidFill>
@@ -18523,7 +18656,7 @@
             </a:r>
             <a:br/>
             <a:r>
-              <a:t>至少 2/3 通過才警報</a:t>
+              <a:t>至少 2/3 通過才觸發警報</a:t>
             </a:r>
           </a:p>
         </p:txBody>
@@ -18536,8 +18669,8 @@
         </p:nvSpPr>
         <p:spPr>
           <a:xfrm>
-            <a:off x="7772400" y="4023360"/>
-            <a:ext cx="3931920" cy="1005840"/>
+            <a:off x="8046720" y="3931920"/>
+            <a:ext cx="3657600" cy="1005840"/>
           </a:xfrm>
           <a:prstGeom prst="roundRect">
             <a:avLst/>
@@ -18581,8 +18714,8 @@
         </p:nvSpPr>
         <p:spPr>
           <a:xfrm>
-            <a:off x="8046720" y="4114800"/>
-            <a:ext cx="3383280" cy="274320"/>
+            <a:off x="8321040" y="4023360"/>
+            <a:ext cx="3200400" cy="274320"/>
           </a:xfrm>
           <a:prstGeom prst="rect">
             <a:avLst/>
@@ -18596,7 +18729,7 @@
           <a:lstStyle/>
           <a:p>
             <a:pPr algn="l">
-              <a:defRPr sz="1400" b="1">
+              <a:defRPr sz="1300" b="1">
                 <a:solidFill>
                   <a:srgbClr val="A78BFA"/>
                 </a:solidFill>
@@ -18617,8 +18750,8 @@
         </p:nvSpPr>
         <p:spPr>
           <a:xfrm>
-            <a:off x="8046720" y="4434840"/>
-            <a:ext cx="3383280" cy="548640"/>
+            <a:off x="8321040" y="4297680"/>
+            <a:ext cx="3200400" cy="548640"/>
           </a:xfrm>
           <a:prstGeom prst="rect">
             <a:avLst/>
@@ -18632,7 +18765,7 @@
           <a:lstStyle/>
           <a:p>
             <a:pPr algn="l">
-              <a:defRPr sz="1200" b="0">
+              <a:defRPr sz="1100" b="0">
                 <a:solidFill>
                   <a:srgbClr val="CBD5E1"/>
                 </a:solidFill>
@@ -18640,11 +18773,11 @@
               </a:defRPr>
             </a:pPr>
             <a:r>
-              <a:t>深度學習模型</a:t>
+              <a:t>Caffe 深度學習模型</a:t>
             </a:r>
             <a:br/>
             <a:r>
-              <a:t>精準人形偵測</a:t>
+              <a:t>精準人形偵測 (class 15)</a:t>
             </a:r>
           </a:p>
         </p:txBody>
@@ -18657,8 +18790,8 @@
         </p:nvSpPr>
         <p:spPr>
           <a:xfrm>
-            <a:off x="7772400" y="5212080"/>
-            <a:ext cx="3931920" cy="1005840"/>
+            <a:off x="8046720" y="5120640"/>
+            <a:ext cx="3657600" cy="1005840"/>
           </a:xfrm>
           <a:prstGeom prst="roundRect">
             <a:avLst/>
@@ -18702,8 +18835,8 @@
         </p:nvSpPr>
         <p:spPr>
           <a:xfrm>
-            <a:off x="8046720" y="5303520"/>
-            <a:ext cx="3383280" cy="274320"/>
+            <a:off x="8321040" y="5212080"/>
+            <a:ext cx="3200400" cy="274320"/>
           </a:xfrm>
           <a:prstGeom prst="rect">
             <a:avLst/>
@@ -18717,7 +18850,7 @@
           <a:lstStyle/>
           <a:p>
             <a:pPr algn="l">
-              <a:defRPr sz="1400" b="1">
+              <a:defRPr sz="1300" b="1">
                 <a:solidFill>
                   <a:srgbClr val="F87171"/>
                 </a:solidFill>
@@ -18738,8 +18871,8 @@
         </p:nvSpPr>
         <p:spPr>
           <a:xfrm>
-            <a:off x="8046720" y="5623560"/>
-            <a:ext cx="3383280" cy="548640"/>
+            <a:off x="8321040" y="5486400"/>
+            <a:ext cx="3200400" cy="548640"/>
           </a:xfrm>
           <a:prstGeom prst="rect">
             <a:avLst/>
@@ -18753,7 +18886,7 @@
           <a:lstStyle/>
           <a:p>
             <a:pPr algn="l">
-              <a:defRPr sz="1200" b="0">
+              <a:defRPr sz="1100" b="0">
                 <a:solidFill>
                   <a:srgbClr val="CBD5E1"/>
                 </a:solidFill>
@@ -18761,11 +18894,11 @@
               </a:defRPr>
             </a:pPr>
             <a:r>
-              <a:t>MQTT → Dashboard</a:t>
+              <a:t>MQTT → Dashboard 即時</a:t>
             </a:r>
             <a:br/>
             <a:r>
-              <a:t>Webhook → Discord</a:t>
+              <a:t>Webhook → Discord 推播</a:t>
             </a:r>
           </a:p>
         </p:txBody>
